--- a/LibrarySystemValidation.pptx
+++ b/LibrarySystemValidation.pptx
@@ -5,24 +5,25 @@
     <p:sldMasterId id="2147483648" r:id="rId4"/>
   </p:sldMasterIdLst>
   <p:notesMasterIdLst>
-    <p:notesMasterId r:id="rId17"/>
+    <p:notesMasterId r:id="rId18"/>
   </p:notesMasterIdLst>
   <p:handoutMasterIdLst>
-    <p:handoutMasterId r:id="rId18"/>
+    <p:handoutMasterId r:id="rId19"/>
   </p:handoutMasterIdLst>
   <p:sldIdLst>
     <p:sldId id="256" r:id="rId5"/>
-    <p:sldId id="257" r:id="rId6"/>
-    <p:sldId id="258" r:id="rId7"/>
-    <p:sldId id="259" r:id="rId8"/>
-    <p:sldId id="260" r:id="rId9"/>
-    <p:sldId id="266" r:id="rId10"/>
-    <p:sldId id="268" r:id="rId11"/>
-    <p:sldId id="261" r:id="rId12"/>
-    <p:sldId id="262" r:id="rId13"/>
-    <p:sldId id="263" r:id="rId14"/>
-    <p:sldId id="264" r:id="rId15"/>
-    <p:sldId id="265" r:id="rId16"/>
+    <p:sldId id="269" r:id="rId6"/>
+    <p:sldId id="257" r:id="rId7"/>
+    <p:sldId id="266" r:id="rId8"/>
+    <p:sldId id="270" r:id="rId9"/>
+    <p:sldId id="274" r:id="rId10"/>
+    <p:sldId id="271" r:id="rId11"/>
+    <p:sldId id="273" r:id="rId12"/>
+    <p:sldId id="260" r:id="rId13"/>
+    <p:sldId id="259" r:id="rId14"/>
+    <p:sldId id="258" r:id="rId15"/>
+    <p:sldId id="263" r:id="rId16"/>
+    <p:sldId id="264" r:id="rId17"/>
   </p:sldIdLst>
   <p:sldSz cx="12192000" cy="6858000"/>
   <p:notesSz cx="6858000" cy="9144000"/>
@@ -1991,10 +1992,9 @@
         <a:lstStyle/>
         <a:p>
           <a:r>
-            <a:rPr lang="en-US"/>
-            <a:t>Step 1 Title</a:t>
+            <a:rPr lang="en-US" dirty="0"/>
+            <a:t>STRENGTHS</a:t>
           </a:r>
-          <a:endParaRPr lang="en-US" dirty="0"/>
         </a:p>
       </dgm:t>
     </dgm:pt>
@@ -2173,7 +2173,7 @@
         <a:p>
           <a:r>
             <a:rPr lang="en-US" dirty="0"/>
-            <a:t>Step 2 Title</a:t>
+            <a:t>WEAKNESSES</a:t>
           </a:r>
         </a:p>
       </dgm:t>
@@ -2317,7 +2317,7 @@
         <a:p>
           <a:r>
             <a:rPr lang="en-US" dirty="0"/>
-            <a:t>Step 3 Title</a:t>
+            <a:t>OPPORTUNITY</a:t>
           </a:r>
         </a:p>
       </dgm:t>
@@ -2425,7 +2425,7 @@
         <a:p>
           <a:r>
             <a:rPr lang="en-US" dirty="0"/>
-            <a:t>Step 4 Title</a:t>
+            <a:t>THREAT</a:t>
           </a:r>
         </a:p>
       </dgm:t>
@@ -2971,12 +2971,12 @@
         <a:fontRef idx="minor"/>
       </dsp:style>
       <dsp:txBody>
-        <a:bodyPr spcFirstLastPara="0" vert="horz" wrap="square" lIns="0" tIns="128016" rIns="128016" bIns="128016" numCol="1" spcCol="1270" anchor="ctr" anchorCtr="0">
+        <a:bodyPr spcFirstLastPara="0" vert="horz" wrap="square" lIns="0" tIns="120904" rIns="120904" bIns="120904" numCol="1" spcCol="1270" anchor="ctr" anchorCtr="0">
           <a:noAutofit/>
         </a:bodyPr>
         <a:lstStyle/>
         <a:p>
-          <a:pPr marL="0" lvl="0" indent="0" algn="l" defTabSz="800100">
+          <a:pPr marL="0" lvl="0" indent="0" algn="l" defTabSz="755650">
             <a:lnSpc>
               <a:spcPct val="90000"/>
             </a:lnSpc>
@@ -2989,7 +2989,7 @@
             <a:buNone/>
           </a:pPr>
           <a:r>
-            <a:rPr lang="en-US" sz="1800" kern="1200" dirty="0"/>
+            <a:rPr lang="en-US" sz="1700" kern="1200" dirty="0"/>
             <a:t>Task description</a:t>
           </a:r>
         </a:p>
@@ -3050,12 +3050,12 @@
         <a:fontRef idx="minor"/>
       </dsp:style>
       <dsp:txBody>
-        <a:bodyPr spcFirstLastPara="0" vert="horz" wrap="square" lIns="0" tIns="128016" rIns="128016" bIns="128016" numCol="1" spcCol="1270" anchor="ctr" anchorCtr="0">
+        <a:bodyPr spcFirstLastPara="0" vert="horz" wrap="square" lIns="0" tIns="120904" rIns="120904" bIns="120904" numCol="1" spcCol="1270" anchor="ctr" anchorCtr="0">
           <a:noAutofit/>
         </a:bodyPr>
         <a:lstStyle/>
         <a:p>
-          <a:pPr marL="0" lvl="0" indent="0" algn="l" defTabSz="800100">
+          <a:pPr marL="0" lvl="0" indent="0" algn="l" defTabSz="755650">
             <a:lnSpc>
               <a:spcPct val="90000"/>
             </a:lnSpc>
@@ -3068,7 +3068,7 @@
             <a:buNone/>
           </a:pPr>
           <a:r>
-            <a:rPr lang="en-US" sz="1800" kern="1200" dirty="0"/>
+            <a:rPr lang="en-US" sz="1700" kern="1200" dirty="0"/>
             <a:t>Task description</a:t>
           </a:r>
         </a:p>
@@ -3129,12 +3129,12 @@
         <a:fontRef idx="minor"/>
       </dsp:style>
       <dsp:txBody>
-        <a:bodyPr spcFirstLastPara="0" vert="horz" wrap="square" lIns="0" tIns="128016" rIns="128016" bIns="128016" numCol="1" spcCol="1270" anchor="ctr" anchorCtr="0">
+        <a:bodyPr spcFirstLastPara="0" vert="horz" wrap="square" lIns="0" tIns="120904" rIns="120904" bIns="120904" numCol="1" spcCol="1270" anchor="ctr" anchorCtr="0">
           <a:noAutofit/>
         </a:bodyPr>
         <a:lstStyle/>
         <a:p>
-          <a:pPr marL="0" lvl="0" indent="0" algn="l" defTabSz="800100">
+          <a:pPr marL="0" lvl="0" indent="0" algn="l" defTabSz="755650">
             <a:lnSpc>
               <a:spcPct val="90000"/>
             </a:lnSpc>
@@ -3147,7 +3147,7 @@
             <a:buNone/>
           </a:pPr>
           <a:r>
-            <a:rPr lang="en-US" sz="1800" kern="1200" dirty="0"/>
+            <a:rPr lang="en-US" sz="1700" kern="1200" dirty="0"/>
             <a:t>Task description</a:t>
           </a:r>
         </a:p>
@@ -3208,12 +3208,12 @@
         <a:fontRef idx="minor"/>
       </dsp:style>
       <dsp:txBody>
-        <a:bodyPr spcFirstLastPara="0" vert="horz" wrap="square" lIns="0" tIns="128016" rIns="128016" bIns="128016" numCol="1" spcCol="1270" anchor="ctr" anchorCtr="0">
+        <a:bodyPr spcFirstLastPara="0" vert="horz" wrap="square" lIns="0" tIns="120904" rIns="120904" bIns="120904" numCol="1" spcCol="1270" anchor="ctr" anchorCtr="0">
           <a:noAutofit/>
         </a:bodyPr>
         <a:lstStyle/>
         <a:p>
-          <a:pPr marL="0" lvl="0" indent="0" algn="l" defTabSz="800100">
+          <a:pPr marL="0" lvl="0" indent="0" algn="l" defTabSz="755650">
             <a:lnSpc>
               <a:spcPct val="90000"/>
             </a:lnSpc>
@@ -3226,7 +3226,7 @@
             <a:buNone/>
           </a:pPr>
           <a:r>
-            <a:rPr lang="en-US" sz="1800" kern="1200" dirty="0"/>
+            <a:rPr lang="en-US" sz="1700" kern="1200" dirty="0"/>
             <a:t>Task description</a:t>
           </a:r>
         </a:p>
@@ -3317,7 +3317,7 @@
         </a:bodyPr>
         <a:lstStyle/>
         <a:p>
-          <a:pPr marL="0" lvl="0" indent="0" algn="ctr" defTabSz="933450">
+          <a:pPr marL="0" lvl="0" indent="0" algn="ctr" defTabSz="355600">
             <a:lnSpc>
               <a:spcPct val="90000"/>
             </a:lnSpc>
@@ -3330,10 +3330,9 @@
             <a:buNone/>
           </a:pPr>
           <a:r>
-            <a:rPr lang="en-US" sz="2100" kern="1200"/>
-            <a:t>Step 1 Title</a:t>
+            <a:rPr lang="en-US" sz="800" kern="1200" dirty="0"/>
+            <a:t>STRENGTHS</a:t>
           </a:r>
-          <a:endParaRPr lang="en-US" sz="2100" kern="1200" dirty="0"/>
         </a:p>
       </dsp:txBody>
       <dsp:txXfrm>
@@ -3392,12 +3391,12 @@
         <a:fontRef idx="minor"/>
       </dsp:style>
       <dsp:txBody>
-        <a:bodyPr spcFirstLastPara="0" vert="horz" wrap="square" lIns="0" tIns="128016" rIns="128016" bIns="128016" numCol="1" spcCol="1270" anchor="ctr" anchorCtr="0">
+        <a:bodyPr spcFirstLastPara="0" vert="horz" wrap="square" lIns="0" tIns="120904" rIns="120904" bIns="120904" numCol="1" spcCol="1270" anchor="ctr" anchorCtr="0">
           <a:noAutofit/>
         </a:bodyPr>
         <a:lstStyle/>
         <a:p>
-          <a:pPr marL="0" lvl="0" indent="0" algn="l" defTabSz="800100">
+          <a:pPr marL="0" lvl="0" indent="0" algn="l" defTabSz="755650">
             <a:lnSpc>
               <a:spcPct val="90000"/>
             </a:lnSpc>
@@ -3410,7 +3409,7 @@
             <a:buNone/>
           </a:pPr>
           <a:r>
-            <a:rPr lang="en-US" sz="1800" kern="1200" dirty="0"/>
+            <a:rPr lang="en-US" sz="1700" kern="1200" dirty="0"/>
             <a:t>Task description</a:t>
           </a:r>
         </a:p>
@@ -3471,12 +3470,12 @@
         <a:fontRef idx="minor"/>
       </dsp:style>
       <dsp:txBody>
-        <a:bodyPr spcFirstLastPara="0" vert="horz" wrap="square" lIns="0" tIns="128016" rIns="128016" bIns="128016" numCol="1" spcCol="1270" anchor="ctr" anchorCtr="0">
+        <a:bodyPr spcFirstLastPara="0" vert="horz" wrap="square" lIns="0" tIns="120904" rIns="120904" bIns="120904" numCol="1" spcCol="1270" anchor="ctr" anchorCtr="0">
           <a:noAutofit/>
         </a:bodyPr>
         <a:lstStyle/>
         <a:p>
-          <a:pPr marL="0" lvl="0" indent="0" algn="l" defTabSz="800100">
+          <a:pPr marL="0" lvl="0" indent="0" algn="l" defTabSz="755650">
             <a:lnSpc>
               <a:spcPct val="90000"/>
             </a:lnSpc>
@@ -3489,7 +3488,7 @@
             <a:buNone/>
           </a:pPr>
           <a:r>
-            <a:rPr lang="en-US" sz="1800" kern="1200" dirty="0"/>
+            <a:rPr lang="en-US" sz="1700" kern="1200" dirty="0"/>
             <a:t>Task description</a:t>
           </a:r>
         </a:p>
@@ -3550,12 +3549,12 @@
         <a:fontRef idx="minor"/>
       </dsp:style>
       <dsp:txBody>
-        <a:bodyPr spcFirstLastPara="0" vert="horz" wrap="square" lIns="0" tIns="128016" rIns="128016" bIns="128016" numCol="1" spcCol="1270" anchor="ctr" anchorCtr="0">
+        <a:bodyPr spcFirstLastPara="0" vert="horz" wrap="square" lIns="0" tIns="120904" rIns="120904" bIns="120904" numCol="1" spcCol="1270" anchor="ctr" anchorCtr="0">
           <a:noAutofit/>
         </a:bodyPr>
         <a:lstStyle/>
         <a:p>
-          <a:pPr marL="0" lvl="0" indent="0" algn="l" defTabSz="800100">
+          <a:pPr marL="0" lvl="0" indent="0" algn="l" defTabSz="755650">
             <a:lnSpc>
               <a:spcPct val="90000"/>
             </a:lnSpc>
@@ -3568,7 +3567,7 @@
             <a:buNone/>
           </a:pPr>
           <a:r>
-            <a:rPr lang="en-US" sz="1800" kern="1200" dirty="0"/>
+            <a:rPr lang="en-US" sz="1700" kern="1200" dirty="0"/>
             <a:t>Task description</a:t>
           </a:r>
         </a:p>
@@ -3659,7 +3658,7 @@
         </a:bodyPr>
         <a:lstStyle/>
         <a:p>
-          <a:pPr marL="0" lvl="0" indent="0" algn="ctr" defTabSz="933450">
+          <a:pPr marL="0" lvl="0" indent="0" algn="ctr" defTabSz="355600">
             <a:lnSpc>
               <a:spcPct val="90000"/>
             </a:lnSpc>
@@ -3672,8 +3671,8 @@
             <a:buNone/>
           </a:pPr>
           <a:r>
-            <a:rPr lang="en-US" sz="2100" kern="1200" dirty="0"/>
-            <a:t>Step 2 Title</a:t>
+            <a:rPr lang="en-US" sz="800" kern="1200" dirty="0"/>
+            <a:t>WEAKNESSES</a:t>
           </a:r>
         </a:p>
       </dsp:txBody>
@@ -3733,12 +3732,12 @@
         <a:fontRef idx="minor"/>
       </dsp:style>
       <dsp:txBody>
-        <a:bodyPr spcFirstLastPara="0" vert="horz" wrap="square" lIns="0" tIns="128016" rIns="128016" bIns="128016" numCol="1" spcCol="1270" anchor="ctr" anchorCtr="0">
+        <a:bodyPr spcFirstLastPara="0" vert="horz" wrap="square" lIns="0" tIns="120904" rIns="120904" bIns="120904" numCol="1" spcCol="1270" anchor="ctr" anchorCtr="0">
           <a:noAutofit/>
         </a:bodyPr>
         <a:lstStyle/>
         <a:p>
-          <a:pPr marL="0" lvl="0" indent="0" algn="l" defTabSz="800100">
+          <a:pPr marL="0" lvl="0" indent="0" algn="l" defTabSz="755650">
             <a:lnSpc>
               <a:spcPct val="90000"/>
             </a:lnSpc>
@@ -3751,7 +3750,7 @@
             <a:buNone/>
           </a:pPr>
           <a:r>
-            <a:rPr lang="en-US" sz="1800" kern="1200" dirty="0"/>
+            <a:rPr lang="en-US" sz="1700" kern="1200" dirty="0"/>
             <a:t>Task description</a:t>
           </a:r>
         </a:p>
@@ -3812,12 +3811,12 @@
         <a:fontRef idx="minor"/>
       </dsp:style>
       <dsp:txBody>
-        <a:bodyPr spcFirstLastPara="0" vert="horz" wrap="square" lIns="0" tIns="128016" rIns="128016" bIns="128016" numCol="1" spcCol="1270" anchor="ctr" anchorCtr="0">
+        <a:bodyPr spcFirstLastPara="0" vert="horz" wrap="square" lIns="0" tIns="120904" rIns="120904" bIns="120904" numCol="1" spcCol="1270" anchor="ctr" anchorCtr="0">
           <a:noAutofit/>
         </a:bodyPr>
         <a:lstStyle/>
         <a:p>
-          <a:pPr marL="0" lvl="0" indent="0" algn="l" defTabSz="800100">
+          <a:pPr marL="0" lvl="0" indent="0" algn="l" defTabSz="755650">
             <a:lnSpc>
               <a:spcPct val="90000"/>
             </a:lnSpc>
@@ -3830,7 +3829,7 @@
             <a:buNone/>
           </a:pPr>
           <a:r>
-            <a:rPr lang="en-US" sz="1800" kern="1200" dirty="0"/>
+            <a:rPr lang="en-US" sz="1700" kern="1200" dirty="0"/>
             <a:t>Task description</a:t>
           </a:r>
         </a:p>
@@ -3921,7 +3920,7 @@
         </a:bodyPr>
         <a:lstStyle/>
         <a:p>
-          <a:pPr marL="0" lvl="0" indent="0" algn="ctr" defTabSz="933450">
+          <a:pPr marL="0" lvl="0" indent="0" algn="ctr" defTabSz="355600">
             <a:lnSpc>
               <a:spcPct val="90000"/>
             </a:lnSpc>
@@ -3934,8 +3933,8 @@
             <a:buNone/>
           </a:pPr>
           <a:r>
-            <a:rPr lang="en-US" sz="2100" kern="1200" dirty="0"/>
-            <a:t>Step 3 Title</a:t>
+            <a:rPr lang="en-US" sz="800" kern="1200" dirty="0"/>
+            <a:t>OPPORTUNITY</a:t>
           </a:r>
         </a:p>
       </dsp:txBody>
@@ -3995,12 +3994,12 @@
         <a:fontRef idx="minor"/>
       </dsp:style>
       <dsp:txBody>
-        <a:bodyPr spcFirstLastPara="0" vert="horz" wrap="square" lIns="0" tIns="128016" rIns="128016" bIns="128016" numCol="1" spcCol="1270" anchor="ctr" anchorCtr="0">
+        <a:bodyPr spcFirstLastPara="0" vert="horz" wrap="square" lIns="0" tIns="120904" rIns="120904" bIns="120904" numCol="1" spcCol="1270" anchor="ctr" anchorCtr="0">
           <a:noAutofit/>
         </a:bodyPr>
         <a:lstStyle/>
         <a:p>
-          <a:pPr marL="0" lvl="0" indent="0" algn="l" defTabSz="800100">
+          <a:pPr marL="0" lvl="0" indent="0" algn="l" defTabSz="755650">
             <a:lnSpc>
               <a:spcPct val="90000"/>
             </a:lnSpc>
@@ -4013,7 +4012,7 @@
             <a:buNone/>
           </a:pPr>
           <a:r>
-            <a:rPr lang="en-US" sz="1800" kern="1200" dirty="0"/>
+            <a:rPr lang="en-US" sz="1700" kern="1200" dirty="0"/>
             <a:t>Task description</a:t>
           </a:r>
         </a:p>
@@ -4074,12 +4073,12 @@
         <a:fontRef idx="minor"/>
       </dsp:style>
       <dsp:txBody>
-        <a:bodyPr spcFirstLastPara="0" vert="horz" wrap="square" lIns="0" tIns="128016" rIns="128016" bIns="128016" numCol="1" spcCol="1270" anchor="ctr" anchorCtr="0">
+        <a:bodyPr spcFirstLastPara="0" vert="horz" wrap="square" lIns="0" tIns="120904" rIns="120904" bIns="120904" numCol="1" spcCol="1270" anchor="ctr" anchorCtr="0">
           <a:noAutofit/>
         </a:bodyPr>
         <a:lstStyle/>
         <a:p>
-          <a:pPr marL="0" lvl="0" indent="0" algn="l" defTabSz="800100">
+          <a:pPr marL="0" lvl="0" indent="0" algn="l" defTabSz="755650">
             <a:lnSpc>
               <a:spcPct val="90000"/>
             </a:lnSpc>
@@ -4092,7 +4091,7 @@
             <a:buNone/>
           </a:pPr>
           <a:r>
-            <a:rPr lang="en-US" sz="1800" kern="1200" dirty="0"/>
+            <a:rPr lang="en-US" sz="1700" kern="1200" dirty="0"/>
             <a:t>Task description</a:t>
           </a:r>
         </a:p>
@@ -4183,7 +4182,7 @@
         </a:bodyPr>
         <a:lstStyle/>
         <a:p>
-          <a:pPr marL="0" lvl="0" indent="0" algn="ctr" defTabSz="933450">
+          <a:pPr marL="0" lvl="0" indent="0" algn="ctr" defTabSz="355600">
             <a:lnSpc>
               <a:spcPct val="90000"/>
             </a:lnSpc>
@@ -4196,8 +4195,8 @@
             <a:buNone/>
           </a:pPr>
           <a:r>
-            <a:rPr lang="en-US" sz="2100" kern="1200" dirty="0"/>
-            <a:t>Step 4 Title</a:t>
+            <a:rPr lang="en-US" sz="800" kern="1200" dirty="0"/>
+            <a:t>THREAT</a:t>
           </a:r>
         </a:p>
       </dsp:txBody>
@@ -10409,12 +10408,14 @@
           </a:xfrm>
         </p:spPr>
         <p:txBody>
-          <a:bodyPr anchor="ctr"/>
+          <a:bodyPr anchor="ctr">
+            <a:normAutofit fontScale="90000"/>
+          </a:bodyPr>
           <a:lstStyle/>
           <a:p>
             <a:r>
               <a:rPr lang="en-US" dirty="0"/>
-              <a:t>Title With Picture Layout</a:t>
+              <a:t>Library System DATA maintenance and IMPROVEMENT project</a:t>
             </a:r>
           </a:p>
         </p:txBody>
@@ -10429,14 +10430,19 @@
             <p:ph type="subTitle" idx="1"/>
           </p:nvPr>
         </p:nvSpPr>
-        <p:spPr/>
+        <p:spPr>
+          <a:xfrm>
+            <a:off x="1104900" y="5023821"/>
+            <a:ext cx="5734050" cy="443528"/>
+          </a:xfrm>
+        </p:spPr>
         <p:txBody>
           <a:bodyPr/>
           <a:lstStyle/>
           <a:p>
             <a:r>
               <a:rPr lang="en-US" dirty="0"/>
-              <a:t>Subtitle</a:t>
+              <a:t>QA Data Engineering Apprenticeship Module 5</a:t>
             </a:r>
           </a:p>
         </p:txBody>
@@ -10525,15 +10531,520 @@
           <a:p>
             <a:r>
               <a:rPr lang="en-US" dirty="0"/>
-              <a:t>Add a Slide Title - 4</a:t>
+              <a:t>Risks and Issues</a:t>
             </a:r>
           </a:p>
         </p:txBody>
       </p:sp>
+      <p:sp>
+        <p:nvSpPr>
+          <p:cNvPr id="3" name="Content Placeholder 2"/>
+          <p:cNvSpPr>
+            <a:spLocks noGrp="1"/>
+          </p:cNvSpPr>
+          <p:nvPr>
+            <p:ph sz="half" idx="1"/>
+          </p:nvPr>
+        </p:nvSpPr>
+        <p:spPr/>
+        <p:txBody>
+          <a:bodyPr/>
+          <a:lstStyle/>
+          <a:p>
+            <a:r>
+              <a:rPr lang="en-US" dirty="0"/>
+              <a:t>First bullet point here</a:t>
+            </a:r>
+          </a:p>
+          <a:p>
+            <a:r>
+              <a:rPr lang="en-US" dirty="0"/>
+              <a:t>Second bullet point here</a:t>
+            </a:r>
+          </a:p>
+          <a:p>
+            <a:r>
+              <a:rPr lang="en-US" dirty="0"/>
+              <a:t>Third bullet point here</a:t>
+            </a:r>
+          </a:p>
+        </p:txBody>
+      </p:sp>
+      <p:graphicFrame>
+        <p:nvGraphicFramePr>
+          <p:cNvPr id="16" name="Content Placeholder 15"/>
+          <p:cNvGraphicFramePr>
+            <a:graphicFrameLocks noGrp="1"/>
+          </p:cNvGraphicFramePr>
+          <p:nvPr>
+            <p:ph sz="half" idx="2"/>
+            <p:extLst>
+              <p:ext uri="{D42A27DB-BD31-4B8C-83A1-F6EECF244321}">
+                <p14:modId xmlns:p14="http://schemas.microsoft.com/office/powerpoint/2010/main" val="3146902773"/>
+              </p:ext>
+            </p:extLst>
+          </p:nvPr>
+        </p:nvGraphicFramePr>
+        <p:xfrm>
+          <a:off x="1257302" y="3321423"/>
+          <a:ext cx="4914900" cy="2926080"/>
+        </p:xfrm>
+        <a:graphic>
+          <a:graphicData uri="http://schemas.openxmlformats.org/drawingml/2006/table">
+            <a:tbl>
+              <a:tblPr firstRow="1" bandRow="1">
+                <a:tableStyleId>{5C22544A-7EE6-4342-B048-85BDC9FD1C3A}</a:tableStyleId>
+              </a:tblPr>
+              <a:tblGrid>
+                <a:gridCol w="982980">
+                  <a:extLst>
+                    <a:ext uri="{9D8B030D-6E8A-4147-A177-3AD203B41FA5}">
+                      <a16:colId xmlns:a16="http://schemas.microsoft.com/office/drawing/2014/main" val="20000"/>
+                    </a:ext>
+                  </a:extLst>
+                </a:gridCol>
+                <a:gridCol w="982980">
+                  <a:extLst>
+                    <a:ext uri="{9D8B030D-6E8A-4147-A177-3AD203B41FA5}">
+                      <a16:colId xmlns:a16="http://schemas.microsoft.com/office/drawing/2014/main" val="20001"/>
+                    </a:ext>
+                  </a:extLst>
+                </a:gridCol>
+                <a:gridCol w="982980">
+                  <a:extLst>
+                    <a:ext uri="{9D8B030D-6E8A-4147-A177-3AD203B41FA5}">
+                      <a16:colId xmlns:a16="http://schemas.microsoft.com/office/drawing/2014/main" val="3081029502"/>
+                    </a:ext>
+                  </a:extLst>
+                </a:gridCol>
+                <a:gridCol w="982980">
+                  <a:extLst>
+                    <a:ext uri="{9D8B030D-6E8A-4147-A177-3AD203B41FA5}">
+                      <a16:colId xmlns:a16="http://schemas.microsoft.com/office/drawing/2014/main" val="20002"/>
+                    </a:ext>
+                  </a:extLst>
+                </a:gridCol>
+                <a:gridCol w="982980">
+                  <a:extLst>
+                    <a:ext uri="{9D8B030D-6E8A-4147-A177-3AD203B41FA5}">
+                      <a16:colId xmlns:a16="http://schemas.microsoft.com/office/drawing/2014/main" val="2254064161"/>
+                    </a:ext>
+                  </a:extLst>
+                </a:gridCol>
+              </a:tblGrid>
+              <a:tr h="457200">
+                <a:tc>
+                  <a:txBody>
+                    <a:bodyPr/>
+                    <a:lstStyle/>
+                    <a:p>
+                      <a:r>
+                        <a:rPr lang="en-US" dirty="0"/>
+                        <a:t>RI ID</a:t>
+                      </a:r>
+                      <a:endParaRPr dirty="0"/>
+                    </a:p>
+                  </a:txBody>
+                  <a:tcPr anchor="ctr"/>
+                </a:tc>
+                <a:tc>
+                  <a:txBody>
+                    <a:bodyPr/>
+                    <a:lstStyle/>
+                    <a:p>
+                      <a:pPr algn="ctr"/>
+                      <a:r>
+                        <a:rPr lang="en-US" dirty="0"/>
+                        <a:t>RISKS</a:t>
+                      </a:r>
+                      <a:endParaRPr dirty="0"/>
+                    </a:p>
+                  </a:txBody>
+                  <a:tcPr anchor="ctr"/>
+                </a:tc>
+                <a:tc>
+                  <a:txBody>
+                    <a:bodyPr/>
+                    <a:lstStyle/>
+                    <a:p>
+                      <a:pPr algn="ctr"/>
+                      <a:r>
+                        <a:rPr lang="en-US" dirty="0"/>
+                        <a:t>RISK TYPE</a:t>
+                      </a:r>
+                      <a:endParaRPr dirty="0"/>
+                    </a:p>
+                  </a:txBody>
+                  <a:tcPr anchor="ctr"/>
+                </a:tc>
+                <a:tc>
+                  <a:txBody>
+                    <a:bodyPr/>
+                    <a:lstStyle/>
+                    <a:p>
+                      <a:pPr algn="ctr"/>
+                      <a:r>
+                        <a:rPr lang="en-US" dirty="0"/>
+                        <a:t>ISSUES</a:t>
+                      </a:r>
+                      <a:endParaRPr dirty="0"/>
+                    </a:p>
+                  </a:txBody>
+                  <a:tcPr anchor="ctr"/>
+                </a:tc>
+                <a:tc>
+                  <a:txBody>
+                    <a:bodyPr/>
+                    <a:lstStyle/>
+                    <a:p>
+                      <a:pPr algn="ctr"/>
+                      <a:r>
+                        <a:rPr lang="en-US" dirty="0"/>
+                        <a:t>ISSUE TYPE</a:t>
+                      </a:r>
+                      <a:endParaRPr dirty="0"/>
+                    </a:p>
+                  </a:txBody>
+                  <a:tcPr anchor="ctr"/>
+                </a:tc>
+                <a:extLst>
+                  <a:ext uri="{0D108BD9-81ED-4DB2-BD59-A6C34878D82A}">
+                    <a16:rowId xmlns:a16="http://schemas.microsoft.com/office/drawing/2014/main" val="10000"/>
+                  </a:ext>
+                </a:extLst>
+              </a:tr>
+              <a:tr h="457200">
+                <a:tc>
+                  <a:txBody>
+                    <a:bodyPr/>
+                    <a:lstStyle/>
+                    <a:p>
+                      <a:r>
+                        <a:rPr lang="en-US" dirty="0"/>
+                        <a:t>RI</a:t>
+                      </a:r>
+                      <a:r>
+                        <a:rPr dirty="0"/>
+                        <a:t> 1</a:t>
+                      </a:r>
+                    </a:p>
+                  </a:txBody>
+                  <a:tcPr anchor="ctr"/>
+                </a:tc>
+                <a:tc>
+                  <a:txBody>
+                    <a:bodyPr/>
+                    <a:lstStyle/>
+                    <a:p>
+                      <a:pPr algn="ctr"/>
+                      <a:endParaRPr dirty="0"/>
+                    </a:p>
+                  </a:txBody>
+                  <a:tcPr anchor="ctr"/>
+                </a:tc>
+                <a:tc>
+                  <a:txBody>
+                    <a:bodyPr/>
+                    <a:lstStyle/>
+                    <a:p>
+                      <a:pPr algn="ctr"/>
+                      <a:endParaRPr dirty="0"/>
+                    </a:p>
+                  </a:txBody>
+                  <a:tcPr anchor="ctr"/>
+                </a:tc>
+                <a:tc>
+                  <a:txBody>
+                    <a:bodyPr/>
+                    <a:lstStyle/>
+                    <a:p>
+                      <a:pPr algn="ctr"/>
+                      <a:endParaRPr dirty="0"/>
+                    </a:p>
+                  </a:txBody>
+                  <a:tcPr anchor="ctr"/>
+                </a:tc>
+                <a:tc>
+                  <a:txBody>
+                    <a:bodyPr/>
+                    <a:lstStyle/>
+                    <a:p>
+                      <a:pPr algn="ctr"/>
+                      <a:endParaRPr dirty="0"/>
+                    </a:p>
+                  </a:txBody>
+                  <a:tcPr anchor="ctr"/>
+                </a:tc>
+                <a:extLst>
+                  <a:ext uri="{0D108BD9-81ED-4DB2-BD59-A6C34878D82A}">
+                    <a16:rowId xmlns:a16="http://schemas.microsoft.com/office/drawing/2014/main" val="10001"/>
+                  </a:ext>
+                </a:extLst>
+              </a:tr>
+              <a:tr h="457200">
+                <a:tc>
+                  <a:txBody>
+                    <a:bodyPr/>
+                    <a:lstStyle/>
+                    <a:p>
+                      <a:r>
+                        <a:rPr lang="en-US" dirty="0"/>
+                        <a:t>RI</a:t>
+                      </a:r>
+                      <a:r>
+                        <a:rPr baseline="0" dirty="0"/>
+                        <a:t> 2</a:t>
+                      </a:r>
+                      <a:endParaRPr dirty="0"/>
+                    </a:p>
+                  </a:txBody>
+                  <a:tcPr anchor="ctr"/>
+                </a:tc>
+                <a:tc>
+                  <a:txBody>
+                    <a:bodyPr/>
+                    <a:lstStyle/>
+                    <a:p>
+                      <a:pPr algn="ctr"/>
+                      <a:endParaRPr dirty="0"/>
+                    </a:p>
+                  </a:txBody>
+                  <a:tcPr anchor="ctr"/>
+                </a:tc>
+                <a:tc>
+                  <a:txBody>
+                    <a:bodyPr/>
+                    <a:lstStyle/>
+                    <a:p>
+                      <a:pPr algn="ctr"/>
+                      <a:endParaRPr dirty="0"/>
+                    </a:p>
+                  </a:txBody>
+                  <a:tcPr anchor="ctr"/>
+                </a:tc>
+                <a:tc>
+                  <a:txBody>
+                    <a:bodyPr/>
+                    <a:lstStyle/>
+                    <a:p>
+                      <a:pPr algn="ctr"/>
+                      <a:endParaRPr dirty="0"/>
+                    </a:p>
+                  </a:txBody>
+                  <a:tcPr anchor="ctr"/>
+                </a:tc>
+                <a:tc>
+                  <a:txBody>
+                    <a:bodyPr/>
+                    <a:lstStyle/>
+                    <a:p>
+                      <a:pPr algn="ctr"/>
+                      <a:endParaRPr dirty="0"/>
+                    </a:p>
+                  </a:txBody>
+                  <a:tcPr anchor="ctr"/>
+                </a:tc>
+                <a:extLst>
+                  <a:ext uri="{0D108BD9-81ED-4DB2-BD59-A6C34878D82A}">
+                    <a16:rowId xmlns:a16="http://schemas.microsoft.com/office/drawing/2014/main" val="10002"/>
+                  </a:ext>
+                </a:extLst>
+              </a:tr>
+              <a:tr h="457200">
+                <a:tc>
+                  <a:txBody>
+                    <a:bodyPr/>
+                    <a:lstStyle/>
+                    <a:p>
+                      <a:r>
+                        <a:rPr lang="en-US" dirty="0"/>
+                        <a:t>RI 3</a:t>
+                      </a:r>
+                      <a:endParaRPr dirty="0"/>
+                    </a:p>
+                  </a:txBody>
+                  <a:tcPr anchor="ctr"/>
+                </a:tc>
+                <a:tc>
+                  <a:txBody>
+                    <a:bodyPr/>
+                    <a:lstStyle/>
+                    <a:p>
+                      <a:pPr algn="ctr"/>
+                      <a:endParaRPr dirty="0"/>
+                    </a:p>
+                  </a:txBody>
+                  <a:tcPr anchor="ctr"/>
+                </a:tc>
+                <a:tc>
+                  <a:txBody>
+                    <a:bodyPr/>
+                    <a:lstStyle/>
+                    <a:p>
+                      <a:pPr algn="ctr"/>
+                      <a:endParaRPr dirty="0"/>
+                    </a:p>
+                  </a:txBody>
+                  <a:tcPr anchor="ctr"/>
+                </a:tc>
+                <a:tc>
+                  <a:txBody>
+                    <a:bodyPr/>
+                    <a:lstStyle/>
+                    <a:p>
+                      <a:pPr algn="ctr"/>
+                      <a:endParaRPr dirty="0"/>
+                    </a:p>
+                  </a:txBody>
+                  <a:tcPr anchor="ctr"/>
+                </a:tc>
+                <a:tc>
+                  <a:txBody>
+                    <a:bodyPr/>
+                    <a:lstStyle/>
+                    <a:p>
+                      <a:pPr algn="ctr"/>
+                      <a:endParaRPr dirty="0"/>
+                    </a:p>
+                  </a:txBody>
+                  <a:tcPr anchor="ctr"/>
+                </a:tc>
+                <a:extLst>
+                  <a:ext uri="{0D108BD9-81ED-4DB2-BD59-A6C34878D82A}">
+                    <a16:rowId xmlns:a16="http://schemas.microsoft.com/office/drawing/2014/main" val="10003"/>
+                  </a:ext>
+                </a:extLst>
+              </a:tr>
+              <a:tr h="457200">
+                <a:tc>
+                  <a:txBody>
+                    <a:bodyPr/>
+                    <a:lstStyle/>
+                    <a:p>
+                      <a:endParaRPr dirty="0"/>
+                    </a:p>
+                  </a:txBody>
+                  <a:tcPr anchor="ctr"/>
+                </a:tc>
+                <a:tc>
+                  <a:txBody>
+                    <a:bodyPr/>
+                    <a:lstStyle/>
+                    <a:p>
+                      <a:pPr algn="ctr"/>
+                      <a:endParaRPr dirty="0"/>
+                    </a:p>
+                  </a:txBody>
+                  <a:tcPr anchor="ctr"/>
+                </a:tc>
+                <a:tc>
+                  <a:txBody>
+                    <a:bodyPr/>
+                    <a:lstStyle/>
+                    <a:p>
+                      <a:pPr algn="ctr"/>
+                      <a:endParaRPr dirty="0"/>
+                    </a:p>
+                  </a:txBody>
+                  <a:tcPr anchor="ctr"/>
+                </a:tc>
+                <a:tc>
+                  <a:txBody>
+                    <a:bodyPr/>
+                    <a:lstStyle/>
+                    <a:p>
+                      <a:pPr algn="ctr"/>
+                      <a:endParaRPr dirty="0"/>
+                    </a:p>
+                  </a:txBody>
+                  <a:tcPr anchor="ctr"/>
+                </a:tc>
+                <a:tc>
+                  <a:txBody>
+                    <a:bodyPr/>
+                    <a:lstStyle/>
+                    <a:p>
+                      <a:pPr algn="ctr"/>
+                      <a:endParaRPr dirty="0"/>
+                    </a:p>
+                  </a:txBody>
+                  <a:tcPr anchor="ctr"/>
+                </a:tc>
+                <a:extLst>
+                  <a:ext uri="{0D108BD9-81ED-4DB2-BD59-A6C34878D82A}">
+                    <a16:rowId xmlns:a16="http://schemas.microsoft.com/office/drawing/2014/main" val="4279117335"/>
+                  </a:ext>
+                </a:extLst>
+              </a:tr>
+              <a:tr h="457200">
+                <a:tc>
+                  <a:txBody>
+                    <a:bodyPr/>
+                    <a:lstStyle/>
+                    <a:p>
+                      <a:endParaRPr dirty="0"/>
+                    </a:p>
+                  </a:txBody>
+                  <a:tcPr anchor="ctr"/>
+                </a:tc>
+                <a:tc>
+                  <a:txBody>
+                    <a:bodyPr/>
+                    <a:lstStyle/>
+                    <a:p>
+                      <a:pPr algn="ctr"/>
+                      <a:endParaRPr dirty="0"/>
+                    </a:p>
+                  </a:txBody>
+                  <a:tcPr anchor="ctr"/>
+                </a:tc>
+                <a:tc>
+                  <a:txBody>
+                    <a:bodyPr/>
+                    <a:lstStyle/>
+                    <a:p>
+                      <a:pPr algn="ctr"/>
+                      <a:endParaRPr dirty="0"/>
+                    </a:p>
+                  </a:txBody>
+                  <a:tcPr anchor="ctr"/>
+                </a:tc>
+                <a:tc>
+                  <a:txBody>
+                    <a:bodyPr/>
+                    <a:lstStyle/>
+                    <a:p>
+                      <a:pPr algn="ctr"/>
+                      <a:endParaRPr dirty="0"/>
+                    </a:p>
+                  </a:txBody>
+                  <a:tcPr anchor="ctr"/>
+                </a:tc>
+                <a:tc>
+                  <a:txBody>
+                    <a:bodyPr/>
+                    <a:lstStyle/>
+                    <a:p>
+                      <a:pPr algn="ctr"/>
+                      <a:endParaRPr dirty="0"/>
+                    </a:p>
+                  </a:txBody>
+                  <a:tcPr anchor="ctr"/>
+                </a:tc>
+                <a:extLst>
+                  <a:ext uri="{0D108BD9-81ED-4DB2-BD59-A6C34878D82A}">
+                    <a16:rowId xmlns:a16="http://schemas.microsoft.com/office/drawing/2014/main" val="2318330902"/>
+                  </a:ext>
+                </a:extLst>
+              </a:tr>
+            </a:tbl>
+          </a:graphicData>
+        </a:graphic>
+      </p:graphicFrame>
     </p:spTree>
     <p:extLst>
       <p:ext uri="{BB962C8B-B14F-4D97-AF65-F5344CB8AC3E}">
-        <p14:creationId xmlns:p14="http://schemas.microsoft.com/office/powerpoint/2010/main" val="1527004159"/>
+        <p14:creationId xmlns:p14="http://schemas.microsoft.com/office/powerpoint/2010/main" val="2853788422"/>
       </p:ext>
     </p:extLst>
   </p:cSld>
@@ -10572,10 +11083,58 @@
           <a:chExt cx="0" cy="0"/>
         </a:xfrm>
       </p:grpSpPr>
+      <p:sp>
+        <p:nvSpPr>
+          <p:cNvPr id="2" name="Title 1"/>
+          <p:cNvSpPr>
+            <a:spLocks noGrp="1"/>
+          </p:cNvSpPr>
+          <p:nvPr>
+            <p:ph type="title"/>
+          </p:nvPr>
+        </p:nvSpPr>
+        <p:spPr/>
+        <p:txBody>
+          <a:bodyPr/>
+          <a:lstStyle/>
+          <a:p>
+            <a:r>
+              <a:rPr lang="en-US"/>
+              <a:t>Title and Content Layout with Chart</a:t>
+            </a:r>
+            <a:endParaRPr lang="en-US" dirty="0"/>
+          </a:p>
+        </p:txBody>
+      </p:sp>
+      <p:graphicFrame>
+        <p:nvGraphicFramePr>
+          <p:cNvPr id="6" name="Content Placeholder 5" descr="Clustered Column chart showing the values of 3 series for 4 categories"/>
+          <p:cNvGraphicFramePr>
+            <a:graphicFrameLocks noGrp="1"/>
+          </p:cNvGraphicFramePr>
+          <p:nvPr>
+            <p:ph idx="1"/>
+            <p:extLst>
+              <p:ext uri="{D42A27DB-BD31-4B8C-83A1-F6EECF244321}">
+                <p14:modId xmlns:p14="http://schemas.microsoft.com/office/powerpoint/2010/main" val="3944260537"/>
+              </p:ext>
+            </p:extLst>
+          </p:nvPr>
+        </p:nvGraphicFramePr>
+        <p:xfrm>
+          <a:off x="1104900" y="1600200"/>
+          <a:ext cx="9982200" cy="4572000"/>
+        </p:xfrm>
+        <a:graphic>
+          <a:graphicData uri="http://schemas.openxmlformats.org/drawingml/2006/chart">
+            <c:chart xmlns:c="http://schemas.openxmlformats.org/drawingml/2006/chart" xmlns:r="http://schemas.openxmlformats.org/officeDocument/2006/relationships" r:id="rId2"/>
+          </a:graphicData>
+        </a:graphic>
+      </p:graphicFrame>
     </p:spTree>
     <p:extLst>
       <p:ext uri="{BB962C8B-B14F-4D97-AF65-F5344CB8AC3E}">
-        <p14:creationId xmlns:p14="http://schemas.microsoft.com/office/powerpoint/2010/main" val="1800380133"/>
+        <p14:creationId xmlns:p14="http://schemas.microsoft.com/office/powerpoint/2010/main" val="4010278615"/>
       </p:ext>
     </p:extLst>
   </p:cSld>
@@ -10631,53 +11190,57 @@
           <a:p>
             <a:r>
               <a:rPr lang="en-US" dirty="0"/>
-              <a:t>Add a Slide Title - 5</a:t>
+              <a:t>Summary</a:t>
             </a:r>
-          </a:p>
-        </p:txBody>
-      </p:sp>
-      <p:sp>
-        <p:nvSpPr>
-          <p:cNvPr id="4" name="Text Placeholder 3"/>
-          <p:cNvSpPr>
-            <a:spLocks noGrp="1"/>
-          </p:cNvSpPr>
-          <p:nvPr>
-            <p:ph type="body" sz="half" idx="2"/>
-          </p:nvPr>
-        </p:nvSpPr>
-        <p:spPr/>
-        <p:txBody>
-          <a:bodyPr/>
-          <a:lstStyle/>
-          <a:p>
-            <a:endParaRPr lang="en-US"/>
-          </a:p>
-        </p:txBody>
-      </p:sp>
-      <p:sp>
-        <p:nvSpPr>
-          <p:cNvPr id="3" name="Content Placeholder 2"/>
-          <p:cNvSpPr>
-            <a:spLocks noGrp="1"/>
-          </p:cNvSpPr>
-          <p:nvPr>
-            <p:ph idx="1"/>
-          </p:nvPr>
-        </p:nvSpPr>
-        <p:spPr/>
-        <p:txBody>
-          <a:bodyPr/>
-          <a:lstStyle/>
-          <a:p>
-            <a:endParaRPr lang="en-US"/>
           </a:p>
         </p:txBody>
       </p:sp>
     </p:spTree>
     <p:extLst>
       <p:ext uri="{BB962C8B-B14F-4D97-AF65-F5344CB8AC3E}">
-        <p14:creationId xmlns:p14="http://schemas.microsoft.com/office/powerpoint/2010/main" val="3197023440"/>
+        <p14:creationId xmlns:p14="http://schemas.microsoft.com/office/powerpoint/2010/main" val="1527004159"/>
+      </p:ext>
+    </p:extLst>
+  </p:cSld>
+  <p:clrMapOvr>
+    <a:masterClrMapping/>
+  </p:clrMapOvr>
+  <mc:AlternateContent xmlns:mc="http://schemas.openxmlformats.org/markup-compatibility/2006" xmlns:p14="http://schemas.microsoft.com/office/powerpoint/2010/main">
+    <mc:Choice Requires="p14">
+      <p:transition spd="med" p14:dur="700">
+        <p:fade/>
+      </p:transition>
+    </mc:Choice>
+    <mc:Fallback xmlns="">
+      <p:transition spd="med">
+        <p:fade/>
+      </p:transition>
+    </mc:Fallback>
+  </mc:AlternateContent>
+</p:sld>
+</file>
+
+<file path=ppt/slides/slide13.xml><?xml version="1.0" encoding="utf-8"?>
+<p:sld xmlns:a="http://schemas.openxmlformats.org/drawingml/2006/main" xmlns:r="http://schemas.openxmlformats.org/officeDocument/2006/relationships" xmlns:p="http://schemas.openxmlformats.org/presentationml/2006/main">
+  <p:cSld>
+    <p:spTree>
+      <p:nvGrpSpPr>
+        <p:cNvPr id="1" name=""/>
+        <p:cNvGrpSpPr/>
+        <p:nvPr/>
+      </p:nvGrpSpPr>
+      <p:grpSpPr>
+        <a:xfrm>
+          <a:off x="0" y="0"/>
+          <a:ext cx="0" cy="0"/>
+          <a:chOff x="0" y="0"/>
+          <a:chExt cx="0" cy="0"/>
+        </a:xfrm>
+      </p:grpSpPr>
+    </p:spTree>
+    <p:extLst>
+      <p:ext uri="{BB962C8B-B14F-4D97-AF65-F5344CB8AC3E}">
+        <p14:creationId xmlns:p14="http://schemas.microsoft.com/office/powerpoint/2010/main" val="1800380133"/>
       </p:ext>
     </p:extLst>
   </p:cSld>
@@ -10718,7 +11281,13 @@
       </p:grpSpPr>
       <p:sp>
         <p:nvSpPr>
-          <p:cNvPr id="13" name="Title 12"/>
+          <p:cNvPr id="2" name="Title 1">
+            <a:extLst>
+              <a:ext uri="{FF2B5EF4-FFF2-40B4-BE49-F238E27FC236}">
+                <a16:creationId xmlns:a16="http://schemas.microsoft.com/office/drawing/2014/main" id="{C823C359-003C-417D-AB73-8E0327BAB95D}"/>
+              </a:ext>
+            </a:extLst>
+          </p:cNvPr>
           <p:cNvSpPr>
             <a:spLocks noGrp="1"/>
           </p:cNvSpPr>
@@ -10732,16 +11301,22 @@
           <a:lstStyle/>
           <a:p>
             <a:r>
-              <a:rPr lang="en-US"/>
-              <a:t>Title and Content Layout with List</a:t>
+              <a:rPr lang="en-US" dirty="0"/>
+              <a:t>Presentation Brief</a:t>
             </a:r>
-            <a:endParaRPr lang="en-US" dirty="0"/>
+            <a:endParaRPr lang="en-GB" dirty="0"/>
           </a:p>
         </p:txBody>
       </p:sp>
       <p:sp>
         <p:nvSpPr>
-          <p:cNvPr id="14" name="Content Placeholder 13"/>
+          <p:cNvPr id="3" name="Content Placeholder 2">
+            <a:extLst>
+              <a:ext uri="{FF2B5EF4-FFF2-40B4-BE49-F238E27FC236}">
+                <a16:creationId xmlns:a16="http://schemas.microsoft.com/office/drawing/2014/main" id="{4A60C738-9DE6-4843-8475-45F5855E585E}"/>
+              </a:ext>
+            </a:extLst>
+          </p:cNvPr>
           <p:cNvSpPr>
             <a:spLocks noGrp="1"/>
           </p:cNvSpPr>
@@ -10755,29 +11330,67 @@
           <a:lstStyle/>
           <a:p>
             <a:r>
-              <a:rPr lang="en-US"/>
-              <a:t>Add your first bullet point here</a:t>
+              <a:rPr lang="en-US" dirty="0"/>
+              <a:t>Build a presentation for the library client with a proposed solution. You must  include:</a:t>
             </a:r>
           </a:p>
           <a:p>
             <a:r>
-              <a:rPr lang="en-US"/>
-              <a:t>Add your second bullet point here</a:t>
+              <a:rPr lang="en-US" dirty="0"/>
+              <a:t>An Architecture Diagram</a:t>
             </a:r>
           </a:p>
           <a:p>
             <a:r>
-              <a:rPr lang="en-US"/>
-              <a:t>Add your third bullet point here</a:t>
+              <a:rPr lang="en-US" dirty="0"/>
+              <a:t>Proposed Solution</a:t>
             </a:r>
-            <a:endParaRPr lang="en-US" dirty="0"/>
+          </a:p>
+          <a:p>
+            <a:r>
+              <a:rPr lang="en-US" dirty="0"/>
+              <a:t>A </a:t>
+            </a:r>
+            <a:r>
+              <a:rPr lang="en-US" dirty="0" err="1"/>
+              <a:t>PowerBI</a:t>
+            </a:r>
+            <a:r>
+              <a:rPr lang="en-US" dirty="0"/>
+              <a:t> dashboard to track the pipeline runs along with 3 Data Engineering metrics (this can be manual for today).</a:t>
+            </a:r>
+          </a:p>
+          <a:p>
+            <a:r>
+              <a:rPr lang="en-US" dirty="0"/>
+              <a:t>Demo (if novel)</a:t>
+            </a:r>
+          </a:p>
+          <a:p>
+            <a:r>
+              <a:rPr lang="en-US" dirty="0"/>
+              <a:t>Risks &amp; Issues</a:t>
+            </a:r>
+          </a:p>
+          <a:p>
+            <a:r>
+              <a:rPr lang="en-US" dirty="0"/>
+              <a:t>SWAT Analysis</a:t>
+            </a:r>
+          </a:p>
+          <a:p>
+            <a:r>
+              <a:rPr lang="en-US" dirty="0"/>
+              <a:t>Stretch: Demo/Test Docker Swarm and explain how this would fit into the above.</a:t>
+            </a:r>
+            <a:endParaRPr lang="en-GB" dirty="0"/>
           </a:p>
         </p:txBody>
       </p:sp>
     </p:spTree>
     <p:extLst>
       <p:ext uri="{BB962C8B-B14F-4D97-AF65-F5344CB8AC3E}">
-        <p14:creationId xmlns:p14="http://schemas.microsoft.com/office/powerpoint/2010/main" val="1654255301"/>
+        <p14:creationId xmlns:p14="http://schemas.microsoft.com/office/powerpoint/2010/main" val="2297851795"/>
       </p:ext>
     </p:extLst>
   </p:cSld>
@@ -10818,7 +11431,7 @@
       </p:grpSpPr>
       <p:sp>
         <p:nvSpPr>
-          <p:cNvPr id="2" name="Title 1"/>
+          <p:cNvPr id="13" name="Title 12"/>
           <p:cNvSpPr>
             <a:spLocks noGrp="1"/>
           </p:cNvSpPr>
@@ -10832,42 +11445,61 @@
           <a:lstStyle/>
           <a:p>
             <a:r>
-              <a:rPr lang="en-US"/>
-              <a:t>Title and Content Layout with Chart</a:t>
+              <a:rPr lang="en-US" dirty="0"/>
+              <a:t>Data </a:t>
             </a:r>
-            <a:endParaRPr lang="en-US" dirty="0"/>
+            <a:r>
+              <a:rPr lang="en-US" dirty="0" err="1"/>
+              <a:t>Maint</a:t>
+            </a:r>
+            <a:r>
+              <a:rPr lang="en-US" dirty="0"/>
+              <a:t> and Improvement PROJECT GOALS</a:t>
+            </a:r>
           </a:p>
         </p:txBody>
       </p:sp>
-      <p:graphicFrame>
-        <p:nvGraphicFramePr>
-          <p:cNvPr id="6" name="Content Placeholder 5" descr="Clustered Column chart showing the values of 3 series for 4 categories"/>
-          <p:cNvGraphicFramePr>
-            <a:graphicFrameLocks noGrp="1"/>
-          </p:cNvGraphicFramePr>
+      <p:sp>
+        <p:nvSpPr>
+          <p:cNvPr id="14" name="Content Placeholder 13"/>
+          <p:cNvSpPr>
+            <a:spLocks noGrp="1"/>
+          </p:cNvSpPr>
           <p:nvPr>
             <p:ph idx="1"/>
-            <p:extLst>
-              <p:ext uri="{D42A27DB-BD31-4B8C-83A1-F6EECF244321}">
-                <p14:modId xmlns:p14="http://schemas.microsoft.com/office/powerpoint/2010/main" val="3944260537"/>
-              </p:ext>
-            </p:extLst>
           </p:nvPr>
-        </p:nvGraphicFramePr>
-        <p:xfrm>
-          <a:off x="1104900" y="1600200"/>
-          <a:ext cx="9982200" cy="4572000"/>
-        </p:xfrm>
-        <a:graphic>
-          <a:graphicData uri="http://schemas.openxmlformats.org/drawingml/2006/chart">
-            <c:chart xmlns:c="http://schemas.openxmlformats.org/drawingml/2006/chart" xmlns:r="http://schemas.openxmlformats.org/officeDocument/2006/relationships" r:id="rId2"/>
-          </a:graphicData>
-        </a:graphic>
-      </p:graphicFrame>
+        </p:nvSpPr>
+        <p:spPr/>
+        <p:txBody>
+          <a:bodyPr/>
+          <a:lstStyle/>
+          <a:p>
+            <a:r>
+              <a:rPr lang="en-US" dirty="0"/>
+              <a:t>Project to carry out Periodic Cleansing Tasks for the Library System Data</a:t>
+            </a:r>
+          </a:p>
+          <a:p>
+            <a:r>
+              <a:rPr lang="en-US" dirty="0"/>
+              <a:t>Validate and Correct Dirty Data – to improve data quality</a:t>
+            </a:r>
+          </a:p>
+          <a:p>
+            <a:r>
+              <a:rPr lang="en-US" dirty="0"/>
+              <a:t>Carry out Business Intelligence Derivations on the data - to improve data business value</a:t>
+            </a:r>
+          </a:p>
+          <a:p>
+            <a:endParaRPr lang="en-US" dirty="0"/>
+          </a:p>
+        </p:txBody>
+      </p:sp>
     </p:spTree>
     <p:extLst>
       <p:ext uri="{BB962C8B-B14F-4D97-AF65-F5344CB8AC3E}">
-        <p14:creationId xmlns:p14="http://schemas.microsoft.com/office/powerpoint/2010/main" val="4010278615"/>
+        <p14:creationId xmlns:p14="http://schemas.microsoft.com/office/powerpoint/2010/main" val="1654255301"/>
       </p:ext>
     </p:extLst>
   </p:cSld>
@@ -10922,20 +11554,20 @@
           <a:lstStyle/>
           <a:p>
             <a:r>
-              <a:rPr lang="en-US"/>
-              <a:t>Two Content Layout with Table</a:t>
+              <a:rPr lang="en-US" dirty="0"/>
+              <a:t>Workflow and Data Validation Rules</a:t>
             </a:r>
           </a:p>
         </p:txBody>
       </p:sp>
       <p:sp>
         <p:nvSpPr>
-          <p:cNvPr id="3" name="Content Placeholder 2"/>
+          <p:cNvPr id="4" name="Text Placeholder 3"/>
           <p:cNvSpPr>
             <a:spLocks noGrp="1"/>
           </p:cNvSpPr>
           <p:nvPr>
-            <p:ph sz="half" idx="1"/>
+            <p:ph type="body" sz="half" idx="2"/>
           </p:nvPr>
         </p:nvSpPr>
         <p:spPr/>
@@ -10943,275 +11575,80 @@
           <a:bodyPr/>
           <a:lstStyle/>
           <a:p>
-            <a:r>
-              <a:rPr lang="en-US" dirty="0"/>
-              <a:t>First bullet point here</a:t>
-            </a:r>
-          </a:p>
-          <a:p>
-            <a:r>
-              <a:rPr lang="en-US" dirty="0"/>
-              <a:t>Second bullet point here</a:t>
-            </a:r>
-          </a:p>
-          <a:p>
-            <a:r>
-              <a:rPr lang="en-US" dirty="0"/>
-              <a:t>Third bullet point here</a:t>
-            </a:r>
+            <a:endParaRPr lang="en-US" dirty="0"/>
           </a:p>
         </p:txBody>
       </p:sp>
-      <p:graphicFrame>
-        <p:nvGraphicFramePr>
-          <p:cNvPr id="16" name="Content Placeholder 15"/>
-          <p:cNvGraphicFramePr>
-            <a:graphicFrameLocks noGrp="1"/>
-          </p:cNvGraphicFramePr>
+      <p:pic>
+        <p:nvPicPr>
+          <p:cNvPr id="5" name="Picture Placeholder 4" descr="Close-up of books on shelves with more books blurred in foreground and background"/>
+          <p:cNvPicPr>
+            <a:picLocks noGrp="1" noChangeAspect="1"/>
+          </p:cNvPicPr>
           <p:nvPr>
-            <p:ph sz="half" idx="2"/>
-            <p:extLst>
-              <p:ext uri="{D42A27DB-BD31-4B8C-83A1-F6EECF244321}">
-                <p14:modId xmlns:p14="http://schemas.microsoft.com/office/powerpoint/2010/main" val="1139291616"/>
-              </p:ext>
-            </p:extLst>
+            <p:ph type="pic" idx="1"/>
           </p:nvPr>
-        </p:nvGraphicFramePr>
-        <p:xfrm>
-          <a:off x="6172200" y="1600200"/>
-          <a:ext cx="4914900" cy="1828800"/>
-        </p:xfrm>
-        <a:graphic>
-          <a:graphicData uri="http://schemas.openxmlformats.org/drawingml/2006/table">
-            <a:tbl>
-              <a:tblPr firstRow="1" bandRow="1">
-                <a:tableStyleId>{5C22544A-7EE6-4342-B048-85BDC9FD1C3A}</a:tableStyleId>
-              </a:tblPr>
-              <a:tblGrid>
-                <a:gridCol w="1638300">
-                  <a:extLst>
-                    <a:ext uri="{9D8B030D-6E8A-4147-A177-3AD203B41FA5}">
-                      <a16:colId xmlns:a16="http://schemas.microsoft.com/office/drawing/2014/main" val="20000"/>
-                    </a:ext>
-                  </a:extLst>
-                </a:gridCol>
-                <a:gridCol w="1638300">
-                  <a:extLst>
-                    <a:ext uri="{9D8B030D-6E8A-4147-A177-3AD203B41FA5}">
-                      <a16:colId xmlns:a16="http://schemas.microsoft.com/office/drawing/2014/main" val="20001"/>
-                    </a:ext>
-                  </a:extLst>
-                </a:gridCol>
-                <a:gridCol w="1638300">
-                  <a:extLst>
-                    <a:ext uri="{9D8B030D-6E8A-4147-A177-3AD203B41FA5}">
-                      <a16:colId xmlns:a16="http://schemas.microsoft.com/office/drawing/2014/main" val="20002"/>
-                    </a:ext>
-                  </a:extLst>
-                </a:gridCol>
-              </a:tblGrid>
-              <a:tr h="457200">
-                <a:tc>
-                  <a:txBody>
-                    <a:bodyPr/>
-                    <a:lstStyle/>
-                    <a:p>
-                      <a:r>
-                        <a:rPr lang="en-US" dirty="0"/>
-                        <a:t>Class</a:t>
-                      </a:r>
-                      <a:endParaRPr dirty="0"/>
-                    </a:p>
-                  </a:txBody>
-                  <a:tcPr anchor="ctr"/>
-                </a:tc>
-                <a:tc>
-                  <a:txBody>
-                    <a:bodyPr/>
-                    <a:lstStyle/>
-                    <a:p>
-                      <a:pPr algn="ctr"/>
-                      <a:r>
-                        <a:rPr dirty="0"/>
-                        <a:t>Group 1</a:t>
-                      </a:r>
-                    </a:p>
-                  </a:txBody>
-                  <a:tcPr anchor="ctr"/>
-                </a:tc>
-                <a:tc>
-                  <a:txBody>
-                    <a:bodyPr/>
-                    <a:lstStyle/>
-                    <a:p>
-                      <a:pPr algn="ctr"/>
-                      <a:r>
-                        <a:rPr dirty="0"/>
-                        <a:t>Group 2</a:t>
-                      </a:r>
-                    </a:p>
-                  </a:txBody>
-                  <a:tcPr anchor="ctr"/>
-                </a:tc>
-                <a:extLst>
-                  <a:ext uri="{0D108BD9-81ED-4DB2-BD59-A6C34878D82A}">
-                    <a16:rowId xmlns:a16="http://schemas.microsoft.com/office/drawing/2014/main" val="10000"/>
-                  </a:ext>
-                </a:extLst>
-              </a:tr>
-              <a:tr h="457200">
-                <a:tc>
-                  <a:txBody>
-                    <a:bodyPr/>
-                    <a:lstStyle/>
-                    <a:p>
-                      <a:r>
-                        <a:rPr dirty="0"/>
-                        <a:t>Class 1</a:t>
-                      </a:r>
-                    </a:p>
-                  </a:txBody>
-                  <a:tcPr anchor="ctr"/>
-                </a:tc>
-                <a:tc>
-                  <a:txBody>
-                    <a:bodyPr/>
-                    <a:lstStyle/>
-                    <a:p>
-                      <a:pPr algn="ctr"/>
-                      <a:r>
-                        <a:rPr dirty="0"/>
-                        <a:t>82</a:t>
-                      </a:r>
-                    </a:p>
-                  </a:txBody>
-                  <a:tcPr anchor="ctr"/>
-                </a:tc>
-                <a:tc>
-                  <a:txBody>
-                    <a:bodyPr/>
-                    <a:lstStyle/>
-                    <a:p>
-                      <a:pPr algn="ctr"/>
-                      <a:r>
-                        <a:t>95</a:t>
-                      </a:r>
-                    </a:p>
-                  </a:txBody>
-                  <a:tcPr anchor="ctr"/>
-                </a:tc>
-                <a:extLst>
-                  <a:ext uri="{0D108BD9-81ED-4DB2-BD59-A6C34878D82A}">
-                    <a16:rowId xmlns:a16="http://schemas.microsoft.com/office/drawing/2014/main" val="10001"/>
-                  </a:ext>
-                </a:extLst>
-              </a:tr>
-              <a:tr h="457200">
-                <a:tc>
-                  <a:txBody>
-                    <a:bodyPr/>
-                    <a:lstStyle/>
-                    <a:p>
-                      <a:r>
-                        <a:t>Class</a:t>
-                      </a:r>
-                      <a:r>
-                        <a:rPr baseline="0"/>
-                        <a:t> 2</a:t>
-                      </a:r>
-                      <a:endParaRPr/>
-                    </a:p>
-                  </a:txBody>
-                  <a:tcPr anchor="ctr"/>
-                </a:tc>
-                <a:tc>
-                  <a:txBody>
-                    <a:bodyPr/>
-                    <a:lstStyle/>
-                    <a:p>
-                      <a:pPr algn="ctr"/>
-                      <a:r>
-                        <a:rPr dirty="0"/>
-                        <a:t>76</a:t>
-                      </a:r>
-                    </a:p>
-                  </a:txBody>
-                  <a:tcPr anchor="ctr"/>
-                </a:tc>
-                <a:tc>
-                  <a:txBody>
-                    <a:bodyPr/>
-                    <a:lstStyle/>
-                    <a:p>
-                      <a:pPr algn="ctr"/>
-                      <a:r>
-                        <a:rPr dirty="0"/>
-                        <a:t>88</a:t>
-                      </a:r>
-                    </a:p>
-                  </a:txBody>
-                  <a:tcPr anchor="ctr"/>
-                </a:tc>
-                <a:extLst>
-                  <a:ext uri="{0D108BD9-81ED-4DB2-BD59-A6C34878D82A}">
-                    <a16:rowId xmlns:a16="http://schemas.microsoft.com/office/drawing/2014/main" val="10002"/>
-                  </a:ext>
-                </a:extLst>
-              </a:tr>
-              <a:tr h="457200">
-                <a:tc>
-                  <a:txBody>
-                    <a:bodyPr/>
-                    <a:lstStyle/>
-                    <a:p>
-                      <a:r>
-                        <a:t>Class 3</a:t>
-                      </a:r>
-                    </a:p>
-                  </a:txBody>
-                  <a:tcPr anchor="ctr"/>
-                </a:tc>
-                <a:tc>
-                  <a:txBody>
-                    <a:bodyPr/>
-                    <a:lstStyle/>
-                    <a:p>
-                      <a:pPr algn="ctr"/>
-                      <a:r>
-                        <a:t>84</a:t>
-                      </a:r>
-                    </a:p>
-                  </a:txBody>
-                  <a:tcPr anchor="ctr"/>
-                </a:tc>
-                <a:tc>
-                  <a:txBody>
-                    <a:bodyPr/>
-                    <a:lstStyle/>
-                    <a:p>
-                      <a:pPr algn="ctr"/>
-                      <a:r>
-                        <a:rPr dirty="0"/>
-                        <a:t>90</a:t>
-                      </a:r>
-                    </a:p>
-                  </a:txBody>
-                  <a:tcPr anchor="ctr"/>
-                </a:tc>
-                <a:extLst>
-                  <a:ext uri="{0D108BD9-81ED-4DB2-BD59-A6C34878D82A}">
-                    <a16:rowId xmlns:a16="http://schemas.microsoft.com/office/drawing/2014/main" val="10003"/>
-                  </a:ext>
-                </a:extLst>
-              </a:tr>
-            </a:tbl>
-          </a:graphicData>
-        </a:graphic>
-      </p:graphicFrame>
+        </p:nvPicPr>
+        <p:blipFill>
+          <a:blip r:embed="rId2" cstate="print">
+            <a:extLst>
+              <a:ext uri="{28A0092B-C50C-407E-A947-70E740481C1C}">
+                <a14:useLocalDpi xmlns:a14="http://schemas.microsoft.com/office/drawing/2010/main" val="0"/>
+              </a:ext>
+            </a:extLst>
+          </a:blip>
+          <a:srcRect l="3155" r="3155"/>
+          <a:stretch>
+            <a:fillRect/>
+          </a:stretch>
+        </p:blipFill>
+        <p:spPr>
+          <a:xfrm>
+            <a:off x="9737299" y="4623207"/>
+            <a:ext cx="1758703" cy="1777592"/>
+          </a:xfrm>
+        </p:spPr>
+      </p:pic>
+      <p:pic>
+        <p:nvPicPr>
+          <p:cNvPr id="6" name="Picture 5">
+            <a:extLst>
+              <a:ext uri="{FF2B5EF4-FFF2-40B4-BE49-F238E27FC236}">
+                <a16:creationId xmlns:a16="http://schemas.microsoft.com/office/drawing/2014/main" id="{0E4F3B54-0BF8-4601-842F-91D04C7B189B}"/>
+              </a:ext>
+            </a:extLst>
+          </p:cNvPr>
+          <p:cNvPicPr>
+            <a:picLocks noChangeAspect="1"/>
+          </p:cNvPicPr>
+          <p:nvPr/>
+        </p:nvPicPr>
+        <p:blipFill>
+          <a:blip r:embed="rId3">
+            <a:extLst>
+              <a:ext uri="{28A0092B-C50C-407E-A947-70E740481C1C}">
+                <a14:useLocalDpi xmlns:a14="http://schemas.microsoft.com/office/drawing/2010/main" val="0"/>
+              </a:ext>
+            </a:extLst>
+          </a:blip>
+          <a:stretch>
+            <a:fillRect/>
+          </a:stretch>
+        </p:blipFill>
+        <p:spPr>
+          <a:xfrm>
+            <a:off x="1575349" y="1371599"/>
+            <a:ext cx="7248525" cy="5029200"/>
+          </a:xfrm>
+          <a:prstGeom prst="rect">
+            <a:avLst/>
+          </a:prstGeom>
+        </p:spPr>
+      </p:pic>
     </p:spTree>
     <p:extLst>
       <p:ext uri="{BB962C8B-B14F-4D97-AF65-F5344CB8AC3E}">
-        <p14:creationId xmlns:p14="http://schemas.microsoft.com/office/powerpoint/2010/main" val="2853788422"/>
+        <p14:creationId xmlns:p14="http://schemas.microsoft.com/office/powerpoint/2010/main" val="3683544629"/>
       </p:ext>
     </p:extLst>
   </p:cSld>
@@ -11252,7 +11689,7 @@
       </p:grpSpPr>
       <p:sp>
         <p:nvSpPr>
-          <p:cNvPr id="2" name="Title 1"/>
+          <p:cNvPr id="13" name="Title 12"/>
           <p:cNvSpPr>
             <a:spLocks noGrp="1"/>
           </p:cNvSpPr>
@@ -11266,42 +11703,779 @@
           <a:lstStyle/>
           <a:p>
             <a:r>
-              <a:rPr lang="en-US"/>
-              <a:t>Title and Content Layout with SmartArt</a:t>
+              <a:rPr lang="en-US" dirty="0"/>
+              <a:t>Proposed Solution - Tools</a:t>
+            </a:r>
+          </a:p>
+        </p:txBody>
+      </p:sp>
+      <p:sp>
+        <p:nvSpPr>
+          <p:cNvPr id="2" name="TextBox 1">
+            <a:extLst>
+              <a:ext uri="{FF2B5EF4-FFF2-40B4-BE49-F238E27FC236}">
+                <a16:creationId xmlns:a16="http://schemas.microsoft.com/office/drawing/2014/main" id="{5E5A582B-3D6C-4E78-8606-C20830FBB569}"/>
+              </a:ext>
+            </a:extLst>
+          </p:cNvPr>
+          <p:cNvSpPr txBox="1"/>
+          <p:nvPr/>
+        </p:nvSpPr>
+        <p:spPr>
+          <a:xfrm>
+            <a:off x="932778" y="1523450"/>
+            <a:ext cx="1699708" cy="646331"/>
+          </a:xfrm>
+          <a:prstGeom prst="rect">
+            <a:avLst/>
+          </a:prstGeom>
+          <a:noFill/>
+          <a:ln>
+            <a:solidFill>
+              <a:schemeClr val="accent1"/>
+            </a:solidFill>
+          </a:ln>
+        </p:spPr>
+        <p:txBody>
+          <a:bodyPr wrap="square" rtlCol="0">
+            <a:spAutoFit/>
+          </a:bodyPr>
+          <a:lstStyle/>
+          <a:p>
+            <a:r>
+              <a:rPr lang="en-US" dirty="0"/>
+              <a:t>PYTHON SCRIPTS</a:t>
+            </a:r>
+            <a:endParaRPr lang="en-GB" dirty="0"/>
+          </a:p>
+        </p:txBody>
+      </p:sp>
+      <p:sp>
+        <p:nvSpPr>
+          <p:cNvPr id="11" name="TextBox 10">
+            <a:extLst>
+              <a:ext uri="{FF2B5EF4-FFF2-40B4-BE49-F238E27FC236}">
+                <a16:creationId xmlns:a16="http://schemas.microsoft.com/office/drawing/2014/main" id="{DA5C4B32-3481-4FCC-B86B-5F6AFFE21D5A}"/>
+              </a:ext>
+            </a:extLst>
+          </p:cNvPr>
+          <p:cNvSpPr txBox="1"/>
+          <p:nvPr/>
+        </p:nvSpPr>
+        <p:spPr>
+          <a:xfrm>
+            <a:off x="3300814" y="2063091"/>
+            <a:ext cx="1699708" cy="369332"/>
+          </a:xfrm>
+          <a:prstGeom prst="rect">
+            <a:avLst/>
+          </a:prstGeom>
+          <a:noFill/>
+          <a:ln>
+            <a:solidFill>
+              <a:schemeClr val="accent1"/>
+            </a:solidFill>
+          </a:ln>
+        </p:spPr>
+        <p:txBody>
+          <a:bodyPr wrap="square" rtlCol="0">
+            <a:spAutoFit/>
+          </a:bodyPr>
+          <a:lstStyle/>
+          <a:p>
+            <a:r>
+              <a:rPr lang="en-US" dirty="0"/>
+              <a:t>VISUAL CODE</a:t>
+            </a:r>
+            <a:endParaRPr lang="en-GB" dirty="0"/>
+          </a:p>
+        </p:txBody>
+      </p:sp>
+      <p:sp>
+        <p:nvSpPr>
+          <p:cNvPr id="12" name="TextBox 11">
+            <a:extLst>
+              <a:ext uri="{FF2B5EF4-FFF2-40B4-BE49-F238E27FC236}">
+                <a16:creationId xmlns:a16="http://schemas.microsoft.com/office/drawing/2014/main" id="{2434BF8F-74C5-4E3F-A6FC-28EDAF8E745E}"/>
+              </a:ext>
+            </a:extLst>
+          </p:cNvPr>
+          <p:cNvSpPr txBox="1"/>
+          <p:nvPr/>
+        </p:nvSpPr>
+        <p:spPr>
+          <a:xfrm>
+            <a:off x="833483" y="3714412"/>
+            <a:ext cx="1699708" cy="646331"/>
+          </a:xfrm>
+          <a:prstGeom prst="rect">
+            <a:avLst/>
+          </a:prstGeom>
+          <a:noFill/>
+          <a:ln>
+            <a:solidFill>
+              <a:schemeClr val="accent1"/>
+            </a:solidFill>
+          </a:ln>
+        </p:spPr>
+        <p:txBody>
+          <a:bodyPr wrap="square" rtlCol="0">
+            <a:spAutoFit/>
+          </a:bodyPr>
+          <a:lstStyle/>
+          <a:p>
+            <a:r>
+              <a:rPr lang="en-US" dirty="0"/>
+              <a:t>DOCKER CONTAINERS</a:t>
+            </a:r>
+            <a:endParaRPr lang="en-GB" dirty="0"/>
+          </a:p>
+        </p:txBody>
+      </p:sp>
+      <p:sp>
+        <p:nvSpPr>
+          <p:cNvPr id="15" name="TextBox 14">
+            <a:extLst>
+              <a:ext uri="{FF2B5EF4-FFF2-40B4-BE49-F238E27FC236}">
+                <a16:creationId xmlns:a16="http://schemas.microsoft.com/office/drawing/2014/main" id="{177A153D-E1B7-4493-9119-F920DE9BB5B5}"/>
+              </a:ext>
+            </a:extLst>
+          </p:cNvPr>
+          <p:cNvSpPr txBox="1"/>
+          <p:nvPr/>
+        </p:nvSpPr>
+        <p:spPr>
+          <a:xfrm>
+            <a:off x="3405810" y="2650734"/>
+            <a:ext cx="1699708" cy="369332"/>
+          </a:xfrm>
+          <a:prstGeom prst="rect">
+            <a:avLst/>
+          </a:prstGeom>
+          <a:noFill/>
+          <a:ln>
+            <a:solidFill>
+              <a:schemeClr val="accent1"/>
+            </a:solidFill>
+          </a:ln>
+        </p:spPr>
+        <p:txBody>
+          <a:bodyPr wrap="square" rtlCol="0">
+            <a:spAutoFit/>
+          </a:bodyPr>
+          <a:lstStyle/>
+          <a:p>
+            <a:r>
+              <a:rPr lang="en-US" dirty="0"/>
+              <a:t>UNIT TESTING</a:t>
+            </a:r>
+            <a:endParaRPr lang="en-GB" dirty="0"/>
+          </a:p>
+        </p:txBody>
+      </p:sp>
+      <p:sp>
+        <p:nvSpPr>
+          <p:cNvPr id="16" name="TextBox 15">
+            <a:extLst>
+              <a:ext uri="{FF2B5EF4-FFF2-40B4-BE49-F238E27FC236}">
+                <a16:creationId xmlns:a16="http://schemas.microsoft.com/office/drawing/2014/main" id="{FCCD137A-9436-459C-8BE6-F9DB7F41EDAD}"/>
+              </a:ext>
+            </a:extLst>
+          </p:cNvPr>
+          <p:cNvSpPr txBox="1"/>
+          <p:nvPr/>
+        </p:nvSpPr>
+        <p:spPr>
+          <a:xfrm>
+            <a:off x="879852" y="2558401"/>
+            <a:ext cx="1699708" cy="923330"/>
+          </a:xfrm>
+          <a:prstGeom prst="rect">
+            <a:avLst/>
+          </a:prstGeom>
+          <a:noFill/>
+          <a:ln>
+            <a:solidFill>
+              <a:schemeClr val="accent1"/>
+            </a:solidFill>
+          </a:ln>
+        </p:spPr>
+        <p:txBody>
+          <a:bodyPr wrap="square" rtlCol="0">
+            <a:spAutoFit/>
+          </a:bodyPr>
+          <a:lstStyle/>
+          <a:p>
+            <a:r>
+              <a:rPr lang="en-US" dirty="0"/>
+              <a:t>SQL LITE DATABASE - Logging</a:t>
+            </a:r>
+            <a:endParaRPr lang="en-GB" dirty="0"/>
+          </a:p>
+        </p:txBody>
+      </p:sp>
+      <p:sp>
+        <p:nvSpPr>
+          <p:cNvPr id="17" name="TextBox 16">
+            <a:extLst>
+              <a:ext uri="{FF2B5EF4-FFF2-40B4-BE49-F238E27FC236}">
+                <a16:creationId xmlns:a16="http://schemas.microsoft.com/office/drawing/2014/main" id="{780ACF97-E4DA-4EB1-93AE-0BBD6D96AD18}"/>
+              </a:ext>
+            </a:extLst>
+          </p:cNvPr>
+          <p:cNvSpPr txBox="1"/>
+          <p:nvPr/>
+        </p:nvSpPr>
+        <p:spPr>
+          <a:xfrm>
+            <a:off x="3560049" y="3258234"/>
+            <a:ext cx="1699708" cy="646331"/>
+          </a:xfrm>
+          <a:prstGeom prst="rect">
+            <a:avLst/>
+          </a:prstGeom>
+          <a:noFill/>
+          <a:ln>
+            <a:solidFill>
+              <a:schemeClr val="accent1"/>
+            </a:solidFill>
+          </a:ln>
+        </p:spPr>
+        <p:txBody>
+          <a:bodyPr wrap="square" rtlCol="0">
+            <a:spAutoFit/>
+          </a:bodyPr>
+          <a:lstStyle/>
+          <a:p>
+            <a:r>
+              <a:rPr lang="en-US" dirty="0"/>
+              <a:t>CI – Manual Trigger</a:t>
+            </a:r>
+            <a:endParaRPr lang="en-GB" dirty="0"/>
+          </a:p>
+        </p:txBody>
+      </p:sp>
+      <p:sp>
+        <p:nvSpPr>
+          <p:cNvPr id="18" name="TextBox 17">
+            <a:extLst>
+              <a:ext uri="{FF2B5EF4-FFF2-40B4-BE49-F238E27FC236}">
+                <a16:creationId xmlns:a16="http://schemas.microsoft.com/office/drawing/2014/main" id="{7FE5E70A-14BB-47B3-BE3F-E93D3D6E0442}"/>
+              </a:ext>
+            </a:extLst>
+          </p:cNvPr>
+          <p:cNvSpPr txBox="1"/>
+          <p:nvPr/>
+        </p:nvSpPr>
+        <p:spPr>
+          <a:xfrm>
+            <a:off x="5105518" y="1583066"/>
+            <a:ext cx="1270534" cy="646331"/>
+          </a:xfrm>
+          <a:prstGeom prst="rect">
+            <a:avLst/>
+          </a:prstGeom>
+          <a:noFill/>
+          <a:ln>
+            <a:solidFill>
+              <a:schemeClr val="accent1"/>
+            </a:solidFill>
+          </a:ln>
+        </p:spPr>
+        <p:txBody>
+          <a:bodyPr wrap="square" rtlCol="0">
+            <a:spAutoFit/>
+          </a:bodyPr>
+          <a:lstStyle/>
+          <a:p>
+            <a:r>
+              <a:rPr lang="en-US" dirty="0"/>
+              <a:t>CI– AUTO Trigger</a:t>
+            </a:r>
+            <a:endParaRPr lang="en-GB" dirty="0"/>
+          </a:p>
+        </p:txBody>
+      </p:sp>
+      <p:sp>
+        <p:nvSpPr>
+          <p:cNvPr id="19" name="TextBox 18">
+            <a:extLst>
+              <a:ext uri="{FF2B5EF4-FFF2-40B4-BE49-F238E27FC236}">
+                <a16:creationId xmlns:a16="http://schemas.microsoft.com/office/drawing/2014/main" id="{7FB219E8-6E8A-48EA-A06B-B9FB05AA8098}"/>
+              </a:ext>
+            </a:extLst>
+          </p:cNvPr>
+          <p:cNvSpPr txBox="1"/>
+          <p:nvPr/>
+        </p:nvSpPr>
+        <p:spPr>
+          <a:xfrm>
+            <a:off x="6191766" y="2520070"/>
+            <a:ext cx="1699708" cy="2862322"/>
+          </a:xfrm>
+          <a:prstGeom prst="rect">
+            <a:avLst/>
+          </a:prstGeom>
+          <a:noFill/>
+          <a:ln>
+            <a:solidFill>
+              <a:schemeClr val="accent1"/>
+            </a:solidFill>
+          </a:ln>
+        </p:spPr>
+        <p:txBody>
+          <a:bodyPr wrap="square" rtlCol="0">
+            <a:spAutoFit/>
+          </a:bodyPr>
+          <a:lstStyle/>
+          <a:p>
+            <a:r>
+              <a:rPr lang="en-US" dirty="0"/>
+              <a:t>AZ </a:t>
+            </a:r>
+            <a:r>
+              <a:rPr lang="en-US" dirty="0" err="1"/>
+              <a:t>DevOPs</a:t>
             </a:r>
             <a:endParaRPr lang="en-US" dirty="0"/>
           </a:p>
+          <a:p>
+            <a:pPr marL="285750" indent="-285750">
+              <a:buFont typeface="Arial" panose="020B0604020202020204" pitchFamily="34" charset="0"/>
+              <a:buChar char="•"/>
+            </a:pPr>
+            <a:r>
+              <a:rPr lang="en-US" dirty="0"/>
+              <a:t>YAML File</a:t>
+            </a:r>
+          </a:p>
+          <a:p>
+            <a:pPr marL="285750" indent="-285750">
+              <a:buFont typeface="Arial" panose="020B0604020202020204" pitchFamily="34" charset="0"/>
+              <a:buChar char="•"/>
+            </a:pPr>
+            <a:r>
+              <a:rPr lang="en-US" dirty="0"/>
+              <a:t>Trigger</a:t>
+            </a:r>
+          </a:p>
+          <a:p>
+            <a:pPr marL="285750" indent="-285750">
+              <a:buFont typeface="Arial" panose="020B0604020202020204" pitchFamily="34" charset="0"/>
+              <a:buChar char="•"/>
+            </a:pPr>
+            <a:r>
+              <a:rPr lang="en-US" dirty="0"/>
+              <a:t>Pool</a:t>
+            </a:r>
+          </a:p>
+          <a:p>
+            <a:pPr marL="285750" indent="-285750">
+              <a:buFont typeface="Arial" panose="020B0604020202020204" pitchFamily="34" charset="0"/>
+              <a:buChar char="•"/>
+            </a:pPr>
+            <a:r>
+              <a:rPr lang="en-US" dirty="0"/>
+              <a:t>Strategy</a:t>
+            </a:r>
+          </a:p>
+          <a:p>
+            <a:pPr marL="285750" indent="-285750">
+              <a:buFont typeface="Arial" panose="020B0604020202020204" pitchFamily="34" charset="0"/>
+              <a:buChar char="•"/>
+            </a:pPr>
+            <a:r>
+              <a:rPr lang="en-US" dirty="0"/>
+              <a:t>Steps</a:t>
+            </a:r>
+          </a:p>
+          <a:p>
+            <a:pPr marL="285750" indent="-285750">
+              <a:buFont typeface="Arial" panose="020B0604020202020204" pitchFamily="34" charset="0"/>
+              <a:buChar char="•"/>
+            </a:pPr>
+            <a:endParaRPr lang="en-US" dirty="0"/>
+          </a:p>
+          <a:p>
+            <a:pPr marL="285750" indent="-285750">
+              <a:buFont typeface="Arial" panose="020B0604020202020204" pitchFamily="34" charset="0"/>
+              <a:buChar char="•"/>
+            </a:pPr>
+            <a:r>
+              <a:rPr lang="en-US" sz="900" dirty="0">
+                <a:hlinkClick r:id="rId2"/>
+              </a:rPr>
+              <a:t>Build and publish a Python app - Azure Pipelines | Microsoft Learn</a:t>
+            </a:r>
+            <a:endParaRPr lang="en-US" sz="900" dirty="0"/>
+          </a:p>
+          <a:p>
+            <a:endParaRPr lang="en-GB" dirty="0"/>
+          </a:p>
         </p:txBody>
       </p:sp>
-      <p:graphicFrame>
-        <p:nvGraphicFramePr>
-          <p:cNvPr id="4" name="Content Placeholder 3" descr="Stacked List showing 4 groups arranged from left to right with task descriptions under each group"/>
-          <p:cNvGraphicFramePr>
-            <a:graphicFrameLocks noGrp="1"/>
-          </p:cNvGraphicFramePr>
-          <p:nvPr>
-            <p:ph idx="1"/>
-            <p:extLst>
-              <p:ext uri="{D42A27DB-BD31-4B8C-83A1-F6EECF244321}">
-                <p14:modId xmlns:p14="http://schemas.microsoft.com/office/powerpoint/2010/main" val="1992573085"/>
-              </p:ext>
-            </p:extLst>
-          </p:nvPr>
-        </p:nvGraphicFramePr>
-        <p:xfrm>
-          <a:off x="1104900" y="1600200"/>
-          <a:ext cx="9982200" cy="4572000"/>
-        </p:xfrm>
-        <a:graphic>
-          <a:graphicData uri="http://schemas.openxmlformats.org/drawingml/2006/diagram">
-            <dgm:relIds xmlns:dgm="http://schemas.openxmlformats.org/drawingml/2006/diagram" xmlns:r="http://schemas.openxmlformats.org/officeDocument/2006/relationships" r:dm="rId2" r:lo="rId3" r:qs="rId4" r:cs="rId5"/>
-          </a:graphicData>
-        </a:graphic>
-      </p:graphicFrame>
+      <p:pic>
+        <p:nvPicPr>
+          <p:cNvPr id="10" name="Picture 9">
+            <a:extLst>
+              <a:ext uri="{FF2B5EF4-FFF2-40B4-BE49-F238E27FC236}">
+                <a16:creationId xmlns:a16="http://schemas.microsoft.com/office/drawing/2014/main" id="{F6206BB3-9286-4036-A06E-E0EE4B588B0F}"/>
+              </a:ext>
+            </a:extLst>
+          </p:cNvPr>
+          <p:cNvPicPr>
+            <a:picLocks noChangeAspect="1"/>
+          </p:cNvPicPr>
+          <p:nvPr/>
+        </p:nvPicPr>
+        <p:blipFill>
+          <a:blip r:embed="rId3"/>
+          <a:stretch>
+            <a:fillRect/>
+          </a:stretch>
+        </p:blipFill>
+        <p:spPr>
+          <a:xfrm>
+            <a:off x="8243944" y="1581119"/>
+            <a:ext cx="3816885" cy="4078461"/>
+          </a:xfrm>
+          <a:prstGeom prst="rect">
+            <a:avLst/>
+          </a:prstGeom>
+        </p:spPr>
+      </p:pic>
+      <p:sp>
+        <p:nvSpPr>
+          <p:cNvPr id="23" name="TextBox 22">
+            <a:extLst>
+              <a:ext uri="{FF2B5EF4-FFF2-40B4-BE49-F238E27FC236}">
+                <a16:creationId xmlns:a16="http://schemas.microsoft.com/office/drawing/2014/main" id="{58AA32A8-ED5B-4CA0-82D0-D0856D555F08}"/>
+              </a:ext>
+            </a:extLst>
+          </p:cNvPr>
+          <p:cNvSpPr txBox="1"/>
+          <p:nvPr/>
+        </p:nvSpPr>
+        <p:spPr>
+          <a:xfrm>
+            <a:off x="853884" y="4588246"/>
+            <a:ext cx="1699708" cy="369332"/>
+          </a:xfrm>
+          <a:prstGeom prst="rect">
+            <a:avLst/>
+          </a:prstGeom>
+          <a:noFill/>
+          <a:ln>
+            <a:solidFill>
+              <a:schemeClr val="accent1"/>
+            </a:solidFill>
+          </a:ln>
+        </p:spPr>
+        <p:txBody>
+          <a:bodyPr wrap="square" rtlCol="0">
+            <a:spAutoFit/>
+          </a:bodyPr>
+          <a:lstStyle/>
+          <a:p>
+            <a:r>
+              <a:rPr lang="en-US" dirty="0"/>
+              <a:t>POWER BI VIZ</a:t>
+            </a:r>
+            <a:endParaRPr lang="en-GB" dirty="0"/>
+          </a:p>
+        </p:txBody>
+      </p:sp>
+      <p:sp>
+        <p:nvSpPr>
+          <p:cNvPr id="24" name="TextBox 23">
+            <a:extLst>
+              <a:ext uri="{FF2B5EF4-FFF2-40B4-BE49-F238E27FC236}">
+                <a16:creationId xmlns:a16="http://schemas.microsoft.com/office/drawing/2014/main" id="{0BF118AB-3D88-4CD3-859B-97D6293FB280}"/>
+              </a:ext>
+            </a:extLst>
+          </p:cNvPr>
+          <p:cNvSpPr txBox="1"/>
+          <p:nvPr/>
+        </p:nvSpPr>
+        <p:spPr>
+          <a:xfrm>
+            <a:off x="801947" y="5334550"/>
+            <a:ext cx="1699708" cy="646331"/>
+          </a:xfrm>
+          <a:prstGeom prst="rect">
+            <a:avLst/>
+          </a:prstGeom>
+          <a:noFill/>
+          <a:ln>
+            <a:solidFill>
+              <a:schemeClr val="accent1"/>
+            </a:solidFill>
+          </a:ln>
+        </p:spPr>
+        <p:txBody>
+          <a:bodyPr wrap="square" rtlCol="0">
+            <a:spAutoFit/>
+          </a:bodyPr>
+          <a:lstStyle/>
+          <a:p>
+            <a:r>
+              <a:rPr lang="en-US" dirty="0"/>
+              <a:t>TEAM COLAB - SLACK</a:t>
+            </a:r>
+            <a:endParaRPr lang="en-GB" dirty="0"/>
+          </a:p>
+        </p:txBody>
+      </p:sp>
+      <p:pic>
+        <p:nvPicPr>
+          <p:cNvPr id="26" name="Picture 25">
+            <a:extLst>
+              <a:ext uri="{FF2B5EF4-FFF2-40B4-BE49-F238E27FC236}">
+                <a16:creationId xmlns:a16="http://schemas.microsoft.com/office/drawing/2014/main" id="{9A87AB06-A5EA-4507-9265-22FE6018ED04}"/>
+              </a:ext>
+            </a:extLst>
+          </p:cNvPr>
+          <p:cNvPicPr>
+            <a:picLocks noChangeAspect="1"/>
+          </p:cNvPicPr>
+          <p:nvPr/>
+        </p:nvPicPr>
+        <p:blipFill>
+          <a:blip r:embed="rId4"/>
+          <a:stretch>
+            <a:fillRect/>
+          </a:stretch>
+        </p:blipFill>
+        <p:spPr>
+          <a:xfrm>
+            <a:off x="2750191" y="5071993"/>
+            <a:ext cx="2461086" cy="1709807"/>
+          </a:xfrm>
+          <a:prstGeom prst="rect">
+            <a:avLst/>
+          </a:prstGeom>
+        </p:spPr>
+      </p:pic>
+      <p:pic>
+        <p:nvPicPr>
+          <p:cNvPr id="1026" name="Picture 2" descr="Python Logo, Icon, Sign, Emblem, Badge PNG">
+            <a:extLst>
+              <a:ext uri="{FF2B5EF4-FFF2-40B4-BE49-F238E27FC236}">
+                <a16:creationId xmlns:a16="http://schemas.microsoft.com/office/drawing/2014/main" id="{6798856E-3161-4484-B9D5-80816867E778}"/>
+              </a:ext>
+            </a:extLst>
+          </p:cNvPr>
+          <p:cNvPicPr>
+            <a:picLocks noChangeAspect="1" noChangeArrowheads="1"/>
+          </p:cNvPicPr>
+          <p:nvPr/>
+        </p:nvPicPr>
+        <p:blipFill>
+          <a:blip r:embed="rId5" cstate="print">
+            <a:extLst>
+              <a:ext uri="{28A0092B-C50C-407E-A947-70E740481C1C}">
+                <a14:useLocalDpi xmlns:a14="http://schemas.microsoft.com/office/drawing/2010/main" val="0"/>
+              </a:ext>
+            </a:extLst>
+          </a:blip>
+          <a:srcRect/>
+          <a:stretch>
+            <a:fillRect/>
+          </a:stretch>
+        </p:blipFill>
+        <p:spPr bwMode="auto">
+          <a:xfrm>
+            <a:off x="2152388" y="1275650"/>
+            <a:ext cx="960195" cy="960195"/>
+          </a:xfrm>
+          <a:prstGeom prst="rect">
+            <a:avLst/>
+          </a:prstGeom>
+          <a:noFill/>
+          <a:extLst>
+            <a:ext uri="{909E8E84-426E-40DD-AFC4-6F175D3DCCD1}">
+              <a14:hiddenFill xmlns:a14="http://schemas.microsoft.com/office/drawing/2010/main">
+                <a:solidFill>
+                  <a:srgbClr val="FFFFFF"/>
+                </a:solidFill>
+              </a14:hiddenFill>
+            </a:ext>
+          </a:extLst>
+        </p:spPr>
+      </p:pic>
+      <p:pic>
+        <p:nvPicPr>
+          <p:cNvPr id="1030" name="Picture 6" descr="Sqlite - Free vector icons on creazilla.com">
+            <a:extLst>
+              <a:ext uri="{FF2B5EF4-FFF2-40B4-BE49-F238E27FC236}">
+                <a16:creationId xmlns:a16="http://schemas.microsoft.com/office/drawing/2014/main" id="{5F3EBFD7-8C51-49BB-8E03-A90E9A877EEC}"/>
+              </a:ext>
+            </a:extLst>
+          </p:cNvPr>
+          <p:cNvPicPr>
+            <a:picLocks noChangeAspect="1" noChangeArrowheads="1"/>
+          </p:cNvPicPr>
+          <p:nvPr/>
+        </p:nvPicPr>
+        <p:blipFill>
+          <a:blip r:embed="rId6" cstate="print">
+            <a:extLst>
+              <a:ext uri="{28A0092B-C50C-407E-A947-70E740481C1C}">
+                <a14:useLocalDpi xmlns:a14="http://schemas.microsoft.com/office/drawing/2010/main" val="0"/>
+              </a:ext>
+            </a:extLst>
+          </a:blip>
+          <a:srcRect/>
+          <a:stretch>
+            <a:fillRect/>
+          </a:stretch>
+        </p:blipFill>
+        <p:spPr bwMode="auto">
+          <a:xfrm>
+            <a:off x="2342267" y="2439997"/>
+            <a:ext cx="822722" cy="1096962"/>
+          </a:xfrm>
+          <a:prstGeom prst="rect">
+            <a:avLst/>
+          </a:prstGeom>
+          <a:noFill/>
+          <a:extLst>
+            <a:ext uri="{909E8E84-426E-40DD-AFC4-6F175D3DCCD1}">
+              <a14:hiddenFill xmlns:a14="http://schemas.microsoft.com/office/drawing/2010/main">
+                <a:solidFill>
+                  <a:srgbClr val="FFFFFF"/>
+                </a:solidFill>
+              </a14:hiddenFill>
+            </a:ext>
+          </a:extLst>
+        </p:spPr>
+      </p:pic>
+      <p:sp>
+        <p:nvSpPr>
+          <p:cNvPr id="29" name="AutoShape 10" descr="&quot;Docker Logo&quot; Sticker by awildanon | Redbubble">
+            <a:extLst>
+              <a:ext uri="{FF2B5EF4-FFF2-40B4-BE49-F238E27FC236}">
+                <a16:creationId xmlns:a16="http://schemas.microsoft.com/office/drawing/2014/main" id="{1338152A-B0C5-4F8D-99DC-7C6E294EF773}"/>
+              </a:ext>
+            </a:extLst>
+          </p:cNvPr>
+          <p:cNvSpPr>
+            <a:spLocks noChangeAspect="1" noChangeArrowheads="1"/>
+          </p:cNvSpPr>
+          <p:nvPr/>
+        </p:nvSpPr>
+        <p:spPr bwMode="auto">
+          <a:xfrm>
+            <a:off x="5943600" y="3276600"/>
+            <a:ext cx="304800" cy="304800"/>
+          </a:xfrm>
+          <a:prstGeom prst="rect">
+            <a:avLst/>
+          </a:prstGeom>
+          <a:noFill/>
+          <a:extLst>
+            <a:ext uri="{909E8E84-426E-40DD-AFC4-6F175D3DCCD1}">
+              <a14:hiddenFill xmlns:a14="http://schemas.microsoft.com/office/drawing/2010/main">
+                <a:solidFill>
+                  <a:srgbClr val="FFFFFF"/>
+                </a:solidFill>
+              </a14:hiddenFill>
+            </a:ext>
+          </a:extLst>
+        </p:spPr>
+        <p:txBody>
+          <a:bodyPr vert="horz" wrap="square" lIns="91440" tIns="45720" rIns="91440" bIns="45720" numCol="1" anchor="t" anchorCtr="0" compatLnSpc="1">
+            <a:prstTxWarp prst="textNoShape">
+              <a:avLst/>
+            </a:prstTxWarp>
+          </a:bodyPr>
+          <a:lstStyle/>
+          <a:p>
+            <a:endParaRPr lang="en-GB"/>
+          </a:p>
+        </p:txBody>
+      </p:sp>
+      <p:pic>
+        <p:nvPicPr>
+          <p:cNvPr id="33" name="Picture 32">
+            <a:extLst>
+              <a:ext uri="{FF2B5EF4-FFF2-40B4-BE49-F238E27FC236}">
+                <a16:creationId xmlns:a16="http://schemas.microsoft.com/office/drawing/2014/main" id="{B5405008-D094-4B87-937A-E3991160F62D}"/>
+              </a:ext>
+            </a:extLst>
+          </p:cNvPr>
+          <p:cNvPicPr>
+            <a:picLocks noChangeAspect="1"/>
+          </p:cNvPicPr>
+          <p:nvPr/>
+        </p:nvPicPr>
+        <p:blipFill>
+          <a:blip r:embed="rId7"/>
+          <a:stretch>
+            <a:fillRect/>
+          </a:stretch>
+        </p:blipFill>
+        <p:spPr>
+          <a:xfrm>
+            <a:off x="2452145" y="3655363"/>
+            <a:ext cx="888155" cy="848535"/>
+          </a:xfrm>
+          <a:prstGeom prst="rect">
+            <a:avLst/>
+          </a:prstGeom>
+        </p:spPr>
+      </p:pic>
+      <p:pic>
+        <p:nvPicPr>
+          <p:cNvPr id="1040" name="Picture 16" descr="Azure DevOps Logo, symbol, meaning, history, PNG, brand">
+            <a:extLst>
+              <a:ext uri="{FF2B5EF4-FFF2-40B4-BE49-F238E27FC236}">
+                <a16:creationId xmlns:a16="http://schemas.microsoft.com/office/drawing/2014/main" id="{10B37E86-8A46-40FC-B758-77DF2DD996B1}"/>
+              </a:ext>
+            </a:extLst>
+          </p:cNvPr>
+          <p:cNvPicPr>
+            <a:picLocks noChangeAspect="1" noChangeArrowheads="1"/>
+          </p:cNvPicPr>
+          <p:nvPr/>
+        </p:nvPicPr>
+        <p:blipFill>
+          <a:blip r:embed="rId8" cstate="print">
+            <a:extLst>
+              <a:ext uri="{28A0092B-C50C-407E-A947-70E740481C1C}">
+                <a14:useLocalDpi xmlns:a14="http://schemas.microsoft.com/office/drawing/2010/main" val="0"/>
+              </a:ext>
+            </a:extLst>
+          </a:blip>
+          <a:srcRect/>
+          <a:stretch>
+            <a:fillRect/>
+          </a:stretch>
+        </p:blipFill>
+        <p:spPr bwMode="auto">
+          <a:xfrm>
+            <a:off x="6220882" y="1516667"/>
+            <a:ext cx="1641476" cy="923330"/>
+          </a:xfrm>
+          <a:prstGeom prst="rect">
+            <a:avLst/>
+          </a:prstGeom>
+          <a:noFill/>
+          <a:extLst>
+            <a:ext uri="{909E8E84-426E-40DD-AFC4-6F175D3DCCD1}">
+              <a14:hiddenFill xmlns:a14="http://schemas.microsoft.com/office/drawing/2010/main">
+                <a:solidFill>
+                  <a:srgbClr val="FFFFFF"/>
+                </a:solidFill>
+              </a14:hiddenFill>
+            </a:ext>
+          </a:extLst>
+        </p:spPr>
+      </p:pic>
     </p:spTree>
     <p:extLst>
       <p:ext uri="{BB962C8B-B14F-4D97-AF65-F5344CB8AC3E}">
-        <p14:creationId xmlns:p14="http://schemas.microsoft.com/office/powerpoint/2010/main" val="4224509479"/>
+        <p14:creationId xmlns:p14="http://schemas.microsoft.com/office/powerpoint/2010/main" val="2917214872"/>
       </p:ext>
     </p:extLst>
   </p:cSld>
@@ -11342,7 +12516,7 @@
       </p:grpSpPr>
       <p:sp>
         <p:nvSpPr>
-          <p:cNvPr id="2" name="Title 1"/>
+          <p:cNvPr id="13" name="Title 12"/>
           <p:cNvSpPr>
             <a:spLocks noGrp="1"/>
           </p:cNvSpPr>
@@ -11357,19 +12531,19 @@
           <a:p>
             <a:r>
               <a:rPr lang="en-US" dirty="0"/>
-              <a:t>Picture with Caption Layout</a:t>
+              <a:t>Proposed Solution - Pipeline</a:t>
             </a:r>
           </a:p>
         </p:txBody>
       </p:sp>
       <p:sp>
         <p:nvSpPr>
-          <p:cNvPr id="4" name="Text Placeholder 3"/>
+          <p:cNvPr id="14" name="Content Placeholder 13"/>
           <p:cNvSpPr>
             <a:spLocks noGrp="1"/>
           </p:cNvSpPr>
           <p:nvPr>
-            <p:ph type="body" sz="half" idx="2"/>
+            <p:ph idx="1"/>
           </p:nvPr>
         </p:nvSpPr>
         <p:spPr/>
@@ -11377,42 +12551,14 @@
           <a:bodyPr/>
           <a:lstStyle/>
           <a:p>
-            <a:r>
-              <a:rPr lang="en-US" dirty="0"/>
-              <a:t>Caption</a:t>
-            </a:r>
+            <a:endParaRPr lang="en-US" dirty="0"/>
           </a:p>
         </p:txBody>
       </p:sp>
-      <p:pic>
-        <p:nvPicPr>
-          <p:cNvPr id="5" name="Picture Placeholder 4" descr="Close-up of books on shelves with more books blurred in foreground and background"/>
-          <p:cNvPicPr>
-            <a:picLocks noGrp="1" noChangeAspect="1"/>
-          </p:cNvPicPr>
-          <p:nvPr>
-            <p:ph type="pic" idx="1"/>
-          </p:nvPr>
-        </p:nvPicPr>
-        <p:blipFill>
-          <a:blip r:embed="rId2" cstate="print">
-            <a:extLst>
-              <a:ext uri="{28A0092B-C50C-407E-A947-70E740481C1C}">
-                <a14:useLocalDpi xmlns:a14="http://schemas.microsoft.com/office/drawing/2010/main" val="0"/>
-              </a:ext>
-            </a:extLst>
-          </a:blip>
-          <a:srcRect l="3155" r="3155"/>
-          <a:stretch>
-            <a:fillRect/>
-          </a:stretch>
-        </p:blipFill>
-        <p:spPr/>
-      </p:pic>
     </p:spTree>
     <p:extLst>
       <p:ext uri="{BB962C8B-B14F-4D97-AF65-F5344CB8AC3E}">
-        <p14:creationId xmlns:p14="http://schemas.microsoft.com/office/powerpoint/2010/main" val="3683544629"/>
+        <p14:creationId xmlns:p14="http://schemas.microsoft.com/office/powerpoint/2010/main" val="796677603"/>
       </p:ext>
     </p:extLst>
   </p:cSld>
@@ -11453,12 +12599,12 @@
       </p:grpSpPr>
       <p:sp>
         <p:nvSpPr>
-          <p:cNvPr id="2" name="Title 1"/>
+          <p:cNvPr id="13" name="Title 12"/>
           <p:cNvSpPr>
             <a:spLocks noGrp="1"/>
           </p:cNvSpPr>
           <p:nvPr>
-            <p:ph type="ctrTitle"/>
+            <p:ph type="title"/>
           </p:nvPr>
         </p:nvSpPr>
         <p:spPr/>
@@ -11467,20 +12613,24 @@
           <a:lstStyle/>
           <a:p>
             <a:r>
+              <a:rPr lang="en-US" dirty="0" err="1"/>
+              <a:t>PowerBI</a:t>
+            </a:r>
+            <a:r>
               <a:rPr lang="en-US" dirty="0"/>
-              <a:t>Add a Slide Title - 1</a:t>
+              <a:t> dashboard</a:t>
             </a:r>
           </a:p>
         </p:txBody>
       </p:sp>
       <p:sp>
         <p:nvSpPr>
-          <p:cNvPr id="3" name="Subtitle 2"/>
+          <p:cNvPr id="14" name="Content Placeholder 13"/>
           <p:cNvSpPr>
             <a:spLocks noGrp="1"/>
           </p:cNvSpPr>
           <p:nvPr>
-            <p:ph type="subTitle" idx="1"/>
+            <p:ph idx="1"/>
           </p:nvPr>
         </p:nvSpPr>
         <p:spPr/>
@@ -11488,14 +12638,14 @@
           <a:bodyPr/>
           <a:lstStyle/>
           <a:p>
-            <a:endParaRPr lang="en-US"/>
+            <a:endParaRPr lang="en-US" dirty="0"/>
           </a:p>
         </p:txBody>
       </p:sp>
     </p:spTree>
     <p:extLst>
       <p:ext uri="{BB962C8B-B14F-4D97-AF65-F5344CB8AC3E}">
-        <p14:creationId xmlns:p14="http://schemas.microsoft.com/office/powerpoint/2010/main" val="1315647518"/>
+        <p14:creationId xmlns:p14="http://schemas.microsoft.com/office/powerpoint/2010/main" val="4216570307"/>
       </p:ext>
     </p:extLst>
   </p:cSld>
@@ -11536,7 +12686,7 @@
       </p:grpSpPr>
       <p:sp>
         <p:nvSpPr>
-          <p:cNvPr id="2" name="Title 1"/>
+          <p:cNvPr id="13" name="Title 12"/>
           <p:cNvSpPr>
             <a:spLocks noGrp="1"/>
           </p:cNvSpPr>
@@ -11551,19 +12701,19 @@
           <a:p>
             <a:r>
               <a:rPr lang="en-US" dirty="0"/>
-              <a:t>Add a Slide Title - 2</a:t>
+              <a:t>Proposed Solution</a:t>
             </a:r>
           </a:p>
         </p:txBody>
       </p:sp>
       <p:sp>
         <p:nvSpPr>
-          <p:cNvPr id="3" name="Text Placeholder 2"/>
+          <p:cNvPr id="14" name="Content Placeholder 13"/>
           <p:cNvSpPr>
             <a:spLocks noGrp="1"/>
           </p:cNvSpPr>
           <p:nvPr>
-            <p:ph type="body" idx="1"/>
+            <p:ph idx="1"/>
           </p:nvPr>
         </p:nvSpPr>
         <p:spPr/>
@@ -11571,14 +12721,14 @@
           <a:bodyPr/>
           <a:lstStyle/>
           <a:p>
-            <a:endParaRPr lang="en-US"/>
+            <a:endParaRPr lang="en-US" dirty="0"/>
           </a:p>
         </p:txBody>
       </p:sp>
     </p:spTree>
     <p:extLst>
       <p:ext uri="{BB962C8B-B14F-4D97-AF65-F5344CB8AC3E}">
-        <p14:creationId xmlns:p14="http://schemas.microsoft.com/office/powerpoint/2010/main" val="132884364"/>
+        <p14:creationId xmlns:p14="http://schemas.microsoft.com/office/powerpoint/2010/main" val="2164460"/>
       </p:ext>
     </p:extLst>
   </p:cSld>
@@ -11634,91 +12784,40 @@
           <a:p>
             <a:r>
               <a:rPr lang="en-US" dirty="0"/>
-              <a:t>Add a Slide Title - 3</a:t>
+              <a:t>SWAT</a:t>
             </a:r>
           </a:p>
         </p:txBody>
       </p:sp>
-      <p:sp>
-        <p:nvSpPr>
-          <p:cNvPr id="3" name="Text Placeholder 2"/>
-          <p:cNvSpPr>
-            <a:spLocks noGrp="1"/>
-          </p:cNvSpPr>
+      <p:graphicFrame>
+        <p:nvGraphicFramePr>
+          <p:cNvPr id="4" name="Content Placeholder 3" descr="Stacked List showing 4 groups arranged from left to right with task descriptions under each group"/>
+          <p:cNvGraphicFramePr>
+            <a:graphicFrameLocks noGrp="1"/>
+          </p:cNvGraphicFramePr>
           <p:nvPr>
-            <p:ph type="body" idx="1"/>
+            <p:ph idx="1"/>
+            <p:extLst>
+              <p:ext uri="{D42A27DB-BD31-4B8C-83A1-F6EECF244321}">
+                <p14:modId xmlns:p14="http://schemas.microsoft.com/office/powerpoint/2010/main" val="305999686"/>
+              </p:ext>
+            </p:extLst>
           </p:nvPr>
-        </p:nvSpPr>
-        <p:spPr/>
-        <p:txBody>
-          <a:bodyPr/>
-          <a:lstStyle/>
-          <a:p>
-            <a:endParaRPr lang="en-US"/>
-          </a:p>
-        </p:txBody>
-      </p:sp>
-      <p:sp>
-        <p:nvSpPr>
-          <p:cNvPr id="4" name="Content Placeholder 3"/>
-          <p:cNvSpPr>
-            <a:spLocks noGrp="1"/>
-          </p:cNvSpPr>
-          <p:nvPr>
-            <p:ph sz="half" idx="2"/>
-          </p:nvPr>
-        </p:nvSpPr>
-        <p:spPr/>
-        <p:txBody>
-          <a:bodyPr/>
-          <a:lstStyle/>
-          <a:p>
-            <a:endParaRPr lang="en-US"/>
-          </a:p>
-        </p:txBody>
-      </p:sp>
-      <p:sp>
-        <p:nvSpPr>
-          <p:cNvPr id="5" name="Text Placeholder 4"/>
-          <p:cNvSpPr>
-            <a:spLocks noGrp="1"/>
-          </p:cNvSpPr>
-          <p:nvPr>
-            <p:ph type="body" sz="quarter" idx="3"/>
-          </p:nvPr>
-        </p:nvSpPr>
-        <p:spPr/>
-        <p:txBody>
-          <a:bodyPr/>
-          <a:lstStyle/>
-          <a:p>
-            <a:endParaRPr lang="en-US"/>
-          </a:p>
-        </p:txBody>
-      </p:sp>
-      <p:sp>
-        <p:nvSpPr>
-          <p:cNvPr id="6" name="Content Placeholder 5"/>
-          <p:cNvSpPr>
-            <a:spLocks noGrp="1"/>
-          </p:cNvSpPr>
-          <p:nvPr>
-            <p:ph sz="quarter" idx="4"/>
-          </p:nvPr>
-        </p:nvSpPr>
-        <p:spPr/>
-        <p:txBody>
-          <a:bodyPr/>
-          <a:lstStyle/>
-          <a:p>
-            <a:endParaRPr lang="en-US"/>
-          </a:p>
-        </p:txBody>
-      </p:sp>
+        </p:nvGraphicFramePr>
+        <p:xfrm>
+          <a:off x="1104900" y="1600200"/>
+          <a:ext cx="9982200" cy="4572000"/>
+        </p:xfrm>
+        <a:graphic>
+          <a:graphicData uri="http://schemas.openxmlformats.org/drawingml/2006/diagram">
+            <dgm:relIds xmlns:dgm="http://schemas.openxmlformats.org/drawingml/2006/diagram" xmlns:r="http://schemas.openxmlformats.org/officeDocument/2006/relationships" r:dm="rId2" r:lo="rId3" r:qs="rId4" r:cs="rId5"/>
+          </a:graphicData>
+        </a:graphic>
+      </p:graphicFrame>
     </p:spTree>
     <p:extLst>
       <p:ext uri="{BB962C8B-B14F-4D97-AF65-F5344CB8AC3E}">
-        <p14:creationId xmlns:p14="http://schemas.microsoft.com/office/powerpoint/2010/main" val="2224495804"/>
+        <p14:creationId xmlns:p14="http://schemas.microsoft.com/office/powerpoint/2010/main" val="4224509479"/>
       </p:ext>
     </p:extLst>
   </p:cSld>

--- a/LibrarySystemValidation.pptx
+++ b/LibrarySystemValidation.pptx
@@ -5,10 +5,10 @@
     <p:sldMasterId id="2147483648" r:id="rId4"/>
   </p:sldMasterIdLst>
   <p:notesMasterIdLst>
-    <p:notesMasterId r:id="rId18"/>
+    <p:notesMasterId r:id="rId16"/>
   </p:notesMasterIdLst>
   <p:handoutMasterIdLst>
-    <p:handoutMasterId r:id="rId19"/>
+    <p:handoutMasterId r:id="rId17"/>
   </p:handoutMasterIdLst>
   <p:sldIdLst>
     <p:sldId id="256" r:id="rId5"/>
@@ -18,12 +18,10 @@
     <p:sldId id="270" r:id="rId9"/>
     <p:sldId id="274" r:id="rId10"/>
     <p:sldId id="271" r:id="rId11"/>
-    <p:sldId id="273" r:id="rId12"/>
-    <p:sldId id="260" r:id="rId13"/>
-    <p:sldId id="259" r:id="rId14"/>
-    <p:sldId id="258" r:id="rId15"/>
-    <p:sldId id="263" r:id="rId16"/>
-    <p:sldId id="264" r:id="rId17"/>
+    <p:sldId id="260" r:id="rId12"/>
+    <p:sldId id="259" r:id="rId13"/>
+    <p:sldId id="263" r:id="rId14"/>
+    <p:sldId id="264" r:id="rId15"/>
   </p:sldIdLst>
   <p:sldSz cx="12192000" cy="6858000"/>
   <p:notesSz cx="6858000" cy="9144000"/>
@@ -142,1085 +140,6 @@
     </p:ext>
   </p:extLst>
 </p:presentation>
-</file>
-
-<file path=ppt/charts/chart1.xml><?xml version="1.0" encoding="utf-8"?>
-<c:chartSpace xmlns:c="http://schemas.openxmlformats.org/drawingml/2006/chart" xmlns:a="http://schemas.openxmlformats.org/drawingml/2006/main" xmlns:r="http://schemas.openxmlformats.org/officeDocument/2006/relationships" xmlns:c16r2="http://schemas.microsoft.com/office/drawing/2015/06/chart">
-  <c:date1904 val="0"/>
-  <c:lang val="en-US"/>
-  <c:roundedCorners val="0"/>
-  <mc:AlternateContent xmlns:mc="http://schemas.openxmlformats.org/markup-compatibility/2006">
-    <mc:Choice xmlns:c14="http://schemas.microsoft.com/office/drawing/2007/8/2/chart" Requires="c14">
-      <c14:style val="102"/>
-    </mc:Choice>
-    <mc:Fallback>
-      <c:style val="2"/>
-    </mc:Fallback>
-  </mc:AlternateContent>
-  <c:chart>
-    <c:autoTitleDeleted val="1"/>
-    <c:plotArea>
-      <c:layout/>
-      <c:barChart>
-        <c:barDir val="col"/>
-        <c:grouping val="clustered"/>
-        <c:varyColors val="0"/>
-        <c:ser>
-          <c:idx val="0"/>
-          <c:order val="0"/>
-          <c:tx>
-            <c:strRef>
-              <c:f>Sheet1!$B$1</c:f>
-              <c:strCache>
-                <c:ptCount val="1"/>
-                <c:pt idx="0">
-                  <c:v>Series 1</c:v>
-                </c:pt>
-              </c:strCache>
-            </c:strRef>
-          </c:tx>
-          <c:spPr>
-            <a:gradFill rotWithShape="1">
-              <a:gsLst>
-                <a:gs pos="0">
-                  <a:schemeClr val="accent1">
-                    <a:shade val="100000"/>
-                    <a:satMod val="137000"/>
-                  </a:schemeClr>
-                </a:gs>
-                <a:gs pos="71000">
-                  <a:schemeClr val="accent1">
-                    <a:shade val="98000"/>
-                    <a:satMod val="137000"/>
-                  </a:schemeClr>
-                </a:gs>
-                <a:gs pos="100000">
-                  <a:schemeClr val="accent1">
-                    <a:shade val="75000"/>
-                    <a:satMod val="137000"/>
-                  </a:schemeClr>
-                </a:gs>
-              </a:gsLst>
-              <a:path path="rect">
-                <a:fillToRect l="50000" t="50000" r="50000" b="50000"/>
-              </a:path>
-            </a:gradFill>
-            <a:ln>
-              <a:noFill/>
-            </a:ln>
-            <a:effectLst>
-              <a:outerShdw blurRad="39000" dist="25400" dir="5400000" rotWithShape="0">
-                <a:srgbClr val="000000">
-                  <a:alpha val="38000"/>
-                </a:srgbClr>
-              </a:outerShdw>
-            </a:effectLst>
-            <a:scene3d>
-              <a:camera prst="orthographicFront">
-                <a:rot lat="0" lon="0" rev="0"/>
-              </a:camera>
-              <a:lightRig rig="threePt" dir="t">
-                <a:rot lat="0" lon="0" rev="1800000"/>
-              </a:lightRig>
-            </a:scene3d>
-            <a:sp3d prstMaterial="matte">
-              <a:bevelT h="20000"/>
-            </a:sp3d>
-          </c:spPr>
-          <c:invertIfNegative val="0"/>
-          <c:cat>
-            <c:strRef>
-              <c:f>Sheet1!$A$2:$A$5</c:f>
-              <c:strCache>
-                <c:ptCount val="4"/>
-                <c:pt idx="0">
-                  <c:v>Category 1</c:v>
-                </c:pt>
-                <c:pt idx="1">
-                  <c:v>Category 2</c:v>
-                </c:pt>
-                <c:pt idx="2">
-                  <c:v>Category 3</c:v>
-                </c:pt>
-                <c:pt idx="3">
-                  <c:v>Category 4</c:v>
-                </c:pt>
-              </c:strCache>
-            </c:strRef>
-          </c:cat>
-          <c:val>
-            <c:numRef>
-              <c:f>Sheet1!$B$2:$B$5</c:f>
-              <c:numCache>
-                <c:formatCode>General</c:formatCode>
-                <c:ptCount val="4"/>
-                <c:pt idx="0">
-                  <c:v>4.3</c:v>
-                </c:pt>
-                <c:pt idx="1">
-                  <c:v>2.5</c:v>
-                </c:pt>
-                <c:pt idx="2">
-                  <c:v>3.5</c:v>
-                </c:pt>
-                <c:pt idx="3">
-                  <c:v>4.5</c:v>
-                </c:pt>
-              </c:numCache>
-            </c:numRef>
-          </c:val>
-          <c:extLst>
-            <c:ext xmlns:c16="http://schemas.microsoft.com/office/drawing/2014/chart" uri="{C3380CC4-5D6E-409C-BE32-E72D297353CC}">
-              <c16:uniqueId val="{00000000-2572-47D6-91B5-B08EA9A0FA41}"/>
-            </c:ext>
-          </c:extLst>
-        </c:ser>
-        <c:ser>
-          <c:idx val="1"/>
-          <c:order val="1"/>
-          <c:tx>
-            <c:strRef>
-              <c:f>Sheet1!$C$1</c:f>
-              <c:strCache>
-                <c:ptCount val="1"/>
-                <c:pt idx="0">
-                  <c:v>Series 2</c:v>
-                </c:pt>
-              </c:strCache>
-            </c:strRef>
-          </c:tx>
-          <c:spPr>
-            <a:gradFill rotWithShape="1">
-              <a:gsLst>
-                <a:gs pos="0">
-                  <a:schemeClr val="accent2">
-                    <a:shade val="100000"/>
-                    <a:satMod val="137000"/>
-                  </a:schemeClr>
-                </a:gs>
-                <a:gs pos="71000">
-                  <a:schemeClr val="accent2">
-                    <a:shade val="98000"/>
-                    <a:satMod val="137000"/>
-                  </a:schemeClr>
-                </a:gs>
-                <a:gs pos="100000">
-                  <a:schemeClr val="accent2">
-                    <a:shade val="75000"/>
-                    <a:satMod val="137000"/>
-                  </a:schemeClr>
-                </a:gs>
-              </a:gsLst>
-              <a:path path="rect">
-                <a:fillToRect l="50000" t="50000" r="50000" b="50000"/>
-              </a:path>
-            </a:gradFill>
-            <a:ln>
-              <a:noFill/>
-            </a:ln>
-            <a:effectLst>
-              <a:outerShdw blurRad="39000" dist="25400" dir="5400000" rotWithShape="0">
-                <a:srgbClr val="000000">
-                  <a:alpha val="38000"/>
-                </a:srgbClr>
-              </a:outerShdw>
-            </a:effectLst>
-            <a:scene3d>
-              <a:camera prst="orthographicFront">
-                <a:rot lat="0" lon="0" rev="0"/>
-              </a:camera>
-              <a:lightRig rig="threePt" dir="t">
-                <a:rot lat="0" lon="0" rev="1800000"/>
-              </a:lightRig>
-            </a:scene3d>
-            <a:sp3d prstMaterial="matte">
-              <a:bevelT h="20000"/>
-            </a:sp3d>
-          </c:spPr>
-          <c:invertIfNegative val="0"/>
-          <c:cat>
-            <c:strRef>
-              <c:f>Sheet1!$A$2:$A$5</c:f>
-              <c:strCache>
-                <c:ptCount val="4"/>
-                <c:pt idx="0">
-                  <c:v>Category 1</c:v>
-                </c:pt>
-                <c:pt idx="1">
-                  <c:v>Category 2</c:v>
-                </c:pt>
-                <c:pt idx="2">
-                  <c:v>Category 3</c:v>
-                </c:pt>
-                <c:pt idx="3">
-                  <c:v>Category 4</c:v>
-                </c:pt>
-              </c:strCache>
-            </c:strRef>
-          </c:cat>
-          <c:val>
-            <c:numRef>
-              <c:f>Sheet1!$C$2:$C$5</c:f>
-              <c:numCache>
-                <c:formatCode>General</c:formatCode>
-                <c:ptCount val="4"/>
-                <c:pt idx="0">
-                  <c:v>2.4</c:v>
-                </c:pt>
-                <c:pt idx="1">
-                  <c:v>4.4000000000000004</c:v>
-                </c:pt>
-                <c:pt idx="2">
-                  <c:v>1.8</c:v>
-                </c:pt>
-                <c:pt idx="3">
-                  <c:v>2.8</c:v>
-                </c:pt>
-              </c:numCache>
-            </c:numRef>
-          </c:val>
-          <c:extLst>
-            <c:ext xmlns:c16="http://schemas.microsoft.com/office/drawing/2014/chart" uri="{C3380CC4-5D6E-409C-BE32-E72D297353CC}">
-              <c16:uniqueId val="{00000001-2572-47D6-91B5-B08EA9A0FA41}"/>
-            </c:ext>
-          </c:extLst>
-        </c:ser>
-        <c:ser>
-          <c:idx val="2"/>
-          <c:order val="2"/>
-          <c:tx>
-            <c:strRef>
-              <c:f>Sheet1!$D$1</c:f>
-              <c:strCache>
-                <c:ptCount val="1"/>
-                <c:pt idx="0">
-                  <c:v>Series 3</c:v>
-                </c:pt>
-              </c:strCache>
-            </c:strRef>
-          </c:tx>
-          <c:spPr>
-            <a:gradFill rotWithShape="1">
-              <a:gsLst>
-                <a:gs pos="0">
-                  <a:schemeClr val="accent3">
-                    <a:shade val="100000"/>
-                    <a:satMod val="137000"/>
-                  </a:schemeClr>
-                </a:gs>
-                <a:gs pos="71000">
-                  <a:schemeClr val="accent3">
-                    <a:shade val="98000"/>
-                    <a:satMod val="137000"/>
-                  </a:schemeClr>
-                </a:gs>
-                <a:gs pos="100000">
-                  <a:schemeClr val="accent3">
-                    <a:shade val="75000"/>
-                    <a:satMod val="137000"/>
-                  </a:schemeClr>
-                </a:gs>
-              </a:gsLst>
-              <a:path path="rect">
-                <a:fillToRect l="50000" t="50000" r="50000" b="50000"/>
-              </a:path>
-            </a:gradFill>
-            <a:ln>
-              <a:noFill/>
-            </a:ln>
-            <a:effectLst>
-              <a:outerShdw blurRad="39000" dist="25400" dir="5400000" rotWithShape="0">
-                <a:srgbClr val="000000">
-                  <a:alpha val="38000"/>
-                </a:srgbClr>
-              </a:outerShdw>
-            </a:effectLst>
-            <a:scene3d>
-              <a:camera prst="orthographicFront">
-                <a:rot lat="0" lon="0" rev="0"/>
-              </a:camera>
-              <a:lightRig rig="threePt" dir="t">
-                <a:rot lat="0" lon="0" rev="1800000"/>
-              </a:lightRig>
-            </a:scene3d>
-            <a:sp3d prstMaterial="matte">
-              <a:bevelT h="20000"/>
-            </a:sp3d>
-          </c:spPr>
-          <c:invertIfNegative val="0"/>
-          <c:cat>
-            <c:strRef>
-              <c:f>Sheet1!$A$2:$A$5</c:f>
-              <c:strCache>
-                <c:ptCount val="4"/>
-                <c:pt idx="0">
-                  <c:v>Category 1</c:v>
-                </c:pt>
-                <c:pt idx="1">
-                  <c:v>Category 2</c:v>
-                </c:pt>
-                <c:pt idx="2">
-                  <c:v>Category 3</c:v>
-                </c:pt>
-                <c:pt idx="3">
-                  <c:v>Category 4</c:v>
-                </c:pt>
-              </c:strCache>
-            </c:strRef>
-          </c:cat>
-          <c:val>
-            <c:numRef>
-              <c:f>Sheet1!$D$2:$D$5</c:f>
-              <c:numCache>
-                <c:formatCode>General</c:formatCode>
-                <c:ptCount val="4"/>
-                <c:pt idx="0">
-                  <c:v>2</c:v>
-                </c:pt>
-                <c:pt idx="1">
-                  <c:v>2</c:v>
-                </c:pt>
-                <c:pt idx="2">
-                  <c:v>3</c:v>
-                </c:pt>
-                <c:pt idx="3">
-                  <c:v>5</c:v>
-                </c:pt>
-              </c:numCache>
-            </c:numRef>
-          </c:val>
-          <c:extLst>
-            <c:ext xmlns:c16="http://schemas.microsoft.com/office/drawing/2014/chart" uri="{C3380CC4-5D6E-409C-BE32-E72D297353CC}">
-              <c16:uniqueId val="{00000002-2572-47D6-91B5-B08EA9A0FA41}"/>
-            </c:ext>
-          </c:extLst>
-        </c:ser>
-        <c:dLbls>
-          <c:showLegendKey val="0"/>
-          <c:showVal val="0"/>
-          <c:showCatName val="0"/>
-          <c:showSerName val="0"/>
-          <c:showPercent val="0"/>
-          <c:showBubbleSize val="0"/>
-        </c:dLbls>
-        <c:gapWidth val="100"/>
-        <c:overlap val="-24"/>
-        <c:axId val="665025880"/>
-        <c:axId val="665015688"/>
-      </c:barChart>
-      <c:catAx>
-        <c:axId val="665025880"/>
-        <c:scaling>
-          <c:orientation val="minMax"/>
-        </c:scaling>
-        <c:delete val="0"/>
-        <c:axPos val="b"/>
-        <c:numFmt formatCode="General" sourceLinked="1"/>
-        <c:majorTickMark val="none"/>
-        <c:minorTickMark val="none"/>
-        <c:tickLblPos val="nextTo"/>
-        <c:spPr>
-          <a:noFill/>
-          <a:ln w="12700" cap="flat" cmpd="sng" algn="ctr">
-            <a:solidFill>
-              <a:schemeClr val="tx1">
-                <a:lumMod val="15000"/>
-                <a:lumOff val="85000"/>
-              </a:schemeClr>
-            </a:solidFill>
-            <a:round/>
-          </a:ln>
-          <a:effectLst/>
-        </c:spPr>
-        <c:txPr>
-          <a:bodyPr rot="-60000000" spcFirstLastPara="1" vertOverflow="ellipsis" vert="horz" wrap="square" anchor="ctr" anchorCtr="1"/>
-          <a:lstStyle/>
-          <a:p>
-            <a:pPr>
-              <a:defRPr sz="1197" b="0" i="0" u="none" strike="noStrike" kern="1200" baseline="0">
-                <a:solidFill>
-                  <a:schemeClr val="tx1">
-                    <a:lumMod val="65000"/>
-                    <a:lumOff val="35000"/>
-                  </a:schemeClr>
-                </a:solidFill>
-                <a:latin typeface="+mn-lt"/>
-                <a:ea typeface="+mn-ea"/>
-                <a:cs typeface="+mn-cs"/>
-              </a:defRPr>
-            </a:pPr>
-            <a:endParaRPr lang="en-US"/>
-          </a:p>
-        </c:txPr>
-        <c:crossAx val="665015688"/>
-        <c:crosses val="autoZero"/>
-        <c:auto val="1"/>
-        <c:lblAlgn val="ctr"/>
-        <c:lblOffset val="100"/>
-        <c:noMultiLvlLbl val="0"/>
-      </c:catAx>
-      <c:valAx>
-        <c:axId val="665015688"/>
-        <c:scaling>
-          <c:orientation val="minMax"/>
-        </c:scaling>
-        <c:delete val="0"/>
-        <c:axPos val="l"/>
-        <c:majorGridlines>
-          <c:spPr>
-            <a:ln w="9525" cap="flat" cmpd="sng" algn="ctr">
-              <a:solidFill>
-                <a:schemeClr val="tx1">
-                  <a:lumMod val="15000"/>
-                  <a:lumOff val="85000"/>
-                </a:schemeClr>
-              </a:solidFill>
-              <a:round/>
-            </a:ln>
-            <a:effectLst/>
-          </c:spPr>
-        </c:majorGridlines>
-        <c:numFmt formatCode="General" sourceLinked="1"/>
-        <c:majorTickMark val="none"/>
-        <c:minorTickMark val="none"/>
-        <c:tickLblPos val="nextTo"/>
-        <c:spPr>
-          <a:noFill/>
-          <a:ln>
-            <a:noFill/>
-          </a:ln>
-          <a:effectLst/>
-        </c:spPr>
-        <c:txPr>
-          <a:bodyPr rot="-60000000" spcFirstLastPara="1" vertOverflow="ellipsis" vert="horz" wrap="square" anchor="ctr" anchorCtr="1"/>
-          <a:lstStyle/>
-          <a:p>
-            <a:pPr>
-              <a:defRPr sz="1197" b="0" i="0" u="none" strike="noStrike" kern="1200" baseline="0">
-                <a:solidFill>
-                  <a:schemeClr val="tx1">
-                    <a:lumMod val="65000"/>
-                    <a:lumOff val="35000"/>
-                  </a:schemeClr>
-                </a:solidFill>
-                <a:latin typeface="+mn-lt"/>
-                <a:ea typeface="+mn-ea"/>
-                <a:cs typeface="+mn-cs"/>
-              </a:defRPr>
-            </a:pPr>
-            <a:endParaRPr lang="en-US"/>
-          </a:p>
-        </c:txPr>
-        <c:crossAx val="665025880"/>
-        <c:crosses val="autoZero"/>
-        <c:crossBetween val="between"/>
-      </c:valAx>
-      <c:spPr>
-        <a:noFill/>
-        <a:ln>
-          <a:noFill/>
-        </a:ln>
-        <a:effectLst/>
-      </c:spPr>
-    </c:plotArea>
-    <c:legend>
-      <c:legendPos val="b"/>
-      <c:overlay val="0"/>
-      <c:spPr>
-        <a:noFill/>
-        <a:ln>
-          <a:noFill/>
-        </a:ln>
-        <a:effectLst/>
-      </c:spPr>
-      <c:txPr>
-        <a:bodyPr rot="0" spcFirstLastPara="1" vertOverflow="ellipsis" vert="horz" wrap="square" anchor="ctr" anchorCtr="1"/>
-        <a:lstStyle/>
-        <a:p>
-          <a:pPr>
-            <a:defRPr sz="1197" b="0" i="0" u="none" strike="noStrike" kern="1200" baseline="0">
-              <a:solidFill>
-                <a:schemeClr val="tx1">
-                  <a:lumMod val="65000"/>
-                  <a:lumOff val="35000"/>
-                </a:schemeClr>
-              </a:solidFill>
-              <a:latin typeface="+mn-lt"/>
-              <a:ea typeface="+mn-ea"/>
-              <a:cs typeface="+mn-cs"/>
-            </a:defRPr>
-          </a:pPr>
-          <a:endParaRPr lang="en-US"/>
-        </a:p>
-      </c:txPr>
-    </c:legend>
-    <c:plotVisOnly val="1"/>
-    <c:dispBlanksAs val="gap"/>
-    <c:showDLblsOverMax val="0"/>
-  </c:chart>
-  <c:spPr>
-    <a:noFill/>
-    <a:ln>
-      <a:noFill/>
-    </a:ln>
-    <a:effectLst/>
-  </c:spPr>
-  <c:txPr>
-    <a:bodyPr/>
-    <a:lstStyle/>
-    <a:p>
-      <a:pPr>
-        <a:defRPr/>
-      </a:pPr>
-      <a:endParaRPr lang="en-US"/>
-    </a:p>
-  </c:txPr>
-  <c:externalData r:id="rId3">
-    <c:autoUpdate val="0"/>
-  </c:externalData>
-</c:chartSpace>
-</file>
-
-<file path=ppt/charts/colors1.xml><?xml version="1.0" encoding="utf-8"?>
-<cs:colorStyle xmlns:cs="http://schemas.microsoft.com/office/drawing/2012/chartStyle" xmlns:a="http://schemas.openxmlformats.org/drawingml/2006/main" meth="cycle" id="10">
-  <a:schemeClr val="accent1"/>
-  <a:schemeClr val="accent2"/>
-  <a:schemeClr val="accent3"/>
-  <a:schemeClr val="accent4"/>
-  <a:schemeClr val="accent5"/>
-  <a:schemeClr val="accent6"/>
-  <cs:variation/>
-  <cs:variation>
-    <a:lumMod val="60000"/>
-  </cs:variation>
-  <cs:variation>
-    <a:lumMod val="80000"/>
-    <a:lumOff val="20000"/>
-  </cs:variation>
-  <cs:variation>
-    <a:lumMod val="80000"/>
-  </cs:variation>
-  <cs:variation>
-    <a:lumMod val="60000"/>
-    <a:lumOff val="40000"/>
-  </cs:variation>
-  <cs:variation>
-    <a:lumMod val="50000"/>
-  </cs:variation>
-  <cs:variation>
-    <a:lumMod val="70000"/>
-    <a:lumOff val="30000"/>
-  </cs:variation>
-  <cs:variation>
-    <a:lumMod val="70000"/>
-  </cs:variation>
-  <cs:variation>
-    <a:lumMod val="50000"/>
-    <a:lumOff val="50000"/>
-  </cs:variation>
-</cs:colorStyle>
-</file>
-
-<file path=ppt/charts/style1.xml><?xml version="1.0" encoding="utf-8"?>
-<cs:chartStyle xmlns:cs="http://schemas.microsoft.com/office/drawing/2012/chartStyle" xmlns:a="http://schemas.openxmlformats.org/drawingml/2006/main" id="340">
-  <cs:axisTitle>
-    <cs:lnRef idx="0"/>
-    <cs:fillRef idx="0"/>
-    <cs:effectRef idx="0"/>
-    <cs:fontRef idx="minor">
-      <a:schemeClr val="tx1">
-        <a:lumMod val="65000"/>
-        <a:lumOff val="35000"/>
-      </a:schemeClr>
-    </cs:fontRef>
-    <cs:defRPr sz="1197" kern="1200"/>
-  </cs:axisTitle>
-  <cs:categoryAxis>
-    <cs:lnRef idx="0"/>
-    <cs:fillRef idx="0"/>
-    <cs:effectRef idx="0"/>
-    <cs:fontRef idx="minor">
-      <a:schemeClr val="tx1">
-        <a:lumMod val="65000"/>
-        <a:lumOff val="35000"/>
-      </a:schemeClr>
-    </cs:fontRef>
-    <cs:spPr>
-      <a:ln w="12700" cap="flat" cmpd="sng" algn="ctr">
-        <a:solidFill>
-          <a:schemeClr val="tx1">
-            <a:lumMod val="15000"/>
-            <a:lumOff val="85000"/>
-          </a:schemeClr>
-        </a:solidFill>
-        <a:round/>
-      </a:ln>
-    </cs:spPr>
-    <cs:defRPr sz="1197" kern="1200"/>
-  </cs:categoryAxis>
-  <cs:chartArea mods="allowNoFillOverride allowNoLineOverride">
-    <cs:lnRef idx="0"/>
-    <cs:fillRef idx="0"/>
-    <cs:effectRef idx="0"/>
-    <cs:fontRef idx="minor">
-      <a:schemeClr val="tx2"/>
-    </cs:fontRef>
-    <cs:spPr>
-      <a:solidFill>
-        <a:schemeClr val="bg1"/>
-      </a:solidFill>
-      <a:ln w="9525" cap="flat" cmpd="sng" algn="ctr">
-        <a:solidFill>
-          <a:schemeClr val="tx1">
-            <a:lumMod val="15000"/>
-            <a:lumOff val="85000"/>
-          </a:schemeClr>
-        </a:solidFill>
-        <a:round/>
-      </a:ln>
-    </cs:spPr>
-    <cs:defRPr sz="1197" kern="1200"/>
-  </cs:chartArea>
-  <cs:dataLabel>
-    <cs:lnRef idx="0"/>
-    <cs:fillRef idx="0"/>
-    <cs:effectRef idx="0"/>
-    <cs:fontRef idx="minor">
-      <a:schemeClr val="tx1">
-        <a:lumMod val="75000"/>
-        <a:lumOff val="25000"/>
-      </a:schemeClr>
-    </cs:fontRef>
-    <cs:defRPr sz="1197" kern="1200"/>
-  </cs:dataLabel>
-  <cs:dataLabelCallout>
-    <cs:lnRef idx="0"/>
-    <cs:fillRef idx="0"/>
-    <cs:effectRef idx="0"/>
-    <cs:fontRef idx="minor">
-      <a:schemeClr val="dk1">
-        <a:lumMod val="65000"/>
-        <a:lumOff val="35000"/>
-      </a:schemeClr>
-    </cs:fontRef>
-    <cs:spPr>
-      <a:solidFill>
-        <a:schemeClr val="lt1"/>
-      </a:solidFill>
-      <a:ln>
-        <a:solidFill>
-          <a:schemeClr val="dk1">
-            <a:lumMod val="25000"/>
-            <a:lumOff val="75000"/>
-          </a:schemeClr>
-        </a:solidFill>
-      </a:ln>
-    </cs:spPr>
-    <cs:defRPr sz="1197" kern="1200"/>
-    <cs:bodyPr rot="0" spcFirstLastPara="1" vertOverflow="clip" horzOverflow="clip" vert="horz" wrap="square" lIns="36576" tIns="18288" rIns="36576" bIns="18288" anchor="ctr" anchorCtr="1">
-      <a:spAutoFit/>
-    </cs:bodyPr>
-  </cs:dataLabelCallout>
-  <cs:dataPoint>
-    <cs:lnRef idx="0"/>
-    <cs:fillRef idx="3">
-      <cs:styleClr val="auto"/>
-    </cs:fillRef>
-    <cs:effectRef idx="3"/>
-    <cs:fontRef idx="minor">
-      <a:schemeClr val="lt1"/>
-    </cs:fontRef>
-  </cs:dataPoint>
-  <cs:dataPoint3D>
-    <cs:lnRef idx="0"/>
-    <cs:fillRef idx="3">
-      <cs:styleClr val="auto"/>
-    </cs:fillRef>
-    <cs:effectRef idx="3"/>
-    <cs:fontRef idx="minor">
-      <a:schemeClr val="lt1"/>
-    </cs:fontRef>
-  </cs:dataPoint3D>
-  <cs:dataPointLine>
-    <cs:lnRef idx="0">
-      <cs:styleClr val="auto"/>
-    </cs:lnRef>
-    <cs:fillRef idx="3"/>
-    <cs:effectRef idx="3"/>
-    <cs:fontRef idx="minor">
-      <a:schemeClr val="lt1"/>
-    </cs:fontRef>
-    <cs:spPr>
-      <a:ln w="34925" cap="rnd">
-        <a:solidFill>
-          <a:schemeClr val="phClr"/>
-        </a:solidFill>
-        <a:round/>
-      </a:ln>
-    </cs:spPr>
-  </cs:dataPointLine>
-  <cs:dataPointMarker>
-    <cs:lnRef idx="0">
-      <cs:styleClr val="auto"/>
-    </cs:lnRef>
-    <cs:fillRef idx="3">
-      <cs:styleClr val="auto"/>
-    </cs:fillRef>
-    <cs:effectRef idx="3"/>
-    <cs:fontRef idx="minor">
-      <a:schemeClr val="lt1"/>
-    </cs:fontRef>
-    <cs:spPr>
-      <a:ln w="9525">
-        <a:solidFill>
-          <a:schemeClr val="phClr"/>
-        </a:solidFill>
-        <a:round/>
-      </a:ln>
-    </cs:spPr>
-  </cs:dataPointMarker>
-  <cs:dataPointMarkerLayout symbol="circle" size="6"/>
-  <cs:dataPointWireframe>
-    <cs:lnRef idx="0">
-      <cs:styleClr val="auto"/>
-    </cs:lnRef>
-    <cs:fillRef idx="3"/>
-    <cs:effectRef idx="3"/>
-    <cs:fontRef idx="minor">
-      <a:schemeClr val="lt1"/>
-    </cs:fontRef>
-    <cs:spPr>
-      <a:ln w="9525" cap="rnd">
-        <a:solidFill>
-          <a:schemeClr val="phClr"/>
-        </a:solidFill>
-        <a:round/>
-      </a:ln>
-    </cs:spPr>
-  </cs:dataPointWireframe>
-  <cs:dataTable>
-    <cs:lnRef idx="0"/>
-    <cs:fillRef idx="0"/>
-    <cs:effectRef idx="0"/>
-    <cs:fontRef idx="minor">
-      <a:schemeClr val="tx1">
-        <a:lumMod val="65000"/>
-        <a:lumOff val="35000"/>
-      </a:schemeClr>
-    </cs:fontRef>
-    <cs:spPr>
-      <a:noFill/>
-      <a:ln w="9525" cap="flat" cmpd="sng" algn="ctr">
-        <a:solidFill>
-          <a:schemeClr val="tx1">
-            <a:lumMod val="15000"/>
-            <a:lumOff val="85000"/>
-          </a:schemeClr>
-        </a:solidFill>
-        <a:round/>
-      </a:ln>
-    </cs:spPr>
-    <cs:defRPr sz="1197" kern="1200"/>
-  </cs:dataTable>
-  <cs:downBar>
-    <cs:lnRef idx="0"/>
-    <cs:fillRef idx="0"/>
-    <cs:effectRef idx="0"/>
-    <cs:fontRef idx="minor">
-      <a:schemeClr val="dk1"/>
-    </cs:fontRef>
-    <cs:spPr>
-      <a:solidFill>
-        <a:schemeClr val="dk1">
-          <a:lumMod val="65000"/>
-          <a:lumOff val="35000"/>
-        </a:schemeClr>
-      </a:solidFill>
-      <a:ln w="9525">
-        <a:solidFill>
-          <a:schemeClr val="tx1">
-            <a:lumMod val="65000"/>
-            <a:lumOff val="35000"/>
-          </a:schemeClr>
-        </a:solidFill>
-      </a:ln>
-    </cs:spPr>
-  </cs:downBar>
-  <cs:dropLine>
-    <cs:lnRef idx="0"/>
-    <cs:fillRef idx="0"/>
-    <cs:effectRef idx="0"/>
-    <cs:fontRef idx="minor">
-      <a:schemeClr val="tx1"/>
-    </cs:fontRef>
-    <cs:spPr>
-      <a:ln w="9525" cap="flat" cmpd="sng" algn="ctr">
-        <a:solidFill>
-          <a:schemeClr val="tx1">
-            <a:lumMod val="35000"/>
-            <a:lumOff val="65000"/>
-          </a:schemeClr>
-        </a:solidFill>
-        <a:round/>
-      </a:ln>
-    </cs:spPr>
-  </cs:dropLine>
-  <cs:errorBar>
-    <cs:lnRef idx="0"/>
-    <cs:fillRef idx="0"/>
-    <cs:effectRef idx="0"/>
-    <cs:fontRef idx="minor">
-      <a:schemeClr val="tx1"/>
-    </cs:fontRef>
-    <cs:spPr>
-      <a:ln w="9525" cap="flat" cmpd="sng" algn="ctr">
-        <a:solidFill>
-          <a:schemeClr val="tx1">
-            <a:lumMod val="65000"/>
-            <a:lumOff val="35000"/>
-          </a:schemeClr>
-        </a:solidFill>
-        <a:round/>
-      </a:ln>
-    </cs:spPr>
-  </cs:errorBar>
-  <cs:floor>
-    <cs:lnRef idx="0"/>
-    <cs:fillRef idx="0"/>
-    <cs:effectRef idx="0"/>
-    <cs:fontRef idx="minor">
-      <a:schemeClr val="lt1"/>
-    </cs:fontRef>
-  </cs:floor>
-  <cs:gridlineMajor>
-    <cs:lnRef idx="0"/>
-    <cs:fillRef idx="0"/>
-    <cs:effectRef idx="0"/>
-    <cs:fontRef idx="minor">
-      <a:schemeClr val="tx1"/>
-    </cs:fontRef>
-    <cs:spPr>
-      <a:ln w="9525" cap="flat" cmpd="sng" algn="ctr">
-        <a:solidFill>
-          <a:schemeClr val="tx1">
-            <a:lumMod val="15000"/>
-            <a:lumOff val="85000"/>
-          </a:schemeClr>
-        </a:solidFill>
-        <a:round/>
-      </a:ln>
-    </cs:spPr>
-  </cs:gridlineMajor>
-  <cs:gridlineMinor>
-    <cs:lnRef idx="0"/>
-    <cs:fillRef idx="0"/>
-    <cs:effectRef idx="0"/>
-    <cs:fontRef idx="minor">
-      <a:schemeClr val="tx1"/>
-    </cs:fontRef>
-    <cs:spPr>
-      <a:ln w="9525" cap="flat" cmpd="sng" algn="ctr">
-        <a:solidFill>
-          <a:schemeClr val="tx1">
-            <a:lumMod val="5000"/>
-            <a:lumOff val="95000"/>
-          </a:schemeClr>
-        </a:solidFill>
-        <a:round/>
-      </a:ln>
-    </cs:spPr>
-  </cs:gridlineMinor>
-  <cs:hiLoLine>
-    <cs:lnRef idx="0"/>
-    <cs:fillRef idx="0"/>
-    <cs:effectRef idx="0"/>
-    <cs:fontRef idx="minor">
-      <a:schemeClr val="tx1"/>
-    </cs:fontRef>
-    <cs:spPr>
-      <a:ln w="9525" cap="flat" cmpd="sng" algn="ctr">
-        <a:solidFill>
-          <a:schemeClr val="tx1">
-            <a:lumMod val="75000"/>
-            <a:lumOff val="25000"/>
-          </a:schemeClr>
-        </a:solidFill>
-        <a:round/>
-      </a:ln>
-    </cs:spPr>
-  </cs:hiLoLine>
-  <cs:leaderLine>
-    <cs:lnRef idx="0"/>
-    <cs:fillRef idx="0"/>
-    <cs:effectRef idx="0"/>
-    <cs:fontRef idx="minor">
-      <a:schemeClr val="tx1"/>
-    </cs:fontRef>
-    <cs:spPr>
-      <a:ln w="9525" cap="flat" cmpd="sng" algn="ctr">
-        <a:solidFill>
-          <a:schemeClr val="tx1">
-            <a:lumMod val="35000"/>
-            <a:lumOff val="65000"/>
-          </a:schemeClr>
-        </a:solidFill>
-        <a:round/>
-      </a:ln>
-    </cs:spPr>
-  </cs:leaderLine>
-  <cs:legend>
-    <cs:lnRef idx="0"/>
-    <cs:fillRef idx="0"/>
-    <cs:effectRef idx="0"/>
-    <cs:fontRef idx="minor">
-      <a:schemeClr val="tx1">
-        <a:lumMod val="65000"/>
-        <a:lumOff val="35000"/>
-      </a:schemeClr>
-    </cs:fontRef>
-    <cs:defRPr sz="1197" kern="1200"/>
-  </cs:legend>
-  <cs:plotArea>
-    <cs:lnRef idx="0"/>
-    <cs:fillRef idx="0"/>
-    <cs:effectRef idx="0"/>
-    <cs:fontRef idx="minor">
-      <a:schemeClr val="lt1"/>
-    </cs:fontRef>
-  </cs:plotArea>
-  <cs:plotArea3D>
-    <cs:lnRef idx="0"/>
-    <cs:fillRef idx="0"/>
-    <cs:effectRef idx="0"/>
-    <cs:fontRef idx="minor">
-      <a:schemeClr val="lt1"/>
-    </cs:fontRef>
-  </cs:plotArea3D>
-  <cs:seriesAxis>
-    <cs:lnRef idx="0"/>
-    <cs:fillRef idx="0"/>
-    <cs:effectRef idx="0"/>
-    <cs:fontRef idx="minor">
-      <a:schemeClr val="tx1">
-        <a:lumMod val="65000"/>
-        <a:lumOff val="35000"/>
-      </a:schemeClr>
-    </cs:fontRef>
-    <cs:spPr>
-      <a:ln w="12700" cap="flat" cmpd="sng" algn="ctr">
-        <a:solidFill>
-          <a:schemeClr val="tx1">
-            <a:lumMod val="15000"/>
-            <a:lumOff val="85000"/>
-          </a:schemeClr>
-        </a:solidFill>
-        <a:round/>
-      </a:ln>
-    </cs:spPr>
-    <cs:defRPr sz="1197" kern="1200"/>
-  </cs:seriesAxis>
-  <cs:seriesLine>
-    <cs:lnRef idx="0"/>
-    <cs:fillRef idx="0"/>
-    <cs:effectRef idx="0"/>
-    <cs:fontRef idx="minor">
-      <a:schemeClr val="tx1"/>
-    </cs:fontRef>
-    <cs:spPr>
-      <a:ln w="9525" cap="flat" cmpd="sng" algn="ctr">
-        <a:solidFill>
-          <a:schemeClr val="tx1">
-            <a:lumMod val="35000"/>
-            <a:lumOff val="65000"/>
-          </a:schemeClr>
-        </a:solidFill>
-        <a:round/>
-      </a:ln>
-    </cs:spPr>
-  </cs:seriesLine>
-  <cs:title>
-    <cs:lnRef idx="0"/>
-    <cs:fillRef idx="0"/>
-    <cs:effectRef idx="0"/>
-    <cs:fontRef idx="minor">
-      <a:schemeClr val="tx1">
-        <a:lumMod val="65000"/>
-        <a:lumOff val="35000"/>
-      </a:schemeClr>
-    </cs:fontRef>
-    <cs:defRPr sz="2128" b="1" kern="1200" baseline="0"/>
-  </cs:title>
-  <cs:trendline>
-    <cs:lnRef idx="0">
-      <cs:styleClr val="auto"/>
-    </cs:lnRef>
-    <cs:fillRef idx="0"/>
-    <cs:effectRef idx="0"/>
-    <cs:fontRef idx="minor">
-      <a:schemeClr val="lt1"/>
-    </cs:fontRef>
-    <cs:spPr>
-      <a:ln w="19050" cap="rnd">
-        <a:solidFill>
-          <a:schemeClr val="phClr"/>
-        </a:solidFill>
-      </a:ln>
-    </cs:spPr>
-  </cs:trendline>
-  <cs:trendlineLabel>
-    <cs:lnRef idx="0"/>
-    <cs:fillRef idx="0"/>
-    <cs:effectRef idx="0"/>
-    <cs:fontRef idx="minor">
-      <a:schemeClr val="tx1">
-        <a:lumMod val="65000"/>
-        <a:lumOff val="35000"/>
-      </a:schemeClr>
-    </cs:fontRef>
-    <cs:defRPr sz="1197" kern="1200"/>
-  </cs:trendlineLabel>
-  <cs:upBar>
-    <cs:lnRef idx="0"/>
-    <cs:fillRef idx="0"/>
-    <cs:effectRef idx="0"/>
-    <cs:fontRef idx="minor">
-      <a:schemeClr val="dk1"/>
-    </cs:fontRef>
-    <cs:spPr>
-      <a:solidFill>
-        <a:schemeClr val="lt1"/>
-      </a:solidFill>
-      <a:ln w="9525">
-        <a:solidFill>
-          <a:schemeClr val="tx1">
-            <a:lumMod val="15000"/>
-            <a:lumOff val="85000"/>
-          </a:schemeClr>
-        </a:solidFill>
-      </a:ln>
-    </cs:spPr>
-  </cs:upBar>
-  <cs:valueAxis>
-    <cs:lnRef idx="0"/>
-    <cs:fillRef idx="0"/>
-    <cs:effectRef idx="0"/>
-    <cs:fontRef idx="minor">
-      <a:schemeClr val="tx1">
-        <a:lumMod val="65000"/>
-        <a:lumOff val="35000"/>
-      </a:schemeClr>
-    </cs:fontRef>
-    <cs:defRPr sz="1197" kern="1200"/>
-  </cs:valueAxis>
-  <cs:wall>
-    <cs:lnRef idx="0"/>
-    <cs:fillRef idx="0"/>
-    <cs:effectRef idx="0"/>
-    <cs:fontRef idx="minor">
-      <a:schemeClr val="lt1"/>
-    </cs:fontRef>
-  </cs:wall>
-</cs:chartStyle>
 </file>
 
 <file path=ppt/diagrams/colors1.xml><?xml version="1.0" encoding="utf-8"?>
@@ -1985,14 +904,14 @@
       </dgm:t>
     </dgm:pt>
     <dgm:pt modelId="{B4F1B46E-22B2-4721-950C-8704487586DC}">
-      <dgm:prSet phldrT="[Text]"/>
+      <dgm:prSet phldrT="[Text]" custT="1"/>
       <dgm:spPr/>
       <dgm:t>
         <a:bodyPr/>
         <a:lstStyle/>
         <a:p>
           <a:r>
-            <a:rPr lang="en-US" dirty="0"/>
+            <a:rPr lang="en-US" sz="1600" dirty="0"/>
             <a:t>STRENGTHS</a:t>
           </a:r>
         </a:p>
@@ -2029,7 +948,7 @@
         <a:p>
           <a:r>
             <a:rPr lang="en-US" dirty="0"/>
-            <a:t>Task description</a:t>
+            <a:t>Task</a:t>
           </a:r>
         </a:p>
       </dgm:t>
@@ -2057,15 +976,15 @@
       </dgm:t>
     </dgm:pt>
     <dgm:pt modelId="{F9D46839-CD06-4669-AAE4-4D1E9AFEDA78}">
-      <dgm:prSet phldrT="[Text]"/>
+      <dgm:prSet phldrT="[Text]" custT="1"/>
       <dgm:spPr/>
       <dgm:t>
         <a:bodyPr/>
         <a:lstStyle/>
         <a:p>
           <a:r>
-            <a:rPr lang="en-US" dirty="0"/>
-            <a:t>Task description</a:t>
+            <a:rPr lang="en-US" sz="1200" b="1" dirty="0"/>
+            <a:t>Improve Data Quality</a:t>
           </a:r>
         </a:p>
       </dgm:t>
@@ -2093,15 +1012,15 @@
       </dgm:t>
     </dgm:pt>
     <dgm:pt modelId="{7CB6360B-4022-4E96-922B-A12DE0E2A39F}">
-      <dgm:prSet phldrT="[Text]"/>
+      <dgm:prSet phldrT="[Text]" custT="1"/>
       <dgm:spPr/>
       <dgm:t>
         <a:bodyPr/>
         <a:lstStyle/>
         <a:p>
           <a:r>
-            <a:rPr lang="en-US" dirty="0"/>
-            <a:t>Task description</a:t>
+            <a:rPr lang="en-US" sz="1200" b="1" dirty="0"/>
+            <a:t>Improve Business Intelligence</a:t>
           </a:r>
         </a:p>
       </dgm:t>
@@ -2129,15 +1048,15 @@
       </dgm:t>
     </dgm:pt>
     <dgm:pt modelId="{70879558-61CA-4CCD-B2D6-5349B01EF337}">
-      <dgm:prSet phldrT="[Text]"/>
+      <dgm:prSet phldrT="[Text]" custT="1"/>
       <dgm:spPr/>
       <dgm:t>
         <a:bodyPr/>
         <a:lstStyle/>
         <a:p>
           <a:r>
-            <a:rPr lang="en-US" dirty="0"/>
-            <a:t>Task description</a:t>
+            <a:rPr lang="en-US" sz="1200" b="1" dirty="0"/>
+            <a:t>Operational Efficiency</a:t>
           </a:r>
         </a:p>
       </dgm:t>
@@ -2164,52 +1083,16 @@
         </a:p>
       </dgm:t>
     </dgm:pt>
-    <dgm:pt modelId="{F2881FB1-6580-4F21-A283-BFAA6F91D5D2}">
-      <dgm:prSet phldrT="[Text]"/>
+    <dgm:pt modelId="{D5197DDB-D5D2-499F-B255-CF7BB5AE2B43}">
+      <dgm:prSet phldrT="[Text]" custT="1"/>
       <dgm:spPr/>
       <dgm:t>
         <a:bodyPr/>
         <a:lstStyle/>
         <a:p>
           <a:r>
-            <a:rPr lang="en-US" dirty="0"/>
-            <a:t>WEAKNESSES</a:t>
-          </a:r>
-        </a:p>
-      </dgm:t>
-    </dgm:pt>
-    <dgm:pt modelId="{2D960FDD-BADA-480D-9043-497C56588AD3}" type="parTrans" cxnId="{4A31D641-1B5D-46D3-B685-0C4DC6EFE71B}">
-      <dgm:prSet/>
-      <dgm:spPr/>
-      <dgm:t>
-        <a:bodyPr/>
-        <a:lstStyle/>
-        <a:p>
-          <a:endParaRPr lang="en-US"/>
-        </a:p>
-      </dgm:t>
-    </dgm:pt>
-    <dgm:pt modelId="{A5ABDC17-7AB5-4F0E-992A-F9343F5D74EB}" type="sibTrans" cxnId="{4A31D641-1B5D-46D3-B685-0C4DC6EFE71B}">
-      <dgm:prSet/>
-      <dgm:spPr/>
-      <dgm:t>
-        <a:bodyPr/>
-        <a:lstStyle/>
-        <a:p>
-          <a:endParaRPr lang="en-US"/>
-        </a:p>
-      </dgm:t>
-    </dgm:pt>
-    <dgm:pt modelId="{D5197DDB-D5D2-499F-B255-CF7BB5AE2B43}">
-      <dgm:prSet phldrT="[Text]"/>
-      <dgm:spPr/>
-      <dgm:t>
-        <a:bodyPr/>
-        <a:lstStyle/>
-        <a:p>
-          <a:r>
-            <a:rPr lang="en-US" dirty="0"/>
-            <a:t>Task description</a:t>
+            <a:rPr lang="en-US" sz="1600" dirty="0"/>
+            <a:t>Weakness</a:t>
           </a:r>
         </a:p>
       </dgm:t>
@@ -2236,124 +1119,16 @@
         </a:p>
       </dgm:t>
     </dgm:pt>
-    <dgm:pt modelId="{29E78340-8EBE-415C-B973-78A91A054B9C}">
-      <dgm:prSet phldrT="[Text]"/>
+    <dgm:pt modelId="{9614A323-64B1-4077-A841-022051EC749A}">
+      <dgm:prSet phldrT="[Text]" custT="1"/>
       <dgm:spPr/>
       <dgm:t>
         <a:bodyPr/>
         <a:lstStyle/>
         <a:p>
           <a:r>
-            <a:rPr lang="en-US" dirty="0"/>
-            <a:t>Task description</a:t>
-          </a:r>
-        </a:p>
-      </dgm:t>
-    </dgm:pt>
-    <dgm:pt modelId="{FF4E5F97-6974-4E39-A85D-DCB2E100798E}" type="parTrans" cxnId="{311348D8-FDE3-4C22-99F5-3B98C5F51F0D}">
-      <dgm:prSet/>
-      <dgm:spPr/>
-      <dgm:t>
-        <a:bodyPr/>
-        <a:lstStyle/>
-        <a:p>
-          <a:endParaRPr lang="en-US"/>
-        </a:p>
-      </dgm:t>
-    </dgm:pt>
-    <dgm:pt modelId="{B4B9A51E-FA34-465E-B5B4-81CD76EB3FC2}" type="sibTrans" cxnId="{311348D8-FDE3-4C22-99F5-3B98C5F51F0D}">
-      <dgm:prSet/>
-      <dgm:spPr/>
-      <dgm:t>
-        <a:bodyPr/>
-        <a:lstStyle/>
-        <a:p>
-          <a:endParaRPr lang="en-US"/>
-        </a:p>
-      </dgm:t>
-    </dgm:pt>
-    <dgm:pt modelId="{8321AB85-EA8C-4958-B404-B4C118CB3C18}">
-      <dgm:prSet phldrT="[Text]"/>
-      <dgm:spPr/>
-      <dgm:t>
-        <a:bodyPr/>
-        <a:lstStyle/>
-        <a:p>
-          <a:r>
-            <a:rPr lang="en-US" dirty="0"/>
-            <a:t>Task description</a:t>
-          </a:r>
-        </a:p>
-      </dgm:t>
-    </dgm:pt>
-    <dgm:pt modelId="{24ABE8B3-7220-436D-9636-F7B4C0B99576}" type="parTrans" cxnId="{129AEA77-5D2A-49D4-956D-99009974B6C5}">
-      <dgm:prSet/>
-      <dgm:spPr/>
-      <dgm:t>
-        <a:bodyPr/>
-        <a:lstStyle/>
-        <a:p>
-          <a:endParaRPr lang="en-US"/>
-        </a:p>
-      </dgm:t>
-    </dgm:pt>
-    <dgm:pt modelId="{AA5F76CE-8FD4-4692-8BB1-EF84CF9D365E}" type="sibTrans" cxnId="{129AEA77-5D2A-49D4-956D-99009974B6C5}">
-      <dgm:prSet/>
-      <dgm:spPr/>
-      <dgm:t>
-        <a:bodyPr/>
-        <a:lstStyle/>
-        <a:p>
-          <a:endParaRPr lang="en-US"/>
-        </a:p>
-      </dgm:t>
-    </dgm:pt>
-    <dgm:pt modelId="{6352CA33-6755-44BE-808F-400DA4CF80A7}">
-      <dgm:prSet phldrT="[Text]"/>
-      <dgm:spPr/>
-      <dgm:t>
-        <a:bodyPr/>
-        <a:lstStyle/>
-        <a:p>
-          <a:r>
-            <a:rPr lang="en-US" dirty="0"/>
-            <a:t>OPPORTUNITY</a:t>
-          </a:r>
-        </a:p>
-      </dgm:t>
-    </dgm:pt>
-    <dgm:pt modelId="{AEB59203-63BA-4A96-BADC-40BAEBD9AA40}" type="parTrans" cxnId="{82BAE5DD-3A79-4870-9019-1254385E0650}">
-      <dgm:prSet/>
-      <dgm:spPr/>
-      <dgm:t>
-        <a:bodyPr/>
-        <a:lstStyle/>
-        <a:p>
-          <a:endParaRPr lang="en-US"/>
-        </a:p>
-      </dgm:t>
-    </dgm:pt>
-    <dgm:pt modelId="{AAB4CF73-4B9B-4AA0-9074-16C2D2AE00A1}" type="sibTrans" cxnId="{82BAE5DD-3A79-4870-9019-1254385E0650}">
-      <dgm:prSet/>
-      <dgm:spPr/>
-      <dgm:t>
-        <a:bodyPr/>
-        <a:lstStyle/>
-        <a:p>
-          <a:endParaRPr lang="en-US"/>
-        </a:p>
-      </dgm:t>
-    </dgm:pt>
-    <dgm:pt modelId="{9614A323-64B1-4077-A841-022051EC749A}">
-      <dgm:prSet phldrT="[Text]"/>
-      <dgm:spPr/>
-      <dgm:t>
-        <a:bodyPr/>
-        <a:lstStyle/>
-        <a:p>
-          <a:r>
-            <a:rPr lang="en-US" dirty="0"/>
-            <a:t>Task description</a:t>
+            <a:rPr lang="en-US" sz="1600" dirty="0"/>
+            <a:t>Opportunity</a:t>
           </a:r>
         </a:p>
       </dgm:t>
@@ -2380,88 +1155,16 @@
         </a:p>
       </dgm:t>
     </dgm:pt>
-    <dgm:pt modelId="{3D5CDB25-F8FA-444B-8D4A-1D29D0CBA282}">
-      <dgm:prSet phldrT="[Text]"/>
+    <dgm:pt modelId="{DB9FB862-4759-4D6A-84F3-01524B92723B}">
+      <dgm:prSet phldrT="[Text]" custT="1"/>
       <dgm:spPr/>
       <dgm:t>
         <a:bodyPr/>
         <a:lstStyle/>
         <a:p>
           <a:r>
-            <a:rPr lang="en-US" dirty="0"/>
-            <a:t>Task description</a:t>
-          </a:r>
-        </a:p>
-      </dgm:t>
-    </dgm:pt>
-    <dgm:pt modelId="{4C229933-AC16-44B7-98EC-4C0F07FABCB0}" type="parTrans" cxnId="{2E3C97E6-67D4-4948-B47A-1115C2B2979F}">
-      <dgm:prSet/>
-      <dgm:spPr/>
-      <dgm:t>
-        <a:bodyPr/>
-        <a:lstStyle/>
-        <a:p>
-          <a:endParaRPr lang="en-US"/>
-        </a:p>
-      </dgm:t>
-    </dgm:pt>
-    <dgm:pt modelId="{189DA4C5-2A22-4C71-A806-7B4AB57767CC}" type="sibTrans" cxnId="{2E3C97E6-67D4-4948-B47A-1115C2B2979F}">
-      <dgm:prSet/>
-      <dgm:spPr/>
-      <dgm:t>
-        <a:bodyPr/>
-        <a:lstStyle/>
-        <a:p>
-          <a:endParaRPr lang="en-US"/>
-        </a:p>
-      </dgm:t>
-    </dgm:pt>
-    <dgm:pt modelId="{7FCE83D9-631B-4420-BBFC-CA0AFA59F747}">
-      <dgm:prSet phldrT="[Text]"/>
-      <dgm:spPr/>
-      <dgm:t>
-        <a:bodyPr/>
-        <a:lstStyle/>
-        <a:p>
-          <a:r>
-            <a:rPr lang="en-US" dirty="0"/>
-            <a:t>THREAT</a:t>
-          </a:r>
-        </a:p>
-      </dgm:t>
-    </dgm:pt>
-    <dgm:pt modelId="{C61EC981-13FA-4710-B079-D35692EEB764}" type="parTrans" cxnId="{E572418E-4340-4448-940D-253A2FA3B9B3}">
-      <dgm:prSet/>
-      <dgm:spPr/>
-      <dgm:t>
-        <a:bodyPr/>
-        <a:lstStyle/>
-        <a:p>
-          <a:endParaRPr lang="en-US"/>
-        </a:p>
-      </dgm:t>
-    </dgm:pt>
-    <dgm:pt modelId="{1B48A0DE-4031-4D45-86A1-94CDAF68824A}" type="sibTrans" cxnId="{E572418E-4340-4448-940D-253A2FA3B9B3}">
-      <dgm:prSet/>
-      <dgm:spPr/>
-      <dgm:t>
-        <a:bodyPr/>
-        <a:lstStyle/>
-        <a:p>
-          <a:endParaRPr lang="en-US"/>
-        </a:p>
-      </dgm:t>
-    </dgm:pt>
-    <dgm:pt modelId="{DB9FB862-4759-4D6A-84F3-01524B92723B}">
-      <dgm:prSet phldrT="[Text]"/>
-      <dgm:spPr/>
-      <dgm:t>
-        <a:bodyPr/>
-        <a:lstStyle/>
-        <a:p>
-          <a:r>
-            <a:rPr lang="en-US" dirty="0"/>
-            <a:t>Task description</a:t>
+            <a:rPr lang="en-US" sz="1600" dirty="0"/>
+            <a:t>Threats</a:t>
           </a:r>
         </a:p>
       </dgm:t>
@@ -2495,10 +1198,7 @@
         <a:bodyPr/>
         <a:lstStyle/>
         <a:p>
-          <a:r>
-            <a:rPr lang="en-US" dirty="0"/>
-            <a:t>Task description</a:t>
-          </a:r>
+          <a:endParaRPr lang="en-US" dirty="0"/>
         </a:p>
       </dgm:t>
     </dgm:pt>
@@ -2521,6 +1221,443 @@
         <a:lstStyle/>
         <a:p>
           <a:endParaRPr lang="en-US"/>
+        </a:p>
+      </dgm:t>
+    </dgm:pt>
+    <dgm:pt modelId="{621F5721-CE6C-4594-9958-72E5AA1941ED}">
+      <dgm:prSet phldrT="[Text]"/>
+      <dgm:spPr/>
+      <dgm:t>
+        <a:bodyPr/>
+        <a:lstStyle/>
+        <a:p>
+          <a:r>
+            <a:rPr lang="en-US" dirty="0"/>
+            <a:t>Task</a:t>
+          </a:r>
+        </a:p>
+      </dgm:t>
+    </dgm:pt>
+    <dgm:pt modelId="{5E60E7B0-4718-448E-8C5C-5542750BE6D5}" type="parTrans" cxnId="{97DD8B45-B346-4C7F-BD2C-3171CE4F290D}">
+      <dgm:prSet/>
+      <dgm:spPr/>
+      <dgm:t>
+        <a:bodyPr/>
+        <a:lstStyle/>
+        <a:p>
+          <a:endParaRPr lang="en-GB"/>
+        </a:p>
+      </dgm:t>
+    </dgm:pt>
+    <dgm:pt modelId="{7E67761A-1206-4E52-8003-2ADB17C18A27}" type="sibTrans" cxnId="{97DD8B45-B346-4C7F-BD2C-3171CE4F290D}">
+      <dgm:prSet/>
+      <dgm:spPr/>
+      <dgm:t>
+        <a:bodyPr/>
+        <a:lstStyle/>
+        <a:p>
+          <a:endParaRPr lang="en-GB"/>
+        </a:p>
+      </dgm:t>
+    </dgm:pt>
+    <dgm:pt modelId="{A16880C6-7D68-4948-ACCF-79892605EAC8}">
+      <dgm:prSet phldrT="[Text]" custT="1"/>
+      <dgm:spPr/>
+      <dgm:t>
+        <a:bodyPr/>
+        <a:lstStyle/>
+        <a:p>
+          <a:r>
+            <a:rPr lang="en-US" sz="1200" b="1" dirty="0"/>
+            <a:t>Project Cost vs Service income</a:t>
+          </a:r>
+        </a:p>
+      </dgm:t>
+    </dgm:pt>
+    <dgm:pt modelId="{096FB429-D28A-4E7C-96F3-20FFD79257C3}" type="parTrans" cxnId="{D376AE1E-9E8D-44EB-80FC-823F209304AA}">
+      <dgm:prSet/>
+      <dgm:spPr/>
+      <dgm:t>
+        <a:bodyPr/>
+        <a:lstStyle/>
+        <a:p>
+          <a:endParaRPr lang="en-GB"/>
+        </a:p>
+      </dgm:t>
+    </dgm:pt>
+    <dgm:pt modelId="{A442F457-741A-45DD-BFCB-F271E3335A6E}" type="sibTrans" cxnId="{D376AE1E-9E8D-44EB-80FC-823F209304AA}">
+      <dgm:prSet/>
+      <dgm:spPr/>
+      <dgm:t>
+        <a:bodyPr/>
+        <a:lstStyle/>
+        <a:p>
+          <a:endParaRPr lang="en-GB"/>
+        </a:p>
+      </dgm:t>
+    </dgm:pt>
+    <dgm:pt modelId="{06B9F379-0FBC-4679-A4CF-9FDCF6C36FCC}">
+      <dgm:prSet phldrT="[Text]" custT="1"/>
+      <dgm:spPr/>
+      <dgm:t>
+        <a:bodyPr/>
+        <a:lstStyle/>
+        <a:p>
+          <a:r>
+            <a:rPr lang="en-US" sz="1200" b="1" dirty="0"/>
+            <a:t>Disruption</a:t>
+          </a:r>
+        </a:p>
+      </dgm:t>
+    </dgm:pt>
+    <dgm:pt modelId="{5BEF6586-3584-4315-BCFF-EA43DBF47A3B}" type="parTrans" cxnId="{A425FCD1-D4F6-42A8-B44E-216F9443859C}">
+      <dgm:prSet/>
+      <dgm:spPr/>
+      <dgm:t>
+        <a:bodyPr/>
+        <a:lstStyle/>
+        <a:p>
+          <a:endParaRPr lang="en-GB"/>
+        </a:p>
+      </dgm:t>
+    </dgm:pt>
+    <dgm:pt modelId="{9A40CFD8-3684-4DD2-9F70-73A6A2F6B6F3}" type="sibTrans" cxnId="{A425FCD1-D4F6-42A8-B44E-216F9443859C}">
+      <dgm:prSet/>
+      <dgm:spPr/>
+      <dgm:t>
+        <a:bodyPr/>
+        <a:lstStyle/>
+        <a:p>
+          <a:endParaRPr lang="en-GB"/>
+        </a:p>
+      </dgm:t>
+    </dgm:pt>
+    <dgm:pt modelId="{EA10134D-095E-40CA-9F6B-98412C29FAC6}">
+      <dgm:prSet phldrT="[Text]" custT="1"/>
+      <dgm:spPr/>
+      <dgm:t>
+        <a:bodyPr/>
+        <a:lstStyle/>
+        <a:p>
+          <a:r>
+            <a:rPr lang="en-US" sz="1200" b="1" dirty="0"/>
+            <a:t>Decision Making – Agreement Reaching – Time taken</a:t>
+          </a:r>
+        </a:p>
+        <a:p>
+          <a:endParaRPr lang="en-US" sz="700" dirty="0"/>
+        </a:p>
+      </dgm:t>
+    </dgm:pt>
+    <dgm:pt modelId="{DBB72CAB-A77F-4C95-9EAA-AF4ABCECC905}" type="parTrans" cxnId="{F06E0728-8399-440D-A82D-10B00812519D}">
+      <dgm:prSet/>
+      <dgm:spPr/>
+      <dgm:t>
+        <a:bodyPr/>
+        <a:lstStyle/>
+        <a:p>
+          <a:endParaRPr lang="en-GB"/>
+        </a:p>
+      </dgm:t>
+    </dgm:pt>
+    <dgm:pt modelId="{667B5842-02CD-4A20-BC37-70503CD97536}" type="sibTrans" cxnId="{F06E0728-8399-440D-A82D-10B00812519D}">
+      <dgm:prSet/>
+      <dgm:spPr/>
+      <dgm:t>
+        <a:bodyPr/>
+        <a:lstStyle/>
+        <a:p>
+          <a:endParaRPr lang="en-GB"/>
+        </a:p>
+      </dgm:t>
+    </dgm:pt>
+    <dgm:pt modelId="{AABCA24F-54F9-4114-8891-699A496EA9AE}">
+      <dgm:prSet phldrT="[Text]"/>
+      <dgm:spPr/>
+      <dgm:t>
+        <a:bodyPr/>
+        <a:lstStyle/>
+        <a:p>
+          <a:r>
+            <a:rPr lang="en-US"/>
+            <a:t>Task</a:t>
+          </a:r>
+          <a:endParaRPr lang="en-GB"/>
+        </a:p>
+      </dgm:t>
+    </dgm:pt>
+    <dgm:pt modelId="{E2D99E65-F92D-4A92-ABA9-07239CB76896}" type="parTrans" cxnId="{69FE84A8-EFBD-4BC2-9877-9D780B1FB054}">
+      <dgm:prSet/>
+      <dgm:spPr/>
+      <dgm:t>
+        <a:bodyPr/>
+        <a:lstStyle/>
+        <a:p>
+          <a:endParaRPr lang="en-GB"/>
+        </a:p>
+      </dgm:t>
+    </dgm:pt>
+    <dgm:pt modelId="{ABEB9657-F406-4283-87EB-C85B04B9B8D9}" type="sibTrans" cxnId="{69FE84A8-EFBD-4BC2-9877-9D780B1FB054}">
+      <dgm:prSet/>
+      <dgm:spPr/>
+      <dgm:t>
+        <a:bodyPr/>
+        <a:lstStyle/>
+        <a:p>
+          <a:endParaRPr lang="en-GB"/>
+        </a:p>
+      </dgm:t>
+    </dgm:pt>
+    <dgm:pt modelId="{B3A4CFCF-8579-42FB-ABC3-AF036B385751}">
+      <dgm:prSet phldrT="[Text]" custT="1"/>
+      <dgm:spPr/>
+      <dgm:t>
+        <a:bodyPr/>
+        <a:lstStyle/>
+        <a:p>
+          <a:r>
+            <a:rPr lang="en-US" sz="1200" b="1" dirty="0"/>
+            <a:t>Improve Analytics – Business opportunities</a:t>
+          </a:r>
+        </a:p>
+      </dgm:t>
+    </dgm:pt>
+    <dgm:pt modelId="{F51E3C80-D469-4003-A619-E22F0894E520}" type="parTrans" cxnId="{C1488C89-F7A3-43DB-B5FF-4E8E0D0AB105}">
+      <dgm:prSet/>
+      <dgm:spPr/>
+      <dgm:t>
+        <a:bodyPr/>
+        <a:lstStyle/>
+        <a:p>
+          <a:endParaRPr lang="en-GB"/>
+        </a:p>
+      </dgm:t>
+    </dgm:pt>
+    <dgm:pt modelId="{2F0B5642-0483-4206-86EF-FB06458376CD}" type="sibTrans" cxnId="{C1488C89-F7A3-43DB-B5FF-4E8E0D0AB105}">
+      <dgm:prSet/>
+      <dgm:spPr/>
+      <dgm:t>
+        <a:bodyPr/>
+        <a:lstStyle/>
+        <a:p>
+          <a:endParaRPr lang="en-GB"/>
+        </a:p>
+      </dgm:t>
+    </dgm:pt>
+    <dgm:pt modelId="{AAD5F8AC-6C23-4597-956D-D275786D34EB}">
+      <dgm:prSet phldrT="[Text]" custT="1"/>
+      <dgm:spPr/>
+      <dgm:t>
+        <a:bodyPr/>
+        <a:lstStyle/>
+        <a:p>
+          <a:r>
+            <a:rPr lang="en-US" sz="1200" b="1" dirty="0"/>
+            <a:t>Process Standardization = Reuse</a:t>
+          </a:r>
+        </a:p>
+      </dgm:t>
+    </dgm:pt>
+    <dgm:pt modelId="{EDE0D4E3-2C6E-4504-AC7C-D3B5E6286375}" type="parTrans" cxnId="{21D055A5-CBB1-41D6-848C-5D37574C83D2}">
+      <dgm:prSet/>
+      <dgm:spPr/>
+      <dgm:t>
+        <a:bodyPr/>
+        <a:lstStyle/>
+        <a:p>
+          <a:endParaRPr lang="en-GB"/>
+        </a:p>
+      </dgm:t>
+    </dgm:pt>
+    <dgm:pt modelId="{E5783EA2-05F5-4196-BF4B-9A3E660BBFF0}" type="sibTrans" cxnId="{21D055A5-CBB1-41D6-848C-5D37574C83D2}">
+      <dgm:prSet/>
+      <dgm:spPr/>
+      <dgm:t>
+        <a:bodyPr/>
+        <a:lstStyle/>
+        <a:p>
+          <a:endParaRPr lang="en-GB"/>
+        </a:p>
+      </dgm:t>
+    </dgm:pt>
+    <dgm:pt modelId="{F93D1B19-3291-4E17-AA88-B7FB150C064F}">
+      <dgm:prSet phldrT="[Text]" custT="1"/>
+      <dgm:spPr/>
+      <dgm:t>
+        <a:bodyPr/>
+        <a:lstStyle/>
+        <a:p>
+          <a:r>
+            <a:rPr lang="en-US" sz="1200" b="1" dirty="0"/>
+            <a:t>Long Term Data Gov Improvement</a:t>
+          </a:r>
+          <a:endParaRPr lang="en-US" sz="1000" dirty="0"/>
+        </a:p>
+      </dgm:t>
+    </dgm:pt>
+    <dgm:pt modelId="{142113C2-12E6-409C-94B1-0DB6E0E240EF}" type="parTrans" cxnId="{C14BF5C0-7FC5-4BA5-9F82-C3AA0D960A9D}">
+      <dgm:prSet/>
+      <dgm:spPr/>
+      <dgm:t>
+        <a:bodyPr/>
+        <a:lstStyle/>
+        <a:p>
+          <a:endParaRPr lang="en-GB"/>
+        </a:p>
+      </dgm:t>
+    </dgm:pt>
+    <dgm:pt modelId="{A1DCBED2-6FC9-4E7C-9DD2-2AA01C61C326}" type="sibTrans" cxnId="{C14BF5C0-7FC5-4BA5-9F82-C3AA0D960A9D}">
+      <dgm:prSet/>
+      <dgm:spPr/>
+      <dgm:t>
+        <a:bodyPr/>
+        <a:lstStyle/>
+        <a:p>
+          <a:endParaRPr lang="en-GB"/>
+        </a:p>
+      </dgm:t>
+    </dgm:pt>
+    <dgm:pt modelId="{B389FE5B-53D8-4427-A8AD-72ECC471323E}">
+      <dgm:prSet phldrT="[Text]" custT="1"/>
+      <dgm:spPr/>
+      <dgm:t>
+        <a:bodyPr/>
+        <a:lstStyle/>
+        <a:p>
+          <a:r>
+            <a:rPr lang="en-US" sz="1200" b="1" dirty="0"/>
+            <a:t>Security Risks</a:t>
+          </a:r>
+        </a:p>
+      </dgm:t>
+    </dgm:pt>
+    <dgm:pt modelId="{32412EB8-57ED-4F25-B1F4-1C1685F6945A}" type="parTrans" cxnId="{2FB7D298-E00D-4CD5-BF0B-252D6C9AA9DC}">
+      <dgm:prSet/>
+      <dgm:spPr/>
+      <dgm:t>
+        <a:bodyPr/>
+        <a:lstStyle/>
+        <a:p>
+          <a:endParaRPr lang="en-GB"/>
+        </a:p>
+      </dgm:t>
+    </dgm:pt>
+    <dgm:pt modelId="{F963F9C1-ADAC-451D-8D00-37136AE00AC4}" type="sibTrans" cxnId="{2FB7D298-E00D-4CD5-BF0B-252D6C9AA9DC}">
+      <dgm:prSet/>
+      <dgm:spPr/>
+      <dgm:t>
+        <a:bodyPr/>
+        <a:lstStyle/>
+        <a:p>
+          <a:endParaRPr lang="en-GB"/>
+        </a:p>
+      </dgm:t>
+    </dgm:pt>
+    <dgm:pt modelId="{85B93EC2-982B-4C02-A8CE-419F69B41ACA}">
+      <dgm:prSet phldrT="[Text]" custT="1"/>
+      <dgm:spPr/>
+      <dgm:t>
+        <a:bodyPr/>
+        <a:lstStyle/>
+        <a:p>
+          <a:r>
+            <a:rPr lang="en-US" sz="1200" b="1" dirty="0"/>
+            <a:t>Scope Creep</a:t>
+          </a:r>
+        </a:p>
+      </dgm:t>
+    </dgm:pt>
+    <dgm:pt modelId="{DD72EA39-73C3-46AD-8FEF-2328569DC67B}" type="parTrans" cxnId="{EE042382-9568-4309-978F-B3F649F0ACC8}">
+      <dgm:prSet/>
+      <dgm:spPr/>
+      <dgm:t>
+        <a:bodyPr/>
+        <a:lstStyle/>
+        <a:p>
+          <a:endParaRPr lang="en-GB"/>
+        </a:p>
+      </dgm:t>
+    </dgm:pt>
+    <dgm:pt modelId="{C88B4100-B295-4351-9E6B-670D6C3CB443}" type="sibTrans" cxnId="{EE042382-9568-4309-978F-B3F649F0ACC8}">
+      <dgm:prSet/>
+      <dgm:spPr/>
+      <dgm:t>
+        <a:bodyPr/>
+        <a:lstStyle/>
+        <a:p>
+          <a:endParaRPr lang="en-GB"/>
+        </a:p>
+      </dgm:t>
+    </dgm:pt>
+    <dgm:pt modelId="{28C89411-2B01-41E9-8274-DDD7006030DA}">
+      <dgm:prSet phldrT="[Text]"/>
+      <dgm:spPr/>
+      <dgm:t>
+        <a:bodyPr/>
+        <a:lstStyle/>
+        <a:p>
+          <a:r>
+            <a:rPr lang="en-US" b="1" dirty="0"/>
+            <a:t>Stakeholder Resistance</a:t>
+          </a:r>
+        </a:p>
+      </dgm:t>
+    </dgm:pt>
+    <dgm:pt modelId="{77FD02A2-21FF-426B-B768-B5B3320E2F0E}" type="parTrans" cxnId="{B9A2C363-504B-4A7B-A1A0-9C94F8AFE4BD}">
+      <dgm:prSet/>
+      <dgm:spPr/>
+      <dgm:t>
+        <a:bodyPr/>
+        <a:lstStyle/>
+        <a:p>
+          <a:endParaRPr lang="en-GB"/>
+        </a:p>
+      </dgm:t>
+    </dgm:pt>
+    <dgm:pt modelId="{EA812954-E907-4BE3-AE9A-78B934CCF81B}" type="sibTrans" cxnId="{B9A2C363-504B-4A7B-A1A0-9C94F8AFE4BD}">
+      <dgm:prSet/>
+      <dgm:spPr/>
+      <dgm:t>
+        <a:bodyPr/>
+        <a:lstStyle/>
+        <a:p>
+          <a:endParaRPr lang="en-GB"/>
+        </a:p>
+      </dgm:t>
+    </dgm:pt>
+    <dgm:pt modelId="{6EE420E1-922D-4C85-85FB-16324D0852A4}">
+      <dgm:prSet phldrT="[Text]"/>
+      <dgm:spPr/>
+      <dgm:t>
+        <a:bodyPr/>
+        <a:lstStyle/>
+        <a:p>
+          <a:r>
+            <a:rPr lang="en-US" b="1" dirty="0"/>
+            <a:t>Upkeep Cost</a:t>
+          </a:r>
+        </a:p>
+      </dgm:t>
+    </dgm:pt>
+    <dgm:pt modelId="{4A90E5E3-B244-4262-9ADE-EBBB3284F15F}" type="parTrans" cxnId="{8DA4F2D0-7756-4458-ACCF-4C0709F3E287}">
+      <dgm:prSet/>
+      <dgm:spPr/>
+      <dgm:t>
+        <a:bodyPr/>
+        <a:lstStyle/>
+        <a:p>
+          <a:endParaRPr lang="en-GB"/>
+        </a:p>
+      </dgm:t>
+    </dgm:pt>
+    <dgm:pt modelId="{585BA18E-439E-41F6-869D-D4FA45232B6D}" type="sibTrans" cxnId="{8DA4F2D0-7756-4458-ACCF-4C0709F3E287}">
+      <dgm:prSet/>
+      <dgm:spPr/>
+      <dgm:t>
+        <a:bodyPr/>
+        <a:lstStyle/>
+        <a:p>
+          <a:endParaRPr lang="en-GB"/>
         </a:p>
       </dgm:t>
     </dgm:pt>
@@ -2550,11 +1687,11 @@
       <dgm:spPr/>
     </dgm:pt>
     <dgm:pt modelId="{6B08AC4B-4CEC-41E5-AE19-47A4E2720563}" type="pres">
-      <dgm:prSet presAssocID="{B4F1B46E-22B2-4721-950C-8704487586DC}" presName="firstChild" presStyleLbl="bgAccFollowNode1" presStyleIdx="0" presStyleCnt="11"/>
+      <dgm:prSet presAssocID="{B4F1B46E-22B2-4721-950C-8704487586DC}" presName="firstChild" presStyleLbl="bgAccFollowNode1" presStyleIdx="0" presStyleCnt="17"/>
       <dgm:spPr/>
     </dgm:pt>
     <dgm:pt modelId="{187D4E8C-5C91-4D00-870C-2C45D4EA263C}" type="pres">
-      <dgm:prSet presAssocID="{B4F1B46E-22B2-4721-950C-8704487586DC}" presName="firstChildTx" presStyleLbl="bgAccFollowNode1" presStyleIdx="0" presStyleCnt="11">
+      <dgm:prSet presAssocID="{B4F1B46E-22B2-4721-950C-8704487586DC}" presName="firstChildTx" presStyleLbl="bgAccFollowNode1" presStyleIdx="0" presStyleCnt="17">
         <dgm:presLayoutVars>
           <dgm:bulletEnabled val="1"/>
         </dgm:presLayoutVars>
@@ -2566,11 +1703,11 @@
       <dgm:spPr/>
     </dgm:pt>
     <dgm:pt modelId="{59179C9B-8BA4-4AC7-ACB1-A12DE00142E2}" type="pres">
-      <dgm:prSet presAssocID="{F9D46839-CD06-4669-AAE4-4D1E9AFEDA78}" presName="child" presStyleLbl="bgAccFollowNode1" presStyleIdx="1" presStyleCnt="11"/>
+      <dgm:prSet presAssocID="{F9D46839-CD06-4669-AAE4-4D1E9AFEDA78}" presName="child" presStyleLbl="bgAccFollowNode1" presStyleIdx="1" presStyleCnt="17" custScaleX="95653" custScaleY="107394"/>
       <dgm:spPr/>
     </dgm:pt>
     <dgm:pt modelId="{4AE7D907-B6F4-4647-AB3F-ABE94C438AE8}" type="pres">
-      <dgm:prSet presAssocID="{F9D46839-CD06-4669-AAE4-4D1E9AFEDA78}" presName="childTx" presStyleLbl="bgAccFollowNode1" presStyleIdx="1" presStyleCnt="11">
+      <dgm:prSet presAssocID="{F9D46839-CD06-4669-AAE4-4D1E9AFEDA78}" presName="childTx" presStyleLbl="bgAccFollowNode1" presStyleIdx="1" presStyleCnt="17">
         <dgm:presLayoutVars>
           <dgm:bulletEnabled val="1"/>
         </dgm:presLayoutVars>
@@ -2582,11 +1719,11 @@
       <dgm:spPr/>
     </dgm:pt>
     <dgm:pt modelId="{1877502C-A892-4DC0-ADA6-FA065097BB90}" type="pres">
-      <dgm:prSet presAssocID="{7CB6360B-4022-4E96-922B-A12DE0E2A39F}" presName="child" presStyleLbl="bgAccFollowNode1" presStyleIdx="2" presStyleCnt="11"/>
+      <dgm:prSet presAssocID="{7CB6360B-4022-4E96-922B-A12DE0E2A39F}" presName="child" presStyleLbl="bgAccFollowNode1" presStyleIdx="2" presStyleCnt="17"/>
       <dgm:spPr/>
     </dgm:pt>
     <dgm:pt modelId="{D685DD23-B321-4B5E-842F-394CB33239FA}" type="pres">
-      <dgm:prSet presAssocID="{7CB6360B-4022-4E96-922B-A12DE0E2A39F}" presName="childTx" presStyleLbl="bgAccFollowNode1" presStyleIdx="2" presStyleCnt="11">
+      <dgm:prSet presAssocID="{7CB6360B-4022-4E96-922B-A12DE0E2A39F}" presName="childTx" presStyleLbl="bgAccFollowNode1" presStyleIdx="2" presStyleCnt="17">
         <dgm:presLayoutVars>
           <dgm:bulletEnabled val="1"/>
         </dgm:presLayoutVars>
@@ -2598,11 +1735,11 @@
       <dgm:spPr/>
     </dgm:pt>
     <dgm:pt modelId="{51F68A05-A560-4C6F-BC90-521AEF3B0907}" type="pres">
-      <dgm:prSet presAssocID="{70879558-61CA-4CCD-B2D6-5349B01EF337}" presName="child" presStyleLbl="bgAccFollowNode1" presStyleIdx="3" presStyleCnt="11"/>
+      <dgm:prSet presAssocID="{70879558-61CA-4CCD-B2D6-5349B01EF337}" presName="child" presStyleLbl="bgAccFollowNode1" presStyleIdx="3" presStyleCnt="17"/>
       <dgm:spPr/>
     </dgm:pt>
     <dgm:pt modelId="{3EBE42F0-6491-49CC-95DC-985BA00CD458}" type="pres">
-      <dgm:prSet presAssocID="{70879558-61CA-4CCD-B2D6-5349B01EF337}" presName="childTx" presStyleLbl="bgAccFollowNode1" presStyleIdx="3" presStyleCnt="11">
+      <dgm:prSet presAssocID="{70879558-61CA-4CCD-B2D6-5349B01EF337}" presName="childTx" presStyleLbl="bgAccFollowNode1" presStyleIdx="3" presStyleCnt="17">
         <dgm:presLayoutVars>
           <dgm:bulletEnabled val="1"/>
         </dgm:presLayoutVars>
@@ -2614,237 +1751,351 @@
       <dgm:spPr/>
     </dgm:pt>
     <dgm:pt modelId="{FC7ED273-8CFD-43C2-9C05-44FADF3E0637}" type="pres">
-      <dgm:prSet presAssocID="{B4F1B46E-22B2-4721-950C-8704487586DC}" presName="circle" presStyleLbl="node1" presStyleIdx="0" presStyleCnt="4"/>
+      <dgm:prSet presAssocID="{B4F1B46E-22B2-4721-950C-8704487586DC}" presName="circle" presStyleLbl="node1" presStyleIdx="0" presStyleCnt="4" custScaleX="231175" custScaleY="144034"/>
       <dgm:spPr/>
     </dgm:pt>
     <dgm:pt modelId="{13C564B0-C27E-4ABA-AFDA-59E145B256BA}" type="pres">
       <dgm:prSet presAssocID="{A7E2530A-34E2-4E9F-BC78-8920BA140C41}" presName="transSpace" presStyleCnt="0"/>
       <dgm:spPr/>
     </dgm:pt>
-    <dgm:pt modelId="{6300E233-87DF-4270-9808-160BFEB8A5BE}" type="pres">
-      <dgm:prSet presAssocID="{F2881FB1-6580-4F21-A283-BFAA6F91D5D2}" presName="posSpace" presStyleCnt="0"/>
+    <dgm:pt modelId="{2251E69D-71D4-4225-8278-CEF2E0FCFE3F}" type="pres">
+      <dgm:prSet presAssocID="{D5197DDB-D5D2-499F-B255-CF7BB5AE2B43}" presName="posSpace" presStyleCnt="0"/>
       <dgm:spPr/>
     </dgm:pt>
-    <dgm:pt modelId="{6E53DEF7-499E-42EE-802D-59B2F8915392}" type="pres">
-      <dgm:prSet presAssocID="{F2881FB1-6580-4F21-A283-BFAA6F91D5D2}" presName="vertFlow" presStyleCnt="0"/>
+    <dgm:pt modelId="{C3ED22B8-D2AB-460C-B17E-A5DD560B88AA}" type="pres">
+      <dgm:prSet presAssocID="{D5197DDB-D5D2-499F-B255-CF7BB5AE2B43}" presName="vertFlow" presStyleCnt="0"/>
       <dgm:spPr/>
     </dgm:pt>
-    <dgm:pt modelId="{E08C30D1-35EA-4D05-9731-5D01E3FCBD09}" type="pres">
-      <dgm:prSet presAssocID="{F2881FB1-6580-4F21-A283-BFAA6F91D5D2}" presName="topSpace" presStyleCnt="0"/>
+    <dgm:pt modelId="{0A3E5C38-EED4-43B9-9D98-FAE62E8909C0}" type="pres">
+      <dgm:prSet presAssocID="{D5197DDB-D5D2-499F-B255-CF7BB5AE2B43}" presName="topSpace" presStyleCnt="0"/>
       <dgm:spPr/>
     </dgm:pt>
-    <dgm:pt modelId="{2F3BD88A-9166-4A26-B941-B9BAEE1A11D5}" type="pres">
-      <dgm:prSet presAssocID="{F2881FB1-6580-4F21-A283-BFAA6F91D5D2}" presName="firstComp" presStyleCnt="0"/>
+    <dgm:pt modelId="{7A3C60BA-4D75-40E0-AA7F-6B2C8B99EA6D}" type="pres">
+      <dgm:prSet presAssocID="{D5197DDB-D5D2-499F-B255-CF7BB5AE2B43}" presName="firstComp" presStyleCnt="0"/>
       <dgm:spPr/>
     </dgm:pt>
-    <dgm:pt modelId="{F660F4B9-35DB-4256-A868-A35C6DCCF6B2}" type="pres">
-      <dgm:prSet presAssocID="{F2881FB1-6580-4F21-A283-BFAA6F91D5D2}" presName="firstChild" presStyleLbl="bgAccFollowNode1" presStyleIdx="4" presStyleCnt="11"/>
+    <dgm:pt modelId="{794955AD-1927-49A0-84E8-2CCDC252516A}" type="pres">
+      <dgm:prSet presAssocID="{D5197DDB-D5D2-499F-B255-CF7BB5AE2B43}" presName="firstChild" presStyleLbl="bgAccFollowNode1" presStyleIdx="4" presStyleCnt="17"/>
       <dgm:spPr/>
     </dgm:pt>
-    <dgm:pt modelId="{10C9E3CF-3A8F-4100-8ACD-91E2373197A2}" type="pres">
-      <dgm:prSet presAssocID="{F2881FB1-6580-4F21-A283-BFAA6F91D5D2}" presName="firstChildTx" presStyleLbl="bgAccFollowNode1" presStyleIdx="4" presStyleCnt="11">
+    <dgm:pt modelId="{1BA260C2-9C91-41B1-941E-B6DC8B0E9EB7}" type="pres">
+      <dgm:prSet presAssocID="{D5197DDB-D5D2-499F-B255-CF7BB5AE2B43}" presName="firstChildTx" presStyleLbl="bgAccFollowNode1" presStyleIdx="4" presStyleCnt="17">
         <dgm:presLayoutVars>
           <dgm:bulletEnabled val="1"/>
         </dgm:presLayoutVars>
       </dgm:prSet>
       <dgm:spPr/>
     </dgm:pt>
-    <dgm:pt modelId="{60887C36-4733-46AC-A452-5444F6BC3B23}" type="pres">
-      <dgm:prSet presAssocID="{29E78340-8EBE-415C-B973-78A91A054B9C}" presName="comp" presStyleCnt="0"/>
+    <dgm:pt modelId="{EE539B57-4A7F-402B-93DA-9F88ACEF69CF}" type="pres">
+      <dgm:prSet presAssocID="{A16880C6-7D68-4948-ACCF-79892605EAC8}" presName="comp" presStyleCnt="0"/>
       <dgm:spPr/>
     </dgm:pt>
-    <dgm:pt modelId="{614EBA0E-D12B-447E-B378-B0FA2DEBEA2F}" type="pres">
-      <dgm:prSet presAssocID="{29E78340-8EBE-415C-B973-78A91A054B9C}" presName="child" presStyleLbl="bgAccFollowNode1" presStyleIdx="5" presStyleCnt="11"/>
+    <dgm:pt modelId="{FBDD7FE6-0F8B-44A0-AE0C-3B2AD3CC07AD}" type="pres">
+      <dgm:prSet presAssocID="{A16880C6-7D68-4948-ACCF-79892605EAC8}" presName="child" presStyleLbl="bgAccFollowNode1" presStyleIdx="5" presStyleCnt="17"/>
       <dgm:spPr/>
     </dgm:pt>
-    <dgm:pt modelId="{B12AEB83-0A64-4B36-BF01-B2F834861BAA}" type="pres">
-      <dgm:prSet presAssocID="{29E78340-8EBE-415C-B973-78A91A054B9C}" presName="childTx" presStyleLbl="bgAccFollowNode1" presStyleIdx="5" presStyleCnt="11">
+    <dgm:pt modelId="{BBEE5F82-DC71-48B2-B53D-C1C1A76F0315}" type="pres">
+      <dgm:prSet presAssocID="{A16880C6-7D68-4948-ACCF-79892605EAC8}" presName="childTx" presStyleLbl="bgAccFollowNode1" presStyleIdx="5" presStyleCnt="17">
         <dgm:presLayoutVars>
           <dgm:bulletEnabled val="1"/>
         </dgm:presLayoutVars>
       </dgm:prSet>
       <dgm:spPr/>
     </dgm:pt>
-    <dgm:pt modelId="{3055F178-D8CA-413A-99F2-20C8231C0651}" type="pres">
-      <dgm:prSet presAssocID="{8321AB85-EA8C-4958-B404-B4C118CB3C18}" presName="comp" presStyleCnt="0"/>
+    <dgm:pt modelId="{A67A99EA-82CE-41F6-BBC5-E109318D2967}" type="pres">
+      <dgm:prSet presAssocID="{06B9F379-0FBC-4679-A4CF-9FDCF6C36FCC}" presName="comp" presStyleCnt="0"/>
       <dgm:spPr/>
     </dgm:pt>
-    <dgm:pt modelId="{68509703-D239-4E1B-8CF0-EF08079E1226}" type="pres">
-      <dgm:prSet presAssocID="{8321AB85-EA8C-4958-B404-B4C118CB3C18}" presName="child" presStyleLbl="bgAccFollowNode1" presStyleIdx="6" presStyleCnt="11"/>
+    <dgm:pt modelId="{D11A74E1-5FCB-4366-9790-51977417C95D}" type="pres">
+      <dgm:prSet presAssocID="{06B9F379-0FBC-4679-A4CF-9FDCF6C36FCC}" presName="child" presStyleLbl="bgAccFollowNode1" presStyleIdx="6" presStyleCnt="17"/>
       <dgm:spPr/>
     </dgm:pt>
-    <dgm:pt modelId="{E1767793-EDD5-4203-A612-8120A71CA906}" type="pres">
-      <dgm:prSet presAssocID="{8321AB85-EA8C-4958-B404-B4C118CB3C18}" presName="childTx" presStyleLbl="bgAccFollowNode1" presStyleIdx="6" presStyleCnt="11">
+    <dgm:pt modelId="{2C4960A3-2C5B-4B02-914C-877EA08BB3E0}" type="pres">
+      <dgm:prSet presAssocID="{06B9F379-0FBC-4679-A4CF-9FDCF6C36FCC}" presName="childTx" presStyleLbl="bgAccFollowNode1" presStyleIdx="6" presStyleCnt="17">
         <dgm:presLayoutVars>
           <dgm:bulletEnabled val="1"/>
         </dgm:presLayoutVars>
       </dgm:prSet>
       <dgm:spPr/>
     </dgm:pt>
-    <dgm:pt modelId="{69136330-53DB-4978-A56B-160862279381}" type="pres">
-      <dgm:prSet presAssocID="{F2881FB1-6580-4F21-A283-BFAA6F91D5D2}" presName="negSpace" presStyleCnt="0"/>
+    <dgm:pt modelId="{23C6C96A-B12A-47BE-9985-EC629F84561D}" type="pres">
+      <dgm:prSet presAssocID="{EA10134D-095E-40CA-9F6B-98412C29FAC6}" presName="comp" presStyleCnt="0"/>
       <dgm:spPr/>
     </dgm:pt>
-    <dgm:pt modelId="{FD776C1E-557E-4553-9447-49B69EEC7907}" type="pres">
-      <dgm:prSet presAssocID="{F2881FB1-6580-4F21-A283-BFAA6F91D5D2}" presName="circle" presStyleLbl="node1" presStyleIdx="1" presStyleCnt="4"/>
+    <dgm:pt modelId="{625F3147-9BFE-46B2-818C-46F1484E6B6A}" type="pres">
+      <dgm:prSet presAssocID="{EA10134D-095E-40CA-9F6B-98412C29FAC6}" presName="child" presStyleLbl="bgAccFollowNode1" presStyleIdx="7" presStyleCnt="17"/>
       <dgm:spPr/>
     </dgm:pt>
-    <dgm:pt modelId="{FC2522F1-14BB-4B37-B60E-2E8A7E8A6C30}" type="pres">
-      <dgm:prSet presAssocID="{A5ABDC17-7AB5-4F0E-992A-F9343F5D74EB}" presName="transSpace" presStyleCnt="0"/>
-      <dgm:spPr/>
-    </dgm:pt>
-    <dgm:pt modelId="{2C2F6211-85A7-47FE-9239-DE94DF41A263}" type="pres">
-      <dgm:prSet presAssocID="{6352CA33-6755-44BE-808F-400DA4CF80A7}" presName="posSpace" presStyleCnt="0"/>
-      <dgm:spPr/>
-    </dgm:pt>
-    <dgm:pt modelId="{7B0C2EAE-70CB-4160-863D-210C3C66D5FD}" type="pres">
-      <dgm:prSet presAssocID="{6352CA33-6755-44BE-808F-400DA4CF80A7}" presName="vertFlow" presStyleCnt="0"/>
-      <dgm:spPr/>
-    </dgm:pt>
-    <dgm:pt modelId="{5AF3752E-55A6-443C-AD35-C49DF50A4566}" type="pres">
-      <dgm:prSet presAssocID="{6352CA33-6755-44BE-808F-400DA4CF80A7}" presName="topSpace" presStyleCnt="0"/>
-      <dgm:spPr/>
-    </dgm:pt>
-    <dgm:pt modelId="{53567A66-F0E9-4EF8-ADA9-764BA36AA6A9}" type="pres">
-      <dgm:prSet presAssocID="{6352CA33-6755-44BE-808F-400DA4CF80A7}" presName="firstComp" presStyleCnt="0"/>
-      <dgm:spPr/>
-    </dgm:pt>
-    <dgm:pt modelId="{AD2806AC-6A03-4F05-9F4D-F72EA0E56FBF}" type="pres">
-      <dgm:prSet presAssocID="{6352CA33-6755-44BE-808F-400DA4CF80A7}" presName="firstChild" presStyleLbl="bgAccFollowNode1" presStyleIdx="7" presStyleCnt="11"/>
-      <dgm:spPr/>
-    </dgm:pt>
-    <dgm:pt modelId="{F8977219-728E-448F-AE8B-46B14F4F17DE}" type="pres">
-      <dgm:prSet presAssocID="{6352CA33-6755-44BE-808F-400DA4CF80A7}" presName="firstChildTx" presStyleLbl="bgAccFollowNode1" presStyleIdx="7" presStyleCnt="11">
+    <dgm:pt modelId="{5C5CDE35-6454-4D87-ACD7-39D3292D600F}" type="pres">
+      <dgm:prSet presAssocID="{EA10134D-095E-40CA-9F6B-98412C29FAC6}" presName="childTx" presStyleLbl="bgAccFollowNode1" presStyleIdx="7" presStyleCnt="17">
         <dgm:presLayoutVars>
           <dgm:bulletEnabled val="1"/>
         </dgm:presLayoutVars>
       </dgm:prSet>
       <dgm:spPr/>
     </dgm:pt>
-    <dgm:pt modelId="{46A8623B-DC64-4ED6-B73D-98FEAB030508}" type="pres">
-      <dgm:prSet presAssocID="{3D5CDB25-F8FA-444B-8D4A-1D29D0CBA282}" presName="comp" presStyleCnt="0"/>
+    <dgm:pt modelId="{7303E416-2A8A-4BE3-9559-CBA57FD775B5}" type="pres">
+      <dgm:prSet presAssocID="{D5197DDB-D5D2-499F-B255-CF7BB5AE2B43}" presName="negSpace" presStyleCnt="0"/>
       <dgm:spPr/>
     </dgm:pt>
-    <dgm:pt modelId="{5314AADB-0AD3-4BAE-9F15-B0FE4F44C802}" type="pres">
-      <dgm:prSet presAssocID="{3D5CDB25-F8FA-444B-8D4A-1D29D0CBA282}" presName="child" presStyleLbl="bgAccFollowNode1" presStyleIdx="8" presStyleCnt="11"/>
+    <dgm:pt modelId="{CBDBED7C-E4C8-4363-B2F1-5441894E4EFB}" type="pres">
+      <dgm:prSet presAssocID="{D5197DDB-D5D2-499F-B255-CF7BB5AE2B43}" presName="circle" presStyleLbl="node1" presStyleIdx="1" presStyleCnt="4" custScaleX="194930" custScaleY="152082" custLinFactNeighborX="-46217" custLinFactNeighborY="1454"/>
       <dgm:spPr/>
     </dgm:pt>
-    <dgm:pt modelId="{96624143-7928-48E9-817F-BC4A07250C32}" type="pres">
-      <dgm:prSet presAssocID="{3D5CDB25-F8FA-444B-8D4A-1D29D0CBA282}" presName="childTx" presStyleLbl="bgAccFollowNode1" presStyleIdx="8" presStyleCnt="11">
+    <dgm:pt modelId="{82C7FDD8-AFBD-4AEE-A0A7-9E00FBD25426}" type="pres">
+      <dgm:prSet presAssocID="{29F2454A-2FA8-4B3A-AC63-4A0B9FD04A75}" presName="transSpace" presStyleCnt="0"/>
+      <dgm:spPr/>
+    </dgm:pt>
+    <dgm:pt modelId="{CBAC1F13-E1E7-4497-8DA8-B54B4ABE1CF6}" type="pres">
+      <dgm:prSet presAssocID="{9614A323-64B1-4077-A841-022051EC749A}" presName="posSpace" presStyleCnt="0"/>
+      <dgm:spPr/>
+    </dgm:pt>
+    <dgm:pt modelId="{C25AE5EE-41B0-40EF-BDBF-3A09DB4EF3A1}" type="pres">
+      <dgm:prSet presAssocID="{9614A323-64B1-4077-A841-022051EC749A}" presName="vertFlow" presStyleCnt="0"/>
+      <dgm:spPr/>
+    </dgm:pt>
+    <dgm:pt modelId="{EE83A135-8337-45BE-9974-2097BCE9F8A7}" type="pres">
+      <dgm:prSet presAssocID="{9614A323-64B1-4077-A841-022051EC749A}" presName="topSpace" presStyleCnt="0"/>
+      <dgm:spPr/>
+    </dgm:pt>
+    <dgm:pt modelId="{22B85C18-846F-4BFA-B063-24412BDF736F}" type="pres">
+      <dgm:prSet presAssocID="{9614A323-64B1-4077-A841-022051EC749A}" presName="firstComp" presStyleCnt="0"/>
+      <dgm:spPr/>
+    </dgm:pt>
+    <dgm:pt modelId="{72AC9EAC-BCD0-4A2D-8612-F09D47148D71}" type="pres">
+      <dgm:prSet presAssocID="{9614A323-64B1-4077-A841-022051EC749A}" presName="firstChild" presStyleLbl="bgAccFollowNode1" presStyleIdx="8" presStyleCnt="17" custLinFactNeighborX="-22942" custLinFactNeighborY="3969"/>
+      <dgm:spPr/>
+    </dgm:pt>
+    <dgm:pt modelId="{D8DA147B-8C30-42CE-85D6-6B9053C6E13F}" type="pres">
+      <dgm:prSet presAssocID="{9614A323-64B1-4077-A841-022051EC749A}" presName="firstChildTx" presStyleLbl="bgAccFollowNode1" presStyleIdx="8" presStyleCnt="17">
         <dgm:presLayoutVars>
           <dgm:bulletEnabled val="1"/>
         </dgm:presLayoutVars>
       </dgm:prSet>
       <dgm:spPr/>
     </dgm:pt>
-    <dgm:pt modelId="{FBCC4E74-37C0-494F-ABC0-7D18132E1437}" type="pres">
-      <dgm:prSet presAssocID="{6352CA33-6755-44BE-808F-400DA4CF80A7}" presName="negSpace" presStyleCnt="0"/>
+    <dgm:pt modelId="{B40BC616-7983-461E-BE08-A6A57B9807A2}" type="pres">
+      <dgm:prSet presAssocID="{B3A4CFCF-8579-42FB-ABC3-AF036B385751}" presName="comp" presStyleCnt="0"/>
       <dgm:spPr/>
     </dgm:pt>
-    <dgm:pt modelId="{89E6DA6E-7A23-44BD-8A99-378091FF741D}" type="pres">
-      <dgm:prSet presAssocID="{6352CA33-6755-44BE-808F-400DA4CF80A7}" presName="circle" presStyleLbl="node1" presStyleIdx="2" presStyleCnt="4"/>
+    <dgm:pt modelId="{EAD1BD7D-225C-48A4-90CC-92464D1A0043}" type="pres">
+      <dgm:prSet presAssocID="{B3A4CFCF-8579-42FB-ABC3-AF036B385751}" presName="child" presStyleLbl="bgAccFollowNode1" presStyleIdx="9" presStyleCnt="17" custScaleX="104320" custScaleY="102339" custLinFactNeighborX="-17344" custLinFactNeighborY="-224"/>
       <dgm:spPr/>
     </dgm:pt>
-    <dgm:pt modelId="{E966790E-26B5-4EB8-981F-1094BF4B7611}" type="pres">
-      <dgm:prSet presAssocID="{AAB4CF73-4B9B-4AA0-9074-16C2D2AE00A1}" presName="transSpace" presStyleCnt="0"/>
-      <dgm:spPr/>
-    </dgm:pt>
-    <dgm:pt modelId="{229B7655-E1F4-4CF5-84B8-30F0491D32B5}" type="pres">
-      <dgm:prSet presAssocID="{7FCE83D9-631B-4420-BBFC-CA0AFA59F747}" presName="posSpace" presStyleCnt="0"/>
-      <dgm:spPr/>
-    </dgm:pt>
-    <dgm:pt modelId="{F85FFCDF-8E5F-492B-B22D-55A08EACE783}" type="pres">
-      <dgm:prSet presAssocID="{7FCE83D9-631B-4420-BBFC-CA0AFA59F747}" presName="vertFlow" presStyleCnt="0"/>
-      <dgm:spPr/>
-    </dgm:pt>
-    <dgm:pt modelId="{600B3FB2-1315-4A84-8613-B445666BC7D2}" type="pres">
-      <dgm:prSet presAssocID="{7FCE83D9-631B-4420-BBFC-CA0AFA59F747}" presName="topSpace" presStyleCnt="0"/>
-      <dgm:spPr/>
-    </dgm:pt>
-    <dgm:pt modelId="{E47C73E9-FBEE-4370-9B3F-E04EB7C4023A}" type="pres">
-      <dgm:prSet presAssocID="{7FCE83D9-631B-4420-BBFC-CA0AFA59F747}" presName="firstComp" presStyleCnt="0"/>
-      <dgm:spPr/>
-    </dgm:pt>
-    <dgm:pt modelId="{402C2C77-A32C-4D99-9940-12535E1181F2}" type="pres">
-      <dgm:prSet presAssocID="{7FCE83D9-631B-4420-BBFC-CA0AFA59F747}" presName="firstChild" presStyleLbl="bgAccFollowNode1" presStyleIdx="9" presStyleCnt="11"/>
-      <dgm:spPr/>
-    </dgm:pt>
-    <dgm:pt modelId="{5B88A17E-EFF5-4A04-9CC9-D2131DA9ECCC}" type="pres">
-      <dgm:prSet presAssocID="{7FCE83D9-631B-4420-BBFC-CA0AFA59F747}" presName="firstChildTx" presStyleLbl="bgAccFollowNode1" presStyleIdx="9" presStyleCnt="11">
+    <dgm:pt modelId="{B7C9C597-8C2B-4944-B28F-245541F5ED8A}" type="pres">
+      <dgm:prSet presAssocID="{B3A4CFCF-8579-42FB-ABC3-AF036B385751}" presName="childTx" presStyleLbl="bgAccFollowNode1" presStyleIdx="9" presStyleCnt="17">
         <dgm:presLayoutVars>
           <dgm:bulletEnabled val="1"/>
         </dgm:presLayoutVars>
       </dgm:prSet>
       <dgm:spPr/>
     </dgm:pt>
-    <dgm:pt modelId="{F3C2D87B-A5E7-46E2-B3D3-58E6D9562663}" type="pres">
-      <dgm:prSet presAssocID="{50451020-5E1A-4778-9E8D-169182A36191}" presName="comp" presStyleCnt="0"/>
+    <dgm:pt modelId="{2A20FD18-A749-41BC-8823-7E5CB71E67E7}" type="pres">
+      <dgm:prSet presAssocID="{AAD5F8AC-6C23-4597-956D-D275786D34EB}" presName="comp" presStyleCnt="0"/>
       <dgm:spPr/>
     </dgm:pt>
-    <dgm:pt modelId="{3086D0BF-AAD1-4310-88ED-4D81A687BD50}" type="pres">
-      <dgm:prSet presAssocID="{50451020-5E1A-4778-9E8D-169182A36191}" presName="child" presStyleLbl="bgAccFollowNode1" presStyleIdx="10" presStyleCnt="11"/>
+    <dgm:pt modelId="{AC6AA3B2-F7BD-4DBC-8658-A0E24F8CAED5}" type="pres">
+      <dgm:prSet presAssocID="{AAD5F8AC-6C23-4597-956D-D275786D34EB}" presName="child" presStyleLbl="bgAccFollowNode1" presStyleIdx="10" presStyleCnt="17" custLinFactNeighborX="-33967" custLinFactNeighborY="-1837"/>
       <dgm:spPr/>
     </dgm:pt>
-    <dgm:pt modelId="{2B18CCD9-D6B1-4225-8D26-4BA691BB1837}" type="pres">
-      <dgm:prSet presAssocID="{50451020-5E1A-4778-9E8D-169182A36191}" presName="childTx" presStyleLbl="bgAccFollowNode1" presStyleIdx="10" presStyleCnt="11">
+    <dgm:pt modelId="{8B42A167-94E4-4EE4-8A5D-493859E57EC5}" type="pres">
+      <dgm:prSet presAssocID="{AAD5F8AC-6C23-4597-956D-D275786D34EB}" presName="childTx" presStyleLbl="bgAccFollowNode1" presStyleIdx="10" presStyleCnt="17">
         <dgm:presLayoutVars>
           <dgm:bulletEnabled val="1"/>
         </dgm:presLayoutVars>
       </dgm:prSet>
       <dgm:spPr/>
     </dgm:pt>
-    <dgm:pt modelId="{9051EF7D-7D6C-4B43-A6C4-239F9933C94D}" type="pres">
-      <dgm:prSet presAssocID="{7FCE83D9-631B-4420-BBFC-CA0AFA59F747}" presName="negSpace" presStyleCnt="0"/>
+    <dgm:pt modelId="{1F8B151D-CD7A-4F92-814A-3FDF28BAE06C}" type="pres">
+      <dgm:prSet presAssocID="{F93D1B19-3291-4E17-AA88-B7FB150C064F}" presName="comp" presStyleCnt="0"/>
       <dgm:spPr/>
     </dgm:pt>
-    <dgm:pt modelId="{7453D9C8-CD6E-4AA4-8A19-7F6F667528F0}" type="pres">
-      <dgm:prSet presAssocID="{7FCE83D9-631B-4420-BBFC-CA0AFA59F747}" presName="circle" presStyleLbl="node1" presStyleIdx="3" presStyleCnt="4"/>
+    <dgm:pt modelId="{BEBE39A4-D286-45BE-8C26-99DDC2614E7C}" type="pres">
+      <dgm:prSet presAssocID="{F93D1B19-3291-4E17-AA88-B7FB150C064F}" presName="child" presStyleLbl="bgAccFollowNode1" presStyleIdx="11" presStyleCnt="17" custScaleX="105363" custScaleY="95408" custLinFactNeighborX="-19267" custLinFactNeighborY="-3288"/>
+      <dgm:spPr/>
+    </dgm:pt>
+    <dgm:pt modelId="{8414F751-81A8-4F83-AB61-87B6590191AC}" type="pres">
+      <dgm:prSet presAssocID="{F93D1B19-3291-4E17-AA88-B7FB150C064F}" presName="childTx" presStyleLbl="bgAccFollowNode1" presStyleIdx="11" presStyleCnt="17">
+        <dgm:presLayoutVars>
+          <dgm:bulletEnabled val="1"/>
+        </dgm:presLayoutVars>
+      </dgm:prSet>
+      <dgm:spPr/>
+    </dgm:pt>
+    <dgm:pt modelId="{4665971C-4301-4860-95C3-8AAB39C64E38}" type="pres">
+      <dgm:prSet presAssocID="{9614A323-64B1-4077-A841-022051EC749A}" presName="negSpace" presStyleCnt="0"/>
+      <dgm:spPr/>
+    </dgm:pt>
+    <dgm:pt modelId="{38BDFE91-DC84-4E35-8A15-4802AA0AF531}" type="pres">
+      <dgm:prSet presAssocID="{9614A323-64B1-4077-A841-022051EC749A}" presName="circle" presStyleLbl="node1" presStyleIdx="2" presStyleCnt="4" custScaleX="232135" custScaleY="165904" custLinFactNeighborX="-52277" custLinFactNeighborY="-23360"/>
+      <dgm:spPr/>
+    </dgm:pt>
+    <dgm:pt modelId="{A4101AEA-D9B7-406F-8CA8-EB6CC900FF14}" type="pres">
+      <dgm:prSet presAssocID="{FEC2A79F-8857-403A-A738-E8CE75C965E2}" presName="transSpace" presStyleCnt="0"/>
+      <dgm:spPr/>
+    </dgm:pt>
+    <dgm:pt modelId="{DD1E0351-0D09-4260-836A-71B02BF60676}" type="pres">
+      <dgm:prSet presAssocID="{DB9FB862-4759-4D6A-84F3-01524B92723B}" presName="posSpace" presStyleCnt="0"/>
+      <dgm:spPr/>
+    </dgm:pt>
+    <dgm:pt modelId="{2EB49BF0-DCD7-4275-8A8F-0CD83C2BAE4E}" type="pres">
+      <dgm:prSet presAssocID="{DB9FB862-4759-4D6A-84F3-01524B92723B}" presName="vertFlow" presStyleCnt="0"/>
+      <dgm:spPr/>
+    </dgm:pt>
+    <dgm:pt modelId="{FC1DD4C0-5D40-4EEB-952F-FE5F6C693099}" type="pres">
+      <dgm:prSet presAssocID="{DB9FB862-4759-4D6A-84F3-01524B92723B}" presName="topSpace" presStyleCnt="0"/>
+      <dgm:spPr/>
+    </dgm:pt>
+    <dgm:pt modelId="{5176E6AB-D107-4714-B8B1-C657AA0362D4}" type="pres">
+      <dgm:prSet presAssocID="{DB9FB862-4759-4D6A-84F3-01524B92723B}" presName="firstComp" presStyleCnt="0"/>
+      <dgm:spPr/>
+    </dgm:pt>
+    <dgm:pt modelId="{C1F19226-E171-4933-BA2F-F3AB7038C301}" type="pres">
+      <dgm:prSet presAssocID="{DB9FB862-4759-4D6A-84F3-01524B92723B}" presName="firstChild" presStyleLbl="bgAccFollowNode1" presStyleIdx="12" presStyleCnt="17" custLinFactNeighborX="-33920" custLinFactNeighborY="-1374"/>
+      <dgm:spPr/>
+    </dgm:pt>
+    <dgm:pt modelId="{CAB7603B-0E9A-48C0-A031-DCD4590D8F2A}" type="pres">
+      <dgm:prSet presAssocID="{DB9FB862-4759-4D6A-84F3-01524B92723B}" presName="firstChildTx" presStyleLbl="bgAccFollowNode1" presStyleIdx="12" presStyleCnt="17">
+        <dgm:presLayoutVars>
+          <dgm:bulletEnabled val="1"/>
+        </dgm:presLayoutVars>
+      </dgm:prSet>
+      <dgm:spPr/>
+    </dgm:pt>
+    <dgm:pt modelId="{3CF3A251-EA87-453D-82A3-C25B37CFB173}" type="pres">
+      <dgm:prSet presAssocID="{B389FE5B-53D8-4427-A8AD-72ECC471323E}" presName="comp" presStyleCnt="0"/>
+      <dgm:spPr/>
+    </dgm:pt>
+    <dgm:pt modelId="{F013BCCC-175D-47EB-BB40-008AA9BFF93C}" type="pres">
+      <dgm:prSet presAssocID="{B389FE5B-53D8-4427-A8AD-72ECC471323E}" presName="child" presStyleLbl="bgAccFollowNode1" presStyleIdx="13" presStyleCnt="17" custLinFactNeighborX="-33920" custLinFactNeighborY="-1374"/>
+      <dgm:spPr/>
+    </dgm:pt>
+    <dgm:pt modelId="{210D29AE-6F8D-4C46-8112-18AF17D8CD23}" type="pres">
+      <dgm:prSet presAssocID="{B389FE5B-53D8-4427-A8AD-72ECC471323E}" presName="childTx" presStyleLbl="bgAccFollowNode1" presStyleIdx="13" presStyleCnt="17">
+        <dgm:presLayoutVars>
+          <dgm:bulletEnabled val="1"/>
+        </dgm:presLayoutVars>
+      </dgm:prSet>
+      <dgm:spPr/>
+    </dgm:pt>
+    <dgm:pt modelId="{BB670AAF-2F44-4018-9516-F1DCF015D09B}" type="pres">
+      <dgm:prSet presAssocID="{85B93EC2-982B-4C02-A8CE-419F69B41ACA}" presName="comp" presStyleCnt="0"/>
+      <dgm:spPr/>
+    </dgm:pt>
+    <dgm:pt modelId="{2E447C66-EB28-4EBC-9942-68E964C91CB6}" type="pres">
+      <dgm:prSet presAssocID="{85B93EC2-982B-4C02-A8CE-419F69B41ACA}" presName="child" presStyleLbl="bgAccFollowNode1" presStyleIdx="14" presStyleCnt="17" custLinFactNeighborX="-33920" custLinFactNeighborY="-1374"/>
+      <dgm:spPr/>
+    </dgm:pt>
+    <dgm:pt modelId="{7DF42A3A-22A7-414C-B84E-1F14B99AC416}" type="pres">
+      <dgm:prSet presAssocID="{85B93EC2-982B-4C02-A8CE-419F69B41ACA}" presName="childTx" presStyleLbl="bgAccFollowNode1" presStyleIdx="14" presStyleCnt="17">
+        <dgm:presLayoutVars>
+          <dgm:bulletEnabled val="1"/>
+        </dgm:presLayoutVars>
+      </dgm:prSet>
+      <dgm:spPr/>
+    </dgm:pt>
+    <dgm:pt modelId="{47F42016-DE63-4B5E-98C7-686BFD441738}" type="pres">
+      <dgm:prSet presAssocID="{28C89411-2B01-41E9-8274-DDD7006030DA}" presName="comp" presStyleCnt="0"/>
+      <dgm:spPr/>
+    </dgm:pt>
+    <dgm:pt modelId="{F2A9C5CA-23F2-45CC-8C35-9676AD1B9D5A}" type="pres">
+      <dgm:prSet presAssocID="{28C89411-2B01-41E9-8274-DDD7006030DA}" presName="child" presStyleLbl="bgAccFollowNode1" presStyleIdx="15" presStyleCnt="17" custLinFactNeighborX="-33920" custLinFactNeighborY="-1374"/>
+      <dgm:spPr/>
+    </dgm:pt>
+    <dgm:pt modelId="{7C0D7CEE-B755-4FC2-8B2E-905A3D94C71B}" type="pres">
+      <dgm:prSet presAssocID="{28C89411-2B01-41E9-8274-DDD7006030DA}" presName="childTx" presStyleLbl="bgAccFollowNode1" presStyleIdx="15" presStyleCnt="17">
+        <dgm:presLayoutVars>
+          <dgm:bulletEnabled val="1"/>
+        </dgm:presLayoutVars>
+      </dgm:prSet>
+      <dgm:spPr/>
+    </dgm:pt>
+    <dgm:pt modelId="{74A7A3ED-4819-4997-94CE-DCA17C9EC51D}" type="pres">
+      <dgm:prSet presAssocID="{6EE420E1-922D-4C85-85FB-16324D0852A4}" presName="comp" presStyleCnt="0"/>
+      <dgm:spPr/>
+    </dgm:pt>
+    <dgm:pt modelId="{69373249-1CA5-43C2-9B52-BA36A7C69C11}" type="pres">
+      <dgm:prSet presAssocID="{6EE420E1-922D-4C85-85FB-16324D0852A4}" presName="child" presStyleLbl="bgAccFollowNode1" presStyleIdx="16" presStyleCnt="17" custLinFactNeighborX="-33920" custLinFactNeighborY="-1374"/>
+      <dgm:spPr/>
+    </dgm:pt>
+    <dgm:pt modelId="{102DE0C6-D8E3-4620-89A1-AD26870A8E7B}" type="pres">
+      <dgm:prSet presAssocID="{6EE420E1-922D-4C85-85FB-16324D0852A4}" presName="childTx" presStyleLbl="bgAccFollowNode1" presStyleIdx="16" presStyleCnt="17">
+        <dgm:presLayoutVars>
+          <dgm:bulletEnabled val="1"/>
+        </dgm:presLayoutVars>
+      </dgm:prSet>
+      <dgm:spPr/>
+    </dgm:pt>
+    <dgm:pt modelId="{1ACD62BD-37A9-44BB-8A73-3D533D0318E3}" type="pres">
+      <dgm:prSet presAssocID="{DB9FB862-4759-4D6A-84F3-01524B92723B}" presName="negSpace" presStyleCnt="0"/>
+      <dgm:spPr/>
+    </dgm:pt>
+    <dgm:pt modelId="{69226676-7B84-4407-B251-53F22C063F6E}" type="pres">
+      <dgm:prSet presAssocID="{DB9FB862-4759-4D6A-84F3-01524B92723B}" presName="circle" presStyleLbl="node1" presStyleIdx="3" presStyleCnt="4" custScaleX="195444" custScaleY="143145" custLinFactNeighborX="-48332" custLinFactNeighborY="-5449"/>
       <dgm:spPr/>
     </dgm:pt>
   </dgm:ptLst>
   <dgm:cxnLst>
-    <dgm:cxn modelId="{0E640A01-5254-426D-9300-3ED2F4E3FC75}" type="presOf" srcId="{29E78340-8EBE-415C-B973-78A91A054B9C}" destId="{614EBA0E-D12B-447E-B378-B0FA2DEBEA2F}" srcOrd="0" destOrd="0" presId="urn:microsoft.com/office/officeart/2005/8/layout/hList9"/>
+    <dgm:cxn modelId="{463E8404-F88D-4A81-9A35-1CE00357E19F}" type="presOf" srcId="{B389FE5B-53D8-4427-A8AD-72ECC471323E}" destId="{210D29AE-6F8D-4C46-8112-18AF17D8CD23}" srcOrd="1" destOrd="0" presId="urn:microsoft.com/office/officeart/2005/8/layout/hList9"/>
+    <dgm:cxn modelId="{118D6308-B5FB-4C0D-BAC7-AC4DFCD6D58B}" type="presOf" srcId="{621F5721-CE6C-4594-9958-72E5AA1941ED}" destId="{1BA260C2-9C91-41B1-941E-B6DC8B0E9EB7}" srcOrd="1" destOrd="0" presId="urn:microsoft.com/office/officeart/2005/8/layout/hList9"/>
     <dgm:cxn modelId="{91E5380B-556D-40F8-ABFD-10D81CAF19AA}" type="presOf" srcId="{7CB6360B-4022-4E96-922B-A12DE0E2A39F}" destId="{D685DD23-B321-4B5E-842F-394CB33239FA}" srcOrd="1" destOrd="0" presId="urn:microsoft.com/office/officeart/2005/8/layout/hList9"/>
-    <dgm:cxn modelId="{20AF3F0D-FCCC-4AE8-8B10-DDA56D69A389}" type="presOf" srcId="{6352CA33-6755-44BE-808F-400DA4CF80A7}" destId="{89E6DA6E-7A23-44BD-8A99-378091FF741D}" srcOrd="0" destOrd="0" presId="urn:microsoft.com/office/officeart/2005/8/layout/hList9"/>
+    <dgm:cxn modelId="{6E097111-ADB6-46A0-872E-9778E2634AF3}" type="presOf" srcId="{AABCA24F-54F9-4114-8891-699A496EA9AE}" destId="{72AC9EAC-BCD0-4A2D-8612-F09D47148D71}" srcOrd="0" destOrd="0" presId="urn:microsoft.com/office/officeart/2005/8/layout/hList9"/>
     <dgm:cxn modelId="{7F3B5912-CE3A-4F69-B6A0-82162798FA63}" type="presOf" srcId="{00C18FBF-3FF5-4C16-97CF-AF03740D7AB6}" destId="{0DC7A063-583D-4B0F-88B2-BD54F95D95AF}" srcOrd="0" destOrd="0" presId="urn:microsoft.com/office/officeart/2005/8/layout/hList9"/>
-    <dgm:cxn modelId="{9740321C-35B3-4F5F-BD46-905CB7B8FAEB}" type="presOf" srcId="{9614A323-64B1-4077-A841-022051EC749A}" destId="{AD2806AC-6A03-4F05-9F4D-F72EA0E56FBF}" srcOrd="0" destOrd="0" presId="urn:microsoft.com/office/officeart/2005/8/layout/hList9"/>
-    <dgm:cxn modelId="{C0DEB330-C4FA-4F66-86CA-0C9C52F1F01F}" type="presOf" srcId="{29E78340-8EBE-415C-B973-78A91A054B9C}" destId="{B12AEB83-0A64-4B36-BF01-B2F834861BAA}" srcOrd="1" destOrd="0" presId="urn:microsoft.com/office/officeart/2005/8/layout/hList9"/>
+    <dgm:cxn modelId="{84682B1A-7818-4509-83EE-2886A98E8A90}" type="presOf" srcId="{A16880C6-7D68-4948-ACCF-79892605EAC8}" destId="{FBDD7FE6-0F8B-44A0-AE0C-3B2AD3CC07AD}" srcOrd="0" destOrd="0" presId="urn:microsoft.com/office/officeart/2005/8/layout/hList9"/>
+    <dgm:cxn modelId="{D2D4811D-DAD9-4F2F-B366-EC86379ED75A}" type="presOf" srcId="{AAD5F8AC-6C23-4597-956D-D275786D34EB}" destId="{8B42A167-94E4-4EE4-8A5D-493859E57EC5}" srcOrd="1" destOrd="0" presId="urn:microsoft.com/office/officeart/2005/8/layout/hList9"/>
+    <dgm:cxn modelId="{D376AE1E-9E8D-44EB-80FC-823F209304AA}" srcId="{D5197DDB-D5D2-499F-B255-CF7BB5AE2B43}" destId="{A16880C6-7D68-4948-ACCF-79892605EAC8}" srcOrd="1" destOrd="0" parTransId="{096FB429-D28A-4E7C-96F3-20FFD79257C3}" sibTransId="{A442F457-741A-45DD-BFCB-F271E3335A6E}"/>
+    <dgm:cxn modelId="{53FF6B25-D8E0-40E0-8A03-3CF6C4DF59BA}" type="presOf" srcId="{28C89411-2B01-41E9-8274-DDD7006030DA}" destId="{F2A9C5CA-23F2-45CC-8C35-9676AD1B9D5A}" srcOrd="0" destOrd="0" presId="urn:microsoft.com/office/officeart/2005/8/layout/hList9"/>
+    <dgm:cxn modelId="{F06E0728-8399-440D-A82D-10B00812519D}" srcId="{D5197DDB-D5D2-499F-B255-CF7BB5AE2B43}" destId="{EA10134D-095E-40CA-9F6B-98412C29FAC6}" srcOrd="3" destOrd="0" parTransId="{DBB72CAB-A77F-4C95-9EAA-AF4ABCECC905}" sibTransId="{667B5842-02CD-4A20-BC37-70503CD97536}"/>
     <dgm:cxn modelId="{70AA2139-FA57-4EAA-83C0-CFBB31F3B2CD}" type="presOf" srcId="{9D72CDD3-5859-43DB-BD75-0C3C30E3DE62}" destId="{187D4E8C-5C91-4D00-870C-2C45D4EA263C}" srcOrd="1" destOrd="0" presId="urn:microsoft.com/office/officeart/2005/8/layout/hList9"/>
-    <dgm:cxn modelId="{EDF0B63A-DCA1-49A5-910A-B447CA5609B2}" type="presOf" srcId="{3D5CDB25-F8FA-444B-8D4A-1D29D0CBA282}" destId="{96624143-7928-48E9-817F-BC4A07250C32}" srcOrd="1" destOrd="0" presId="urn:microsoft.com/office/officeart/2005/8/layout/hList9"/>
-    <dgm:cxn modelId="{FFE7CF3F-C427-4831-953F-615124811AB4}" type="presOf" srcId="{8321AB85-EA8C-4958-B404-B4C118CB3C18}" destId="{E1767793-EDD5-4203-A612-8120A71CA906}" srcOrd="1" destOrd="0" presId="urn:microsoft.com/office/officeart/2005/8/layout/hList9"/>
-    <dgm:cxn modelId="{4A31D641-1B5D-46D3-B685-0C4DC6EFE71B}" srcId="{00C18FBF-3FF5-4C16-97CF-AF03740D7AB6}" destId="{F2881FB1-6580-4F21-A283-BFAA6F91D5D2}" srcOrd="1" destOrd="0" parTransId="{2D960FDD-BADA-480D-9043-497C56588AD3}" sibTransId="{A5ABDC17-7AB5-4F0E-992A-F9343F5D74EB}"/>
-    <dgm:cxn modelId="{16E03549-76FD-4D73-932D-9C88E7D9FF05}" type="presOf" srcId="{DB9FB862-4759-4D6A-84F3-01524B92723B}" destId="{402C2C77-A32C-4D99-9940-12535E1181F2}" srcOrd="0" destOrd="0" presId="urn:microsoft.com/office/officeart/2005/8/layout/hList9"/>
-    <dgm:cxn modelId="{B635AE6E-37F7-4F2E-8725-C1D81C11EBE6}" type="presOf" srcId="{8321AB85-EA8C-4958-B404-B4C118CB3C18}" destId="{68509703-D239-4E1B-8CF0-EF08079E1226}" srcOrd="0" destOrd="0" presId="urn:microsoft.com/office/officeart/2005/8/layout/hList9"/>
+    <dgm:cxn modelId="{855AAB3A-8780-482B-91B9-34F38B3262CD}" type="presOf" srcId="{06B9F379-0FBC-4679-A4CF-9FDCF6C36FCC}" destId="{2C4960A3-2C5B-4B02-914C-877EA08BB3E0}" srcOrd="1" destOrd="0" presId="urn:microsoft.com/office/officeart/2005/8/layout/hList9"/>
+    <dgm:cxn modelId="{B9A2C363-504B-4A7B-A1A0-9C94F8AFE4BD}" srcId="{DB9FB862-4759-4D6A-84F3-01524B92723B}" destId="{28C89411-2B01-41E9-8274-DDD7006030DA}" srcOrd="3" destOrd="0" parTransId="{77FD02A2-21FF-426B-B768-B5B3320E2F0E}" sibTransId="{EA812954-E907-4BE3-AE9A-78B934CCF81B}"/>
+    <dgm:cxn modelId="{97DD8B45-B346-4C7F-BD2C-3171CE4F290D}" srcId="{D5197DDB-D5D2-499F-B255-CF7BB5AE2B43}" destId="{621F5721-CE6C-4594-9958-72E5AA1941ED}" srcOrd="0" destOrd="0" parTransId="{5E60E7B0-4718-448E-8C5C-5542750BE6D5}" sibTransId="{7E67761A-1206-4E52-8003-2ADB17C18A27}"/>
+    <dgm:cxn modelId="{B3959866-1E8E-4D53-8492-07B0613CD41A}" type="presOf" srcId="{A16880C6-7D68-4948-ACCF-79892605EAC8}" destId="{BBEE5F82-DC71-48B2-B53D-C1C1A76F0315}" srcOrd="1" destOrd="0" presId="urn:microsoft.com/office/officeart/2005/8/layout/hList9"/>
+    <dgm:cxn modelId="{691AA34C-9304-4053-9A6E-B0AC84AB8638}" type="presOf" srcId="{B3A4CFCF-8579-42FB-ABC3-AF036B385751}" destId="{B7C9C597-8C2B-4944-B28F-245541F5ED8A}" srcOrd="1" destOrd="0" presId="urn:microsoft.com/office/officeart/2005/8/layout/hList9"/>
+    <dgm:cxn modelId="{4796CF50-D4B3-417F-8058-CDEF38821F1F}" type="presOf" srcId="{EA10134D-095E-40CA-9F6B-98412C29FAC6}" destId="{5C5CDE35-6454-4D87-ACD7-39D3292D600F}" srcOrd="1" destOrd="0" presId="urn:microsoft.com/office/officeart/2005/8/layout/hList9"/>
     <dgm:cxn modelId="{3F290A52-8A4A-4469-9AB4-D811A6E23C3C}" type="presOf" srcId="{F9D46839-CD06-4669-AAE4-4D1E9AFEDA78}" destId="{59179C9B-8BA4-4AC7-ACB1-A12DE00142E2}" srcOrd="0" destOrd="0" presId="urn:microsoft.com/office/officeart/2005/8/layout/hList9"/>
-    <dgm:cxn modelId="{3204ED53-15A0-4643-A582-021A785F1BA2}" srcId="{F2881FB1-6580-4F21-A283-BFAA6F91D5D2}" destId="{D5197DDB-D5D2-499F-B255-CF7BB5AE2B43}" srcOrd="0" destOrd="0" parTransId="{B14A4DC9-F40A-4867-ADB8-4BA8A1F83766}" sibTransId="{29F2454A-2FA8-4B3A-AC63-4A0B9FD04A75}"/>
-    <dgm:cxn modelId="{B2647B56-8947-4632-AB4A-42CBB9B48494}" type="presOf" srcId="{7FCE83D9-631B-4420-BBFC-CA0AFA59F747}" destId="{7453D9C8-CD6E-4AA4-8A19-7F6F667528F0}" srcOrd="0" destOrd="0" presId="urn:microsoft.com/office/officeart/2005/8/layout/hList9"/>
-    <dgm:cxn modelId="{129AEA77-5D2A-49D4-956D-99009974B6C5}" srcId="{F2881FB1-6580-4F21-A283-BFAA6F91D5D2}" destId="{8321AB85-EA8C-4958-B404-B4C118CB3C18}" srcOrd="2" destOrd="0" parTransId="{24ABE8B3-7220-436D-9636-F7B4C0B99576}" sibTransId="{AA5F76CE-8FD4-4692-8BB1-EF84CF9D365E}"/>
+    <dgm:cxn modelId="{7E486072-DC86-45CE-9FA7-54ECD9DEC693}" type="presOf" srcId="{85B93EC2-982B-4C02-A8CE-419F69B41ACA}" destId="{2E447C66-EB28-4EBC-9942-68E964C91CB6}" srcOrd="0" destOrd="0" presId="urn:microsoft.com/office/officeart/2005/8/layout/hList9"/>
+    <dgm:cxn modelId="{3204ED53-15A0-4643-A582-021A785F1BA2}" srcId="{00C18FBF-3FF5-4C16-97CF-AF03740D7AB6}" destId="{D5197DDB-D5D2-499F-B255-CF7BB5AE2B43}" srcOrd="1" destOrd="0" parTransId="{B14A4DC9-F40A-4867-ADB8-4BA8A1F83766}" sibTransId="{29F2454A-2FA8-4B3A-AC63-4A0B9FD04A75}"/>
+    <dgm:cxn modelId="{0AD23A77-D818-497C-B237-98E8943EE756}" type="presOf" srcId="{50451020-5E1A-4778-9E8D-169182A36191}" destId="{CAB7603B-0E9A-48C0-A031-DCD4590D8F2A}" srcOrd="1" destOrd="0" presId="urn:microsoft.com/office/officeart/2005/8/layout/hList9"/>
+    <dgm:cxn modelId="{37046B77-CB75-43D4-9483-F1B37EB8D9FB}" type="presOf" srcId="{F93D1B19-3291-4E17-AA88-B7FB150C064F}" destId="{8414F751-81A8-4F83-AB61-87B6590191AC}" srcOrd="1" destOrd="0" presId="urn:microsoft.com/office/officeart/2005/8/layout/hList9"/>
     <dgm:cxn modelId="{8FAB4659-6291-457D-941A-93BCD304031A}" srcId="{B4F1B46E-22B2-4721-950C-8704487586DC}" destId="{70879558-61CA-4CCD-B2D6-5349B01EF337}" srcOrd="3" destOrd="0" parTransId="{95F5E6EE-4E8D-49F8-8C9E-8BBFD01B6A0E}" sibTransId="{053E317B-DD3F-4AFF-90D1-A55D37D325DC}"/>
-    <dgm:cxn modelId="{FC7BD086-74EA-4D6C-9657-E916D355F209}" srcId="{6352CA33-6755-44BE-808F-400DA4CF80A7}" destId="{9614A323-64B1-4077-A841-022051EC749A}" srcOrd="0" destOrd="0" parTransId="{E5F6BCBD-B84E-4018-BE9E-BF57FF3B4B36}" sibTransId="{FEC2A79F-8857-403A-A738-E8CE75C965E2}"/>
-    <dgm:cxn modelId="{E572418E-4340-4448-940D-253A2FA3B9B3}" srcId="{00C18FBF-3FF5-4C16-97CF-AF03740D7AB6}" destId="{7FCE83D9-631B-4420-BBFC-CA0AFA59F747}" srcOrd="3" destOrd="0" parTransId="{C61EC981-13FA-4710-B079-D35692EEB764}" sibTransId="{1B48A0DE-4031-4D45-86A1-94CDAF68824A}"/>
-    <dgm:cxn modelId="{B736D792-8630-4423-BF25-ED6293A18ADD}" type="presOf" srcId="{9614A323-64B1-4077-A841-022051EC749A}" destId="{F8977219-728E-448F-AE8B-46B14F4F17DE}" srcOrd="1" destOrd="0" presId="urn:microsoft.com/office/officeart/2005/8/layout/hList9"/>
-    <dgm:cxn modelId="{6C9D5899-99E2-4916-98F9-1660647928E3}" type="presOf" srcId="{DB9FB862-4759-4D6A-84F3-01524B92723B}" destId="{5B88A17E-EFF5-4A04-9CC9-D2131DA9ECCC}" srcOrd="1" destOrd="0" presId="urn:microsoft.com/office/officeart/2005/8/layout/hList9"/>
+    <dgm:cxn modelId="{9B61C481-6B10-41D3-9BD5-E394506BBD84}" type="presOf" srcId="{6EE420E1-922D-4C85-85FB-16324D0852A4}" destId="{102DE0C6-D8E3-4620-89A1-AD26870A8E7B}" srcOrd="1" destOrd="0" presId="urn:microsoft.com/office/officeart/2005/8/layout/hList9"/>
+    <dgm:cxn modelId="{EE042382-9568-4309-978F-B3F649F0ACC8}" srcId="{DB9FB862-4759-4D6A-84F3-01524B92723B}" destId="{85B93EC2-982B-4C02-A8CE-419F69B41ACA}" srcOrd="2" destOrd="0" parTransId="{DD72EA39-73C3-46AD-8FEF-2328569DC67B}" sibTransId="{C88B4100-B295-4351-9E6B-670D6C3CB443}"/>
+    <dgm:cxn modelId="{FC7BD086-74EA-4D6C-9657-E916D355F209}" srcId="{00C18FBF-3FF5-4C16-97CF-AF03740D7AB6}" destId="{9614A323-64B1-4077-A841-022051EC749A}" srcOrd="2" destOrd="0" parTransId="{E5F6BCBD-B84E-4018-BE9E-BF57FF3B4B36}" sibTransId="{FEC2A79F-8857-403A-A738-E8CE75C965E2}"/>
+    <dgm:cxn modelId="{C1488C89-F7A3-43DB-B5FF-4E8E0D0AB105}" srcId="{9614A323-64B1-4077-A841-022051EC749A}" destId="{B3A4CFCF-8579-42FB-ABC3-AF036B385751}" srcOrd="1" destOrd="0" parTransId="{F51E3C80-D469-4003-A619-E22F0894E520}" sibTransId="{2F0B5642-0483-4206-86EF-FB06458376CD}"/>
+    <dgm:cxn modelId="{8C151592-5A2C-4933-BD00-B6409F3ADF3F}" type="presOf" srcId="{9614A323-64B1-4077-A841-022051EC749A}" destId="{38BDFE91-DC84-4E35-8A15-4802AA0AF531}" srcOrd="0" destOrd="0" presId="urn:microsoft.com/office/officeart/2005/8/layout/hList9"/>
+    <dgm:cxn modelId="{2FB7D298-E00D-4CD5-BF0B-252D6C9AA9DC}" srcId="{DB9FB862-4759-4D6A-84F3-01524B92723B}" destId="{B389FE5B-53D8-4427-A8AD-72ECC471323E}" srcOrd="1" destOrd="0" parTransId="{32412EB8-57ED-4F25-B1F4-1C1685F6945A}" sibTransId="{F963F9C1-ADAC-451D-8D00-37136AE00AC4}"/>
     <dgm:cxn modelId="{DDB5AD9A-40B0-48EF-AF2C-8CCDA330F7FE}" srcId="{B4F1B46E-22B2-4721-950C-8704487586DC}" destId="{9D72CDD3-5859-43DB-BD75-0C3C30E3DE62}" srcOrd="0" destOrd="0" parTransId="{1D5B1F83-33A7-4298-BC11-2B1252AFAEA5}" sibTransId="{15E25BD4-1EBF-43C2-8885-DBF66B8429E1}"/>
+    <dgm:cxn modelId="{2944D79F-61B2-408E-8DEB-00BC3E36523E}" type="presOf" srcId="{AABCA24F-54F9-4114-8891-699A496EA9AE}" destId="{D8DA147B-8C30-42CE-85D6-6B9053C6E13F}" srcOrd="1" destOrd="0" presId="urn:microsoft.com/office/officeart/2005/8/layout/hList9"/>
     <dgm:cxn modelId="{AD25A8A0-4628-40E2-8C9E-64E6AD4D4D91}" srcId="{B4F1B46E-22B2-4721-950C-8704487586DC}" destId="{F9D46839-CD06-4669-AAE4-4D1E9AFEDA78}" srcOrd="1" destOrd="0" parTransId="{B6B535D8-00AB-4FA1-AAEC-92498ABC6F4C}" sibTransId="{6497F199-DC2A-41F9-A449-D395E6BC4900}"/>
+    <dgm:cxn modelId="{FCC17DA1-F15B-4392-B27A-53BB785E559C}" type="presOf" srcId="{D5197DDB-D5D2-499F-B255-CF7BB5AE2B43}" destId="{CBDBED7C-E4C8-4363-B2F1-5441894E4EFB}" srcOrd="0" destOrd="0" presId="urn:microsoft.com/office/officeart/2005/8/layout/hList9"/>
+    <dgm:cxn modelId="{21D055A5-CBB1-41D6-848C-5D37574C83D2}" srcId="{9614A323-64B1-4077-A841-022051EC749A}" destId="{AAD5F8AC-6C23-4597-956D-D275786D34EB}" srcOrd="2" destOrd="0" parTransId="{EDE0D4E3-2C6E-4504-AC7C-D3B5E6286375}" sibTransId="{E5783EA2-05F5-4196-BF4B-9A3E660BBFF0}"/>
+    <dgm:cxn modelId="{69FE84A8-EFBD-4BC2-9877-9D780B1FB054}" srcId="{9614A323-64B1-4077-A841-022051EC749A}" destId="{AABCA24F-54F9-4114-8891-699A496EA9AE}" srcOrd="0" destOrd="0" parTransId="{E2D99E65-F92D-4A92-ABA9-07239CB76896}" sibTransId="{ABEB9657-F406-4283-87EB-C85B04B9B8D9}"/>
     <dgm:cxn modelId="{3EF668B1-7B6A-40A1-9E64-0829B2EF0539}" type="presOf" srcId="{F9D46839-CD06-4669-AAE4-4D1E9AFEDA78}" destId="{4AE7D907-B6F4-4647-AB3F-ABE94C438AE8}" srcOrd="1" destOrd="0" presId="urn:microsoft.com/office/officeart/2005/8/layout/hList9"/>
     <dgm:cxn modelId="{2C8317B2-2EBB-4589-86EA-C77B3B6E81AA}" srcId="{00C18FBF-3FF5-4C16-97CF-AF03740D7AB6}" destId="{B4F1B46E-22B2-4721-950C-8704487586DC}" srcOrd="0" destOrd="0" parTransId="{E8A66543-CC4D-4785-A93E-5B125E09F826}" sibTransId="{A7E2530A-34E2-4E9F-BC78-8920BA140C41}"/>
     <dgm:cxn modelId="{CD5EFFB3-C9FD-4DAC-8D97-0C2FB02B380B}" srcId="{B4F1B46E-22B2-4721-950C-8704487586DC}" destId="{7CB6360B-4022-4E96-922B-A12DE0E2A39F}" srcOrd="2" destOrd="0" parTransId="{44B2858F-607B-47DF-B44B-EA7D73FDC9F2}" sibTransId="{B35ED9D1-2A17-4034-8D08-4945CA54F6C9}"/>
-    <dgm:cxn modelId="{70E22FBE-4510-487A-BD3F-D791559A8263}" type="presOf" srcId="{3D5CDB25-F8FA-444B-8D4A-1D29D0CBA282}" destId="{5314AADB-0AD3-4BAE-9F15-B0FE4F44C802}" srcOrd="0" destOrd="0" presId="urn:microsoft.com/office/officeart/2005/8/layout/hList9"/>
+    <dgm:cxn modelId="{C14BF5C0-7FC5-4BA5-9F82-C3AA0D960A9D}" srcId="{9614A323-64B1-4077-A841-022051EC749A}" destId="{F93D1B19-3291-4E17-AA88-B7FB150C064F}" srcOrd="3" destOrd="0" parTransId="{142113C2-12E6-409C-94B1-0DB6E0E240EF}" sibTransId="{A1DCBED2-6FC9-4E7C-9DD2-2AA01C61C326}"/>
+    <dgm:cxn modelId="{FDC149C5-F4B1-44A1-AC0C-ECFE98DDD3D0}" type="presOf" srcId="{6EE420E1-922D-4C85-85FB-16324D0852A4}" destId="{69373249-1CA5-43C2-9B52-BA36A7C69C11}" srcOrd="0" destOrd="0" presId="urn:microsoft.com/office/officeart/2005/8/layout/hList9"/>
     <dgm:cxn modelId="{2DF4FDC6-9998-45E2-B49B-7BDDAE43878E}" type="presOf" srcId="{B4F1B46E-22B2-4721-950C-8704487586DC}" destId="{FC7ED273-8CFD-43C2-9C05-44FADF3E0637}" srcOrd="0" destOrd="0" presId="urn:microsoft.com/office/officeart/2005/8/layout/hList9"/>
-    <dgm:cxn modelId="{A587C2CB-6562-4021-B4BF-D479DBE9444F}" type="presOf" srcId="{D5197DDB-D5D2-499F-B255-CF7BB5AE2B43}" destId="{F660F4B9-35DB-4256-A868-A35C6DCCF6B2}" srcOrd="0" destOrd="0" presId="urn:microsoft.com/office/officeart/2005/8/layout/hList9"/>
-    <dgm:cxn modelId="{77F620CE-FC2D-42CF-890C-6A28A43BA06E}" type="presOf" srcId="{F2881FB1-6580-4F21-A283-BFAA6F91D5D2}" destId="{FD776C1E-557E-4553-9447-49B69EEC7907}" srcOrd="0" destOrd="0" presId="urn:microsoft.com/office/officeart/2005/8/layout/hList9"/>
+    <dgm:cxn modelId="{D9205BCD-8E09-43C5-8A02-CB02C4101F88}" type="presOf" srcId="{AAD5F8AC-6C23-4597-956D-D275786D34EB}" destId="{AC6AA3B2-F7BD-4DBC-8658-A0E24F8CAED5}" srcOrd="0" destOrd="0" presId="urn:microsoft.com/office/officeart/2005/8/layout/hList9"/>
+    <dgm:cxn modelId="{8DA4F2D0-7756-4458-ACCF-4C0709F3E287}" srcId="{DB9FB862-4759-4D6A-84F3-01524B92723B}" destId="{6EE420E1-922D-4C85-85FB-16324D0852A4}" srcOrd="4" destOrd="0" parTransId="{4A90E5E3-B244-4262-9ADE-EBBB3284F15F}" sibTransId="{585BA18E-439E-41F6-869D-D4FA45232B6D}"/>
     <dgm:cxn modelId="{AACC54D1-0243-46E9-9624-A663799E8A06}" type="presOf" srcId="{9D72CDD3-5859-43DB-BD75-0C3C30E3DE62}" destId="{6B08AC4B-4CEC-41E5-AE19-47A4E2720563}" srcOrd="0" destOrd="0" presId="urn:microsoft.com/office/officeart/2005/8/layout/hList9"/>
+    <dgm:cxn modelId="{A425FCD1-D4F6-42A8-B44E-216F9443859C}" srcId="{D5197DDB-D5D2-499F-B255-CF7BB5AE2B43}" destId="{06B9F379-0FBC-4679-A4CF-9FDCF6C36FCC}" srcOrd="2" destOrd="0" parTransId="{5BEF6586-3584-4315-BCFF-EA43DBF47A3B}" sibTransId="{9A40CFD8-3684-4DD2-9F70-73A6A2F6B6F3}"/>
     <dgm:cxn modelId="{F3210AD4-6CEB-4017-A75B-E24F2FA3B062}" type="presOf" srcId="{70879558-61CA-4CCD-B2D6-5349B01EF337}" destId="{51F68A05-A560-4C6F-BC90-521AEF3B0907}" srcOrd="0" destOrd="0" presId="urn:microsoft.com/office/officeart/2005/8/layout/hList9"/>
-    <dgm:cxn modelId="{311348D8-FDE3-4C22-99F5-3B98C5F51F0D}" srcId="{F2881FB1-6580-4F21-A283-BFAA6F91D5D2}" destId="{29E78340-8EBE-415C-B973-78A91A054B9C}" srcOrd="1" destOrd="0" parTransId="{FF4E5F97-6974-4E39-A85D-DCB2E100798E}" sibTransId="{B4B9A51E-FA34-465E-B5B4-81CD76EB3FC2}"/>
-    <dgm:cxn modelId="{0F86DBDB-3C4F-4C84-981B-7F4CA2A8EAF3}" srcId="{7FCE83D9-631B-4420-BBFC-CA0AFA59F747}" destId="{50451020-5E1A-4778-9E8D-169182A36191}" srcOrd="1" destOrd="0" parTransId="{7DFC3849-4A12-49FB-B614-8AFD597CCB9E}" sibTransId="{EEDE2474-4F18-4F59-8E58-6382D253E514}"/>
-    <dgm:cxn modelId="{82BAE5DD-3A79-4870-9019-1254385E0650}" srcId="{00C18FBF-3FF5-4C16-97CF-AF03740D7AB6}" destId="{6352CA33-6755-44BE-808F-400DA4CF80A7}" srcOrd="2" destOrd="0" parTransId="{AEB59203-63BA-4A96-BADC-40BAEBD9AA40}" sibTransId="{AAB4CF73-4B9B-4AA0-9074-16C2D2AE00A1}"/>
-    <dgm:cxn modelId="{2E3C97E6-67D4-4948-B47A-1115C2B2979F}" srcId="{6352CA33-6755-44BE-808F-400DA4CF80A7}" destId="{3D5CDB25-F8FA-444B-8D4A-1D29D0CBA282}" srcOrd="1" destOrd="0" parTransId="{4C229933-AC16-44B7-98EC-4C0F07FABCB0}" sibTransId="{189DA4C5-2A22-4C71-A806-7B4AB57767CC}"/>
-    <dgm:cxn modelId="{59E871E8-E7D2-4CCC-B749-A714977AF5E6}" type="presOf" srcId="{D5197DDB-D5D2-499F-B255-CF7BB5AE2B43}" destId="{10C9E3CF-3A8F-4100-8ACD-91E2373197A2}" srcOrd="1" destOrd="0" presId="urn:microsoft.com/office/officeart/2005/8/layout/hList9"/>
-    <dgm:cxn modelId="{114529EA-CDEE-4574-B59D-8F35E4FE7A75}" type="presOf" srcId="{50451020-5E1A-4778-9E8D-169182A36191}" destId="{3086D0BF-AAD1-4310-88ED-4D81A687BD50}" srcOrd="0" destOrd="0" presId="urn:microsoft.com/office/officeart/2005/8/layout/hList9"/>
+    <dgm:cxn modelId="{24905CD8-12CD-4A77-9F7A-01CA320FF644}" type="presOf" srcId="{B389FE5B-53D8-4427-A8AD-72ECC471323E}" destId="{F013BCCC-175D-47EB-BB40-008AA9BFF93C}" srcOrd="0" destOrd="0" presId="urn:microsoft.com/office/officeart/2005/8/layout/hList9"/>
+    <dgm:cxn modelId="{0F86DBDB-3C4F-4C84-981B-7F4CA2A8EAF3}" srcId="{DB9FB862-4759-4D6A-84F3-01524B92723B}" destId="{50451020-5E1A-4778-9E8D-169182A36191}" srcOrd="0" destOrd="0" parTransId="{7DFC3849-4A12-49FB-B614-8AFD597CCB9E}" sibTransId="{EEDE2474-4F18-4F59-8E58-6382D253E514}"/>
+    <dgm:cxn modelId="{EF5047DE-75CA-4BE6-BCC2-96F2F4332408}" type="presOf" srcId="{50451020-5E1A-4778-9E8D-169182A36191}" destId="{C1F19226-E171-4933-BA2F-F3AB7038C301}" srcOrd="0" destOrd="0" presId="urn:microsoft.com/office/officeart/2005/8/layout/hList9"/>
+    <dgm:cxn modelId="{B4E1F1DE-0C18-4ED3-9D16-705EE249668B}" type="presOf" srcId="{EA10134D-095E-40CA-9F6B-98412C29FAC6}" destId="{625F3147-9BFE-46B2-818C-46F1484E6B6A}" srcOrd="0" destOrd="0" presId="urn:microsoft.com/office/officeart/2005/8/layout/hList9"/>
+    <dgm:cxn modelId="{2AA185E3-DD15-4FD1-83B9-F6C6DFF86C62}" type="presOf" srcId="{F93D1B19-3291-4E17-AA88-B7FB150C064F}" destId="{BEBE39A4-D286-45BE-8C26-99DDC2614E7C}" srcOrd="0" destOrd="0" presId="urn:microsoft.com/office/officeart/2005/8/layout/hList9"/>
+    <dgm:cxn modelId="{5420F7E4-1DCA-4537-966D-2D84AC763F55}" type="presOf" srcId="{B3A4CFCF-8579-42FB-ABC3-AF036B385751}" destId="{EAD1BD7D-225C-48A4-90CC-92464D1A0043}" srcOrd="0" destOrd="0" presId="urn:microsoft.com/office/officeart/2005/8/layout/hList9"/>
+    <dgm:cxn modelId="{2731F0E7-E943-4325-BA04-0E58C18F6066}" type="presOf" srcId="{06B9F379-0FBC-4679-A4CF-9FDCF6C36FCC}" destId="{D11A74E1-5FCB-4366-9790-51977417C95D}" srcOrd="0" destOrd="0" presId="urn:microsoft.com/office/officeart/2005/8/layout/hList9"/>
+    <dgm:cxn modelId="{320F8CE8-6370-44FE-8716-76B0827ECEE1}" type="presOf" srcId="{85B93EC2-982B-4C02-A8CE-419F69B41ACA}" destId="{7DF42A3A-22A7-414C-B84E-1F14B99AC416}" srcOrd="1" destOrd="0" presId="urn:microsoft.com/office/officeart/2005/8/layout/hList9"/>
+    <dgm:cxn modelId="{42FB0EEE-AB8B-4095-BEF0-44A0B014C1BC}" type="presOf" srcId="{DB9FB862-4759-4D6A-84F3-01524B92723B}" destId="{69226676-7B84-4407-B251-53F22C063F6E}" srcOrd="0" destOrd="0" presId="urn:microsoft.com/office/officeart/2005/8/layout/hList9"/>
     <dgm:cxn modelId="{92B5CCEF-1CDF-4025-ACF6-0780E13B9A00}" type="presOf" srcId="{7CB6360B-4022-4E96-922B-A12DE0E2A39F}" destId="{1877502C-A892-4DC0-ADA6-FA065097BB90}" srcOrd="0" destOrd="0" presId="urn:microsoft.com/office/officeart/2005/8/layout/hList9"/>
     <dgm:cxn modelId="{62ECA4F6-D6A0-41F0-AB7C-2AA480A6F080}" type="presOf" srcId="{70879558-61CA-4CCD-B2D6-5349B01EF337}" destId="{3EBE42F0-6491-49CC-95DC-985BA00CD458}" srcOrd="1" destOrd="0" presId="urn:microsoft.com/office/officeart/2005/8/layout/hList9"/>
-    <dgm:cxn modelId="{4CCFFDF9-D8E9-43FF-9A5C-0D554AC5AAB1}" type="presOf" srcId="{50451020-5E1A-4778-9E8D-169182A36191}" destId="{2B18CCD9-D6B1-4225-8D26-4BA691BB1837}" srcOrd="1" destOrd="0" presId="urn:microsoft.com/office/officeart/2005/8/layout/hList9"/>
-    <dgm:cxn modelId="{70CAB4FC-3D17-49C2-8A7B-F387031FCDCA}" srcId="{7FCE83D9-631B-4420-BBFC-CA0AFA59F747}" destId="{DB9FB862-4759-4D6A-84F3-01524B92723B}" srcOrd="0" destOrd="0" parTransId="{CD1EE44C-3116-420B-89E3-1D797CB25D34}" sibTransId="{4BD4D4A5-043E-4ED5-A5CA-8D46DADC3150}"/>
+    <dgm:cxn modelId="{9130D2F7-3F56-4BEB-9D34-83A97E85A106}" type="presOf" srcId="{28C89411-2B01-41E9-8274-DDD7006030DA}" destId="{7C0D7CEE-B755-4FC2-8B2E-905A3D94C71B}" srcOrd="1" destOrd="0" presId="urn:microsoft.com/office/officeart/2005/8/layout/hList9"/>
+    <dgm:cxn modelId="{41A851FA-540A-4B03-803C-1D3C4069615C}" type="presOf" srcId="{621F5721-CE6C-4594-9958-72E5AA1941ED}" destId="{794955AD-1927-49A0-84E8-2CCDC252516A}" srcOrd="0" destOrd="0" presId="urn:microsoft.com/office/officeart/2005/8/layout/hList9"/>
+    <dgm:cxn modelId="{70CAB4FC-3D17-49C2-8A7B-F387031FCDCA}" srcId="{00C18FBF-3FF5-4C16-97CF-AF03740D7AB6}" destId="{DB9FB862-4759-4D6A-84F3-01524B92723B}" srcOrd="3" destOrd="0" parTransId="{CD1EE44C-3116-420B-89E3-1D797CB25D34}" sibTransId="{4BD4D4A5-043E-4ED5-A5CA-8D46DADC3150}"/>
     <dgm:cxn modelId="{E1D1E23B-EC87-45CC-9E87-38B27A23764D}" type="presParOf" srcId="{0DC7A063-583D-4B0F-88B2-BD54F95D95AF}" destId="{3B23570A-ECC9-4DF8-BCB4-0465C69CBB88}" srcOrd="0" destOrd="0" presId="urn:microsoft.com/office/officeart/2005/8/layout/hList9"/>
     <dgm:cxn modelId="{82537023-5CD7-4BB7-84CF-DE8196338CF2}" type="presParOf" srcId="{0DC7A063-583D-4B0F-88B2-BD54F95D95AF}" destId="{FC66A233-6BBA-46AF-B2F6-28E379B158E2}" srcOrd="1" destOrd="0" presId="urn:microsoft.com/office/officeart/2005/8/layout/hList9"/>
     <dgm:cxn modelId="{5DFED7C8-2E54-4441-B032-3A4788B2A8D3}" type="presParOf" srcId="{FC66A233-6BBA-46AF-B2F6-28E379B158E2}" destId="{46739A04-1AA3-49C6-8EA7-EB1DE975B900}" srcOrd="0" destOrd="0" presId="urn:microsoft.com/office/officeart/2005/8/layout/hList9"/>
@@ -2863,44 +2114,62 @@
     <dgm:cxn modelId="{DEF99A7A-98F1-424D-AC92-7C6B69A0E544}" type="presParOf" srcId="{0DC7A063-583D-4B0F-88B2-BD54F95D95AF}" destId="{3845DB9A-BEF3-4D5D-B9C7-5FC0456401AC}" srcOrd="2" destOrd="0" presId="urn:microsoft.com/office/officeart/2005/8/layout/hList9"/>
     <dgm:cxn modelId="{ACD8FD0D-39C9-49DB-B77E-B03522FDF5FC}" type="presParOf" srcId="{0DC7A063-583D-4B0F-88B2-BD54F95D95AF}" destId="{FC7ED273-8CFD-43C2-9C05-44FADF3E0637}" srcOrd="3" destOrd="0" presId="urn:microsoft.com/office/officeart/2005/8/layout/hList9"/>
     <dgm:cxn modelId="{2C72EC61-81F4-4DCD-A533-255CBC66AE34}" type="presParOf" srcId="{0DC7A063-583D-4B0F-88B2-BD54F95D95AF}" destId="{13C564B0-C27E-4ABA-AFDA-59E145B256BA}" srcOrd="4" destOrd="0" presId="urn:microsoft.com/office/officeart/2005/8/layout/hList9"/>
-    <dgm:cxn modelId="{775600F8-FCFE-4862-8108-85F84EA9DEE2}" type="presParOf" srcId="{0DC7A063-583D-4B0F-88B2-BD54F95D95AF}" destId="{6300E233-87DF-4270-9808-160BFEB8A5BE}" srcOrd="5" destOrd="0" presId="urn:microsoft.com/office/officeart/2005/8/layout/hList9"/>
-    <dgm:cxn modelId="{AE3B7A69-67E7-41D2-BC1A-3586A3CC259D}" type="presParOf" srcId="{0DC7A063-583D-4B0F-88B2-BD54F95D95AF}" destId="{6E53DEF7-499E-42EE-802D-59B2F8915392}" srcOrd="6" destOrd="0" presId="urn:microsoft.com/office/officeart/2005/8/layout/hList9"/>
-    <dgm:cxn modelId="{76A9B804-07B5-4060-AA61-249A1765ECB9}" type="presParOf" srcId="{6E53DEF7-499E-42EE-802D-59B2F8915392}" destId="{E08C30D1-35EA-4D05-9731-5D01E3FCBD09}" srcOrd="0" destOrd="0" presId="urn:microsoft.com/office/officeart/2005/8/layout/hList9"/>
-    <dgm:cxn modelId="{6162898E-21FD-497B-BFEE-B78CF45F7D9A}" type="presParOf" srcId="{6E53DEF7-499E-42EE-802D-59B2F8915392}" destId="{2F3BD88A-9166-4A26-B941-B9BAEE1A11D5}" srcOrd="1" destOrd="0" presId="urn:microsoft.com/office/officeart/2005/8/layout/hList9"/>
-    <dgm:cxn modelId="{71D4EFDE-15BC-4327-9242-5F72F9DAFAD4}" type="presParOf" srcId="{2F3BD88A-9166-4A26-B941-B9BAEE1A11D5}" destId="{F660F4B9-35DB-4256-A868-A35C6DCCF6B2}" srcOrd="0" destOrd="0" presId="urn:microsoft.com/office/officeart/2005/8/layout/hList9"/>
-    <dgm:cxn modelId="{9B414BA4-2018-40DF-8E7D-AD7E78EF0217}" type="presParOf" srcId="{2F3BD88A-9166-4A26-B941-B9BAEE1A11D5}" destId="{10C9E3CF-3A8F-4100-8ACD-91E2373197A2}" srcOrd="1" destOrd="0" presId="urn:microsoft.com/office/officeart/2005/8/layout/hList9"/>
-    <dgm:cxn modelId="{28BA3997-5DD1-4713-9F4F-B2881F36E8DC}" type="presParOf" srcId="{6E53DEF7-499E-42EE-802D-59B2F8915392}" destId="{60887C36-4733-46AC-A452-5444F6BC3B23}" srcOrd="2" destOrd="0" presId="urn:microsoft.com/office/officeart/2005/8/layout/hList9"/>
-    <dgm:cxn modelId="{7A6208FE-C5A8-4871-9488-BEEAE472C061}" type="presParOf" srcId="{60887C36-4733-46AC-A452-5444F6BC3B23}" destId="{614EBA0E-D12B-447E-B378-B0FA2DEBEA2F}" srcOrd="0" destOrd="0" presId="urn:microsoft.com/office/officeart/2005/8/layout/hList9"/>
-    <dgm:cxn modelId="{2148A8C9-9BA6-45BD-9008-59301C4B49FC}" type="presParOf" srcId="{60887C36-4733-46AC-A452-5444F6BC3B23}" destId="{B12AEB83-0A64-4B36-BF01-B2F834861BAA}" srcOrd="1" destOrd="0" presId="urn:microsoft.com/office/officeart/2005/8/layout/hList9"/>
-    <dgm:cxn modelId="{32E6E4AD-0BFD-4285-AC4A-131E4A0904F2}" type="presParOf" srcId="{6E53DEF7-499E-42EE-802D-59B2F8915392}" destId="{3055F178-D8CA-413A-99F2-20C8231C0651}" srcOrd="3" destOrd="0" presId="urn:microsoft.com/office/officeart/2005/8/layout/hList9"/>
-    <dgm:cxn modelId="{A1DB4BC0-DADA-4058-A3BB-D04BE7DF689A}" type="presParOf" srcId="{3055F178-D8CA-413A-99F2-20C8231C0651}" destId="{68509703-D239-4E1B-8CF0-EF08079E1226}" srcOrd="0" destOrd="0" presId="urn:microsoft.com/office/officeart/2005/8/layout/hList9"/>
-    <dgm:cxn modelId="{5B5F83FC-F721-4241-90AB-7117B39AABD5}" type="presParOf" srcId="{3055F178-D8CA-413A-99F2-20C8231C0651}" destId="{E1767793-EDD5-4203-A612-8120A71CA906}" srcOrd="1" destOrd="0" presId="urn:microsoft.com/office/officeart/2005/8/layout/hList9"/>
-    <dgm:cxn modelId="{D8406746-50BE-425E-A523-9ED524500743}" type="presParOf" srcId="{0DC7A063-583D-4B0F-88B2-BD54F95D95AF}" destId="{69136330-53DB-4978-A56B-160862279381}" srcOrd="7" destOrd="0" presId="urn:microsoft.com/office/officeart/2005/8/layout/hList9"/>
-    <dgm:cxn modelId="{A91BC494-75AC-4CCA-8CC1-7E9884C2F3AD}" type="presParOf" srcId="{0DC7A063-583D-4B0F-88B2-BD54F95D95AF}" destId="{FD776C1E-557E-4553-9447-49B69EEC7907}" srcOrd="8" destOrd="0" presId="urn:microsoft.com/office/officeart/2005/8/layout/hList9"/>
-    <dgm:cxn modelId="{487F9920-08DF-4AC5-BA64-D35F42602B66}" type="presParOf" srcId="{0DC7A063-583D-4B0F-88B2-BD54F95D95AF}" destId="{FC2522F1-14BB-4B37-B60E-2E8A7E8A6C30}" srcOrd="9" destOrd="0" presId="urn:microsoft.com/office/officeart/2005/8/layout/hList9"/>
-    <dgm:cxn modelId="{DC194D92-7E98-42DD-A8CA-BCD1EDD2C95D}" type="presParOf" srcId="{0DC7A063-583D-4B0F-88B2-BD54F95D95AF}" destId="{2C2F6211-85A7-47FE-9239-DE94DF41A263}" srcOrd="10" destOrd="0" presId="urn:microsoft.com/office/officeart/2005/8/layout/hList9"/>
-    <dgm:cxn modelId="{575F4FD6-9E0F-4F5E-88EE-9B265B6FD4F4}" type="presParOf" srcId="{0DC7A063-583D-4B0F-88B2-BD54F95D95AF}" destId="{7B0C2EAE-70CB-4160-863D-210C3C66D5FD}" srcOrd="11" destOrd="0" presId="urn:microsoft.com/office/officeart/2005/8/layout/hList9"/>
-    <dgm:cxn modelId="{8AE96C49-A416-4FC7-84EE-2BDAF35C57FF}" type="presParOf" srcId="{7B0C2EAE-70CB-4160-863D-210C3C66D5FD}" destId="{5AF3752E-55A6-443C-AD35-C49DF50A4566}" srcOrd="0" destOrd="0" presId="urn:microsoft.com/office/officeart/2005/8/layout/hList9"/>
-    <dgm:cxn modelId="{235B263C-399E-4245-95BD-2AA1F19D4AB4}" type="presParOf" srcId="{7B0C2EAE-70CB-4160-863D-210C3C66D5FD}" destId="{53567A66-F0E9-4EF8-ADA9-764BA36AA6A9}" srcOrd="1" destOrd="0" presId="urn:microsoft.com/office/officeart/2005/8/layout/hList9"/>
-    <dgm:cxn modelId="{265DA8D6-D429-4956-8CB8-10EE7EF20F0C}" type="presParOf" srcId="{53567A66-F0E9-4EF8-ADA9-764BA36AA6A9}" destId="{AD2806AC-6A03-4F05-9F4D-F72EA0E56FBF}" srcOrd="0" destOrd="0" presId="urn:microsoft.com/office/officeart/2005/8/layout/hList9"/>
-    <dgm:cxn modelId="{35A8C2CA-EB30-45FD-8152-A7470BE42B4C}" type="presParOf" srcId="{53567A66-F0E9-4EF8-ADA9-764BA36AA6A9}" destId="{F8977219-728E-448F-AE8B-46B14F4F17DE}" srcOrd="1" destOrd="0" presId="urn:microsoft.com/office/officeart/2005/8/layout/hList9"/>
-    <dgm:cxn modelId="{6ACEADBE-023B-4505-93FF-04069F754490}" type="presParOf" srcId="{7B0C2EAE-70CB-4160-863D-210C3C66D5FD}" destId="{46A8623B-DC64-4ED6-B73D-98FEAB030508}" srcOrd="2" destOrd="0" presId="urn:microsoft.com/office/officeart/2005/8/layout/hList9"/>
-    <dgm:cxn modelId="{AD010A9C-D63C-4BD8-BA56-A4D20026F974}" type="presParOf" srcId="{46A8623B-DC64-4ED6-B73D-98FEAB030508}" destId="{5314AADB-0AD3-4BAE-9F15-B0FE4F44C802}" srcOrd="0" destOrd="0" presId="urn:microsoft.com/office/officeart/2005/8/layout/hList9"/>
-    <dgm:cxn modelId="{10F973FE-8000-468C-900B-4ED99BE40E65}" type="presParOf" srcId="{46A8623B-DC64-4ED6-B73D-98FEAB030508}" destId="{96624143-7928-48E9-817F-BC4A07250C32}" srcOrd="1" destOrd="0" presId="urn:microsoft.com/office/officeart/2005/8/layout/hList9"/>
-    <dgm:cxn modelId="{EF3F399A-E096-436A-AD74-CF747D62B02A}" type="presParOf" srcId="{0DC7A063-583D-4B0F-88B2-BD54F95D95AF}" destId="{FBCC4E74-37C0-494F-ABC0-7D18132E1437}" srcOrd="12" destOrd="0" presId="urn:microsoft.com/office/officeart/2005/8/layout/hList9"/>
-    <dgm:cxn modelId="{5EA17F20-F6C6-4B5A-AFEB-38BD8F975065}" type="presParOf" srcId="{0DC7A063-583D-4B0F-88B2-BD54F95D95AF}" destId="{89E6DA6E-7A23-44BD-8A99-378091FF741D}" srcOrd="13" destOrd="0" presId="urn:microsoft.com/office/officeart/2005/8/layout/hList9"/>
-    <dgm:cxn modelId="{463280A8-1DBA-4FE7-B5B2-8151A298EB35}" type="presParOf" srcId="{0DC7A063-583D-4B0F-88B2-BD54F95D95AF}" destId="{E966790E-26B5-4EB8-981F-1094BF4B7611}" srcOrd="14" destOrd="0" presId="urn:microsoft.com/office/officeart/2005/8/layout/hList9"/>
-    <dgm:cxn modelId="{A4221FEF-656B-43DD-8382-199EAB5F1E7B}" type="presParOf" srcId="{0DC7A063-583D-4B0F-88B2-BD54F95D95AF}" destId="{229B7655-E1F4-4CF5-84B8-30F0491D32B5}" srcOrd="15" destOrd="0" presId="urn:microsoft.com/office/officeart/2005/8/layout/hList9"/>
-    <dgm:cxn modelId="{48FA6F14-4694-4C77-8D75-48D3A22A3540}" type="presParOf" srcId="{0DC7A063-583D-4B0F-88B2-BD54F95D95AF}" destId="{F85FFCDF-8E5F-492B-B22D-55A08EACE783}" srcOrd="16" destOrd="0" presId="urn:microsoft.com/office/officeart/2005/8/layout/hList9"/>
-    <dgm:cxn modelId="{3995A447-6B53-4DFA-8494-06C3A1F8D7F7}" type="presParOf" srcId="{F85FFCDF-8E5F-492B-B22D-55A08EACE783}" destId="{600B3FB2-1315-4A84-8613-B445666BC7D2}" srcOrd="0" destOrd="0" presId="urn:microsoft.com/office/officeart/2005/8/layout/hList9"/>
-    <dgm:cxn modelId="{C652D75D-BE73-43BB-9138-B232AAF272A1}" type="presParOf" srcId="{F85FFCDF-8E5F-492B-B22D-55A08EACE783}" destId="{E47C73E9-FBEE-4370-9B3F-E04EB7C4023A}" srcOrd="1" destOrd="0" presId="urn:microsoft.com/office/officeart/2005/8/layout/hList9"/>
-    <dgm:cxn modelId="{5F19BD3C-10AC-4F51-A8FD-00351A52371B}" type="presParOf" srcId="{E47C73E9-FBEE-4370-9B3F-E04EB7C4023A}" destId="{402C2C77-A32C-4D99-9940-12535E1181F2}" srcOrd="0" destOrd="0" presId="urn:microsoft.com/office/officeart/2005/8/layout/hList9"/>
-    <dgm:cxn modelId="{1D14EEBA-2351-4066-8BB7-C42885F1D780}" type="presParOf" srcId="{E47C73E9-FBEE-4370-9B3F-E04EB7C4023A}" destId="{5B88A17E-EFF5-4A04-9CC9-D2131DA9ECCC}" srcOrd="1" destOrd="0" presId="urn:microsoft.com/office/officeart/2005/8/layout/hList9"/>
-    <dgm:cxn modelId="{D230C2D8-6446-403F-971D-BA59F9482A7E}" type="presParOf" srcId="{F85FFCDF-8E5F-492B-B22D-55A08EACE783}" destId="{F3C2D87B-A5E7-46E2-B3D3-58E6D9562663}" srcOrd="2" destOrd="0" presId="urn:microsoft.com/office/officeart/2005/8/layout/hList9"/>
-    <dgm:cxn modelId="{71EFAC4F-7BC1-470A-9459-DE14D03A3B20}" type="presParOf" srcId="{F3C2D87B-A5E7-46E2-B3D3-58E6D9562663}" destId="{3086D0BF-AAD1-4310-88ED-4D81A687BD50}" srcOrd="0" destOrd="0" presId="urn:microsoft.com/office/officeart/2005/8/layout/hList9"/>
-    <dgm:cxn modelId="{6035C1AD-47FA-47BC-9D78-974272EBB1D2}" type="presParOf" srcId="{F3C2D87B-A5E7-46E2-B3D3-58E6D9562663}" destId="{2B18CCD9-D6B1-4225-8D26-4BA691BB1837}" srcOrd="1" destOrd="0" presId="urn:microsoft.com/office/officeart/2005/8/layout/hList9"/>
-    <dgm:cxn modelId="{ADA815FB-429E-4ABD-97FC-4AEA97B4630C}" type="presParOf" srcId="{0DC7A063-583D-4B0F-88B2-BD54F95D95AF}" destId="{9051EF7D-7D6C-4B43-A6C4-239F9933C94D}" srcOrd="17" destOrd="0" presId="urn:microsoft.com/office/officeart/2005/8/layout/hList9"/>
-    <dgm:cxn modelId="{7961C21C-3FE8-4B71-95E5-AB5835F91CC1}" type="presParOf" srcId="{0DC7A063-583D-4B0F-88B2-BD54F95D95AF}" destId="{7453D9C8-CD6E-4AA4-8A19-7F6F667528F0}" srcOrd="18" destOrd="0" presId="urn:microsoft.com/office/officeart/2005/8/layout/hList9"/>
+    <dgm:cxn modelId="{951D4502-B17D-4CF1-BD91-840C37F85E6F}" type="presParOf" srcId="{0DC7A063-583D-4B0F-88B2-BD54F95D95AF}" destId="{2251E69D-71D4-4225-8278-CEF2E0FCFE3F}" srcOrd="5" destOrd="0" presId="urn:microsoft.com/office/officeart/2005/8/layout/hList9"/>
+    <dgm:cxn modelId="{2311C160-32A7-462B-BE2F-73544586EC4B}" type="presParOf" srcId="{0DC7A063-583D-4B0F-88B2-BD54F95D95AF}" destId="{C3ED22B8-D2AB-460C-B17E-A5DD560B88AA}" srcOrd="6" destOrd="0" presId="urn:microsoft.com/office/officeart/2005/8/layout/hList9"/>
+    <dgm:cxn modelId="{120B6F7B-C941-4232-8104-2CF5F8C47BFD}" type="presParOf" srcId="{C3ED22B8-D2AB-460C-B17E-A5DD560B88AA}" destId="{0A3E5C38-EED4-43B9-9D98-FAE62E8909C0}" srcOrd="0" destOrd="0" presId="urn:microsoft.com/office/officeart/2005/8/layout/hList9"/>
+    <dgm:cxn modelId="{5F949B40-561D-41F2-94D8-961DC0D8E08F}" type="presParOf" srcId="{C3ED22B8-D2AB-460C-B17E-A5DD560B88AA}" destId="{7A3C60BA-4D75-40E0-AA7F-6B2C8B99EA6D}" srcOrd="1" destOrd="0" presId="urn:microsoft.com/office/officeart/2005/8/layout/hList9"/>
+    <dgm:cxn modelId="{EE26B209-E087-4CF8-A7F4-6DA5F9C590E3}" type="presParOf" srcId="{7A3C60BA-4D75-40E0-AA7F-6B2C8B99EA6D}" destId="{794955AD-1927-49A0-84E8-2CCDC252516A}" srcOrd="0" destOrd="0" presId="urn:microsoft.com/office/officeart/2005/8/layout/hList9"/>
+    <dgm:cxn modelId="{D8219FBA-E1D6-4A8C-B3E7-76F327E008BB}" type="presParOf" srcId="{7A3C60BA-4D75-40E0-AA7F-6B2C8B99EA6D}" destId="{1BA260C2-9C91-41B1-941E-B6DC8B0E9EB7}" srcOrd="1" destOrd="0" presId="urn:microsoft.com/office/officeart/2005/8/layout/hList9"/>
+    <dgm:cxn modelId="{BA9859D0-ED3B-4CE0-97CF-4577AFD1E095}" type="presParOf" srcId="{C3ED22B8-D2AB-460C-B17E-A5DD560B88AA}" destId="{EE539B57-4A7F-402B-93DA-9F88ACEF69CF}" srcOrd="2" destOrd="0" presId="urn:microsoft.com/office/officeart/2005/8/layout/hList9"/>
+    <dgm:cxn modelId="{1AE5E72C-0E0D-400D-9FBF-DE52788D6CBE}" type="presParOf" srcId="{EE539B57-4A7F-402B-93DA-9F88ACEF69CF}" destId="{FBDD7FE6-0F8B-44A0-AE0C-3B2AD3CC07AD}" srcOrd="0" destOrd="0" presId="urn:microsoft.com/office/officeart/2005/8/layout/hList9"/>
+    <dgm:cxn modelId="{30F03964-CC33-43F4-A242-55F377449688}" type="presParOf" srcId="{EE539B57-4A7F-402B-93DA-9F88ACEF69CF}" destId="{BBEE5F82-DC71-48B2-B53D-C1C1A76F0315}" srcOrd="1" destOrd="0" presId="urn:microsoft.com/office/officeart/2005/8/layout/hList9"/>
+    <dgm:cxn modelId="{65D21940-5F18-4B7A-AA3B-59077521376E}" type="presParOf" srcId="{C3ED22B8-D2AB-460C-B17E-A5DD560B88AA}" destId="{A67A99EA-82CE-41F6-BBC5-E109318D2967}" srcOrd="3" destOrd="0" presId="urn:microsoft.com/office/officeart/2005/8/layout/hList9"/>
+    <dgm:cxn modelId="{755B1F30-4045-40C1-82E0-78064F1ACD5C}" type="presParOf" srcId="{A67A99EA-82CE-41F6-BBC5-E109318D2967}" destId="{D11A74E1-5FCB-4366-9790-51977417C95D}" srcOrd="0" destOrd="0" presId="urn:microsoft.com/office/officeart/2005/8/layout/hList9"/>
+    <dgm:cxn modelId="{179720A9-A090-4995-ADFE-A64AF5D3BB0D}" type="presParOf" srcId="{A67A99EA-82CE-41F6-BBC5-E109318D2967}" destId="{2C4960A3-2C5B-4B02-914C-877EA08BB3E0}" srcOrd="1" destOrd="0" presId="urn:microsoft.com/office/officeart/2005/8/layout/hList9"/>
+    <dgm:cxn modelId="{7DB6E33D-A48E-4ABD-9063-DBFC3EB95000}" type="presParOf" srcId="{C3ED22B8-D2AB-460C-B17E-A5DD560B88AA}" destId="{23C6C96A-B12A-47BE-9985-EC629F84561D}" srcOrd="4" destOrd="0" presId="urn:microsoft.com/office/officeart/2005/8/layout/hList9"/>
+    <dgm:cxn modelId="{05A0FE0F-16B6-4CCB-BED3-389955E5A8A9}" type="presParOf" srcId="{23C6C96A-B12A-47BE-9985-EC629F84561D}" destId="{625F3147-9BFE-46B2-818C-46F1484E6B6A}" srcOrd="0" destOrd="0" presId="urn:microsoft.com/office/officeart/2005/8/layout/hList9"/>
+    <dgm:cxn modelId="{9D081C55-C329-4FC7-BD4C-967BC8C7311E}" type="presParOf" srcId="{23C6C96A-B12A-47BE-9985-EC629F84561D}" destId="{5C5CDE35-6454-4D87-ACD7-39D3292D600F}" srcOrd="1" destOrd="0" presId="urn:microsoft.com/office/officeart/2005/8/layout/hList9"/>
+    <dgm:cxn modelId="{11742D23-75C8-4CC7-8EA6-7CD5F59282C3}" type="presParOf" srcId="{0DC7A063-583D-4B0F-88B2-BD54F95D95AF}" destId="{7303E416-2A8A-4BE3-9559-CBA57FD775B5}" srcOrd="7" destOrd="0" presId="urn:microsoft.com/office/officeart/2005/8/layout/hList9"/>
+    <dgm:cxn modelId="{5A10EC82-4A11-4317-A8B1-300D703F266D}" type="presParOf" srcId="{0DC7A063-583D-4B0F-88B2-BD54F95D95AF}" destId="{CBDBED7C-E4C8-4363-B2F1-5441894E4EFB}" srcOrd="8" destOrd="0" presId="urn:microsoft.com/office/officeart/2005/8/layout/hList9"/>
+    <dgm:cxn modelId="{A012DBEE-A682-4D95-93C9-C98BBA1604F2}" type="presParOf" srcId="{0DC7A063-583D-4B0F-88B2-BD54F95D95AF}" destId="{82C7FDD8-AFBD-4AEE-A0A7-9E00FBD25426}" srcOrd="9" destOrd="0" presId="urn:microsoft.com/office/officeart/2005/8/layout/hList9"/>
+    <dgm:cxn modelId="{A1445C78-6E5C-4779-90F6-7A7E0B5DBA59}" type="presParOf" srcId="{0DC7A063-583D-4B0F-88B2-BD54F95D95AF}" destId="{CBAC1F13-E1E7-4497-8DA8-B54B4ABE1CF6}" srcOrd="10" destOrd="0" presId="urn:microsoft.com/office/officeart/2005/8/layout/hList9"/>
+    <dgm:cxn modelId="{E2175A76-C56E-460E-9EE7-22CFB1C97539}" type="presParOf" srcId="{0DC7A063-583D-4B0F-88B2-BD54F95D95AF}" destId="{C25AE5EE-41B0-40EF-BDBF-3A09DB4EF3A1}" srcOrd="11" destOrd="0" presId="urn:microsoft.com/office/officeart/2005/8/layout/hList9"/>
+    <dgm:cxn modelId="{E95CECDA-8244-4535-AB46-24C90AF28D85}" type="presParOf" srcId="{C25AE5EE-41B0-40EF-BDBF-3A09DB4EF3A1}" destId="{EE83A135-8337-45BE-9974-2097BCE9F8A7}" srcOrd="0" destOrd="0" presId="urn:microsoft.com/office/officeart/2005/8/layout/hList9"/>
+    <dgm:cxn modelId="{CD1A6A0E-7012-4191-8C89-FF586BC9CEA8}" type="presParOf" srcId="{C25AE5EE-41B0-40EF-BDBF-3A09DB4EF3A1}" destId="{22B85C18-846F-4BFA-B063-24412BDF736F}" srcOrd="1" destOrd="0" presId="urn:microsoft.com/office/officeart/2005/8/layout/hList9"/>
+    <dgm:cxn modelId="{641D75D2-90FE-4D2C-A919-C88D86564B82}" type="presParOf" srcId="{22B85C18-846F-4BFA-B063-24412BDF736F}" destId="{72AC9EAC-BCD0-4A2D-8612-F09D47148D71}" srcOrd="0" destOrd="0" presId="urn:microsoft.com/office/officeart/2005/8/layout/hList9"/>
+    <dgm:cxn modelId="{96674ECC-BB5A-4ABF-B23B-BC0F4E46111F}" type="presParOf" srcId="{22B85C18-846F-4BFA-B063-24412BDF736F}" destId="{D8DA147B-8C30-42CE-85D6-6B9053C6E13F}" srcOrd="1" destOrd="0" presId="urn:microsoft.com/office/officeart/2005/8/layout/hList9"/>
+    <dgm:cxn modelId="{A12EB7CB-9274-405A-9EE3-901C3EF7834A}" type="presParOf" srcId="{C25AE5EE-41B0-40EF-BDBF-3A09DB4EF3A1}" destId="{B40BC616-7983-461E-BE08-A6A57B9807A2}" srcOrd="2" destOrd="0" presId="urn:microsoft.com/office/officeart/2005/8/layout/hList9"/>
+    <dgm:cxn modelId="{1BC34DF4-6D48-46C2-B60A-5D0FC4A2A7F2}" type="presParOf" srcId="{B40BC616-7983-461E-BE08-A6A57B9807A2}" destId="{EAD1BD7D-225C-48A4-90CC-92464D1A0043}" srcOrd="0" destOrd="0" presId="urn:microsoft.com/office/officeart/2005/8/layout/hList9"/>
+    <dgm:cxn modelId="{374A37F7-4311-4F9D-99C1-AA76117E0277}" type="presParOf" srcId="{B40BC616-7983-461E-BE08-A6A57B9807A2}" destId="{B7C9C597-8C2B-4944-B28F-245541F5ED8A}" srcOrd="1" destOrd="0" presId="urn:microsoft.com/office/officeart/2005/8/layout/hList9"/>
+    <dgm:cxn modelId="{A9AC6413-3756-4DD5-B07B-204706687709}" type="presParOf" srcId="{C25AE5EE-41B0-40EF-BDBF-3A09DB4EF3A1}" destId="{2A20FD18-A749-41BC-8823-7E5CB71E67E7}" srcOrd="3" destOrd="0" presId="urn:microsoft.com/office/officeart/2005/8/layout/hList9"/>
+    <dgm:cxn modelId="{24D54594-F464-4803-A2EB-3384278D6189}" type="presParOf" srcId="{2A20FD18-A749-41BC-8823-7E5CB71E67E7}" destId="{AC6AA3B2-F7BD-4DBC-8658-A0E24F8CAED5}" srcOrd="0" destOrd="0" presId="urn:microsoft.com/office/officeart/2005/8/layout/hList9"/>
+    <dgm:cxn modelId="{E0C9DE37-1174-4BA8-8972-E260F650B30F}" type="presParOf" srcId="{2A20FD18-A749-41BC-8823-7E5CB71E67E7}" destId="{8B42A167-94E4-4EE4-8A5D-493859E57EC5}" srcOrd="1" destOrd="0" presId="urn:microsoft.com/office/officeart/2005/8/layout/hList9"/>
+    <dgm:cxn modelId="{27AFC204-9534-4BCC-B347-7FBDD0623507}" type="presParOf" srcId="{C25AE5EE-41B0-40EF-BDBF-3A09DB4EF3A1}" destId="{1F8B151D-CD7A-4F92-814A-3FDF28BAE06C}" srcOrd="4" destOrd="0" presId="urn:microsoft.com/office/officeart/2005/8/layout/hList9"/>
+    <dgm:cxn modelId="{BF671ADE-2613-4243-9F89-85F3D35EB237}" type="presParOf" srcId="{1F8B151D-CD7A-4F92-814A-3FDF28BAE06C}" destId="{BEBE39A4-D286-45BE-8C26-99DDC2614E7C}" srcOrd="0" destOrd="0" presId="urn:microsoft.com/office/officeart/2005/8/layout/hList9"/>
+    <dgm:cxn modelId="{243F10B3-B9E1-4827-89F4-525D1BE1A73D}" type="presParOf" srcId="{1F8B151D-CD7A-4F92-814A-3FDF28BAE06C}" destId="{8414F751-81A8-4F83-AB61-87B6590191AC}" srcOrd="1" destOrd="0" presId="urn:microsoft.com/office/officeart/2005/8/layout/hList9"/>
+    <dgm:cxn modelId="{D6F93734-318A-43F1-B1D9-F8EC8965F629}" type="presParOf" srcId="{0DC7A063-583D-4B0F-88B2-BD54F95D95AF}" destId="{4665971C-4301-4860-95C3-8AAB39C64E38}" srcOrd="12" destOrd="0" presId="urn:microsoft.com/office/officeart/2005/8/layout/hList9"/>
+    <dgm:cxn modelId="{35439E41-6A72-4B0F-A001-F54C00D26E0E}" type="presParOf" srcId="{0DC7A063-583D-4B0F-88B2-BD54F95D95AF}" destId="{38BDFE91-DC84-4E35-8A15-4802AA0AF531}" srcOrd="13" destOrd="0" presId="urn:microsoft.com/office/officeart/2005/8/layout/hList9"/>
+    <dgm:cxn modelId="{19ABF5FB-640A-44D2-A24B-6A1C07864E08}" type="presParOf" srcId="{0DC7A063-583D-4B0F-88B2-BD54F95D95AF}" destId="{A4101AEA-D9B7-406F-8CA8-EB6CC900FF14}" srcOrd="14" destOrd="0" presId="urn:microsoft.com/office/officeart/2005/8/layout/hList9"/>
+    <dgm:cxn modelId="{B9BE9D64-E0D3-4FE7-B5DC-C8B9D11E7067}" type="presParOf" srcId="{0DC7A063-583D-4B0F-88B2-BD54F95D95AF}" destId="{DD1E0351-0D09-4260-836A-71B02BF60676}" srcOrd="15" destOrd="0" presId="urn:microsoft.com/office/officeart/2005/8/layout/hList9"/>
+    <dgm:cxn modelId="{02AE7F2C-6C0C-43A0-9AB6-A323B76C24B0}" type="presParOf" srcId="{0DC7A063-583D-4B0F-88B2-BD54F95D95AF}" destId="{2EB49BF0-DCD7-4275-8A8F-0CD83C2BAE4E}" srcOrd="16" destOrd="0" presId="urn:microsoft.com/office/officeart/2005/8/layout/hList9"/>
+    <dgm:cxn modelId="{025836C3-2667-470B-A176-A7E4A166A8D8}" type="presParOf" srcId="{2EB49BF0-DCD7-4275-8A8F-0CD83C2BAE4E}" destId="{FC1DD4C0-5D40-4EEB-952F-FE5F6C693099}" srcOrd="0" destOrd="0" presId="urn:microsoft.com/office/officeart/2005/8/layout/hList9"/>
+    <dgm:cxn modelId="{50CBE7F7-E810-487E-9D7B-E699135DDC90}" type="presParOf" srcId="{2EB49BF0-DCD7-4275-8A8F-0CD83C2BAE4E}" destId="{5176E6AB-D107-4714-B8B1-C657AA0362D4}" srcOrd="1" destOrd="0" presId="urn:microsoft.com/office/officeart/2005/8/layout/hList9"/>
+    <dgm:cxn modelId="{B0C5F4C4-AE72-4E99-B61A-6140A674529C}" type="presParOf" srcId="{5176E6AB-D107-4714-B8B1-C657AA0362D4}" destId="{C1F19226-E171-4933-BA2F-F3AB7038C301}" srcOrd="0" destOrd="0" presId="urn:microsoft.com/office/officeart/2005/8/layout/hList9"/>
+    <dgm:cxn modelId="{F67C8DCD-3815-41EB-9373-A70157292544}" type="presParOf" srcId="{5176E6AB-D107-4714-B8B1-C657AA0362D4}" destId="{CAB7603B-0E9A-48C0-A031-DCD4590D8F2A}" srcOrd="1" destOrd="0" presId="urn:microsoft.com/office/officeart/2005/8/layout/hList9"/>
+    <dgm:cxn modelId="{E068FF09-ED4D-4AAC-A48B-F0D4E2332448}" type="presParOf" srcId="{2EB49BF0-DCD7-4275-8A8F-0CD83C2BAE4E}" destId="{3CF3A251-EA87-453D-82A3-C25B37CFB173}" srcOrd="2" destOrd="0" presId="urn:microsoft.com/office/officeart/2005/8/layout/hList9"/>
+    <dgm:cxn modelId="{10F2BE89-8034-4C95-A700-E106F335521A}" type="presParOf" srcId="{3CF3A251-EA87-453D-82A3-C25B37CFB173}" destId="{F013BCCC-175D-47EB-BB40-008AA9BFF93C}" srcOrd="0" destOrd="0" presId="urn:microsoft.com/office/officeart/2005/8/layout/hList9"/>
+    <dgm:cxn modelId="{B7FAC8AE-5412-492C-8315-12566AC369EB}" type="presParOf" srcId="{3CF3A251-EA87-453D-82A3-C25B37CFB173}" destId="{210D29AE-6F8D-4C46-8112-18AF17D8CD23}" srcOrd="1" destOrd="0" presId="urn:microsoft.com/office/officeart/2005/8/layout/hList9"/>
+    <dgm:cxn modelId="{CEA1ACBF-1121-4D41-B90B-AA3701E1C747}" type="presParOf" srcId="{2EB49BF0-DCD7-4275-8A8F-0CD83C2BAE4E}" destId="{BB670AAF-2F44-4018-9516-F1DCF015D09B}" srcOrd="3" destOrd="0" presId="urn:microsoft.com/office/officeart/2005/8/layout/hList9"/>
+    <dgm:cxn modelId="{397836C4-71EA-4A10-AE47-29D0A87F9AFB}" type="presParOf" srcId="{BB670AAF-2F44-4018-9516-F1DCF015D09B}" destId="{2E447C66-EB28-4EBC-9942-68E964C91CB6}" srcOrd="0" destOrd="0" presId="urn:microsoft.com/office/officeart/2005/8/layout/hList9"/>
+    <dgm:cxn modelId="{5E1B7CF7-BCE8-45C3-B990-D1973BB54317}" type="presParOf" srcId="{BB670AAF-2F44-4018-9516-F1DCF015D09B}" destId="{7DF42A3A-22A7-414C-B84E-1F14B99AC416}" srcOrd="1" destOrd="0" presId="urn:microsoft.com/office/officeart/2005/8/layout/hList9"/>
+    <dgm:cxn modelId="{575110B7-3EE5-4609-A124-2D3364BDF4DC}" type="presParOf" srcId="{2EB49BF0-DCD7-4275-8A8F-0CD83C2BAE4E}" destId="{47F42016-DE63-4B5E-98C7-686BFD441738}" srcOrd="4" destOrd="0" presId="urn:microsoft.com/office/officeart/2005/8/layout/hList9"/>
+    <dgm:cxn modelId="{BB45B2F0-3A86-4F9C-B8FF-4B624385FD8F}" type="presParOf" srcId="{47F42016-DE63-4B5E-98C7-686BFD441738}" destId="{F2A9C5CA-23F2-45CC-8C35-9676AD1B9D5A}" srcOrd="0" destOrd="0" presId="urn:microsoft.com/office/officeart/2005/8/layout/hList9"/>
+    <dgm:cxn modelId="{C8ECEEAF-E6BE-4169-A4A7-D9E5E0D99FB2}" type="presParOf" srcId="{47F42016-DE63-4B5E-98C7-686BFD441738}" destId="{7C0D7CEE-B755-4FC2-8B2E-905A3D94C71B}" srcOrd="1" destOrd="0" presId="urn:microsoft.com/office/officeart/2005/8/layout/hList9"/>
+    <dgm:cxn modelId="{9D92699B-D164-4C3E-8195-5467ECBA5FDF}" type="presParOf" srcId="{2EB49BF0-DCD7-4275-8A8F-0CD83C2BAE4E}" destId="{74A7A3ED-4819-4997-94CE-DCA17C9EC51D}" srcOrd="5" destOrd="0" presId="urn:microsoft.com/office/officeart/2005/8/layout/hList9"/>
+    <dgm:cxn modelId="{8975BAC1-BF37-4B42-8C70-442297E121AC}" type="presParOf" srcId="{74A7A3ED-4819-4997-94CE-DCA17C9EC51D}" destId="{69373249-1CA5-43C2-9B52-BA36A7C69C11}" srcOrd="0" destOrd="0" presId="urn:microsoft.com/office/officeart/2005/8/layout/hList9"/>
+    <dgm:cxn modelId="{74F4157A-BD6E-46CA-973D-4A6DBA2D500B}" type="presParOf" srcId="{74A7A3ED-4819-4997-94CE-DCA17C9EC51D}" destId="{102DE0C6-D8E3-4620-89A1-AD26870A8E7B}" srcOrd="1" destOrd="0" presId="urn:microsoft.com/office/officeart/2005/8/layout/hList9"/>
+    <dgm:cxn modelId="{E9027988-BE22-4FED-A957-6660B59CC217}" type="presParOf" srcId="{0DC7A063-583D-4B0F-88B2-BD54F95D95AF}" destId="{1ACD62BD-37A9-44BB-8A73-3D533D0318E3}" srcOrd="17" destOrd="0" presId="urn:microsoft.com/office/officeart/2005/8/layout/hList9"/>
+    <dgm:cxn modelId="{ACF71687-0DCC-48A5-A347-D98399CEE124}" type="presParOf" srcId="{0DC7A063-583D-4B0F-88B2-BD54F95D95AF}" destId="{69226676-7B84-4407-B251-53F22C063F6E}" srcOrd="18" destOrd="0" presId="urn:microsoft.com/office/officeart/2005/8/layout/hList9"/>
   </dgm:cxnLst>
   <dgm:bg/>
   <dgm:whole/>
@@ -2927,8 +2196,8 @@
       </dsp:nvSpPr>
       <dsp:spPr>
         <a:xfrm>
-          <a:off x="819461" y="453531"/>
-          <a:ext cx="1526209" cy="1017981"/>
+          <a:off x="565310" y="581081"/>
+          <a:ext cx="1111299" cy="741236"/>
         </a:xfrm>
         <a:prstGeom prst="rect">
           <a:avLst/>
@@ -2971,12 +2240,12 @@
         <a:fontRef idx="minor"/>
       </dsp:style>
       <dsp:txBody>
-        <a:bodyPr spcFirstLastPara="0" vert="horz" wrap="square" lIns="0" tIns="120904" rIns="120904" bIns="120904" numCol="1" spcCol="1270" anchor="ctr" anchorCtr="0">
+        <a:bodyPr spcFirstLastPara="0" vert="horz" wrap="square" lIns="0" tIns="85344" rIns="85344" bIns="85344" numCol="1" spcCol="1270" anchor="ctr" anchorCtr="0">
           <a:noAutofit/>
         </a:bodyPr>
         <a:lstStyle/>
         <a:p>
-          <a:pPr marL="0" lvl="0" indent="0" algn="l" defTabSz="755650">
+          <a:pPr marL="0" lvl="0" indent="0" algn="l" defTabSz="533400">
             <a:lnSpc>
               <a:spcPct val="90000"/>
             </a:lnSpc>
@@ -2989,14 +2258,14 @@
             <a:buNone/>
           </a:pPr>
           <a:r>
-            <a:rPr lang="en-US" sz="1700" kern="1200" dirty="0"/>
-            <a:t>Task description</a:t>
+            <a:rPr lang="en-US" sz="1200" kern="1200" dirty="0"/>
+            <a:t>Task</a:t>
           </a:r>
         </a:p>
       </dsp:txBody>
       <dsp:txXfrm>
-        <a:off x="1063655" y="453531"/>
-        <a:ext cx="1282015" cy="1017981"/>
+        <a:off x="743118" y="581081"/>
+        <a:ext cx="933491" cy="741236"/>
       </dsp:txXfrm>
     </dsp:sp>
     <dsp:sp modelId="{59179C9B-8BA4-4AC7-ACB1-A12DE00142E2}">
@@ -3006,8 +2275,8 @@
       </dsp:nvSpPr>
       <dsp:spPr>
         <a:xfrm>
-          <a:off x="819461" y="1471513"/>
-          <a:ext cx="1526209" cy="1017981"/>
+          <a:off x="589464" y="1322318"/>
+          <a:ext cx="1062991" cy="796043"/>
         </a:xfrm>
         <a:prstGeom prst="rect">
           <a:avLst/>
@@ -3050,12 +2319,12 @@
         <a:fontRef idx="minor"/>
       </dsp:style>
       <dsp:txBody>
-        <a:bodyPr spcFirstLastPara="0" vert="horz" wrap="square" lIns="0" tIns="120904" rIns="120904" bIns="120904" numCol="1" spcCol="1270" anchor="ctr" anchorCtr="0">
+        <a:bodyPr spcFirstLastPara="0" vert="horz" wrap="square" lIns="0" tIns="85344" rIns="85344" bIns="85344" numCol="1" spcCol="1270" anchor="ctr" anchorCtr="0">
           <a:noAutofit/>
         </a:bodyPr>
         <a:lstStyle/>
         <a:p>
-          <a:pPr marL="0" lvl="0" indent="0" algn="l" defTabSz="755650">
+          <a:pPr marL="0" lvl="0" indent="0" algn="l" defTabSz="533400">
             <a:lnSpc>
               <a:spcPct val="90000"/>
             </a:lnSpc>
@@ -3068,14 +2337,14 @@
             <a:buNone/>
           </a:pPr>
           <a:r>
-            <a:rPr lang="en-US" sz="1700" kern="1200" dirty="0"/>
-            <a:t>Task description</a:t>
+            <a:rPr lang="en-US" sz="1200" b="1" kern="1200" dirty="0"/>
+            <a:t>Improve Data Quality</a:t>
           </a:r>
         </a:p>
       </dsp:txBody>
       <dsp:txXfrm>
-        <a:off x="1063655" y="1471513"/>
-        <a:ext cx="1282015" cy="1017981"/>
+        <a:off x="759543" y="1322318"/>
+        <a:ext cx="892912" cy="796043"/>
       </dsp:txXfrm>
     </dsp:sp>
     <dsp:sp modelId="{1877502C-A892-4DC0-ADA6-FA065097BB90}">
@@ -3085,8 +2354,8 @@
       </dsp:nvSpPr>
       <dsp:spPr>
         <a:xfrm>
-          <a:off x="819461" y="2489494"/>
-          <a:ext cx="1526209" cy="1017981"/>
+          <a:off x="565310" y="2118361"/>
+          <a:ext cx="1111299" cy="741236"/>
         </a:xfrm>
         <a:prstGeom prst="rect">
           <a:avLst/>
@@ -3129,12 +2398,12 @@
         <a:fontRef idx="minor"/>
       </dsp:style>
       <dsp:txBody>
-        <a:bodyPr spcFirstLastPara="0" vert="horz" wrap="square" lIns="0" tIns="120904" rIns="120904" bIns="120904" numCol="1" spcCol="1270" anchor="ctr" anchorCtr="0">
+        <a:bodyPr spcFirstLastPara="0" vert="horz" wrap="square" lIns="0" tIns="85344" rIns="85344" bIns="85344" numCol="1" spcCol="1270" anchor="ctr" anchorCtr="0">
           <a:noAutofit/>
         </a:bodyPr>
         <a:lstStyle/>
         <a:p>
-          <a:pPr marL="0" lvl="0" indent="0" algn="l" defTabSz="755650">
+          <a:pPr marL="0" lvl="0" indent="0" algn="l" defTabSz="533400">
             <a:lnSpc>
               <a:spcPct val="90000"/>
             </a:lnSpc>
@@ -3147,14 +2416,14 @@
             <a:buNone/>
           </a:pPr>
           <a:r>
-            <a:rPr lang="en-US" sz="1700" kern="1200" dirty="0"/>
-            <a:t>Task description</a:t>
+            <a:rPr lang="en-US" sz="1200" b="1" kern="1200" dirty="0"/>
+            <a:t>Improve Business Intelligence</a:t>
           </a:r>
         </a:p>
       </dsp:txBody>
       <dsp:txXfrm>
-        <a:off x="1063655" y="2489494"/>
-        <a:ext cx="1282015" cy="1017981"/>
+        <a:off x="743118" y="2118361"/>
+        <a:ext cx="933491" cy="741236"/>
       </dsp:txXfrm>
     </dsp:sp>
     <dsp:sp modelId="{51F68A05-A560-4C6F-BC90-521AEF3B0907}">
@@ -3164,8 +2433,8 @@
       </dsp:nvSpPr>
       <dsp:spPr>
         <a:xfrm>
-          <a:off x="819461" y="3507476"/>
-          <a:ext cx="1526209" cy="1017981"/>
+          <a:off x="565310" y="2859598"/>
+          <a:ext cx="1111299" cy="741236"/>
         </a:xfrm>
         <a:prstGeom prst="rect">
           <a:avLst/>
@@ -3208,12 +2477,12 @@
         <a:fontRef idx="minor"/>
       </dsp:style>
       <dsp:txBody>
-        <a:bodyPr spcFirstLastPara="0" vert="horz" wrap="square" lIns="0" tIns="120904" rIns="120904" bIns="120904" numCol="1" spcCol="1270" anchor="ctr" anchorCtr="0">
+        <a:bodyPr spcFirstLastPara="0" vert="horz" wrap="square" lIns="0" tIns="85344" rIns="85344" bIns="85344" numCol="1" spcCol="1270" anchor="ctr" anchorCtr="0">
           <a:noAutofit/>
         </a:bodyPr>
         <a:lstStyle/>
         <a:p>
-          <a:pPr marL="0" lvl="0" indent="0" algn="l" defTabSz="755650">
+          <a:pPr marL="0" lvl="0" indent="0" algn="l" defTabSz="533400">
             <a:lnSpc>
               <a:spcPct val="90000"/>
             </a:lnSpc>
@@ -3226,14 +2495,14 @@
             <a:buNone/>
           </a:pPr>
           <a:r>
-            <a:rPr lang="en-US" sz="1700" kern="1200" dirty="0"/>
-            <a:t>Task description</a:t>
+            <a:rPr lang="en-US" sz="1200" b="1" kern="1200" dirty="0"/>
+            <a:t>Operational Efficiency</a:t>
           </a:r>
         </a:p>
       </dsp:txBody>
       <dsp:txXfrm>
-        <a:off x="1063655" y="3507476"/>
-        <a:ext cx="1282015" cy="1017981"/>
+        <a:off x="743118" y="2859598"/>
+        <a:ext cx="933491" cy="741236"/>
       </dsp:txXfrm>
     </dsp:sp>
     <dsp:sp modelId="{FC7ED273-8CFD-43C2-9C05-44FADF3E0637}">
@@ -3243,8 +2512,8 @@
       </dsp:nvSpPr>
       <dsp:spPr>
         <a:xfrm>
-          <a:off x="5483" y="46542"/>
-          <a:ext cx="1017472" cy="1017472"/>
+          <a:off x="-27382" y="284734"/>
+          <a:ext cx="1712697" cy="1067099"/>
         </a:xfrm>
         <a:prstGeom prst="ellipse">
           <a:avLst/>
@@ -3317,7 +2586,7 @@
         </a:bodyPr>
         <a:lstStyle/>
         <a:p>
-          <a:pPr marL="0" lvl="0" indent="0" algn="ctr" defTabSz="355600">
+          <a:pPr marL="0" lvl="0" indent="0" algn="ctr" defTabSz="711200">
             <a:lnSpc>
               <a:spcPct val="90000"/>
             </a:lnSpc>
@@ -3330,25 +2599,25 @@
             <a:buNone/>
           </a:pPr>
           <a:r>
-            <a:rPr lang="en-US" sz="800" kern="1200" dirty="0"/>
+            <a:rPr lang="en-US" sz="1600" kern="1200" dirty="0"/>
             <a:t>STRENGTHS</a:t>
           </a:r>
         </a:p>
       </dsp:txBody>
       <dsp:txXfrm>
-        <a:off x="154488" y="195547"/>
-        <a:ext cx="719462" cy="719462"/>
+        <a:off x="223437" y="441007"/>
+        <a:ext cx="1211059" cy="754553"/>
       </dsp:txXfrm>
     </dsp:sp>
-    <dsp:sp modelId="{F660F4B9-35DB-4256-A868-A35C6DCCF6B2}">
+    <dsp:sp modelId="{794955AD-1927-49A0-84E8-2CCDC252516A}">
       <dsp:nvSpPr>
         <dsp:cNvPr id="0" name=""/>
         <dsp:cNvSpPr/>
       </dsp:nvSpPr>
       <dsp:spPr>
         <a:xfrm>
-          <a:off x="3363143" y="453531"/>
-          <a:ext cx="1526209" cy="1017981"/>
+          <a:off x="3389308" y="581081"/>
+          <a:ext cx="1111299" cy="741236"/>
         </a:xfrm>
         <a:prstGeom prst="rect">
           <a:avLst/>
@@ -3391,12 +2660,12 @@
         <a:fontRef idx="minor"/>
       </dsp:style>
       <dsp:txBody>
-        <a:bodyPr spcFirstLastPara="0" vert="horz" wrap="square" lIns="0" tIns="120904" rIns="120904" bIns="120904" numCol="1" spcCol="1270" anchor="ctr" anchorCtr="0">
+        <a:bodyPr spcFirstLastPara="0" vert="horz" wrap="square" lIns="0" tIns="85344" rIns="85344" bIns="85344" numCol="1" spcCol="1270" anchor="ctr" anchorCtr="0">
           <a:noAutofit/>
         </a:bodyPr>
         <a:lstStyle/>
         <a:p>
-          <a:pPr marL="0" lvl="0" indent="0" algn="l" defTabSz="755650">
+          <a:pPr marL="0" lvl="0" indent="0" algn="l" defTabSz="533400">
             <a:lnSpc>
               <a:spcPct val="90000"/>
             </a:lnSpc>
@@ -3409,25 +2678,25 @@
             <a:buNone/>
           </a:pPr>
           <a:r>
-            <a:rPr lang="en-US" sz="1700" kern="1200" dirty="0"/>
-            <a:t>Task description</a:t>
+            <a:rPr lang="en-US" sz="1200" kern="1200" dirty="0"/>
+            <a:t>Task</a:t>
           </a:r>
         </a:p>
       </dsp:txBody>
       <dsp:txXfrm>
-        <a:off x="3607337" y="453531"/>
-        <a:ext cx="1282015" cy="1017981"/>
+        <a:off x="3567116" y="581081"/>
+        <a:ext cx="933491" cy="741236"/>
       </dsp:txXfrm>
     </dsp:sp>
-    <dsp:sp modelId="{614EBA0E-D12B-447E-B378-B0FA2DEBEA2F}">
+    <dsp:sp modelId="{FBDD7FE6-0F8B-44A0-AE0C-3B2AD3CC07AD}">
       <dsp:nvSpPr>
         <dsp:cNvPr id="0" name=""/>
         <dsp:cNvSpPr/>
       </dsp:nvSpPr>
       <dsp:spPr>
         <a:xfrm>
-          <a:off x="3363143" y="1471513"/>
-          <a:ext cx="1526209" cy="1017981"/>
+          <a:off x="3389308" y="1322318"/>
+          <a:ext cx="1111299" cy="741236"/>
         </a:xfrm>
         <a:prstGeom prst="rect">
           <a:avLst/>
@@ -3470,12 +2739,12 @@
         <a:fontRef idx="minor"/>
       </dsp:style>
       <dsp:txBody>
-        <a:bodyPr spcFirstLastPara="0" vert="horz" wrap="square" lIns="0" tIns="120904" rIns="120904" bIns="120904" numCol="1" spcCol="1270" anchor="ctr" anchorCtr="0">
+        <a:bodyPr spcFirstLastPara="0" vert="horz" wrap="square" lIns="0" tIns="85344" rIns="85344" bIns="85344" numCol="1" spcCol="1270" anchor="ctr" anchorCtr="0">
           <a:noAutofit/>
         </a:bodyPr>
         <a:lstStyle/>
         <a:p>
-          <a:pPr marL="0" lvl="0" indent="0" algn="l" defTabSz="755650">
+          <a:pPr marL="0" lvl="0" indent="0" algn="l" defTabSz="533400">
             <a:lnSpc>
               <a:spcPct val="90000"/>
             </a:lnSpc>
@@ -3488,25 +2757,25 @@
             <a:buNone/>
           </a:pPr>
           <a:r>
-            <a:rPr lang="en-US" sz="1700" kern="1200" dirty="0"/>
-            <a:t>Task description</a:t>
+            <a:rPr lang="en-US" sz="1200" b="1" kern="1200" dirty="0"/>
+            <a:t>Project Cost vs Service income</a:t>
           </a:r>
         </a:p>
       </dsp:txBody>
       <dsp:txXfrm>
-        <a:off x="3607337" y="1471513"/>
-        <a:ext cx="1282015" cy="1017981"/>
+        <a:off x="3567116" y="1322318"/>
+        <a:ext cx="933491" cy="741236"/>
       </dsp:txXfrm>
     </dsp:sp>
-    <dsp:sp modelId="{68509703-D239-4E1B-8CF0-EF08079E1226}">
+    <dsp:sp modelId="{D11A74E1-5FCB-4366-9790-51977417C95D}">
       <dsp:nvSpPr>
         <dsp:cNvPr id="0" name=""/>
         <dsp:cNvSpPr/>
       </dsp:nvSpPr>
       <dsp:spPr>
         <a:xfrm>
-          <a:off x="3363143" y="2489494"/>
-          <a:ext cx="1526209" cy="1017981"/>
+          <a:off x="3389308" y="2063554"/>
+          <a:ext cx="1111299" cy="741236"/>
         </a:xfrm>
         <a:prstGeom prst="rect">
           <a:avLst/>
@@ -3549,12 +2818,12 @@
         <a:fontRef idx="minor"/>
       </dsp:style>
       <dsp:txBody>
-        <a:bodyPr spcFirstLastPara="0" vert="horz" wrap="square" lIns="0" tIns="120904" rIns="120904" bIns="120904" numCol="1" spcCol="1270" anchor="ctr" anchorCtr="0">
+        <a:bodyPr spcFirstLastPara="0" vert="horz" wrap="square" lIns="0" tIns="85344" rIns="85344" bIns="85344" numCol="1" spcCol="1270" anchor="ctr" anchorCtr="0">
           <a:noAutofit/>
         </a:bodyPr>
         <a:lstStyle/>
         <a:p>
-          <a:pPr marL="0" lvl="0" indent="0" algn="l" defTabSz="755650">
+          <a:pPr marL="0" lvl="0" indent="0" algn="l" defTabSz="533400">
             <a:lnSpc>
               <a:spcPct val="90000"/>
             </a:lnSpc>
@@ -3567,25 +2836,119 @@
             <a:buNone/>
           </a:pPr>
           <a:r>
-            <a:rPr lang="en-US" sz="1700" kern="1200" dirty="0"/>
-            <a:t>Task description</a:t>
+            <a:rPr lang="en-US" sz="1200" b="1" kern="1200" dirty="0"/>
+            <a:t>Disruption</a:t>
           </a:r>
         </a:p>
       </dsp:txBody>
       <dsp:txXfrm>
-        <a:off x="3607337" y="2489494"/>
-        <a:ext cx="1282015" cy="1017981"/>
+        <a:off x="3567116" y="2063554"/>
+        <a:ext cx="933491" cy="741236"/>
       </dsp:txXfrm>
     </dsp:sp>
-    <dsp:sp modelId="{FD776C1E-557E-4553-9447-49B69EEC7907}">
+    <dsp:sp modelId="{625F3147-9BFE-46B2-818C-46F1484E6B6A}">
       <dsp:nvSpPr>
         <dsp:cNvPr id="0" name=""/>
         <dsp:cNvSpPr/>
       </dsp:nvSpPr>
       <dsp:spPr>
         <a:xfrm>
-          <a:off x="2549165" y="46542"/>
-          <a:ext cx="1017472" cy="1017472"/>
+          <a:off x="3389308" y="2804791"/>
+          <a:ext cx="1111299" cy="741236"/>
+        </a:xfrm>
+        <a:prstGeom prst="rect">
+          <a:avLst/>
+        </a:prstGeom>
+        <a:solidFill>
+          <a:schemeClr val="accent1">
+            <a:alpha val="90000"/>
+            <a:tint val="40000"/>
+            <a:hueOff val="0"/>
+            <a:satOff val="0"/>
+            <a:lumOff val="0"/>
+            <a:alphaOff val="0"/>
+          </a:schemeClr>
+        </a:solidFill>
+        <a:ln w="6350" cap="rnd" cmpd="sng" algn="ctr">
+          <a:solidFill>
+            <a:schemeClr val="accent1">
+              <a:alpha val="90000"/>
+              <a:tint val="40000"/>
+              <a:hueOff val="0"/>
+              <a:satOff val="0"/>
+              <a:lumOff val="0"/>
+              <a:alphaOff val="0"/>
+            </a:schemeClr>
+          </a:solidFill>
+          <a:prstDash val="solid"/>
+        </a:ln>
+        <a:effectLst/>
+      </dsp:spPr>
+      <dsp:style>
+        <a:lnRef idx="1">
+          <a:scrgbClr r="0" g="0" b="0"/>
+        </a:lnRef>
+        <a:fillRef idx="1">
+          <a:scrgbClr r="0" g="0" b="0"/>
+        </a:fillRef>
+        <a:effectRef idx="0">
+          <a:scrgbClr r="0" g="0" b="0"/>
+        </a:effectRef>
+        <a:fontRef idx="minor"/>
+      </dsp:style>
+      <dsp:txBody>
+        <a:bodyPr spcFirstLastPara="0" vert="horz" wrap="square" lIns="0" tIns="85344" rIns="85344" bIns="85344" numCol="1" spcCol="1270" anchor="ctr" anchorCtr="0">
+          <a:noAutofit/>
+        </a:bodyPr>
+        <a:lstStyle/>
+        <a:p>
+          <a:pPr marL="0" lvl="0" indent="0" algn="l" defTabSz="533400">
+            <a:lnSpc>
+              <a:spcPct val="90000"/>
+            </a:lnSpc>
+            <a:spcBef>
+              <a:spcPct val="0"/>
+            </a:spcBef>
+            <a:spcAft>
+              <a:spcPct val="35000"/>
+            </a:spcAft>
+            <a:buNone/>
+          </a:pPr>
+          <a:r>
+            <a:rPr lang="en-US" sz="1200" b="1" kern="1200" dirty="0"/>
+            <a:t>Decision Making – Agreement Reaching – Time taken</a:t>
+          </a:r>
+        </a:p>
+        <a:p>
+          <a:pPr marL="0" lvl="0" indent="0" algn="l" defTabSz="533400">
+            <a:lnSpc>
+              <a:spcPct val="90000"/>
+            </a:lnSpc>
+            <a:spcBef>
+              <a:spcPct val="0"/>
+            </a:spcBef>
+            <a:spcAft>
+              <a:spcPct val="35000"/>
+            </a:spcAft>
+            <a:buNone/>
+          </a:pPr>
+          <a:endParaRPr lang="en-US" sz="700" kern="1200" dirty="0"/>
+        </a:p>
+      </dsp:txBody>
+      <dsp:txXfrm>
+        <a:off x="3567116" y="2804791"/>
+        <a:ext cx="933491" cy="741236"/>
+      </dsp:txXfrm>
+    </dsp:sp>
+    <dsp:sp modelId="{CBDBED7C-E4C8-4363-B2F1-5441894E4EFB}">
+      <dsp:nvSpPr>
+        <dsp:cNvPr id="0" name=""/>
+        <dsp:cNvSpPr/>
+      </dsp:nvSpPr>
+      <dsp:spPr>
+        <a:xfrm>
+          <a:off x="2283005" y="295506"/>
+          <a:ext cx="1444170" cy="1126724"/>
         </a:xfrm>
         <a:prstGeom prst="ellipse">
           <a:avLst/>
@@ -3658,7 +3021,7 @@
         </a:bodyPr>
         <a:lstStyle/>
         <a:p>
-          <a:pPr marL="0" lvl="0" indent="0" algn="ctr" defTabSz="355600">
+          <a:pPr marL="0" lvl="0" indent="0" algn="ctr" defTabSz="711200">
             <a:lnSpc>
               <a:spcPct val="90000"/>
             </a:lnSpc>
@@ -3671,25 +3034,25 @@
             <a:buNone/>
           </a:pPr>
           <a:r>
-            <a:rPr lang="en-US" sz="800" kern="1200" dirty="0"/>
-            <a:t>WEAKNESSES</a:t>
+            <a:rPr lang="en-US" sz="1600" kern="1200" dirty="0"/>
+            <a:t>Weakness</a:t>
           </a:r>
         </a:p>
       </dsp:txBody>
       <dsp:txXfrm>
-        <a:off x="2698170" y="195547"/>
-        <a:ext cx="719462" cy="719462"/>
+        <a:off x="2494499" y="460511"/>
+        <a:ext cx="1021182" cy="796714"/>
       </dsp:txXfrm>
     </dsp:sp>
-    <dsp:sp modelId="{AD2806AC-6A03-4F05-9F4D-F72EA0E56FBF}">
+    <dsp:sp modelId="{72AC9EAC-BCD0-4A2D-8612-F09D47148D71}">
       <dsp:nvSpPr>
         <dsp:cNvPr id="0" name=""/>
         <dsp:cNvSpPr/>
       </dsp:nvSpPr>
       <dsp:spPr>
         <a:xfrm>
-          <a:off x="5906825" y="453531"/>
-          <a:ext cx="1526209" cy="1017981"/>
+          <a:off x="5707548" y="610500"/>
+          <a:ext cx="1170898" cy="741236"/>
         </a:xfrm>
         <a:prstGeom prst="rect">
           <a:avLst/>
@@ -3732,12 +3095,12 @@
         <a:fontRef idx="minor"/>
       </dsp:style>
       <dsp:txBody>
-        <a:bodyPr spcFirstLastPara="0" vert="horz" wrap="square" lIns="0" tIns="120904" rIns="120904" bIns="120904" numCol="1" spcCol="1270" anchor="ctr" anchorCtr="0">
+        <a:bodyPr spcFirstLastPara="0" vert="horz" wrap="square" lIns="0" tIns="85344" rIns="85344" bIns="85344" numCol="1" spcCol="1270" anchor="ctr" anchorCtr="0">
           <a:noAutofit/>
         </a:bodyPr>
         <a:lstStyle/>
         <a:p>
-          <a:pPr marL="0" lvl="0" indent="0" algn="l" defTabSz="755650">
+          <a:pPr marL="0" lvl="0" indent="0" algn="l" defTabSz="533400">
             <a:lnSpc>
               <a:spcPct val="90000"/>
             </a:lnSpc>
@@ -3750,25 +3113,26 @@
             <a:buNone/>
           </a:pPr>
           <a:r>
-            <a:rPr lang="en-US" sz="1700" kern="1200" dirty="0"/>
-            <a:t>Task description</a:t>
+            <a:rPr lang="en-US" sz="1200" kern="1200"/>
+            <a:t>Task</a:t>
           </a:r>
+          <a:endParaRPr lang="en-GB" sz="1200" kern="1200"/>
         </a:p>
       </dsp:txBody>
       <dsp:txXfrm>
-        <a:off x="6151018" y="453531"/>
-        <a:ext cx="1282015" cy="1017981"/>
+        <a:off x="5894892" y="610500"/>
+        <a:ext cx="983554" cy="741236"/>
       </dsp:txXfrm>
     </dsp:sp>
-    <dsp:sp modelId="{5314AADB-0AD3-4BAE-9F15-B0FE4F44C802}">
+    <dsp:sp modelId="{EAD1BD7D-225C-48A4-90CC-92464D1A0043}">
       <dsp:nvSpPr>
         <dsp:cNvPr id="0" name=""/>
         <dsp:cNvSpPr/>
       </dsp:nvSpPr>
       <dsp:spPr>
         <a:xfrm>
-          <a:off x="5906825" y="1471513"/>
-          <a:ext cx="1526209" cy="1017981"/>
+          <a:off x="5747804" y="1320657"/>
+          <a:ext cx="1221481" cy="758574"/>
         </a:xfrm>
         <a:prstGeom prst="rect">
           <a:avLst/>
@@ -3811,12 +3175,12 @@
         <a:fontRef idx="minor"/>
       </dsp:style>
       <dsp:txBody>
-        <a:bodyPr spcFirstLastPara="0" vert="horz" wrap="square" lIns="0" tIns="120904" rIns="120904" bIns="120904" numCol="1" spcCol="1270" anchor="ctr" anchorCtr="0">
+        <a:bodyPr spcFirstLastPara="0" vert="horz" wrap="square" lIns="0" tIns="85344" rIns="85344" bIns="85344" numCol="1" spcCol="1270" anchor="ctr" anchorCtr="0">
           <a:noAutofit/>
         </a:bodyPr>
         <a:lstStyle/>
         <a:p>
-          <a:pPr marL="0" lvl="0" indent="0" algn="l" defTabSz="755650">
+          <a:pPr marL="0" lvl="0" indent="0" algn="l" defTabSz="533400">
             <a:lnSpc>
               <a:spcPct val="90000"/>
             </a:lnSpc>
@@ -3829,25 +3193,184 @@
             <a:buNone/>
           </a:pPr>
           <a:r>
-            <a:rPr lang="en-US" sz="1700" kern="1200" dirty="0"/>
-            <a:t>Task description</a:t>
+            <a:rPr lang="en-US" sz="1200" b="1" kern="1200" dirty="0"/>
+            <a:t>Improve Analytics – Business opportunities</a:t>
           </a:r>
         </a:p>
       </dsp:txBody>
       <dsp:txXfrm>
-        <a:off x="6151018" y="1471513"/>
-        <a:ext cx="1282015" cy="1017981"/>
+        <a:off x="5943241" y="1320657"/>
+        <a:ext cx="1026044" cy="758574"/>
       </dsp:txXfrm>
     </dsp:sp>
-    <dsp:sp modelId="{89E6DA6E-7A23-44BD-8A99-378091FF741D}">
+    <dsp:sp modelId="{AC6AA3B2-F7BD-4DBC-8658-A0E24F8CAED5}">
       <dsp:nvSpPr>
         <dsp:cNvPr id="0" name=""/>
         <dsp:cNvSpPr/>
       </dsp:nvSpPr>
       <dsp:spPr>
         <a:xfrm>
-          <a:off x="5092847" y="46542"/>
-          <a:ext cx="1017472" cy="1017472"/>
+          <a:off x="5578457" y="2067275"/>
+          <a:ext cx="1170898" cy="741236"/>
+        </a:xfrm>
+        <a:prstGeom prst="rect">
+          <a:avLst/>
+        </a:prstGeom>
+        <a:solidFill>
+          <a:schemeClr val="accent1">
+            <a:alpha val="90000"/>
+            <a:tint val="40000"/>
+            <a:hueOff val="0"/>
+            <a:satOff val="0"/>
+            <a:lumOff val="0"/>
+            <a:alphaOff val="0"/>
+          </a:schemeClr>
+        </a:solidFill>
+        <a:ln w="6350" cap="rnd" cmpd="sng" algn="ctr">
+          <a:solidFill>
+            <a:schemeClr val="accent1">
+              <a:alpha val="90000"/>
+              <a:tint val="40000"/>
+              <a:hueOff val="0"/>
+              <a:satOff val="0"/>
+              <a:lumOff val="0"/>
+              <a:alphaOff val="0"/>
+            </a:schemeClr>
+          </a:solidFill>
+          <a:prstDash val="solid"/>
+        </a:ln>
+        <a:effectLst/>
+      </dsp:spPr>
+      <dsp:style>
+        <a:lnRef idx="1">
+          <a:scrgbClr r="0" g="0" b="0"/>
+        </a:lnRef>
+        <a:fillRef idx="1">
+          <a:scrgbClr r="0" g="0" b="0"/>
+        </a:fillRef>
+        <a:effectRef idx="0">
+          <a:scrgbClr r="0" g="0" b="0"/>
+        </a:effectRef>
+        <a:fontRef idx="minor"/>
+      </dsp:style>
+      <dsp:txBody>
+        <a:bodyPr spcFirstLastPara="0" vert="horz" wrap="square" lIns="0" tIns="85344" rIns="85344" bIns="85344" numCol="1" spcCol="1270" anchor="ctr" anchorCtr="0">
+          <a:noAutofit/>
+        </a:bodyPr>
+        <a:lstStyle/>
+        <a:p>
+          <a:pPr marL="0" lvl="0" indent="0" algn="l" defTabSz="533400">
+            <a:lnSpc>
+              <a:spcPct val="90000"/>
+            </a:lnSpc>
+            <a:spcBef>
+              <a:spcPct val="0"/>
+            </a:spcBef>
+            <a:spcAft>
+              <a:spcPct val="35000"/>
+            </a:spcAft>
+            <a:buNone/>
+          </a:pPr>
+          <a:r>
+            <a:rPr lang="en-US" sz="1200" b="1" kern="1200" dirty="0"/>
+            <a:t>Process Standardization = Reuse</a:t>
+          </a:r>
+        </a:p>
+      </dsp:txBody>
+      <dsp:txXfrm>
+        <a:off x="5765800" y="2067275"/>
+        <a:ext cx="983554" cy="741236"/>
+      </dsp:txXfrm>
+    </dsp:sp>
+    <dsp:sp modelId="{BEBE39A4-D286-45BE-8C26-99DDC2614E7C}">
+      <dsp:nvSpPr>
+        <dsp:cNvPr id="0" name=""/>
+        <dsp:cNvSpPr/>
+      </dsp:nvSpPr>
+      <dsp:spPr>
+        <a:xfrm>
+          <a:off x="5719181" y="2797757"/>
+          <a:ext cx="1233693" cy="707199"/>
+        </a:xfrm>
+        <a:prstGeom prst="rect">
+          <a:avLst/>
+        </a:prstGeom>
+        <a:solidFill>
+          <a:schemeClr val="accent1">
+            <a:alpha val="90000"/>
+            <a:tint val="40000"/>
+            <a:hueOff val="0"/>
+            <a:satOff val="0"/>
+            <a:lumOff val="0"/>
+            <a:alphaOff val="0"/>
+          </a:schemeClr>
+        </a:solidFill>
+        <a:ln w="6350" cap="rnd" cmpd="sng" algn="ctr">
+          <a:solidFill>
+            <a:schemeClr val="accent1">
+              <a:alpha val="90000"/>
+              <a:tint val="40000"/>
+              <a:hueOff val="0"/>
+              <a:satOff val="0"/>
+              <a:lumOff val="0"/>
+              <a:alphaOff val="0"/>
+            </a:schemeClr>
+          </a:solidFill>
+          <a:prstDash val="solid"/>
+        </a:ln>
+        <a:effectLst/>
+      </dsp:spPr>
+      <dsp:style>
+        <a:lnRef idx="1">
+          <a:scrgbClr r="0" g="0" b="0"/>
+        </a:lnRef>
+        <a:fillRef idx="1">
+          <a:scrgbClr r="0" g="0" b="0"/>
+        </a:fillRef>
+        <a:effectRef idx="0">
+          <a:scrgbClr r="0" g="0" b="0"/>
+        </a:effectRef>
+        <a:fontRef idx="minor"/>
+      </dsp:style>
+      <dsp:txBody>
+        <a:bodyPr spcFirstLastPara="0" vert="horz" wrap="square" lIns="0" tIns="85344" rIns="85344" bIns="85344" numCol="1" spcCol="1270" anchor="ctr" anchorCtr="0">
+          <a:noAutofit/>
+        </a:bodyPr>
+        <a:lstStyle/>
+        <a:p>
+          <a:pPr marL="0" lvl="0" indent="0" algn="l" defTabSz="533400">
+            <a:lnSpc>
+              <a:spcPct val="90000"/>
+            </a:lnSpc>
+            <a:spcBef>
+              <a:spcPct val="0"/>
+            </a:spcBef>
+            <a:spcAft>
+              <a:spcPct val="35000"/>
+            </a:spcAft>
+            <a:buNone/>
+          </a:pPr>
+          <a:r>
+            <a:rPr lang="en-US" sz="1200" b="1" kern="1200" dirty="0"/>
+            <a:t>Long Term Data Gov Improvement</a:t>
+          </a:r>
+          <a:endParaRPr lang="en-US" sz="1000" kern="1200" dirty="0"/>
+        </a:p>
+      </dsp:txBody>
+      <dsp:txXfrm>
+        <a:off x="5916572" y="2797757"/>
+        <a:ext cx="1036302" cy="707199"/>
+      </dsp:txXfrm>
+    </dsp:sp>
+    <dsp:sp modelId="{38BDFE91-DC84-4E35-8A15-4802AA0AF531}">
+      <dsp:nvSpPr>
+        <dsp:cNvPr id="0" name=""/>
+        <dsp:cNvSpPr/>
+      </dsp:nvSpPr>
+      <dsp:spPr>
+        <a:xfrm>
+          <a:off x="4893525" y="111668"/>
+          <a:ext cx="1719810" cy="1229127"/>
         </a:xfrm>
         <a:prstGeom prst="ellipse">
           <a:avLst/>
@@ -3920,7 +3443,7 @@
         </a:bodyPr>
         <a:lstStyle/>
         <a:p>
-          <a:pPr marL="0" lvl="0" indent="0" algn="ctr" defTabSz="355600">
+          <a:pPr marL="0" lvl="0" indent="0" algn="ctr" defTabSz="711200">
             <a:lnSpc>
               <a:spcPct val="90000"/>
             </a:lnSpc>
@@ -3933,25 +3456,25 @@
             <a:buNone/>
           </a:pPr>
           <a:r>
-            <a:rPr lang="en-US" sz="800" kern="1200" dirty="0"/>
-            <a:t>OPPORTUNITY</a:t>
+            <a:rPr lang="en-US" sz="1600" kern="1200" dirty="0"/>
+            <a:t>Opportunity</a:t>
           </a:r>
         </a:p>
       </dsp:txBody>
       <dsp:txXfrm>
-        <a:off x="5241852" y="195547"/>
-        <a:ext cx="719462" cy="719462"/>
+        <a:off x="5145385" y="291669"/>
+        <a:ext cx="1216090" cy="869125"/>
       </dsp:txXfrm>
     </dsp:sp>
-    <dsp:sp modelId="{402C2C77-A32C-4D99-9940-12535E1181F2}">
+    <dsp:sp modelId="{C1F19226-E171-4933-BA2F-F3AB7038C301}">
       <dsp:nvSpPr>
         <dsp:cNvPr id="0" name=""/>
         <dsp:cNvSpPr/>
       </dsp:nvSpPr>
       <dsp:spPr>
         <a:xfrm>
-          <a:off x="8450507" y="453531"/>
-          <a:ext cx="1526209" cy="1017981"/>
+          <a:off x="8521330" y="570896"/>
+          <a:ext cx="1111299" cy="741236"/>
         </a:xfrm>
         <a:prstGeom prst="rect">
           <a:avLst/>
@@ -3994,12 +3517,12 @@
         <a:fontRef idx="minor"/>
       </dsp:style>
       <dsp:txBody>
-        <a:bodyPr spcFirstLastPara="0" vert="horz" wrap="square" lIns="0" tIns="120904" rIns="120904" bIns="120904" numCol="1" spcCol="1270" anchor="ctr" anchorCtr="0">
+        <a:bodyPr spcFirstLastPara="0" vert="horz" wrap="square" lIns="0" tIns="85344" rIns="85344" bIns="85344" numCol="1" spcCol="1270" anchor="ctr" anchorCtr="0">
           <a:noAutofit/>
         </a:bodyPr>
         <a:lstStyle/>
         <a:p>
-          <a:pPr marL="0" lvl="0" indent="0" algn="l" defTabSz="755650">
+          <a:pPr marL="0" lvl="0" indent="0" algn="l" defTabSz="533400">
             <a:lnSpc>
               <a:spcPct val="90000"/>
             </a:lnSpc>
@@ -4011,26 +3534,23 @@
             </a:spcAft>
             <a:buNone/>
           </a:pPr>
-          <a:r>
-            <a:rPr lang="en-US" sz="1700" kern="1200" dirty="0"/>
-            <a:t>Task description</a:t>
-          </a:r>
+          <a:endParaRPr lang="en-US" sz="1200" kern="1200" dirty="0"/>
         </a:p>
       </dsp:txBody>
       <dsp:txXfrm>
-        <a:off x="8694700" y="453531"/>
-        <a:ext cx="1282015" cy="1017981"/>
+        <a:off x="8699137" y="570896"/>
+        <a:ext cx="933491" cy="741236"/>
       </dsp:txXfrm>
     </dsp:sp>
-    <dsp:sp modelId="{3086D0BF-AAD1-4310-88ED-4D81A687BD50}">
+    <dsp:sp modelId="{F013BCCC-175D-47EB-BB40-008AA9BFF93C}">
       <dsp:nvSpPr>
         <dsp:cNvPr id="0" name=""/>
         <dsp:cNvSpPr/>
       </dsp:nvSpPr>
       <dsp:spPr>
         <a:xfrm>
-          <a:off x="8450507" y="1471513"/>
-          <a:ext cx="1526209" cy="1017981"/>
+          <a:off x="8521330" y="1312133"/>
+          <a:ext cx="1111299" cy="741236"/>
         </a:xfrm>
         <a:prstGeom prst="rect">
           <a:avLst/>
@@ -4073,12 +3593,12 @@
         <a:fontRef idx="minor"/>
       </dsp:style>
       <dsp:txBody>
-        <a:bodyPr spcFirstLastPara="0" vert="horz" wrap="square" lIns="0" tIns="120904" rIns="120904" bIns="120904" numCol="1" spcCol="1270" anchor="ctr" anchorCtr="0">
+        <a:bodyPr spcFirstLastPara="0" vert="horz" wrap="square" lIns="0" tIns="85344" rIns="85344" bIns="85344" numCol="1" spcCol="1270" anchor="ctr" anchorCtr="0">
           <a:noAutofit/>
         </a:bodyPr>
         <a:lstStyle/>
         <a:p>
-          <a:pPr marL="0" lvl="0" indent="0" algn="l" defTabSz="755650">
+          <a:pPr marL="0" lvl="0" indent="0" algn="l" defTabSz="533400">
             <a:lnSpc>
               <a:spcPct val="90000"/>
             </a:lnSpc>
@@ -4091,25 +3611,262 @@
             <a:buNone/>
           </a:pPr>
           <a:r>
-            <a:rPr lang="en-US" sz="1700" kern="1200" dirty="0"/>
-            <a:t>Task description</a:t>
+            <a:rPr lang="en-US" sz="1200" b="1" kern="1200" dirty="0"/>
+            <a:t>Security Risks</a:t>
           </a:r>
         </a:p>
       </dsp:txBody>
       <dsp:txXfrm>
-        <a:off x="8694700" y="1471513"/>
-        <a:ext cx="1282015" cy="1017981"/>
+        <a:off x="8699137" y="1312133"/>
+        <a:ext cx="933491" cy="741236"/>
       </dsp:txXfrm>
     </dsp:sp>
-    <dsp:sp modelId="{7453D9C8-CD6E-4AA4-8A19-7F6F667528F0}">
+    <dsp:sp modelId="{2E447C66-EB28-4EBC-9942-68E964C91CB6}">
       <dsp:nvSpPr>
         <dsp:cNvPr id="0" name=""/>
         <dsp:cNvSpPr/>
       </dsp:nvSpPr>
       <dsp:spPr>
         <a:xfrm>
-          <a:off x="7636529" y="46542"/>
-          <a:ext cx="1017472" cy="1017472"/>
+          <a:off x="8521330" y="2053370"/>
+          <a:ext cx="1111299" cy="741236"/>
+        </a:xfrm>
+        <a:prstGeom prst="rect">
+          <a:avLst/>
+        </a:prstGeom>
+        <a:solidFill>
+          <a:schemeClr val="accent1">
+            <a:alpha val="90000"/>
+            <a:tint val="40000"/>
+            <a:hueOff val="0"/>
+            <a:satOff val="0"/>
+            <a:lumOff val="0"/>
+            <a:alphaOff val="0"/>
+          </a:schemeClr>
+        </a:solidFill>
+        <a:ln w="6350" cap="rnd" cmpd="sng" algn="ctr">
+          <a:solidFill>
+            <a:schemeClr val="accent1">
+              <a:alpha val="90000"/>
+              <a:tint val="40000"/>
+              <a:hueOff val="0"/>
+              <a:satOff val="0"/>
+              <a:lumOff val="0"/>
+              <a:alphaOff val="0"/>
+            </a:schemeClr>
+          </a:solidFill>
+          <a:prstDash val="solid"/>
+        </a:ln>
+        <a:effectLst/>
+      </dsp:spPr>
+      <dsp:style>
+        <a:lnRef idx="1">
+          <a:scrgbClr r="0" g="0" b="0"/>
+        </a:lnRef>
+        <a:fillRef idx="1">
+          <a:scrgbClr r="0" g="0" b="0"/>
+        </a:fillRef>
+        <a:effectRef idx="0">
+          <a:scrgbClr r="0" g="0" b="0"/>
+        </a:effectRef>
+        <a:fontRef idx="minor"/>
+      </dsp:style>
+      <dsp:txBody>
+        <a:bodyPr spcFirstLastPara="0" vert="horz" wrap="square" lIns="0" tIns="85344" rIns="85344" bIns="85344" numCol="1" spcCol="1270" anchor="ctr" anchorCtr="0">
+          <a:noAutofit/>
+        </a:bodyPr>
+        <a:lstStyle/>
+        <a:p>
+          <a:pPr marL="0" lvl="0" indent="0" algn="l" defTabSz="533400">
+            <a:lnSpc>
+              <a:spcPct val="90000"/>
+            </a:lnSpc>
+            <a:spcBef>
+              <a:spcPct val="0"/>
+            </a:spcBef>
+            <a:spcAft>
+              <a:spcPct val="35000"/>
+            </a:spcAft>
+            <a:buNone/>
+          </a:pPr>
+          <a:r>
+            <a:rPr lang="en-US" sz="1200" b="1" kern="1200" dirty="0"/>
+            <a:t>Scope Creep</a:t>
+          </a:r>
+        </a:p>
+      </dsp:txBody>
+      <dsp:txXfrm>
+        <a:off x="8699137" y="2053370"/>
+        <a:ext cx="933491" cy="741236"/>
+      </dsp:txXfrm>
+    </dsp:sp>
+    <dsp:sp modelId="{F2A9C5CA-23F2-45CC-8C35-9676AD1B9D5A}">
+      <dsp:nvSpPr>
+        <dsp:cNvPr id="0" name=""/>
+        <dsp:cNvSpPr/>
+      </dsp:nvSpPr>
+      <dsp:spPr>
+        <a:xfrm>
+          <a:off x="8521330" y="2794607"/>
+          <a:ext cx="1111299" cy="741236"/>
+        </a:xfrm>
+        <a:prstGeom prst="rect">
+          <a:avLst/>
+        </a:prstGeom>
+        <a:solidFill>
+          <a:schemeClr val="accent1">
+            <a:alpha val="90000"/>
+            <a:tint val="40000"/>
+            <a:hueOff val="0"/>
+            <a:satOff val="0"/>
+            <a:lumOff val="0"/>
+            <a:alphaOff val="0"/>
+          </a:schemeClr>
+        </a:solidFill>
+        <a:ln w="6350" cap="rnd" cmpd="sng" algn="ctr">
+          <a:solidFill>
+            <a:schemeClr val="accent1">
+              <a:alpha val="90000"/>
+              <a:tint val="40000"/>
+              <a:hueOff val="0"/>
+              <a:satOff val="0"/>
+              <a:lumOff val="0"/>
+              <a:alphaOff val="0"/>
+            </a:schemeClr>
+          </a:solidFill>
+          <a:prstDash val="solid"/>
+        </a:ln>
+        <a:effectLst/>
+      </dsp:spPr>
+      <dsp:style>
+        <a:lnRef idx="1">
+          <a:scrgbClr r="0" g="0" b="0"/>
+        </a:lnRef>
+        <a:fillRef idx="1">
+          <a:scrgbClr r="0" g="0" b="0"/>
+        </a:fillRef>
+        <a:effectRef idx="0">
+          <a:scrgbClr r="0" g="0" b="0"/>
+        </a:effectRef>
+        <a:fontRef idx="minor"/>
+      </dsp:style>
+      <dsp:txBody>
+        <a:bodyPr spcFirstLastPara="0" vert="horz" wrap="square" lIns="0" tIns="85344" rIns="85344" bIns="85344" numCol="1" spcCol="1270" anchor="ctr" anchorCtr="0">
+          <a:noAutofit/>
+        </a:bodyPr>
+        <a:lstStyle/>
+        <a:p>
+          <a:pPr marL="0" lvl="0" indent="0" algn="l" defTabSz="533400">
+            <a:lnSpc>
+              <a:spcPct val="90000"/>
+            </a:lnSpc>
+            <a:spcBef>
+              <a:spcPct val="0"/>
+            </a:spcBef>
+            <a:spcAft>
+              <a:spcPct val="35000"/>
+            </a:spcAft>
+            <a:buNone/>
+          </a:pPr>
+          <a:r>
+            <a:rPr lang="en-US" sz="1200" b="1" kern="1200" dirty="0"/>
+            <a:t>Stakeholder Resistance</a:t>
+          </a:r>
+        </a:p>
+      </dsp:txBody>
+      <dsp:txXfrm>
+        <a:off x="8699137" y="2794607"/>
+        <a:ext cx="933491" cy="741236"/>
+      </dsp:txXfrm>
+    </dsp:sp>
+    <dsp:sp modelId="{69373249-1CA5-43C2-9B52-BA36A7C69C11}">
+      <dsp:nvSpPr>
+        <dsp:cNvPr id="0" name=""/>
+        <dsp:cNvSpPr/>
+      </dsp:nvSpPr>
+      <dsp:spPr>
+        <a:xfrm>
+          <a:off x="8521330" y="3535843"/>
+          <a:ext cx="1111299" cy="741236"/>
+        </a:xfrm>
+        <a:prstGeom prst="rect">
+          <a:avLst/>
+        </a:prstGeom>
+        <a:solidFill>
+          <a:schemeClr val="accent1">
+            <a:alpha val="90000"/>
+            <a:tint val="40000"/>
+            <a:hueOff val="0"/>
+            <a:satOff val="0"/>
+            <a:lumOff val="0"/>
+            <a:alphaOff val="0"/>
+          </a:schemeClr>
+        </a:solidFill>
+        <a:ln w="6350" cap="rnd" cmpd="sng" algn="ctr">
+          <a:solidFill>
+            <a:schemeClr val="accent1">
+              <a:alpha val="90000"/>
+              <a:tint val="40000"/>
+              <a:hueOff val="0"/>
+              <a:satOff val="0"/>
+              <a:lumOff val="0"/>
+              <a:alphaOff val="0"/>
+            </a:schemeClr>
+          </a:solidFill>
+          <a:prstDash val="solid"/>
+        </a:ln>
+        <a:effectLst/>
+      </dsp:spPr>
+      <dsp:style>
+        <a:lnRef idx="1">
+          <a:scrgbClr r="0" g="0" b="0"/>
+        </a:lnRef>
+        <a:fillRef idx="1">
+          <a:scrgbClr r="0" g="0" b="0"/>
+        </a:fillRef>
+        <a:effectRef idx="0">
+          <a:scrgbClr r="0" g="0" b="0"/>
+        </a:effectRef>
+        <a:fontRef idx="minor"/>
+      </dsp:style>
+      <dsp:txBody>
+        <a:bodyPr spcFirstLastPara="0" vert="horz" wrap="square" lIns="0" tIns="85344" rIns="85344" bIns="85344" numCol="1" spcCol="1270" anchor="ctr" anchorCtr="0">
+          <a:noAutofit/>
+        </a:bodyPr>
+        <a:lstStyle/>
+        <a:p>
+          <a:pPr marL="0" lvl="0" indent="0" algn="l" defTabSz="533400">
+            <a:lnSpc>
+              <a:spcPct val="90000"/>
+            </a:lnSpc>
+            <a:spcBef>
+              <a:spcPct val="0"/>
+            </a:spcBef>
+            <a:spcAft>
+              <a:spcPct val="35000"/>
+            </a:spcAft>
+            <a:buNone/>
+          </a:pPr>
+          <a:r>
+            <a:rPr lang="en-US" sz="1200" b="1" kern="1200" dirty="0"/>
+            <a:t>Upkeep Cost</a:t>
+          </a:r>
+        </a:p>
+      </dsp:txBody>
+      <dsp:txXfrm>
+        <a:off x="8699137" y="3535843"/>
+        <a:ext cx="933491" cy="741236"/>
+      </dsp:txXfrm>
+    </dsp:sp>
+    <dsp:sp modelId="{69226676-7B84-4407-B251-53F22C063F6E}">
+      <dsp:nvSpPr>
+        <dsp:cNvPr id="0" name=""/>
+        <dsp:cNvSpPr/>
+      </dsp:nvSpPr>
+      <dsp:spPr>
+        <a:xfrm>
+          <a:off x="7482015" y="244364"/>
+          <a:ext cx="1447978" cy="1060513"/>
         </a:xfrm>
         <a:prstGeom prst="ellipse">
           <a:avLst/>
@@ -4182,7 +3939,7 @@
         </a:bodyPr>
         <a:lstStyle/>
         <a:p>
-          <a:pPr marL="0" lvl="0" indent="0" algn="ctr" defTabSz="355600">
+          <a:pPr marL="0" lvl="0" indent="0" algn="ctr" defTabSz="711200">
             <a:lnSpc>
               <a:spcPct val="90000"/>
             </a:lnSpc>
@@ -4195,14 +3952,14 @@
             <a:buNone/>
           </a:pPr>
           <a:r>
-            <a:rPr lang="en-US" sz="800" kern="1200" dirty="0"/>
-            <a:t>THREAT</a:t>
+            <a:rPr lang="en-US" sz="1600" kern="1200" dirty="0"/>
+            <a:t>Threats</a:t>
           </a:r>
         </a:p>
       </dsp:txBody>
       <dsp:txXfrm>
-        <a:off x="7785534" y="195547"/>
-        <a:ext cx="719462" cy="719462"/>
+        <a:off x="7694066" y="399673"/>
+        <a:ext cx="1023876" cy="749895"/>
       </dsp:txXfrm>
     </dsp:sp>
   </dsp:spTree>
@@ -10531,665 +10288,6 @@
           <a:p>
             <a:r>
               <a:rPr lang="en-US" dirty="0"/>
-              <a:t>Risks and Issues</a:t>
-            </a:r>
-          </a:p>
-        </p:txBody>
-      </p:sp>
-      <p:sp>
-        <p:nvSpPr>
-          <p:cNvPr id="3" name="Content Placeholder 2"/>
-          <p:cNvSpPr>
-            <a:spLocks noGrp="1"/>
-          </p:cNvSpPr>
-          <p:nvPr>
-            <p:ph sz="half" idx="1"/>
-          </p:nvPr>
-        </p:nvSpPr>
-        <p:spPr/>
-        <p:txBody>
-          <a:bodyPr/>
-          <a:lstStyle/>
-          <a:p>
-            <a:r>
-              <a:rPr lang="en-US" dirty="0"/>
-              <a:t>First bullet point here</a:t>
-            </a:r>
-          </a:p>
-          <a:p>
-            <a:r>
-              <a:rPr lang="en-US" dirty="0"/>
-              <a:t>Second bullet point here</a:t>
-            </a:r>
-          </a:p>
-          <a:p>
-            <a:r>
-              <a:rPr lang="en-US" dirty="0"/>
-              <a:t>Third bullet point here</a:t>
-            </a:r>
-          </a:p>
-        </p:txBody>
-      </p:sp>
-      <p:graphicFrame>
-        <p:nvGraphicFramePr>
-          <p:cNvPr id="16" name="Content Placeholder 15"/>
-          <p:cNvGraphicFramePr>
-            <a:graphicFrameLocks noGrp="1"/>
-          </p:cNvGraphicFramePr>
-          <p:nvPr>
-            <p:ph sz="half" idx="2"/>
-            <p:extLst>
-              <p:ext uri="{D42A27DB-BD31-4B8C-83A1-F6EECF244321}">
-                <p14:modId xmlns:p14="http://schemas.microsoft.com/office/powerpoint/2010/main" val="3146902773"/>
-              </p:ext>
-            </p:extLst>
-          </p:nvPr>
-        </p:nvGraphicFramePr>
-        <p:xfrm>
-          <a:off x="1257302" y="3321423"/>
-          <a:ext cx="4914900" cy="2926080"/>
-        </p:xfrm>
-        <a:graphic>
-          <a:graphicData uri="http://schemas.openxmlformats.org/drawingml/2006/table">
-            <a:tbl>
-              <a:tblPr firstRow="1" bandRow="1">
-                <a:tableStyleId>{5C22544A-7EE6-4342-B048-85BDC9FD1C3A}</a:tableStyleId>
-              </a:tblPr>
-              <a:tblGrid>
-                <a:gridCol w="982980">
-                  <a:extLst>
-                    <a:ext uri="{9D8B030D-6E8A-4147-A177-3AD203B41FA5}">
-                      <a16:colId xmlns:a16="http://schemas.microsoft.com/office/drawing/2014/main" val="20000"/>
-                    </a:ext>
-                  </a:extLst>
-                </a:gridCol>
-                <a:gridCol w="982980">
-                  <a:extLst>
-                    <a:ext uri="{9D8B030D-6E8A-4147-A177-3AD203B41FA5}">
-                      <a16:colId xmlns:a16="http://schemas.microsoft.com/office/drawing/2014/main" val="20001"/>
-                    </a:ext>
-                  </a:extLst>
-                </a:gridCol>
-                <a:gridCol w="982980">
-                  <a:extLst>
-                    <a:ext uri="{9D8B030D-6E8A-4147-A177-3AD203B41FA5}">
-                      <a16:colId xmlns:a16="http://schemas.microsoft.com/office/drawing/2014/main" val="3081029502"/>
-                    </a:ext>
-                  </a:extLst>
-                </a:gridCol>
-                <a:gridCol w="982980">
-                  <a:extLst>
-                    <a:ext uri="{9D8B030D-6E8A-4147-A177-3AD203B41FA5}">
-                      <a16:colId xmlns:a16="http://schemas.microsoft.com/office/drawing/2014/main" val="20002"/>
-                    </a:ext>
-                  </a:extLst>
-                </a:gridCol>
-                <a:gridCol w="982980">
-                  <a:extLst>
-                    <a:ext uri="{9D8B030D-6E8A-4147-A177-3AD203B41FA5}">
-                      <a16:colId xmlns:a16="http://schemas.microsoft.com/office/drawing/2014/main" val="2254064161"/>
-                    </a:ext>
-                  </a:extLst>
-                </a:gridCol>
-              </a:tblGrid>
-              <a:tr h="457200">
-                <a:tc>
-                  <a:txBody>
-                    <a:bodyPr/>
-                    <a:lstStyle/>
-                    <a:p>
-                      <a:r>
-                        <a:rPr lang="en-US" dirty="0"/>
-                        <a:t>RI ID</a:t>
-                      </a:r>
-                      <a:endParaRPr dirty="0"/>
-                    </a:p>
-                  </a:txBody>
-                  <a:tcPr anchor="ctr"/>
-                </a:tc>
-                <a:tc>
-                  <a:txBody>
-                    <a:bodyPr/>
-                    <a:lstStyle/>
-                    <a:p>
-                      <a:pPr algn="ctr"/>
-                      <a:r>
-                        <a:rPr lang="en-US" dirty="0"/>
-                        <a:t>RISKS</a:t>
-                      </a:r>
-                      <a:endParaRPr dirty="0"/>
-                    </a:p>
-                  </a:txBody>
-                  <a:tcPr anchor="ctr"/>
-                </a:tc>
-                <a:tc>
-                  <a:txBody>
-                    <a:bodyPr/>
-                    <a:lstStyle/>
-                    <a:p>
-                      <a:pPr algn="ctr"/>
-                      <a:r>
-                        <a:rPr lang="en-US" dirty="0"/>
-                        <a:t>RISK TYPE</a:t>
-                      </a:r>
-                      <a:endParaRPr dirty="0"/>
-                    </a:p>
-                  </a:txBody>
-                  <a:tcPr anchor="ctr"/>
-                </a:tc>
-                <a:tc>
-                  <a:txBody>
-                    <a:bodyPr/>
-                    <a:lstStyle/>
-                    <a:p>
-                      <a:pPr algn="ctr"/>
-                      <a:r>
-                        <a:rPr lang="en-US" dirty="0"/>
-                        <a:t>ISSUES</a:t>
-                      </a:r>
-                      <a:endParaRPr dirty="0"/>
-                    </a:p>
-                  </a:txBody>
-                  <a:tcPr anchor="ctr"/>
-                </a:tc>
-                <a:tc>
-                  <a:txBody>
-                    <a:bodyPr/>
-                    <a:lstStyle/>
-                    <a:p>
-                      <a:pPr algn="ctr"/>
-                      <a:r>
-                        <a:rPr lang="en-US" dirty="0"/>
-                        <a:t>ISSUE TYPE</a:t>
-                      </a:r>
-                      <a:endParaRPr dirty="0"/>
-                    </a:p>
-                  </a:txBody>
-                  <a:tcPr anchor="ctr"/>
-                </a:tc>
-                <a:extLst>
-                  <a:ext uri="{0D108BD9-81ED-4DB2-BD59-A6C34878D82A}">
-                    <a16:rowId xmlns:a16="http://schemas.microsoft.com/office/drawing/2014/main" val="10000"/>
-                  </a:ext>
-                </a:extLst>
-              </a:tr>
-              <a:tr h="457200">
-                <a:tc>
-                  <a:txBody>
-                    <a:bodyPr/>
-                    <a:lstStyle/>
-                    <a:p>
-                      <a:r>
-                        <a:rPr lang="en-US" dirty="0"/>
-                        <a:t>RI</a:t>
-                      </a:r>
-                      <a:r>
-                        <a:rPr dirty="0"/>
-                        <a:t> 1</a:t>
-                      </a:r>
-                    </a:p>
-                  </a:txBody>
-                  <a:tcPr anchor="ctr"/>
-                </a:tc>
-                <a:tc>
-                  <a:txBody>
-                    <a:bodyPr/>
-                    <a:lstStyle/>
-                    <a:p>
-                      <a:pPr algn="ctr"/>
-                      <a:endParaRPr dirty="0"/>
-                    </a:p>
-                  </a:txBody>
-                  <a:tcPr anchor="ctr"/>
-                </a:tc>
-                <a:tc>
-                  <a:txBody>
-                    <a:bodyPr/>
-                    <a:lstStyle/>
-                    <a:p>
-                      <a:pPr algn="ctr"/>
-                      <a:endParaRPr dirty="0"/>
-                    </a:p>
-                  </a:txBody>
-                  <a:tcPr anchor="ctr"/>
-                </a:tc>
-                <a:tc>
-                  <a:txBody>
-                    <a:bodyPr/>
-                    <a:lstStyle/>
-                    <a:p>
-                      <a:pPr algn="ctr"/>
-                      <a:endParaRPr dirty="0"/>
-                    </a:p>
-                  </a:txBody>
-                  <a:tcPr anchor="ctr"/>
-                </a:tc>
-                <a:tc>
-                  <a:txBody>
-                    <a:bodyPr/>
-                    <a:lstStyle/>
-                    <a:p>
-                      <a:pPr algn="ctr"/>
-                      <a:endParaRPr dirty="0"/>
-                    </a:p>
-                  </a:txBody>
-                  <a:tcPr anchor="ctr"/>
-                </a:tc>
-                <a:extLst>
-                  <a:ext uri="{0D108BD9-81ED-4DB2-BD59-A6C34878D82A}">
-                    <a16:rowId xmlns:a16="http://schemas.microsoft.com/office/drawing/2014/main" val="10001"/>
-                  </a:ext>
-                </a:extLst>
-              </a:tr>
-              <a:tr h="457200">
-                <a:tc>
-                  <a:txBody>
-                    <a:bodyPr/>
-                    <a:lstStyle/>
-                    <a:p>
-                      <a:r>
-                        <a:rPr lang="en-US" dirty="0"/>
-                        <a:t>RI</a:t>
-                      </a:r>
-                      <a:r>
-                        <a:rPr baseline="0" dirty="0"/>
-                        <a:t> 2</a:t>
-                      </a:r>
-                      <a:endParaRPr dirty="0"/>
-                    </a:p>
-                  </a:txBody>
-                  <a:tcPr anchor="ctr"/>
-                </a:tc>
-                <a:tc>
-                  <a:txBody>
-                    <a:bodyPr/>
-                    <a:lstStyle/>
-                    <a:p>
-                      <a:pPr algn="ctr"/>
-                      <a:endParaRPr dirty="0"/>
-                    </a:p>
-                  </a:txBody>
-                  <a:tcPr anchor="ctr"/>
-                </a:tc>
-                <a:tc>
-                  <a:txBody>
-                    <a:bodyPr/>
-                    <a:lstStyle/>
-                    <a:p>
-                      <a:pPr algn="ctr"/>
-                      <a:endParaRPr dirty="0"/>
-                    </a:p>
-                  </a:txBody>
-                  <a:tcPr anchor="ctr"/>
-                </a:tc>
-                <a:tc>
-                  <a:txBody>
-                    <a:bodyPr/>
-                    <a:lstStyle/>
-                    <a:p>
-                      <a:pPr algn="ctr"/>
-                      <a:endParaRPr dirty="0"/>
-                    </a:p>
-                  </a:txBody>
-                  <a:tcPr anchor="ctr"/>
-                </a:tc>
-                <a:tc>
-                  <a:txBody>
-                    <a:bodyPr/>
-                    <a:lstStyle/>
-                    <a:p>
-                      <a:pPr algn="ctr"/>
-                      <a:endParaRPr dirty="0"/>
-                    </a:p>
-                  </a:txBody>
-                  <a:tcPr anchor="ctr"/>
-                </a:tc>
-                <a:extLst>
-                  <a:ext uri="{0D108BD9-81ED-4DB2-BD59-A6C34878D82A}">
-                    <a16:rowId xmlns:a16="http://schemas.microsoft.com/office/drawing/2014/main" val="10002"/>
-                  </a:ext>
-                </a:extLst>
-              </a:tr>
-              <a:tr h="457200">
-                <a:tc>
-                  <a:txBody>
-                    <a:bodyPr/>
-                    <a:lstStyle/>
-                    <a:p>
-                      <a:r>
-                        <a:rPr lang="en-US" dirty="0"/>
-                        <a:t>RI 3</a:t>
-                      </a:r>
-                      <a:endParaRPr dirty="0"/>
-                    </a:p>
-                  </a:txBody>
-                  <a:tcPr anchor="ctr"/>
-                </a:tc>
-                <a:tc>
-                  <a:txBody>
-                    <a:bodyPr/>
-                    <a:lstStyle/>
-                    <a:p>
-                      <a:pPr algn="ctr"/>
-                      <a:endParaRPr dirty="0"/>
-                    </a:p>
-                  </a:txBody>
-                  <a:tcPr anchor="ctr"/>
-                </a:tc>
-                <a:tc>
-                  <a:txBody>
-                    <a:bodyPr/>
-                    <a:lstStyle/>
-                    <a:p>
-                      <a:pPr algn="ctr"/>
-                      <a:endParaRPr dirty="0"/>
-                    </a:p>
-                  </a:txBody>
-                  <a:tcPr anchor="ctr"/>
-                </a:tc>
-                <a:tc>
-                  <a:txBody>
-                    <a:bodyPr/>
-                    <a:lstStyle/>
-                    <a:p>
-                      <a:pPr algn="ctr"/>
-                      <a:endParaRPr dirty="0"/>
-                    </a:p>
-                  </a:txBody>
-                  <a:tcPr anchor="ctr"/>
-                </a:tc>
-                <a:tc>
-                  <a:txBody>
-                    <a:bodyPr/>
-                    <a:lstStyle/>
-                    <a:p>
-                      <a:pPr algn="ctr"/>
-                      <a:endParaRPr dirty="0"/>
-                    </a:p>
-                  </a:txBody>
-                  <a:tcPr anchor="ctr"/>
-                </a:tc>
-                <a:extLst>
-                  <a:ext uri="{0D108BD9-81ED-4DB2-BD59-A6C34878D82A}">
-                    <a16:rowId xmlns:a16="http://schemas.microsoft.com/office/drawing/2014/main" val="10003"/>
-                  </a:ext>
-                </a:extLst>
-              </a:tr>
-              <a:tr h="457200">
-                <a:tc>
-                  <a:txBody>
-                    <a:bodyPr/>
-                    <a:lstStyle/>
-                    <a:p>
-                      <a:endParaRPr dirty="0"/>
-                    </a:p>
-                  </a:txBody>
-                  <a:tcPr anchor="ctr"/>
-                </a:tc>
-                <a:tc>
-                  <a:txBody>
-                    <a:bodyPr/>
-                    <a:lstStyle/>
-                    <a:p>
-                      <a:pPr algn="ctr"/>
-                      <a:endParaRPr dirty="0"/>
-                    </a:p>
-                  </a:txBody>
-                  <a:tcPr anchor="ctr"/>
-                </a:tc>
-                <a:tc>
-                  <a:txBody>
-                    <a:bodyPr/>
-                    <a:lstStyle/>
-                    <a:p>
-                      <a:pPr algn="ctr"/>
-                      <a:endParaRPr dirty="0"/>
-                    </a:p>
-                  </a:txBody>
-                  <a:tcPr anchor="ctr"/>
-                </a:tc>
-                <a:tc>
-                  <a:txBody>
-                    <a:bodyPr/>
-                    <a:lstStyle/>
-                    <a:p>
-                      <a:pPr algn="ctr"/>
-                      <a:endParaRPr dirty="0"/>
-                    </a:p>
-                  </a:txBody>
-                  <a:tcPr anchor="ctr"/>
-                </a:tc>
-                <a:tc>
-                  <a:txBody>
-                    <a:bodyPr/>
-                    <a:lstStyle/>
-                    <a:p>
-                      <a:pPr algn="ctr"/>
-                      <a:endParaRPr dirty="0"/>
-                    </a:p>
-                  </a:txBody>
-                  <a:tcPr anchor="ctr"/>
-                </a:tc>
-                <a:extLst>
-                  <a:ext uri="{0D108BD9-81ED-4DB2-BD59-A6C34878D82A}">
-                    <a16:rowId xmlns:a16="http://schemas.microsoft.com/office/drawing/2014/main" val="4279117335"/>
-                  </a:ext>
-                </a:extLst>
-              </a:tr>
-              <a:tr h="457200">
-                <a:tc>
-                  <a:txBody>
-                    <a:bodyPr/>
-                    <a:lstStyle/>
-                    <a:p>
-                      <a:endParaRPr dirty="0"/>
-                    </a:p>
-                  </a:txBody>
-                  <a:tcPr anchor="ctr"/>
-                </a:tc>
-                <a:tc>
-                  <a:txBody>
-                    <a:bodyPr/>
-                    <a:lstStyle/>
-                    <a:p>
-                      <a:pPr algn="ctr"/>
-                      <a:endParaRPr dirty="0"/>
-                    </a:p>
-                  </a:txBody>
-                  <a:tcPr anchor="ctr"/>
-                </a:tc>
-                <a:tc>
-                  <a:txBody>
-                    <a:bodyPr/>
-                    <a:lstStyle/>
-                    <a:p>
-                      <a:pPr algn="ctr"/>
-                      <a:endParaRPr dirty="0"/>
-                    </a:p>
-                  </a:txBody>
-                  <a:tcPr anchor="ctr"/>
-                </a:tc>
-                <a:tc>
-                  <a:txBody>
-                    <a:bodyPr/>
-                    <a:lstStyle/>
-                    <a:p>
-                      <a:pPr algn="ctr"/>
-                      <a:endParaRPr dirty="0"/>
-                    </a:p>
-                  </a:txBody>
-                  <a:tcPr anchor="ctr"/>
-                </a:tc>
-                <a:tc>
-                  <a:txBody>
-                    <a:bodyPr/>
-                    <a:lstStyle/>
-                    <a:p>
-                      <a:pPr algn="ctr"/>
-                      <a:endParaRPr dirty="0"/>
-                    </a:p>
-                  </a:txBody>
-                  <a:tcPr anchor="ctr"/>
-                </a:tc>
-                <a:extLst>
-                  <a:ext uri="{0D108BD9-81ED-4DB2-BD59-A6C34878D82A}">
-                    <a16:rowId xmlns:a16="http://schemas.microsoft.com/office/drawing/2014/main" val="2318330902"/>
-                  </a:ext>
-                </a:extLst>
-              </a:tr>
-            </a:tbl>
-          </a:graphicData>
-        </a:graphic>
-      </p:graphicFrame>
-    </p:spTree>
-    <p:extLst>
-      <p:ext uri="{BB962C8B-B14F-4D97-AF65-F5344CB8AC3E}">
-        <p14:creationId xmlns:p14="http://schemas.microsoft.com/office/powerpoint/2010/main" val="2853788422"/>
-      </p:ext>
-    </p:extLst>
-  </p:cSld>
-  <p:clrMapOvr>
-    <a:masterClrMapping/>
-  </p:clrMapOvr>
-  <mc:AlternateContent xmlns:mc="http://schemas.openxmlformats.org/markup-compatibility/2006" xmlns:p14="http://schemas.microsoft.com/office/powerpoint/2010/main">
-    <mc:Choice Requires="p14">
-      <p:transition spd="med" p14:dur="700">
-        <p:fade/>
-      </p:transition>
-    </mc:Choice>
-    <mc:Fallback xmlns="">
-      <p:transition spd="med">
-        <p:fade/>
-      </p:transition>
-    </mc:Fallback>
-  </mc:AlternateContent>
-</p:sld>
-</file>
-
-<file path=ppt/slides/slide11.xml><?xml version="1.0" encoding="utf-8"?>
-<p:sld xmlns:a="http://schemas.openxmlformats.org/drawingml/2006/main" xmlns:r="http://schemas.openxmlformats.org/officeDocument/2006/relationships" xmlns:p="http://schemas.openxmlformats.org/presentationml/2006/main">
-  <p:cSld>
-    <p:spTree>
-      <p:nvGrpSpPr>
-        <p:cNvPr id="1" name=""/>
-        <p:cNvGrpSpPr/>
-        <p:nvPr/>
-      </p:nvGrpSpPr>
-      <p:grpSpPr>
-        <a:xfrm>
-          <a:off x="0" y="0"/>
-          <a:ext cx="0" cy="0"/>
-          <a:chOff x="0" y="0"/>
-          <a:chExt cx="0" cy="0"/>
-        </a:xfrm>
-      </p:grpSpPr>
-      <p:sp>
-        <p:nvSpPr>
-          <p:cNvPr id="2" name="Title 1"/>
-          <p:cNvSpPr>
-            <a:spLocks noGrp="1"/>
-          </p:cNvSpPr>
-          <p:nvPr>
-            <p:ph type="title"/>
-          </p:nvPr>
-        </p:nvSpPr>
-        <p:spPr/>
-        <p:txBody>
-          <a:bodyPr/>
-          <a:lstStyle/>
-          <a:p>
-            <a:r>
-              <a:rPr lang="en-US"/>
-              <a:t>Title and Content Layout with Chart</a:t>
-            </a:r>
-            <a:endParaRPr lang="en-US" dirty="0"/>
-          </a:p>
-        </p:txBody>
-      </p:sp>
-      <p:graphicFrame>
-        <p:nvGraphicFramePr>
-          <p:cNvPr id="6" name="Content Placeholder 5" descr="Clustered Column chart showing the values of 3 series for 4 categories"/>
-          <p:cNvGraphicFramePr>
-            <a:graphicFrameLocks noGrp="1"/>
-          </p:cNvGraphicFramePr>
-          <p:nvPr>
-            <p:ph idx="1"/>
-            <p:extLst>
-              <p:ext uri="{D42A27DB-BD31-4B8C-83A1-F6EECF244321}">
-                <p14:modId xmlns:p14="http://schemas.microsoft.com/office/powerpoint/2010/main" val="3944260537"/>
-              </p:ext>
-            </p:extLst>
-          </p:nvPr>
-        </p:nvGraphicFramePr>
-        <p:xfrm>
-          <a:off x="1104900" y="1600200"/>
-          <a:ext cx="9982200" cy="4572000"/>
-        </p:xfrm>
-        <a:graphic>
-          <a:graphicData uri="http://schemas.openxmlformats.org/drawingml/2006/chart">
-            <c:chart xmlns:c="http://schemas.openxmlformats.org/drawingml/2006/chart" xmlns:r="http://schemas.openxmlformats.org/officeDocument/2006/relationships" r:id="rId2"/>
-          </a:graphicData>
-        </a:graphic>
-      </p:graphicFrame>
-    </p:spTree>
-    <p:extLst>
-      <p:ext uri="{BB962C8B-B14F-4D97-AF65-F5344CB8AC3E}">
-        <p14:creationId xmlns:p14="http://schemas.microsoft.com/office/powerpoint/2010/main" val="4010278615"/>
-      </p:ext>
-    </p:extLst>
-  </p:cSld>
-  <p:clrMapOvr>
-    <a:masterClrMapping/>
-  </p:clrMapOvr>
-  <mc:AlternateContent xmlns:mc="http://schemas.openxmlformats.org/markup-compatibility/2006" xmlns:p14="http://schemas.microsoft.com/office/powerpoint/2010/main">
-    <mc:Choice Requires="p14">
-      <p:transition spd="med" p14:dur="700">
-        <p:fade/>
-      </p:transition>
-    </mc:Choice>
-    <mc:Fallback xmlns="">
-      <p:transition spd="med">
-        <p:fade/>
-      </p:transition>
-    </mc:Fallback>
-  </mc:AlternateContent>
-</p:sld>
-</file>
-
-<file path=ppt/slides/slide12.xml><?xml version="1.0" encoding="utf-8"?>
-<p:sld xmlns:a="http://schemas.openxmlformats.org/drawingml/2006/main" xmlns:r="http://schemas.openxmlformats.org/officeDocument/2006/relationships" xmlns:p="http://schemas.openxmlformats.org/presentationml/2006/main">
-  <p:cSld>
-    <p:spTree>
-      <p:nvGrpSpPr>
-        <p:cNvPr id="1" name=""/>
-        <p:cNvGrpSpPr/>
-        <p:nvPr/>
-      </p:nvGrpSpPr>
-      <p:grpSpPr>
-        <a:xfrm>
-          <a:off x="0" y="0"/>
-          <a:ext cx="0" cy="0"/>
-          <a:chOff x="0" y="0"/>
-          <a:chExt cx="0" cy="0"/>
-        </a:xfrm>
-      </p:grpSpPr>
-      <p:sp>
-        <p:nvSpPr>
-          <p:cNvPr id="2" name="Title 1"/>
-          <p:cNvSpPr>
-            <a:spLocks noGrp="1"/>
-          </p:cNvSpPr>
-          <p:nvPr>
-            <p:ph type="title"/>
-          </p:nvPr>
-        </p:nvSpPr>
-        <p:spPr/>
-        <p:txBody>
-          <a:bodyPr/>
-          <a:lstStyle/>
-          <a:p>
-            <a:r>
-              <a:rPr lang="en-US" dirty="0"/>
               <a:t>Summary</a:t>
             </a:r>
           </a:p>
@@ -11220,7 +10318,7 @@
 </p:sld>
 </file>
 
-<file path=ppt/slides/slide13.xml><?xml version="1.0" encoding="utf-8"?>
+<file path=ppt/slides/slide11.xml><?xml version="1.0" encoding="utf-8"?>
 <p:sld xmlns:a="http://schemas.openxmlformats.org/drawingml/2006/main" xmlns:r="http://schemas.openxmlformats.org/officeDocument/2006/relationships" xmlns:p="http://schemas.openxmlformats.org/presentationml/2006/main">
   <p:cSld>
     <p:spTree>
@@ -11446,15 +10544,7 @@
           <a:p>
             <a:r>
               <a:rPr lang="en-US" dirty="0"/>
-              <a:t>Data </a:t>
-            </a:r>
-            <a:r>
-              <a:rPr lang="en-US" dirty="0" err="1"/>
-              <a:t>Maint</a:t>
-            </a:r>
-            <a:r>
-              <a:rPr lang="en-US" dirty="0"/>
-              <a:t> and Improvement PROJECT GOALS</a:t>
+              <a:t>Data Maintenance and Improvement PROJECT GOALS</a:t>
             </a:r>
           </a:p>
         </p:txBody>
@@ -11488,7 +10578,7 @@
           <a:p>
             <a:r>
               <a:rPr lang="en-US" dirty="0"/>
-              <a:t>Carry out Business Intelligence Derivations on the data - to improve data business value</a:t>
+              <a:t>Carry out Business Intelligence Derivations and Transforms on the data - to improve data business value</a:t>
             </a:r>
           </a:p>
           <a:p>
@@ -12536,22 +11626,98 @@
           </a:p>
         </p:txBody>
       </p:sp>
-      <p:sp>
-        <p:nvSpPr>
-          <p:cNvPr id="14" name="Content Placeholder 13"/>
-          <p:cNvSpPr>
-            <a:spLocks noGrp="1"/>
-          </p:cNvSpPr>
+      <p:pic>
+        <p:nvPicPr>
+          <p:cNvPr id="3" name="Content Placeholder 2">
+            <a:extLst>
+              <a:ext uri="{FF2B5EF4-FFF2-40B4-BE49-F238E27FC236}">
+                <a16:creationId xmlns:a16="http://schemas.microsoft.com/office/drawing/2014/main" id="{0C8D7E86-445F-4651-B0DA-00980D3CC39E}"/>
+              </a:ext>
+            </a:extLst>
+          </p:cNvPr>
+          <p:cNvPicPr>
+            <a:picLocks noGrp="1" noChangeAspect="1"/>
+          </p:cNvPicPr>
           <p:nvPr>
             <p:ph idx="1"/>
           </p:nvPr>
+        </p:nvPicPr>
+        <p:blipFill>
+          <a:blip r:embed="rId2"/>
+          <a:stretch>
+            <a:fillRect/>
+          </a:stretch>
+        </p:blipFill>
+        <p:spPr>
+          <a:xfrm>
+            <a:off x="1441186" y="1643230"/>
+            <a:ext cx="2489279" cy="4572000"/>
+          </a:xfrm>
+        </p:spPr>
+      </p:pic>
+      <p:pic>
+        <p:nvPicPr>
+          <p:cNvPr id="5" name="Picture 4">
+            <a:extLst>
+              <a:ext uri="{FF2B5EF4-FFF2-40B4-BE49-F238E27FC236}">
+                <a16:creationId xmlns:a16="http://schemas.microsoft.com/office/drawing/2014/main" id="{A3EE54B7-9BE8-4440-B4C4-703AE648FFD2}"/>
+              </a:ext>
+            </a:extLst>
+          </p:cNvPr>
+          <p:cNvPicPr>
+            <a:picLocks noChangeAspect="1"/>
+          </p:cNvPicPr>
+          <p:nvPr/>
+        </p:nvPicPr>
+        <p:blipFill>
+          <a:blip r:embed="rId3"/>
+          <a:stretch>
+            <a:fillRect/>
+          </a:stretch>
+        </p:blipFill>
+        <p:spPr>
+          <a:xfrm>
+            <a:off x="5934576" y="2166113"/>
+            <a:ext cx="5658640" cy="2181529"/>
+          </a:xfrm>
+          <a:prstGeom prst="rect">
+            <a:avLst/>
+          </a:prstGeom>
+        </p:spPr>
+      </p:pic>
+      <p:sp>
+        <p:nvSpPr>
+          <p:cNvPr id="6" name="TextBox 5">
+            <a:extLst>
+              <a:ext uri="{FF2B5EF4-FFF2-40B4-BE49-F238E27FC236}">
+                <a16:creationId xmlns:a16="http://schemas.microsoft.com/office/drawing/2014/main" id="{EF41ED9F-6CC3-4D05-93EB-1A099990F5AE}"/>
+              </a:ext>
+            </a:extLst>
+          </p:cNvPr>
+          <p:cNvSpPr txBox="1"/>
+          <p:nvPr/>
         </p:nvSpPr>
-        <p:spPr/>
+        <p:spPr>
+          <a:xfrm>
+            <a:off x="4399878" y="1839558"/>
+            <a:ext cx="774550" cy="1477328"/>
+          </a:xfrm>
+          <a:prstGeom prst="rect">
+            <a:avLst/>
+          </a:prstGeom>
+          <a:noFill/>
+        </p:spPr>
         <p:txBody>
-          <a:bodyPr/>
+          <a:bodyPr wrap="square" rtlCol="0">
+            <a:spAutoFit/>
+          </a:bodyPr>
           <a:lstStyle/>
           <a:p>
-            <a:endParaRPr lang="en-US" dirty="0"/>
+            <a:r>
+              <a:rPr lang="en-US" dirty="0"/>
+              <a:t>YAML File for AZ Dev Ops</a:t>
+            </a:r>
+            <a:endParaRPr lang="en-GB" dirty="0"/>
           </a:p>
         </p:txBody>
       </p:sp>
@@ -12623,22 +11789,168 @@
           </a:p>
         </p:txBody>
       </p:sp>
-      <p:sp>
-        <p:nvSpPr>
-          <p:cNvPr id="14" name="Content Placeholder 13"/>
-          <p:cNvSpPr>
-            <a:spLocks noGrp="1"/>
-          </p:cNvSpPr>
+      <p:pic>
+        <p:nvPicPr>
+          <p:cNvPr id="3" name="Content Placeholder 2">
+            <a:extLst>
+              <a:ext uri="{FF2B5EF4-FFF2-40B4-BE49-F238E27FC236}">
+                <a16:creationId xmlns:a16="http://schemas.microsoft.com/office/drawing/2014/main" id="{779946AF-BF3C-411E-8548-FF4F468C7B9B}"/>
+              </a:ext>
+            </a:extLst>
+          </p:cNvPr>
+          <p:cNvPicPr>
+            <a:picLocks noGrp="1" noChangeAspect="1"/>
+          </p:cNvPicPr>
           <p:nvPr>
             <p:ph idx="1"/>
           </p:nvPr>
+        </p:nvPicPr>
+        <p:blipFill>
+          <a:blip r:embed="rId2"/>
+          <a:stretch>
+            <a:fillRect/>
+          </a:stretch>
+        </p:blipFill>
+        <p:spPr>
+          <a:xfrm>
+            <a:off x="6401513" y="1614431"/>
+            <a:ext cx="5046195" cy="2380129"/>
+          </a:xfrm>
+        </p:spPr>
+      </p:pic>
+      <p:pic>
+        <p:nvPicPr>
+          <p:cNvPr id="5" name="Picture 4">
+            <a:extLst>
+              <a:ext uri="{FF2B5EF4-FFF2-40B4-BE49-F238E27FC236}">
+                <a16:creationId xmlns:a16="http://schemas.microsoft.com/office/drawing/2014/main" id="{7170B299-4836-49DD-BFD0-E3C1261DA105}"/>
+              </a:ext>
+            </a:extLst>
+          </p:cNvPr>
+          <p:cNvPicPr>
+            <a:picLocks noChangeAspect="1"/>
+          </p:cNvPicPr>
+          <p:nvPr/>
+        </p:nvPicPr>
+        <p:blipFill>
+          <a:blip r:embed="rId3"/>
+          <a:stretch>
+            <a:fillRect/>
+          </a:stretch>
+        </p:blipFill>
+        <p:spPr>
+          <a:xfrm>
+            <a:off x="857466" y="1493065"/>
+            <a:ext cx="5117396" cy="2692343"/>
+          </a:xfrm>
+          <a:prstGeom prst="rect">
+            <a:avLst/>
+          </a:prstGeom>
+        </p:spPr>
+      </p:pic>
+      <p:pic>
+        <p:nvPicPr>
+          <p:cNvPr id="7" name="Picture 6">
+            <a:extLst>
+              <a:ext uri="{FF2B5EF4-FFF2-40B4-BE49-F238E27FC236}">
+                <a16:creationId xmlns:a16="http://schemas.microsoft.com/office/drawing/2014/main" id="{D675F6B3-9C53-43DB-8FBF-A1E74DB94C91}"/>
+              </a:ext>
+            </a:extLst>
+          </p:cNvPr>
+          <p:cNvPicPr>
+            <a:picLocks noChangeAspect="1"/>
+          </p:cNvPicPr>
+          <p:nvPr/>
+        </p:nvPicPr>
+        <p:blipFill>
+          <a:blip r:embed="rId4"/>
+          <a:stretch>
+            <a:fillRect/>
+          </a:stretch>
+        </p:blipFill>
+        <p:spPr>
+          <a:xfrm>
+            <a:off x="6353804" y="4185408"/>
+            <a:ext cx="4980730" cy="2144786"/>
+          </a:xfrm>
+          <a:prstGeom prst="rect">
+            <a:avLst/>
+          </a:prstGeom>
+        </p:spPr>
+      </p:pic>
+      <p:sp>
+        <p:nvSpPr>
+          <p:cNvPr id="8" name="TextBox 7">
+            <a:extLst>
+              <a:ext uri="{FF2B5EF4-FFF2-40B4-BE49-F238E27FC236}">
+                <a16:creationId xmlns:a16="http://schemas.microsoft.com/office/drawing/2014/main" id="{23EE8DFF-DA59-453B-BB40-5E666020F2D9}"/>
+              </a:ext>
+            </a:extLst>
+          </p:cNvPr>
+          <p:cNvSpPr txBox="1"/>
+          <p:nvPr/>
         </p:nvSpPr>
-        <p:spPr/>
+        <p:spPr>
+          <a:xfrm>
+            <a:off x="1985010" y="3905146"/>
+            <a:ext cx="2026920" cy="1200329"/>
+          </a:xfrm>
+          <a:prstGeom prst="rect">
+            <a:avLst/>
+          </a:prstGeom>
+          <a:noFill/>
+        </p:spPr>
         <p:txBody>
-          <a:bodyPr/>
+          <a:bodyPr wrap="square" rtlCol="0">
+            <a:spAutoFit/>
+          </a:bodyPr>
           <a:lstStyle/>
           <a:p>
-            <a:endParaRPr lang="en-US" dirty="0"/>
+            <a:r>
+              <a:rPr lang="en-US" dirty="0"/>
+              <a:t>Business Intelligence – Business Value</a:t>
+            </a:r>
+          </a:p>
+          <a:p>
+            <a:endParaRPr lang="en-GB" dirty="0"/>
+          </a:p>
+        </p:txBody>
+      </p:sp>
+      <p:sp>
+        <p:nvSpPr>
+          <p:cNvPr id="11" name="TextBox 10">
+            <a:extLst>
+              <a:ext uri="{FF2B5EF4-FFF2-40B4-BE49-F238E27FC236}">
+                <a16:creationId xmlns:a16="http://schemas.microsoft.com/office/drawing/2014/main" id="{92DD2EB8-D89E-4CE5-8CBF-BA2914132906}"/>
+              </a:ext>
+            </a:extLst>
+          </p:cNvPr>
+          <p:cNvSpPr txBox="1"/>
+          <p:nvPr/>
+        </p:nvSpPr>
+        <p:spPr>
+          <a:xfrm>
+            <a:off x="7680713" y="1423583"/>
+            <a:ext cx="2026920" cy="646331"/>
+          </a:xfrm>
+          <a:prstGeom prst="rect">
+            <a:avLst/>
+          </a:prstGeom>
+          <a:noFill/>
+        </p:spPr>
+        <p:txBody>
+          <a:bodyPr wrap="square" rtlCol="0">
+            <a:spAutoFit/>
+          </a:bodyPr>
+          <a:lstStyle/>
+          <a:p>
+            <a:r>
+              <a:rPr lang="en-US" dirty="0"/>
+              <a:t>Data Quality</a:t>
+            </a:r>
+          </a:p>
+          <a:p>
+            <a:endParaRPr lang="en-GB" dirty="0"/>
           </a:p>
         </p:txBody>
       </p:sp>
@@ -12686,7 +11998,7 @@
       </p:grpSpPr>
       <p:sp>
         <p:nvSpPr>
-          <p:cNvPr id="13" name="Title 12"/>
+          <p:cNvPr id="2" name="Title 1"/>
           <p:cNvSpPr>
             <a:spLocks noGrp="1"/>
           </p:cNvSpPr>
@@ -12701,34 +12013,40 @@
           <a:p>
             <a:r>
               <a:rPr lang="en-US" dirty="0"/>
-              <a:t>Proposed Solution</a:t>
+              <a:t>SWAT</a:t>
             </a:r>
           </a:p>
         </p:txBody>
       </p:sp>
-      <p:sp>
-        <p:nvSpPr>
-          <p:cNvPr id="14" name="Content Placeholder 13"/>
-          <p:cNvSpPr>
-            <a:spLocks noGrp="1"/>
-          </p:cNvSpPr>
+      <p:graphicFrame>
+        <p:nvGraphicFramePr>
+          <p:cNvPr id="4" name="Content Placeholder 3" descr="Stacked List showing 4 groups arranged from left to right with task descriptions under each group"/>
+          <p:cNvGraphicFramePr>
+            <a:graphicFrameLocks noGrp="1"/>
+          </p:cNvGraphicFramePr>
           <p:nvPr>
             <p:ph idx="1"/>
+            <p:extLst>
+              <p:ext uri="{D42A27DB-BD31-4B8C-83A1-F6EECF244321}">
+                <p14:modId xmlns:p14="http://schemas.microsoft.com/office/powerpoint/2010/main" val="2845789048"/>
+              </p:ext>
+            </p:extLst>
           </p:nvPr>
-        </p:nvSpPr>
-        <p:spPr/>
-        <p:txBody>
-          <a:bodyPr/>
-          <a:lstStyle/>
-          <a:p>
-            <a:endParaRPr lang="en-US" dirty="0"/>
-          </a:p>
-        </p:txBody>
-      </p:sp>
+        </p:nvGraphicFramePr>
+        <p:xfrm>
+          <a:off x="1104900" y="1600200"/>
+          <a:ext cx="9982200" cy="4572000"/>
+        </p:xfrm>
+        <a:graphic>
+          <a:graphicData uri="http://schemas.openxmlformats.org/drawingml/2006/diagram">
+            <dgm:relIds xmlns:dgm="http://schemas.openxmlformats.org/drawingml/2006/diagram" xmlns:r="http://schemas.openxmlformats.org/officeDocument/2006/relationships" r:dm="rId2" r:lo="rId3" r:qs="rId4" r:cs="rId5"/>
+          </a:graphicData>
+        </a:graphic>
+      </p:graphicFrame>
     </p:spTree>
     <p:extLst>
       <p:ext uri="{BB962C8B-B14F-4D97-AF65-F5344CB8AC3E}">
-        <p14:creationId xmlns:p14="http://schemas.microsoft.com/office/powerpoint/2010/main" val="2164460"/>
+        <p14:creationId xmlns:p14="http://schemas.microsoft.com/office/powerpoint/2010/main" val="4224509479"/>
       </p:ext>
     </p:extLst>
   </p:cSld>
@@ -12784,40 +12102,682 @@
           <a:p>
             <a:r>
               <a:rPr lang="en-US" dirty="0"/>
-              <a:t>SWAT</a:t>
+              <a:t>Risks and Issues</a:t>
             </a:r>
           </a:p>
         </p:txBody>
       </p:sp>
       <p:graphicFrame>
         <p:nvGraphicFramePr>
-          <p:cNvPr id="4" name="Content Placeholder 3" descr="Stacked List showing 4 groups arranged from left to right with task descriptions under each group"/>
+          <p:cNvPr id="16" name="Content Placeholder 15"/>
           <p:cNvGraphicFramePr>
             <a:graphicFrameLocks noGrp="1"/>
           </p:cNvGraphicFramePr>
           <p:nvPr>
-            <p:ph idx="1"/>
+            <p:ph sz="half" idx="2"/>
             <p:extLst>
               <p:ext uri="{D42A27DB-BD31-4B8C-83A1-F6EECF244321}">
-                <p14:modId xmlns:p14="http://schemas.microsoft.com/office/powerpoint/2010/main" val="305999686"/>
+                <p14:modId xmlns:p14="http://schemas.microsoft.com/office/powerpoint/2010/main" val="1311609116"/>
               </p:ext>
             </p:extLst>
           </p:nvPr>
         </p:nvGraphicFramePr>
         <p:xfrm>
-          <a:off x="1104900" y="1600200"/>
-          <a:ext cx="9982200" cy="4572000"/>
+          <a:off x="1104900" y="1621714"/>
+          <a:ext cx="7576521" cy="4348780"/>
         </p:xfrm>
         <a:graphic>
-          <a:graphicData uri="http://schemas.openxmlformats.org/drawingml/2006/diagram">
-            <dgm:relIds xmlns:dgm="http://schemas.openxmlformats.org/drawingml/2006/diagram" xmlns:r="http://schemas.openxmlformats.org/officeDocument/2006/relationships" r:dm="rId2" r:lo="rId3" r:qs="rId4" r:cs="rId5"/>
+          <a:graphicData uri="http://schemas.openxmlformats.org/drawingml/2006/table">
+            <a:tbl>
+              <a:tblPr firstRow="1" bandRow="1">
+                <a:tableStyleId>{5C22544A-7EE6-4342-B048-85BDC9FD1C3A}</a:tableStyleId>
+              </a:tblPr>
+              <a:tblGrid>
+                <a:gridCol w="1515304">
+                  <a:extLst>
+                    <a:ext uri="{9D8B030D-6E8A-4147-A177-3AD203B41FA5}">
+                      <a16:colId xmlns:a16="http://schemas.microsoft.com/office/drawing/2014/main" val="20000"/>
+                    </a:ext>
+                  </a:extLst>
+                </a:gridCol>
+                <a:gridCol w="2067082">
+                  <a:extLst>
+                    <a:ext uri="{9D8B030D-6E8A-4147-A177-3AD203B41FA5}">
+                      <a16:colId xmlns:a16="http://schemas.microsoft.com/office/drawing/2014/main" val="20001"/>
+                    </a:ext>
+                  </a:extLst>
+                </a:gridCol>
+                <a:gridCol w="963527">
+                  <a:extLst>
+                    <a:ext uri="{9D8B030D-6E8A-4147-A177-3AD203B41FA5}">
+                      <a16:colId xmlns:a16="http://schemas.microsoft.com/office/drawing/2014/main" val="3081029502"/>
+                    </a:ext>
+                  </a:extLst>
+                </a:gridCol>
+                <a:gridCol w="2155398">
+                  <a:extLst>
+                    <a:ext uri="{9D8B030D-6E8A-4147-A177-3AD203B41FA5}">
+                      <a16:colId xmlns:a16="http://schemas.microsoft.com/office/drawing/2014/main" val="20002"/>
+                    </a:ext>
+                  </a:extLst>
+                </a:gridCol>
+                <a:gridCol w="875210">
+                  <a:extLst>
+                    <a:ext uri="{9D8B030D-6E8A-4147-A177-3AD203B41FA5}">
+                      <a16:colId xmlns:a16="http://schemas.microsoft.com/office/drawing/2014/main" val="2254064161"/>
+                    </a:ext>
+                  </a:extLst>
+                </a:gridCol>
+              </a:tblGrid>
+              <a:tr h="1261142">
+                <a:tc>
+                  <a:txBody>
+                    <a:bodyPr/>
+                    <a:lstStyle/>
+                    <a:p>
+                      <a:r>
+                        <a:rPr lang="en-US" dirty="0"/>
+                        <a:t>RI ID</a:t>
+                      </a:r>
+                      <a:endParaRPr dirty="0"/>
+                    </a:p>
+                  </a:txBody>
+                  <a:tcPr anchor="ctr"/>
+                </a:tc>
+                <a:tc>
+                  <a:txBody>
+                    <a:bodyPr/>
+                    <a:lstStyle/>
+                    <a:p>
+                      <a:pPr algn="ctr"/>
+                      <a:r>
+                        <a:rPr lang="en-US" dirty="0"/>
+                        <a:t>RISKS</a:t>
+                      </a:r>
+                      <a:endParaRPr dirty="0"/>
+                    </a:p>
+                  </a:txBody>
+                  <a:tcPr anchor="ctr"/>
+                </a:tc>
+                <a:tc>
+                  <a:txBody>
+                    <a:bodyPr/>
+                    <a:lstStyle/>
+                    <a:p>
+                      <a:pPr algn="ctr"/>
+                      <a:r>
+                        <a:rPr lang="en-US" dirty="0"/>
+                        <a:t>RISK TYPE</a:t>
+                      </a:r>
+                      <a:endParaRPr dirty="0"/>
+                    </a:p>
+                  </a:txBody>
+                  <a:tcPr anchor="ctr"/>
+                </a:tc>
+                <a:tc>
+                  <a:txBody>
+                    <a:bodyPr/>
+                    <a:lstStyle/>
+                    <a:p>
+                      <a:pPr algn="ctr"/>
+                      <a:r>
+                        <a:rPr lang="en-US" dirty="0"/>
+                        <a:t>ISSUES</a:t>
+                      </a:r>
+                      <a:endParaRPr dirty="0"/>
+                    </a:p>
+                  </a:txBody>
+                  <a:tcPr anchor="ctr"/>
+                </a:tc>
+                <a:tc>
+                  <a:txBody>
+                    <a:bodyPr/>
+                    <a:lstStyle/>
+                    <a:p>
+                      <a:pPr algn="ctr"/>
+                      <a:r>
+                        <a:rPr lang="en-US" dirty="0"/>
+                        <a:t>ISSUE TYPE</a:t>
+                      </a:r>
+                      <a:endParaRPr dirty="0"/>
+                    </a:p>
+                  </a:txBody>
+                  <a:tcPr anchor="ctr"/>
+                </a:tc>
+                <a:extLst>
+                  <a:ext uri="{0D108BD9-81ED-4DB2-BD59-A6C34878D82A}">
+                    <a16:rowId xmlns:a16="http://schemas.microsoft.com/office/drawing/2014/main" val="10000"/>
+                  </a:ext>
+                </a:extLst>
+              </a:tr>
+              <a:tr h="510734">
+                <a:tc>
+                  <a:txBody>
+                    <a:bodyPr/>
+                    <a:lstStyle/>
+                    <a:p>
+                      <a:r>
+                        <a:rPr lang="en-US" dirty="0"/>
+                        <a:t>RI</a:t>
+                      </a:r>
+                      <a:r>
+                        <a:rPr dirty="0"/>
+                        <a:t> 1</a:t>
+                      </a:r>
+                    </a:p>
+                  </a:txBody>
+                  <a:tcPr anchor="ctr"/>
+                </a:tc>
+                <a:tc>
+                  <a:txBody>
+                    <a:bodyPr/>
+                    <a:lstStyle/>
+                    <a:p>
+                      <a:pPr algn="ctr"/>
+                      <a:r>
+                        <a:rPr lang="en-US" dirty="0"/>
+                        <a:t>Data Loss</a:t>
+                      </a:r>
+                      <a:endParaRPr dirty="0"/>
+                    </a:p>
+                  </a:txBody>
+                  <a:tcPr anchor="ctr"/>
+                </a:tc>
+                <a:tc>
+                  <a:txBody>
+                    <a:bodyPr/>
+                    <a:lstStyle/>
+                    <a:p>
+                      <a:pPr algn="ctr"/>
+                      <a:endParaRPr dirty="0"/>
+                    </a:p>
+                  </a:txBody>
+                  <a:tcPr anchor="ctr"/>
+                </a:tc>
+                <a:tc>
+                  <a:txBody>
+                    <a:bodyPr/>
+                    <a:lstStyle/>
+                    <a:p>
+                      <a:pPr algn="ctr"/>
+                      <a:r>
+                        <a:rPr lang="en-US" dirty="0"/>
+                        <a:t>High Data</a:t>
+                      </a:r>
+                      <a:endParaRPr dirty="0"/>
+                    </a:p>
+                  </a:txBody>
+                  <a:tcPr anchor="ctr"/>
+                </a:tc>
+                <a:tc>
+                  <a:txBody>
+                    <a:bodyPr/>
+                    <a:lstStyle/>
+                    <a:p>
+                      <a:pPr algn="ctr"/>
+                      <a:endParaRPr dirty="0"/>
+                    </a:p>
+                  </a:txBody>
+                  <a:tcPr anchor="ctr"/>
+                </a:tc>
+                <a:extLst>
+                  <a:ext uri="{0D108BD9-81ED-4DB2-BD59-A6C34878D82A}">
+                    <a16:rowId xmlns:a16="http://schemas.microsoft.com/office/drawing/2014/main" val="10001"/>
+                  </a:ext>
+                </a:extLst>
+              </a:tr>
+              <a:tr h="729620">
+                <a:tc>
+                  <a:txBody>
+                    <a:bodyPr/>
+                    <a:lstStyle/>
+                    <a:p>
+                      <a:r>
+                        <a:rPr lang="en-US" dirty="0"/>
+                        <a:t>RI</a:t>
+                      </a:r>
+                      <a:r>
+                        <a:rPr baseline="0" dirty="0"/>
+                        <a:t> 2</a:t>
+                      </a:r>
+                      <a:endParaRPr dirty="0"/>
+                    </a:p>
+                  </a:txBody>
+                  <a:tcPr anchor="ctr"/>
+                </a:tc>
+                <a:tc>
+                  <a:txBody>
+                    <a:bodyPr/>
+                    <a:lstStyle/>
+                    <a:p>
+                      <a:pPr algn="ctr"/>
+                      <a:r>
+                        <a:rPr lang="en-US" dirty="0"/>
+                        <a:t>Compliance</a:t>
+                      </a:r>
+                      <a:endParaRPr dirty="0"/>
+                    </a:p>
+                  </a:txBody>
+                  <a:tcPr anchor="ctr"/>
+                </a:tc>
+                <a:tc>
+                  <a:txBody>
+                    <a:bodyPr/>
+                    <a:lstStyle/>
+                    <a:p>
+                      <a:pPr algn="ctr"/>
+                      <a:endParaRPr dirty="0"/>
+                    </a:p>
+                  </a:txBody>
+                  <a:tcPr anchor="ctr"/>
+                </a:tc>
+                <a:tc>
+                  <a:txBody>
+                    <a:bodyPr/>
+                    <a:lstStyle/>
+                    <a:p>
+                      <a:pPr algn="ctr"/>
+                      <a:r>
+                        <a:rPr lang="en-US" dirty="0"/>
+                        <a:t>Poor Quality Data</a:t>
+                      </a:r>
+                      <a:endParaRPr dirty="0"/>
+                    </a:p>
+                  </a:txBody>
+                  <a:tcPr anchor="ctr"/>
+                </a:tc>
+                <a:tc>
+                  <a:txBody>
+                    <a:bodyPr/>
+                    <a:lstStyle/>
+                    <a:p>
+                      <a:pPr algn="ctr"/>
+                      <a:endParaRPr dirty="0"/>
+                    </a:p>
+                  </a:txBody>
+                  <a:tcPr anchor="ctr"/>
+                </a:tc>
+                <a:extLst>
+                  <a:ext uri="{0D108BD9-81ED-4DB2-BD59-A6C34878D82A}">
+                    <a16:rowId xmlns:a16="http://schemas.microsoft.com/office/drawing/2014/main" val="10002"/>
+                  </a:ext>
+                </a:extLst>
+              </a:tr>
+              <a:tr h="729620">
+                <a:tc>
+                  <a:txBody>
+                    <a:bodyPr/>
+                    <a:lstStyle/>
+                    <a:p>
+                      <a:r>
+                        <a:rPr lang="en-US" dirty="0"/>
+                        <a:t>RI 3</a:t>
+                      </a:r>
+                      <a:endParaRPr dirty="0"/>
+                    </a:p>
+                  </a:txBody>
+                  <a:tcPr anchor="ctr"/>
+                </a:tc>
+                <a:tc>
+                  <a:txBody>
+                    <a:bodyPr/>
+                    <a:lstStyle/>
+                    <a:p>
+                      <a:pPr algn="ctr"/>
+                      <a:r>
+                        <a:rPr lang="en-US" dirty="0"/>
+                        <a:t>Project Overrun</a:t>
+                      </a:r>
+                      <a:endParaRPr dirty="0"/>
+                    </a:p>
+                  </a:txBody>
+                  <a:tcPr anchor="ctr"/>
+                </a:tc>
+                <a:tc>
+                  <a:txBody>
+                    <a:bodyPr/>
+                    <a:lstStyle/>
+                    <a:p>
+                      <a:pPr algn="ctr"/>
+                      <a:endParaRPr dirty="0"/>
+                    </a:p>
+                  </a:txBody>
+                  <a:tcPr anchor="ctr"/>
+                </a:tc>
+                <a:tc>
+                  <a:txBody>
+                    <a:bodyPr/>
+                    <a:lstStyle/>
+                    <a:p>
+                      <a:pPr algn="ctr"/>
+                      <a:r>
+                        <a:rPr lang="en-US" dirty="0"/>
+                        <a:t>Data Anomalies</a:t>
+                      </a:r>
+                      <a:endParaRPr dirty="0"/>
+                    </a:p>
+                  </a:txBody>
+                  <a:tcPr anchor="ctr"/>
+                </a:tc>
+                <a:tc>
+                  <a:txBody>
+                    <a:bodyPr/>
+                    <a:lstStyle/>
+                    <a:p>
+                      <a:pPr algn="ctr"/>
+                      <a:endParaRPr dirty="0"/>
+                    </a:p>
+                  </a:txBody>
+                  <a:tcPr anchor="ctr"/>
+                </a:tc>
+                <a:extLst>
+                  <a:ext uri="{0D108BD9-81ED-4DB2-BD59-A6C34878D82A}">
+                    <a16:rowId xmlns:a16="http://schemas.microsoft.com/office/drawing/2014/main" val="10003"/>
+                  </a:ext>
+                </a:extLst>
+              </a:tr>
+              <a:tr h="729620">
+                <a:tc>
+                  <a:txBody>
+                    <a:bodyPr/>
+                    <a:lstStyle/>
+                    <a:p>
+                      <a:r>
+                        <a:rPr lang="en-US" dirty="0"/>
+                        <a:t>RI4</a:t>
+                      </a:r>
+                      <a:endParaRPr dirty="0"/>
+                    </a:p>
+                  </a:txBody>
+                  <a:tcPr anchor="ctr"/>
+                </a:tc>
+                <a:tc>
+                  <a:txBody>
+                    <a:bodyPr/>
+                    <a:lstStyle/>
+                    <a:p>
+                      <a:pPr algn="ctr"/>
+                      <a:endParaRPr dirty="0"/>
+                    </a:p>
+                  </a:txBody>
+                  <a:tcPr anchor="ctr"/>
+                </a:tc>
+                <a:tc>
+                  <a:txBody>
+                    <a:bodyPr/>
+                    <a:lstStyle/>
+                    <a:p>
+                      <a:pPr algn="ctr"/>
+                      <a:endParaRPr dirty="0"/>
+                    </a:p>
+                  </a:txBody>
+                  <a:tcPr anchor="ctr"/>
+                </a:tc>
+                <a:tc>
+                  <a:txBody>
+                    <a:bodyPr/>
+                    <a:lstStyle/>
+                    <a:p>
+                      <a:pPr algn="ctr"/>
+                      <a:r>
+                        <a:rPr lang="en-US" dirty="0"/>
+                        <a:t>Over Cleaning</a:t>
+                      </a:r>
+                      <a:endParaRPr dirty="0"/>
+                    </a:p>
+                  </a:txBody>
+                  <a:tcPr anchor="ctr"/>
+                </a:tc>
+                <a:tc>
+                  <a:txBody>
+                    <a:bodyPr/>
+                    <a:lstStyle/>
+                    <a:p>
+                      <a:pPr algn="ctr"/>
+                      <a:endParaRPr dirty="0"/>
+                    </a:p>
+                  </a:txBody>
+                  <a:tcPr anchor="ctr"/>
+                </a:tc>
+                <a:extLst>
+                  <a:ext uri="{0D108BD9-81ED-4DB2-BD59-A6C34878D82A}">
+                    <a16:rowId xmlns:a16="http://schemas.microsoft.com/office/drawing/2014/main" val="4279117335"/>
+                  </a:ext>
+                </a:extLst>
+              </a:tr>
+              <a:tr h="388044">
+                <a:tc>
+                  <a:txBody>
+                    <a:bodyPr/>
+                    <a:lstStyle/>
+                    <a:p>
+                      <a:endParaRPr dirty="0"/>
+                    </a:p>
+                  </a:txBody>
+                  <a:tcPr anchor="ctr"/>
+                </a:tc>
+                <a:tc>
+                  <a:txBody>
+                    <a:bodyPr/>
+                    <a:lstStyle/>
+                    <a:p>
+                      <a:pPr algn="ctr"/>
+                      <a:endParaRPr dirty="0"/>
+                    </a:p>
+                  </a:txBody>
+                  <a:tcPr anchor="ctr"/>
+                </a:tc>
+                <a:tc>
+                  <a:txBody>
+                    <a:bodyPr/>
+                    <a:lstStyle/>
+                    <a:p>
+                      <a:pPr algn="ctr"/>
+                      <a:endParaRPr dirty="0"/>
+                    </a:p>
+                  </a:txBody>
+                  <a:tcPr anchor="ctr"/>
+                </a:tc>
+                <a:tc>
+                  <a:txBody>
+                    <a:bodyPr/>
+                    <a:lstStyle/>
+                    <a:p>
+                      <a:pPr algn="ctr"/>
+                      <a:endParaRPr dirty="0"/>
+                    </a:p>
+                  </a:txBody>
+                  <a:tcPr anchor="ctr"/>
+                </a:tc>
+                <a:tc>
+                  <a:txBody>
+                    <a:bodyPr/>
+                    <a:lstStyle/>
+                    <a:p>
+                      <a:pPr algn="ctr"/>
+                      <a:endParaRPr dirty="0"/>
+                    </a:p>
+                  </a:txBody>
+                  <a:tcPr anchor="ctr"/>
+                </a:tc>
+                <a:extLst>
+                  <a:ext uri="{0D108BD9-81ED-4DB2-BD59-A6C34878D82A}">
+                    <a16:rowId xmlns:a16="http://schemas.microsoft.com/office/drawing/2014/main" val="2318330902"/>
+                  </a:ext>
+                </a:extLst>
+              </a:tr>
+            </a:tbl>
           </a:graphicData>
         </a:graphic>
       </p:graphicFrame>
+      <p:sp>
+        <p:nvSpPr>
+          <p:cNvPr id="6" name="TextBox 5">
+            <a:extLst>
+              <a:ext uri="{FF2B5EF4-FFF2-40B4-BE49-F238E27FC236}">
+                <a16:creationId xmlns:a16="http://schemas.microsoft.com/office/drawing/2014/main" id="{5F1509E1-F187-41D4-AF82-0E51FB6E5A20}"/>
+              </a:ext>
+            </a:extLst>
+          </p:cNvPr>
+          <p:cNvSpPr txBox="1"/>
+          <p:nvPr/>
+        </p:nvSpPr>
+        <p:spPr>
+          <a:xfrm>
+            <a:off x="9746428" y="2635624"/>
+            <a:ext cx="1764254" cy="1754326"/>
+          </a:xfrm>
+          <a:prstGeom prst="rect">
+            <a:avLst/>
+          </a:prstGeom>
+          <a:noFill/>
+          <a:ln>
+            <a:solidFill>
+              <a:schemeClr val="accent1"/>
+            </a:solidFill>
+          </a:ln>
+        </p:spPr>
+        <p:txBody>
+          <a:bodyPr wrap="square" rtlCol="0">
+            <a:spAutoFit/>
+          </a:bodyPr>
+          <a:lstStyle/>
+          <a:p>
+            <a:pPr marL="285750" indent="-285750">
+              <a:buFont typeface="Arial" panose="020B0604020202020204" pitchFamily="34" charset="0"/>
+              <a:buChar char="•"/>
+            </a:pPr>
+            <a:r>
+              <a:rPr lang="en-US" dirty="0"/>
+              <a:t>Budget</a:t>
+            </a:r>
+          </a:p>
+          <a:p>
+            <a:pPr marL="285750" indent="-285750">
+              <a:buFont typeface="Arial" panose="020B0604020202020204" pitchFamily="34" charset="0"/>
+              <a:buChar char="•"/>
+            </a:pPr>
+            <a:r>
+              <a:rPr lang="en-US" dirty="0"/>
+              <a:t>Technical</a:t>
+            </a:r>
+          </a:p>
+          <a:p>
+            <a:pPr marL="285750" indent="-285750">
+              <a:buFont typeface="Arial" panose="020B0604020202020204" pitchFamily="34" charset="0"/>
+              <a:buChar char="•"/>
+            </a:pPr>
+            <a:r>
+              <a:rPr lang="en-US" dirty="0"/>
+              <a:t>Quality</a:t>
+            </a:r>
+          </a:p>
+          <a:p>
+            <a:pPr marL="285750" indent="-285750">
+              <a:buFont typeface="Arial" panose="020B0604020202020204" pitchFamily="34" charset="0"/>
+              <a:buChar char="•"/>
+            </a:pPr>
+            <a:r>
+              <a:rPr lang="en-US" dirty="0"/>
+              <a:t>Scope</a:t>
+            </a:r>
+          </a:p>
+          <a:p>
+            <a:pPr marL="285750" indent="-285750">
+              <a:buFont typeface="Arial" panose="020B0604020202020204" pitchFamily="34" charset="0"/>
+              <a:buChar char="•"/>
+            </a:pPr>
+            <a:r>
+              <a:rPr lang="en-US" dirty="0"/>
+              <a:t>Resource</a:t>
+            </a:r>
+          </a:p>
+          <a:p>
+            <a:endParaRPr lang="en-GB" dirty="0"/>
+          </a:p>
+        </p:txBody>
+      </p:sp>
+      <p:sp>
+        <p:nvSpPr>
+          <p:cNvPr id="7" name="TextBox 6">
+            <a:extLst>
+              <a:ext uri="{FF2B5EF4-FFF2-40B4-BE49-F238E27FC236}">
+                <a16:creationId xmlns:a16="http://schemas.microsoft.com/office/drawing/2014/main" id="{D03FF48C-BC8B-41B4-8F4D-515BA10FFA17}"/>
+              </a:ext>
+            </a:extLst>
+          </p:cNvPr>
+          <p:cNvSpPr txBox="1"/>
+          <p:nvPr/>
+        </p:nvSpPr>
+        <p:spPr>
+          <a:xfrm>
+            <a:off x="9671124" y="4582757"/>
+            <a:ext cx="1764254" cy="1477328"/>
+          </a:xfrm>
+          <a:prstGeom prst="rect">
+            <a:avLst/>
+          </a:prstGeom>
+          <a:noFill/>
+          <a:ln>
+            <a:solidFill>
+              <a:schemeClr val="accent1"/>
+            </a:solidFill>
+          </a:ln>
+        </p:spPr>
+        <p:txBody>
+          <a:bodyPr wrap="square" rtlCol="0">
+            <a:spAutoFit/>
+          </a:bodyPr>
+          <a:lstStyle/>
+          <a:p>
+            <a:pPr marL="285750" indent="-285750">
+              <a:buFont typeface="Arial" panose="020B0604020202020204" pitchFamily="34" charset="0"/>
+              <a:buChar char="•"/>
+            </a:pPr>
+            <a:r>
+              <a:rPr lang="en-US" dirty="0"/>
+              <a:t>Operational</a:t>
+            </a:r>
+          </a:p>
+          <a:p>
+            <a:pPr marL="285750" indent="-285750">
+              <a:buFont typeface="Arial" panose="020B0604020202020204" pitchFamily="34" charset="0"/>
+              <a:buChar char="•"/>
+            </a:pPr>
+            <a:r>
+              <a:rPr lang="en-US" dirty="0"/>
+              <a:t>Finance</a:t>
+            </a:r>
+          </a:p>
+          <a:p>
+            <a:pPr marL="285750" indent="-285750">
+              <a:buFont typeface="Arial" panose="020B0604020202020204" pitchFamily="34" charset="0"/>
+              <a:buChar char="•"/>
+            </a:pPr>
+            <a:r>
+              <a:rPr lang="en-US" dirty="0"/>
+              <a:t>Strategic</a:t>
+            </a:r>
+          </a:p>
+          <a:p>
+            <a:pPr marL="285750" indent="-285750">
+              <a:buFont typeface="Arial" panose="020B0604020202020204" pitchFamily="34" charset="0"/>
+              <a:buChar char="•"/>
+            </a:pPr>
+            <a:r>
+              <a:rPr lang="en-US" dirty="0"/>
+              <a:t>Compliance</a:t>
+            </a:r>
+          </a:p>
+          <a:p>
+            <a:endParaRPr lang="en-GB" dirty="0"/>
+          </a:p>
+        </p:txBody>
+      </p:sp>
     </p:spTree>
     <p:extLst>
       <p:ext uri="{BB962C8B-B14F-4D97-AF65-F5344CB8AC3E}">
-        <p14:creationId xmlns:p14="http://schemas.microsoft.com/office/powerpoint/2010/main" val="4224509479"/>
+        <p14:creationId xmlns:p14="http://schemas.microsoft.com/office/powerpoint/2010/main" val="2853788422"/>
       </p:ext>
     </p:extLst>
   </p:cSld>
@@ -14627,6 +14587,15 @@
 </file>
 
 <file path=customXml/item2.xml><?xml version="1.0" encoding="utf-8"?>
+<?mso-contentType ?>
+<FormTemplates xmlns="http://schemas.microsoft.com/sharepoint/v3/contenttype/forms">
+  <Display>DocumentLibraryForm</Display>
+  <Edit>AssetEditForm</Edit>
+  <New>DocumentLibraryForm</New>
+</FormTemplates>
+</file>
+
+<file path=customXml/item3.xml><?xml version="1.0" encoding="utf-8"?>
 <p:properties xmlns:p="http://schemas.microsoft.com/office/2006/metadata/properties" xmlns:xsi="http://www.w3.org/2001/XMLSchema-instance" xmlns:pc="http://schemas.microsoft.com/office/infopath/2007/PartnerControls">
   <documentManagement>
     <APDescription xmlns="4873beb7-5857-4685-be1f-d57550cc96cc" xsi:nil="true"/>
@@ -14752,15 +14721,6 @@
 </p:properties>
 </file>
 
-<file path=customXml/item3.xml><?xml version="1.0" encoding="utf-8"?>
-<?mso-contentType ?>
-<FormTemplates xmlns="http://schemas.microsoft.com/sharepoint/v3/contenttype/forms">
-  <Display>DocumentLibraryForm</Display>
-  <Edit>AssetEditForm</Edit>
-  <New>DocumentLibraryForm</New>
-</FormTemplates>
-</file>
-
 <file path=customXml/itemProps1.xml><?xml version="1.0" encoding="utf-8"?>
 <ds:datastoreItem xmlns:ds="http://schemas.openxmlformats.org/officeDocument/2006/customXml" ds:itemID="{28C8B9CA-0273-4370-889A-FC05DA5C2FA5}">
   <ds:schemaRefs>
@@ -14780,6 +14740,14 @@
 </file>
 
 <file path=customXml/itemProps2.xml><?xml version="1.0" encoding="utf-8"?>
+<ds:datastoreItem xmlns:ds="http://schemas.openxmlformats.org/officeDocument/2006/customXml" ds:itemID="{561E720F-F05D-4536-9C34-0CFCED65D3B7}">
+  <ds:schemaRefs>
+    <ds:schemaRef ds:uri="http://schemas.microsoft.com/sharepoint/v3/contenttype/forms"/>
+  </ds:schemaRefs>
+</ds:datastoreItem>
+</file>
+
+<file path=customXml/itemProps3.xml><?xml version="1.0" encoding="utf-8"?>
 <ds:datastoreItem xmlns:ds="http://schemas.openxmlformats.org/officeDocument/2006/customXml" ds:itemID="{8CDDBB83-77C1-4099-A0AA-289882E745E2}">
   <ds:schemaRefs>
     <ds:schemaRef ds:uri="http://purl.org/dc/elements/1.1/"/>
@@ -14793,12 +14761,4 @@
     <ds:schemaRef ds:uri="http://purl.org/dc/dcmitype/"/>
   </ds:schemaRefs>
 </ds:datastoreItem>
-</file>
-
-<file path=customXml/itemProps3.xml><?xml version="1.0" encoding="utf-8"?>
-<ds:datastoreItem xmlns:ds="http://schemas.openxmlformats.org/officeDocument/2006/customXml" ds:itemID="{561E720F-F05D-4536-9C34-0CFCED65D3B7}">
-  <ds:schemaRefs>
-    <ds:schemaRef ds:uri="http://schemas.microsoft.com/sharepoint/v3/contenttype/forms"/>
-  </ds:schemaRefs>
-</ds:datastoreItem>
 </file>
--- a/LibrarySystemValidation.pptx
+++ b/LibrarySystemValidation.pptx
@@ -1305,7 +1305,7 @@
         <a:p>
           <a:r>
             <a:rPr lang="en-US" sz="1200" b="1" dirty="0"/>
-            <a:t>Disruption</a:t>
+            <a:t>Business Disruption</a:t>
           </a:r>
         </a:p>
       </dgm:t>
@@ -1823,7 +1823,7 @@
       <dgm:spPr/>
     </dgm:pt>
     <dgm:pt modelId="{625F3147-9BFE-46B2-818C-46F1484E6B6A}" type="pres">
-      <dgm:prSet presAssocID="{EA10134D-095E-40CA-9F6B-98412C29FAC6}" presName="child" presStyleLbl="bgAccFollowNode1" presStyleIdx="7" presStyleCnt="17"/>
+      <dgm:prSet presAssocID="{EA10134D-095E-40CA-9F6B-98412C29FAC6}" presName="child" presStyleLbl="bgAccFollowNode1" presStyleIdx="7" presStyleCnt="17" custScaleY="139114" custLinFactNeighborX="-968" custLinFactNeighborY="2902"/>
       <dgm:spPr/>
     </dgm:pt>
     <dgm:pt modelId="{5C5CDE35-6454-4D87-ACD7-39D3292D600F}" type="pres">
@@ -2837,7 +2837,7 @@
           </a:pPr>
           <a:r>
             <a:rPr lang="en-US" sz="1200" b="1" kern="1200" dirty="0"/>
-            <a:t>Disruption</a:t>
+            <a:t>Business Disruption</a:t>
           </a:r>
         </a:p>
       </dsp:txBody>
@@ -2853,8 +2853,8 @@
       </dsp:nvSpPr>
       <dsp:spPr>
         <a:xfrm>
-          <a:off x="3389308" y="2804791"/>
-          <a:ext cx="1111299" cy="741236"/>
+          <a:off x="3378550" y="2826302"/>
+          <a:ext cx="1111299" cy="1031164"/>
         </a:xfrm>
         <a:prstGeom prst="rect">
           <a:avLst/>
@@ -2936,8 +2936,8 @@
         </a:p>
       </dsp:txBody>
       <dsp:txXfrm>
-        <a:off x="3567116" y="2804791"/>
-        <a:ext cx="933491" cy="741236"/>
+        <a:off x="3556358" y="2826302"/>
+        <a:ext cx="933491" cy="1031164"/>
       </dsp:txXfrm>
     </dsp:sp>
     <dsp:sp modelId="{CBDBED7C-E4C8-4363-B2F1-5441894E4EFB}">
@@ -10293,6 +10293,93 @@
           </a:p>
         </p:txBody>
       </p:sp>
+      <p:sp>
+        <p:nvSpPr>
+          <p:cNvPr id="3" name="TextBox 2">
+            <a:extLst>
+              <a:ext uri="{FF2B5EF4-FFF2-40B4-BE49-F238E27FC236}">
+                <a16:creationId xmlns:a16="http://schemas.microsoft.com/office/drawing/2014/main" id="{9AC261B7-F682-40B9-A4B9-2A922423EF7C}"/>
+              </a:ext>
+            </a:extLst>
+          </p:cNvPr>
+          <p:cNvSpPr txBox="1"/>
+          <p:nvPr/>
+        </p:nvSpPr>
+        <p:spPr>
+          <a:xfrm>
+            <a:off x="2205318" y="2130014"/>
+            <a:ext cx="2366682" cy="3139321"/>
+          </a:xfrm>
+          <a:prstGeom prst="rect">
+            <a:avLst/>
+          </a:prstGeom>
+          <a:noFill/>
+        </p:spPr>
+        <p:txBody>
+          <a:bodyPr wrap="square" rtlCol="0">
+            <a:spAutoFit/>
+          </a:bodyPr>
+          <a:lstStyle/>
+          <a:p>
+            <a:r>
+              <a:rPr lang="en-US" dirty="0"/>
+              <a:t>To Do:</a:t>
+            </a:r>
+          </a:p>
+          <a:p>
+            <a:pPr marL="285750" indent="-285750">
+              <a:buFont typeface="Arial" panose="020B0604020202020204" pitchFamily="34" charset="0"/>
+              <a:buChar char="•"/>
+            </a:pPr>
+            <a:r>
+              <a:rPr lang="en-US" dirty="0"/>
+              <a:t>Capture Pre and Post Cleanse Data Sets</a:t>
+            </a:r>
+          </a:p>
+          <a:p>
+            <a:pPr marL="285750" indent="-285750">
+              <a:buFont typeface="Arial" panose="020B0604020202020204" pitchFamily="34" charset="0"/>
+              <a:buChar char="•"/>
+            </a:pPr>
+            <a:r>
+              <a:rPr lang="en-US" dirty="0"/>
+              <a:t>Tidy Up Repos</a:t>
+            </a:r>
+          </a:p>
+          <a:p>
+            <a:pPr marL="285750" indent="-285750">
+              <a:buFont typeface="Arial" panose="020B0604020202020204" pitchFamily="34" charset="0"/>
+              <a:buChar char="•"/>
+            </a:pPr>
+            <a:r>
+              <a:rPr lang="en-US" dirty="0"/>
+              <a:t>Repeat</a:t>
+            </a:r>
+          </a:p>
+          <a:p>
+            <a:endParaRPr lang="en-US" dirty="0"/>
+          </a:p>
+          <a:p>
+            <a:r>
+              <a:rPr lang="en-US" dirty="0"/>
+              <a:t>Study Extension</a:t>
+            </a:r>
+          </a:p>
+          <a:p>
+            <a:pPr marL="285750" indent="-285750">
+              <a:buFont typeface="Arial" panose="020B0604020202020204" pitchFamily="34" charset="0"/>
+              <a:buChar char="•"/>
+            </a:pPr>
+            <a:r>
+              <a:rPr lang="en-US" dirty="0"/>
+              <a:t>Swarm, Orchestration</a:t>
+            </a:r>
+          </a:p>
+          <a:p>
+            <a:endParaRPr lang="en-GB" dirty="0"/>
+          </a:p>
+        </p:txBody>
+      </p:sp>
     </p:spTree>
     <p:extLst>
       <p:ext uri="{BB962C8B-B14F-4D97-AF65-F5344CB8AC3E}">
@@ -11060,7 +11147,7 @@
         <p:spPr>
           <a:xfrm>
             <a:off x="5105518" y="1583066"/>
-            <a:ext cx="1270534" cy="646331"/>
+            <a:ext cx="1270534" cy="923330"/>
           </a:xfrm>
           <a:prstGeom prst="rect">
             <a:avLst/>
@@ -11079,8 +11166,12 @@
           <a:lstStyle/>
           <a:p>
             <a:r>
+              <a:rPr lang="en-US"/>
+              <a:t>CD– </a:t>
+            </a:r>
+            <a:r>
               <a:rPr lang="en-US" dirty="0"/>
-              <a:t>CI– AUTO Trigger</a:t>
+              <a:t>AUTO Trigger</a:t>
             </a:r>
             <a:endParaRPr lang="en-GB" dirty="0"/>
           </a:p>
@@ -11721,6 +11812,60 @@
           </a:p>
         </p:txBody>
       </p:sp>
+      <p:sp>
+        <p:nvSpPr>
+          <p:cNvPr id="2" name="TextBox 1">
+            <a:extLst>
+              <a:ext uri="{FF2B5EF4-FFF2-40B4-BE49-F238E27FC236}">
+                <a16:creationId xmlns:a16="http://schemas.microsoft.com/office/drawing/2014/main" id="{59194F8F-B1F9-4ABE-8BF1-8A92299C2E99}"/>
+              </a:ext>
+            </a:extLst>
+          </p:cNvPr>
+          <p:cNvSpPr txBox="1"/>
+          <p:nvPr/>
+        </p:nvSpPr>
+        <p:spPr>
+          <a:xfrm>
+            <a:off x="6472493" y="5148470"/>
+            <a:ext cx="2489279" cy="1200329"/>
+          </a:xfrm>
+          <a:prstGeom prst="rect">
+            <a:avLst/>
+          </a:prstGeom>
+          <a:noFill/>
+        </p:spPr>
+        <p:txBody>
+          <a:bodyPr wrap="square" rtlCol="0">
+            <a:spAutoFit/>
+          </a:bodyPr>
+          <a:lstStyle/>
+          <a:p>
+            <a:r>
+              <a:rPr lang="en-US" b="1" dirty="0"/>
+              <a:t>Project Timeline</a:t>
+            </a:r>
+          </a:p>
+          <a:p>
+            <a:r>
+              <a:rPr lang="en-US" dirty="0"/>
+              <a:t>Phase 1 - MVP</a:t>
+            </a:r>
+          </a:p>
+          <a:p>
+            <a:r>
+              <a:rPr lang="en-US" dirty="0"/>
+              <a:t>Phase 2 – V1.1</a:t>
+            </a:r>
+          </a:p>
+          <a:p>
+            <a:r>
+              <a:rPr lang="en-US" dirty="0"/>
+              <a:t>Phase 3 – V2.0</a:t>
+            </a:r>
+            <a:endParaRPr lang="en-GB" dirty="0"/>
+          </a:p>
+        </p:txBody>
+      </p:sp>
     </p:spTree>
     <p:extLst>
       <p:ext uri="{BB962C8B-B14F-4D97-AF65-F5344CB8AC3E}">
@@ -12028,7 +12173,7 @@
             <p:ph idx="1"/>
             <p:extLst>
               <p:ext uri="{D42A27DB-BD31-4B8C-83A1-F6EECF244321}">
-                <p14:modId xmlns:p14="http://schemas.microsoft.com/office/powerpoint/2010/main" val="2845789048"/>
+                <p14:modId xmlns:p14="http://schemas.microsoft.com/office/powerpoint/2010/main" val="2267621788"/>
               </p:ext>
             </p:extLst>
           </p:nvPr>
@@ -12117,14 +12262,14 @@
             <p:ph sz="half" idx="2"/>
             <p:extLst>
               <p:ext uri="{D42A27DB-BD31-4B8C-83A1-F6EECF244321}">
-                <p14:modId xmlns:p14="http://schemas.microsoft.com/office/powerpoint/2010/main" val="1311609116"/>
+                <p14:modId xmlns:p14="http://schemas.microsoft.com/office/powerpoint/2010/main" val="872509449"/>
               </p:ext>
             </p:extLst>
           </p:nvPr>
         </p:nvGraphicFramePr>
         <p:xfrm>
           <a:off x="1104900" y="1621714"/>
-          <a:ext cx="7576521" cy="4348780"/>
+          <a:ext cx="7576521" cy="4478126"/>
         </p:xfrm>
         <a:graphic>
           <a:graphicData uri="http://schemas.openxmlformats.org/drawingml/2006/table">
@@ -12302,7 +12447,7 @@
                       <a:pPr algn="ctr"/>
                       <a:r>
                         <a:rPr lang="en-US" dirty="0"/>
-                        <a:t>High Data</a:t>
+                        <a:t>High Volume of Data</a:t>
                       </a:r>
                       <a:endParaRPr dirty="0"/>
                     </a:p>
@@ -12770,6 +12915,42 @@
             </a:r>
           </a:p>
           <a:p>
+            <a:endParaRPr lang="en-GB" dirty="0"/>
+          </a:p>
+        </p:txBody>
+      </p:sp>
+      <p:sp>
+        <p:nvSpPr>
+          <p:cNvPr id="3" name="TextBox 2">
+            <a:extLst>
+              <a:ext uri="{FF2B5EF4-FFF2-40B4-BE49-F238E27FC236}">
+                <a16:creationId xmlns:a16="http://schemas.microsoft.com/office/drawing/2014/main" id="{E2FD3D9B-97AA-4637-8582-7B40D37274A9}"/>
+              </a:ext>
+            </a:extLst>
+          </p:cNvPr>
+          <p:cNvSpPr txBox="1"/>
+          <p:nvPr/>
+        </p:nvSpPr>
+        <p:spPr>
+          <a:xfrm>
+            <a:off x="9961580" y="1699708"/>
+            <a:ext cx="1124001" cy="369332"/>
+          </a:xfrm>
+          <a:prstGeom prst="rect">
+            <a:avLst/>
+          </a:prstGeom>
+          <a:noFill/>
+        </p:spPr>
+        <p:txBody>
+          <a:bodyPr wrap="square" rtlCol="0">
+            <a:spAutoFit/>
+          </a:bodyPr>
+          <a:lstStyle/>
+          <a:p>
+            <a:r>
+              <a:rPr lang="en-US" dirty="0"/>
+              <a:t>TYPES:</a:t>
+            </a:r>
             <a:endParaRPr lang="en-GB" dirty="0"/>
           </a:p>
         </p:txBody>
@@ -14587,15 +14768,6 @@
 </file>
 
 <file path=customXml/item2.xml><?xml version="1.0" encoding="utf-8"?>
-<?mso-contentType ?>
-<FormTemplates xmlns="http://schemas.microsoft.com/sharepoint/v3/contenttype/forms">
-  <Display>DocumentLibraryForm</Display>
-  <Edit>AssetEditForm</Edit>
-  <New>DocumentLibraryForm</New>
-</FormTemplates>
-</file>
-
-<file path=customXml/item3.xml><?xml version="1.0" encoding="utf-8"?>
 <p:properties xmlns:p="http://schemas.microsoft.com/office/2006/metadata/properties" xmlns:xsi="http://www.w3.org/2001/XMLSchema-instance" xmlns:pc="http://schemas.microsoft.com/office/infopath/2007/PartnerControls">
   <documentManagement>
     <APDescription xmlns="4873beb7-5857-4685-be1f-d57550cc96cc" xsi:nil="true"/>
@@ -14721,6 +14893,15 @@
 </p:properties>
 </file>
 
+<file path=customXml/item3.xml><?xml version="1.0" encoding="utf-8"?>
+<?mso-contentType ?>
+<FormTemplates xmlns="http://schemas.microsoft.com/sharepoint/v3/contenttype/forms">
+  <Display>DocumentLibraryForm</Display>
+  <Edit>AssetEditForm</Edit>
+  <New>DocumentLibraryForm</New>
+</FormTemplates>
+</file>
+
 <file path=customXml/itemProps1.xml><?xml version="1.0" encoding="utf-8"?>
 <ds:datastoreItem xmlns:ds="http://schemas.openxmlformats.org/officeDocument/2006/customXml" ds:itemID="{28C8B9CA-0273-4370-889A-FC05DA5C2FA5}">
   <ds:schemaRefs>
@@ -14740,14 +14921,6 @@
 </file>
 
 <file path=customXml/itemProps2.xml><?xml version="1.0" encoding="utf-8"?>
-<ds:datastoreItem xmlns:ds="http://schemas.openxmlformats.org/officeDocument/2006/customXml" ds:itemID="{561E720F-F05D-4536-9C34-0CFCED65D3B7}">
-  <ds:schemaRefs>
-    <ds:schemaRef ds:uri="http://schemas.microsoft.com/sharepoint/v3/contenttype/forms"/>
-  </ds:schemaRefs>
-</ds:datastoreItem>
-</file>
-
-<file path=customXml/itemProps3.xml><?xml version="1.0" encoding="utf-8"?>
 <ds:datastoreItem xmlns:ds="http://schemas.openxmlformats.org/officeDocument/2006/customXml" ds:itemID="{8CDDBB83-77C1-4099-A0AA-289882E745E2}">
   <ds:schemaRefs>
     <ds:schemaRef ds:uri="http://purl.org/dc/elements/1.1/"/>
@@ -14761,4 +14934,12 @@
     <ds:schemaRef ds:uri="http://purl.org/dc/dcmitype/"/>
   </ds:schemaRefs>
 </ds:datastoreItem>
+</file>
+
+<file path=customXml/itemProps3.xml><?xml version="1.0" encoding="utf-8"?>
+<ds:datastoreItem xmlns:ds="http://schemas.openxmlformats.org/officeDocument/2006/customXml" ds:itemID="{561E720F-F05D-4536-9C34-0CFCED65D3B7}">
+  <ds:schemaRefs>
+    <ds:schemaRef ds:uri="http://schemas.microsoft.com/sharepoint/v3/contenttype/forms"/>
+  </ds:schemaRefs>
+</ds:datastoreItem>
 </file>